--- a/Proj/report/ADA_Interim_Presentation.pptx
+++ b/Proj/report/ADA_Interim_Presentation.pptx
@@ -9,9 +9,8 @@
     <p:sldId id="257" r:id="rId8"/>
     <p:sldId id="258" r:id="rId9"/>
     <p:sldId id="259" r:id="rId10"/>
-    <p:sldId id="260" r:id="rId11"/>
   </p:sldIdLst>
-  <p:sldSz cx="12188952" cy="6858000" type="screen4x3"/>
+  <p:sldSz cx="12191695" cy="6858000" type="screen4x3"/>
   <p:notesSz cx="6858000" cy="9144000"/>
   <p:defaultTextStyle>
     <a:defPPr>
@@ -3085,14 +3084,6 @@
 <file path=ppt/slides/slide1.xml><?xml version="1.0" encoding="utf-8"?>
 <p:sld xmlns:a="http://schemas.openxmlformats.org/drawingml/2006/main" xmlns:p="http://schemas.openxmlformats.org/presentationml/2006/main" xmlns:r="http://schemas.openxmlformats.org/officeDocument/2006/relationships">
   <p:cSld>
-    <p:bg>
-      <p:bgPr>
-        <a:solidFill>
-          <a:srgbClr val="0F172A"/>
-        </a:solidFill>
-        <a:effectLst/>
-      </p:bgPr>
-    </p:bg>
     <p:spTree>
       <p:nvGrpSpPr>
         <p:cNvPr id="1" name=""/>
@@ -3109,17 +3100,18 @@
         <p:spPr>
           <a:xfrm>
             <a:off x="0" y="0"/>
-            <a:ext cx="365760" cy="6858000"/>
+            <a:ext cx="12191695" cy="6858000"/>
           </a:xfrm>
           <a:prstGeom prst="rect">
             <a:avLst/>
           </a:prstGeom>
           <a:solidFill>
-            <a:srgbClr val="3B82F6"/>
+            <a:srgbClr val="0F172A"/>
           </a:solidFill>
           <a:ln>
             <a:noFill/>
           </a:ln>
+          <a:effectLst/>
         </p:spPr>
         <p:style>
           <a:lnRef idx="1">
@@ -3145,24 +3137,25 @@
       </p:sp>
       <p:sp>
         <p:nvSpPr>
-          <p:cNvPr id="3" name="Oval 2"/>
+          <p:cNvPr id="3" name="Rectangle 2"/>
           <p:cNvSpPr/>
           <p:nvPr/>
         </p:nvSpPr>
         <p:spPr>
           <a:xfrm>
-            <a:off x="9601200" y="-731520"/>
-            <a:ext cx="2926080" cy="2926080"/>
-          </a:xfrm>
-          <a:prstGeom prst="ellipse">
+            <a:off x="0" y="0"/>
+            <a:ext cx="228600" cy="6858000"/>
+          </a:xfrm>
+          <a:prstGeom prst="rect">
             <a:avLst/>
           </a:prstGeom>
           <a:solidFill>
-            <a:srgbClr val="1E293B"/>
+            <a:srgbClr val="38BDF8"/>
           </a:solidFill>
           <a:ln>
             <a:noFill/>
           </a:ln>
+          <a:effectLst/>
         </p:spPr>
         <p:style>
           <a:lnRef idx="1">
@@ -3186,15 +3179,39 @@
           </a:p>
         </p:txBody>
       </p:sp>
-      <p:sp>
-        <p:nvSpPr>
-          <p:cNvPr id="4" name="TextBox 3"/>
+      <p:pic>
+        <p:nvPicPr>
+          <p:cNvPr id="4" name="Picture 3" descr="jps_concept.png"/>
+          <p:cNvPicPr>
+            <a:picLocks noChangeAspect="1"/>
+          </p:cNvPicPr>
+          <p:nvPr/>
+        </p:nvPicPr>
+        <p:blipFill>
+          <a:blip r:embed="rId2"/>
+          <a:stretch>
+            <a:fillRect/>
+          </a:stretch>
+        </p:blipFill>
+        <p:spPr>
+          <a:xfrm>
+            <a:off x="8229600" y="1920240"/>
+            <a:ext cx="3672418" cy="3108960"/>
+          </a:xfrm>
+          <a:prstGeom prst="rect">
+            <a:avLst/>
+          </a:prstGeom>
+        </p:spPr>
+      </p:pic>
+      <p:sp>
+        <p:nvSpPr>
+          <p:cNvPr id="5" name="TextBox 4"/>
           <p:cNvSpPr txBox="1"/>
           <p:nvPr/>
         </p:nvSpPr>
         <p:spPr>
           <a:xfrm>
-            <a:off x="731520" y="1371600"/>
+            <a:off x="822960" y="1280160"/>
             <a:ext cx="10058400" cy="365760"/>
           </a:xfrm>
           <a:prstGeom prst="rect">
@@ -3203,33 +3220,34 @@
           <a:noFill/>
         </p:spPr>
         <p:txBody>
-          <a:bodyPr wrap="square">
+          <a:bodyPr wrap="square" lIns="0" rIns="0" tIns="0" bIns="0" anchor="t">
             <a:spAutoFit/>
           </a:bodyPr>
           <a:lstStyle/>
           <a:p>
             <a:pPr algn="l"/>
             <a:r>
-              <a:rPr sz="1100" b="1" i="0">
-                <a:solidFill>
-                  <a:srgbClr val="3B82F6"/>
-                </a:solidFill>
+              <a:rPr sz="1100" b="1">
+                <a:solidFill>
+                  <a:srgbClr val="38BDF8"/>
+                </a:solidFill>
+                <a:latin typeface="Calibri"/>
               </a:rPr>
-              <a:t>ADA INTERIM DEMO  ·  WEEK 13  ·  APRIL 2026</a:t>
-            </a:r>
-          </a:p>
-        </p:txBody>
-      </p:sp>
-      <p:sp>
-        <p:nvSpPr>
-          <p:cNvPr id="5" name="TextBox 4"/>
+              <a:t>HABIB UNIVERSITY  |  ALGORITHM DESIGN &amp; ANALYSIS</a:t>
+            </a:r>
+          </a:p>
+        </p:txBody>
+      </p:sp>
+      <p:sp>
+        <p:nvSpPr>
+          <p:cNvPr id="6" name="TextBox 5"/>
           <p:cNvSpPr txBox="1"/>
           <p:nvPr/>
         </p:nvSpPr>
         <p:spPr>
           <a:xfrm>
-            <a:off x="731520" y="1828800"/>
-            <a:ext cx="10058400" cy="1645920"/>
+            <a:off x="822960" y="1737360"/>
+            <a:ext cx="7315200" cy="1280160"/>
           </a:xfrm>
           <a:prstGeom prst="rect">
             <a:avLst/>
@@ -3237,48 +3255,34 @@
           <a:noFill/>
         </p:spPr>
         <p:txBody>
-          <a:bodyPr wrap="square">
+          <a:bodyPr wrap="square" lIns="0" rIns="0" tIns="0" bIns="0" anchor="t">
             <a:spAutoFit/>
           </a:bodyPr>
           <a:lstStyle/>
           <a:p>
             <a:pPr algn="l"/>
             <a:r>
-              <a:rPr sz="3600" b="1" i="0">
-                <a:solidFill>
-                  <a:srgbClr val="FFFFFF"/>
-                </a:solidFill>
+              <a:rPr sz="4000" b="1">
+                <a:solidFill>
+                  <a:srgbClr val="EEF2F7"/>
+                </a:solidFill>
+                <a:latin typeface="Calibri"/>
               </a:rPr>
-              <a:t>Benchmarking Shortest-Path</a:t>
-            </a:r>
-          </a:p>
-          <a:p>
-            <a:pPr algn="l">
-              <a:spcBef>
-                <a:spcPts val="200"/>
-              </a:spcBef>
-            </a:pPr>
-            <a:r>
-              <a:rPr sz="3600" b="1" i="0">
-                <a:solidFill>
-                  <a:srgbClr val="FFFFFF"/>
-                </a:solidFill>
-              </a:rPr>
-              <a:t>Algorithms on 4-Connected Grid Maps</a:t>
-            </a:r>
-          </a:p>
-        </p:txBody>
-      </p:sp>
-      <p:sp>
-        <p:nvSpPr>
-          <p:cNvPr id="6" name="TextBox 5"/>
+              <a:t>Comparing Shortest-Path</a:t>
+            </a:r>
+          </a:p>
+        </p:txBody>
+      </p:sp>
+      <p:sp>
+        <p:nvSpPr>
+          <p:cNvPr id="7" name="TextBox 6"/>
           <p:cNvSpPr txBox="1"/>
           <p:nvPr/>
         </p:nvSpPr>
         <p:spPr>
           <a:xfrm>
-            <a:off x="731520" y="3520440"/>
-            <a:ext cx="9144000" cy="457200"/>
+            <a:off x="822960" y="2468880"/>
+            <a:ext cx="7315200" cy="914400"/>
           </a:xfrm>
           <a:prstGeom prst="rect">
             <a:avLst/>
@@ -3286,43 +3290,82 @@
           <a:noFill/>
         </p:spPr>
         <p:txBody>
-          <a:bodyPr wrap="square">
+          <a:bodyPr wrap="square" lIns="0" rIns="0" tIns="0" bIns="0" anchor="t">
             <a:spAutoFit/>
           </a:bodyPr>
           <a:lstStyle/>
           <a:p>
             <a:pPr algn="l"/>
             <a:r>
-              <a:rPr sz="1800" b="0" i="1">
-                <a:solidFill>
-                  <a:srgbClr val="10B981"/>
-                </a:solidFill>
+              <a:rPr sz="4000" b="1">
+                <a:solidFill>
+                  <a:srgbClr val="EEF2F7"/>
+                </a:solidFill>
+                <a:latin typeface="Calibri"/>
               </a:rPr>
-              <a:t>Dijkstra  ·  A*  ·  Jump Point Search (JPS4)</a:t>
-            </a:r>
-          </a:p>
-        </p:txBody>
-      </p:sp>
-      <p:sp>
-        <p:nvSpPr>
-          <p:cNvPr id="7" name="Rectangle 6"/>
+              <a:t>Algorithms on Grid Maps</a:t>
+            </a:r>
+          </a:p>
+        </p:txBody>
+      </p:sp>
+      <p:sp>
+        <p:nvSpPr>
+          <p:cNvPr id="8" name="TextBox 7"/>
+          <p:cNvSpPr txBox="1"/>
+          <p:nvPr/>
+        </p:nvSpPr>
+        <p:spPr>
+          <a:xfrm>
+            <a:off x="822960" y="3246120"/>
+            <a:ext cx="7315200" cy="457200"/>
+          </a:xfrm>
+          <a:prstGeom prst="rect">
+            <a:avLst/>
+          </a:prstGeom>
+          <a:noFill/>
+        </p:spPr>
+        <p:txBody>
+          <a:bodyPr wrap="square" lIns="0" rIns="0" tIns="0" bIns="0" anchor="t">
+            <a:spAutoFit/>
+          </a:bodyPr>
+          <a:lstStyle/>
+          <a:p>
+            <a:pPr algn="l"/>
+            <a:r>
+              <a:rPr sz="1600" b="0">
+                <a:solidFill>
+                  <a:srgbClr val="94A3B8"/>
+                </a:solidFill>
+                <a:latin typeface="Calibri"/>
+              </a:rPr>
+              <a:t>Dijkstra vs A* vs JPS4 on 4-connected grids</a:t>
+            </a:r>
+          </a:p>
+        </p:txBody>
+      </p:sp>
+      <p:sp>
+        <p:nvSpPr>
+          <p:cNvPr id="9" name="Rounded Rectangle 8"/>
           <p:cNvSpPr/>
           <p:nvPr/>
         </p:nvSpPr>
         <p:spPr>
           <a:xfrm>
-            <a:off x="731520" y="4114800"/>
-            <a:ext cx="4114800" cy="36576"/>
-          </a:xfrm>
-          <a:prstGeom prst="rect">
-            <a:avLst/>
+            <a:off x="822960" y="4023360"/>
+            <a:ext cx="1417320" cy="502920"/>
+          </a:xfrm>
+          <a:prstGeom prst="roundRect">
+            <a:avLst>
+              <a:gd name="adj" fmla="val 8000"/>
+            </a:avLst>
           </a:prstGeom>
           <a:solidFill>
-            <a:srgbClr val="64748B"/>
+            <a:srgbClr val="E05C5C"/>
           </a:solidFill>
           <a:ln>
             <a:noFill/>
           </a:ln>
+          <a:effectLst/>
         </p:spPr>
         <p:style>
           <a:lnRef idx="1">
@@ -3348,14 +3391,14 @@
       </p:sp>
       <p:sp>
         <p:nvSpPr>
-          <p:cNvPr id="8" name="TextBox 7"/>
+          <p:cNvPr id="10" name="TextBox 9"/>
           <p:cNvSpPr txBox="1"/>
           <p:nvPr/>
         </p:nvSpPr>
         <p:spPr>
           <a:xfrm>
-            <a:off x="731520" y="4251960"/>
-            <a:ext cx="8229600" cy="1097280"/>
+            <a:off x="822960" y="4023360"/>
+            <a:ext cx="1417320" cy="502920"/>
           </a:xfrm>
           <a:prstGeom prst="rect">
             <a:avLst/>
@@ -3363,63 +3406,80 @@
           <a:noFill/>
         </p:spPr>
         <p:txBody>
-          <a:bodyPr wrap="square">
+          <a:bodyPr wrap="square" lIns="0" rIns="0" tIns="0" bIns="0" anchor="ctr">
             <a:spAutoFit/>
           </a:bodyPr>
           <a:lstStyle/>
           <a:p>
-            <a:pPr algn="l"/>
-            <a:r>
-              <a:rPr sz="1400" b="1" i="0">
-                <a:solidFill>
-                  <a:srgbClr val="CBD5E1"/>
-                </a:solidFill>
+            <a:pPr algn="ctr"/>
+            <a:r>
+              <a:rPr sz="1600" b="1">
+                <a:solidFill>
+                  <a:srgbClr val="EEF2F7"/>
+                </a:solidFill>
+                <a:latin typeface="Calibri"/>
               </a:rPr>
-              <a:t>Jazib Waqas   ·   Salman Adnan   ·   Hunain Abbas</a:t>
-            </a:r>
-          </a:p>
-          <a:p>
-            <a:pPr algn="l">
-              <a:spcBef>
-                <a:spcPts val="400"/>
-              </a:spcBef>
-            </a:pPr>
-            <a:r>
-              <a:rPr sz="1100" b="0" i="0">
-                <a:solidFill>
-                  <a:srgbClr val="64748B"/>
-                </a:solidFill>
-              </a:rPr>
-              <a:t>jw08048  ·  sa07885  ·  sh08466</a:t>
-            </a:r>
-          </a:p>
-          <a:p>
-            <a:pPr algn="l">
-              <a:spcBef>
-                <a:spcPts val="200"/>
-              </a:spcBef>
-            </a:pPr>
-            <a:r>
-              <a:rPr sz="1100" b="0" i="0">
-                <a:solidFill>
-                  <a:srgbClr val="64748B"/>
-                </a:solidFill>
-              </a:rPr>
-              <a:t>Habib University</a:t>
-            </a:r>
-          </a:p>
-        </p:txBody>
-      </p:sp>
-      <p:sp>
-        <p:nvSpPr>
-          <p:cNvPr id="9" name="TextBox 8"/>
+              <a:t>Dijkstra</a:t>
+            </a:r>
+          </a:p>
+        </p:txBody>
+      </p:sp>
+      <p:sp>
+        <p:nvSpPr>
+          <p:cNvPr id="11" name="Rounded Rectangle 10"/>
+          <p:cNvSpPr/>
+          <p:nvPr/>
+        </p:nvSpPr>
+        <p:spPr>
+          <a:xfrm>
+            <a:off x="2331720" y="4023360"/>
+            <a:ext cx="1417320" cy="502920"/>
+          </a:xfrm>
+          <a:prstGeom prst="roundRect">
+            <a:avLst>
+              <a:gd name="adj" fmla="val 8000"/>
+            </a:avLst>
+          </a:prstGeom>
+          <a:solidFill>
+            <a:srgbClr val="4D94E0"/>
+          </a:solidFill>
+          <a:ln>
+            <a:noFill/>
+          </a:ln>
+          <a:effectLst/>
+        </p:spPr>
+        <p:style>
+          <a:lnRef idx="1">
+            <a:schemeClr val="accent1"/>
+          </a:lnRef>
+          <a:fillRef idx="3">
+            <a:schemeClr val="accent1"/>
+          </a:fillRef>
+          <a:effectRef idx="2">
+            <a:schemeClr val="accent1"/>
+          </a:effectRef>
+          <a:fontRef idx="minor">
+            <a:schemeClr val="lt1"/>
+          </a:fontRef>
+        </p:style>
+        <p:txBody>
+          <a:bodyPr rtlCol="0" anchor="ctr"/>
+          <a:lstStyle/>
+          <a:p>
+            <a:pPr algn="ctr"/>
+          </a:p>
+        </p:txBody>
+      </p:sp>
+      <p:sp>
+        <p:nvSpPr>
+          <p:cNvPr id="12" name="TextBox 11"/>
           <p:cNvSpPr txBox="1"/>
           <p:nvPr/>
         </p:nvSpPr>
         <p:spPr>
           <a:xfrm>
-            <a:off x="11430000" y="6492240"/>
-            <a:ext cx="731520" cy="274320"/>
+            <a:off x="2331720" y="4023360"/>
+            <a:ext cx="1417320" cy="502920"/>
           </a:xfrm>
           <a:prstGeom prst="rect">
             <a:avLst/>
@@ -3427,19 +3487,276 @@
           <a:noFill/>
         </p:spPr>
         <p:txBody>
-          <a:bodyPr wrap="square">
+          <a:bodyPr wrap="square" lIns="0" rIns="0" tIns="0" bIns="0" anchor="ctr">
             <a:spAutoFit/>
           </a:bodyPr>
           <a:lstStyle/>
           <a:p>
+            <a:pPr algn="ctr"/>
+            <a:r>
+              <a:rPr sz="1600" b="1">
+                <a:solidFill>
+                  <a:srgbClr val="EEF2F7"/>
+                </a:solidFill>
+                <a:latin typeface="Calibri"/>
+              </a:rPr>
+              <a:t>A*</a:t>
+            </a:r>
+          </a:p>
+        </p:txBody>
+      </p:sp>
+      <p:sp>
+        <p:nvSpPr>
+          <p:cNvPr id="13" name="Rounded Rectangle 12"/>
+          <p:cNvSpPr/>
+          <p:nvPr/>
+        </p:nvSpPr>
+        <p:spPr>
+          <a:xfrm>
+            <a:off x="3840480" y="4023360"/>
+            <a:ext cx="1417320" cy="502920"/>
+          </a:xfrm>
+          <a:prstGeom prst="roundRect">
+            <a:avLst>
+              <a:gd name="adj" fmla="val 8000"/>
+            </a:avLst>
+          </a:prstGeom>
+          <a:solidFill>
+            <a:srgbClr val="2CA02C"/>
+          </a:solidFill>
+          <a:ln>
+            <a:noFill/>
+          </a:ln>
+          <a:effectLst/>
+        </p:spPr>
+        <p:style>
+          <a:lnRef idx="1">
+            <a:schemeClr val="accent1"/>
+          </a:lnRef>
+          <a:fillRef idx="3">
+            <a:schemeClr val="accent1"/>
+          </a:fillRef>
+          <a:effectRef idx="2">
+            <a:schemeClr val="accent1"/>
+          </a:effectRef>
+          <a:fontRef idx="minor">
+            <a:schemeClr val="lt1"/>
+          </a:fontRef>
+        </p:style>
+        <p:txBody>
+          <a:bodyPr rtlCol="0" anchor="ctr"/>
+          <a:lstStyle/>
+          <a:p>
+            <a:pPr algn="ctr"/>
+          </a:p>
+        </p:txBody>
+      </p:sp>
+      <p:sp>
+        <p:nvSpPr>
+          <p:cNvPr id="14" name="TextBox 13"/>
+          <p:cNvSpPr txBox="1"/>
+          <p:nvPr/>
+        </p:nvSpPr>
+        <p:spPr>
+          <a:xfrm>
+            <a:off x="3840480" y="4023360"/>
+            <a:ext cx="1417320" cy="502920"/>
+          </a:xfrm>
+          <a:prstGeom prst="rect">
+            <a:avLst/>
+          </a:prstGeom>
+          <a:noFill/>
+        </p:spPr>
+        <p:txBody>
+          <a:bodyPr wrap="square" lIns="0" rIns="0" tIns="0" bIns="0" anchor="ctr">
+            <a:spAutoFit/>
+          </a:bodyPr>
+          <a:lstStyle/>
+          <a:p>
+            <a:pPr algn="ctr"/>
+            <a:r>
+              <a:rPr sz="1600" b="1">
+                <a:solidFill>
+                  <a:srgbClr val="EEF2F7"/>
+                </a:solidFill>
+                <a:latin typeface="Calibri"/>
+              </a:rPr>
+              <a:t>JPS4</a:t>
+            </a:r>
+          </a:p>
+        </p:txBody>
+      </p:sp>
+      <p:sp>
+        <p:nvSpPr>
+          <p:cNvPr id="15" name="TextBox 14"/>
+          <p:cNvSpPr txBox="1"/>
+          <p:nvPr/>
+        </p:nvSpPr>
+        <p:spPr>
+          <a:xfrm>
+            <a:off x="822960" y="4937760"/>
+            <a:ext cx="7315200" cy="411480"/>
+          </a:xfrm>
+          <a:prstGeom prst="rect">
+            <a:avLst/>
+          </a:prstGeom>
+          <a:noFill/>
+        </p:spPr>
+        <p:txBody>
+          <a:bodyPr wrap="square" lIns="0" rIns="0" tIns="0" bIns="0" anchor="t">
+            <a:spAutoFit/>
+          </a:bodyPr>
+          <a:lstStyle/>
+          <a:p>
+            <a:pPr algn="l"/>
+            <a:r>
+              <a:rPr sz="1800" b="1">
+                <a:solidFill>
+                  <a:srgbClr val="94A3B8"/>
+                </a:solidFill>
+                <a:latin typeface="Calibri"/>
+              </a:rPr>
+              <a:t>Interim Progress Report</a:t>
+            </a:r>
+          </a:p>
+        </p:txBody>
+      </p:sp>
+      <p:sp>
+        <p:nvSpPr>
+          <p:cNvPr id="16" name="TextBox 15"/>
+          <p:cNvSpPr txBox="1"/>
+          <p:nvPr/>
+        </p:nvSpPr>
+        <p:spPr>
+          <a:xfrm>
+            <a:off x="822960" y="5440680"/>
+            <a:ext cx="7315200" cy="365760"/>
+          </a:xfrm>
+          <a:prstGeom prst="rect">
+            <a:avLst/>
+          </a:prstGeom>
+          <a:noFill/>
+        </p:spPr>
+        <p:txBody>
+          <a:bodyPr wrap="square" lIns="0" rIns="0" tIns="0" bIns="0" anchor="t">
+            <a:spAutoFit/>
+          </a:bodyPr>
+          <a:lstStyle/>
+          <a:p>
+            <a:pPr algn="l"/>
+            <a:r>
+              <a:rPr sz="1400" b="0">
+                <a:solidFill>
+                  <a:srgbClr val="EEF2F7"/>
+                </a:solidFill>
+                <a:latin typeface="Calibri"/>
+              </a:rPr>
+              <a:t>Jazib Waqas    |    Salman Adnan    |    Hunain Abbas</a:t>
+            </a:r>
+          </a:p>
+        </p:txBody>
+      </p:sp>
+      <p:sp>
+        <p:nvSpPr>
+          <p:cNvPr id="17" name="TextBox 16"/>
+          <p:cNvSpPr txBox="1"/>
+          <p:nvPr/>
+        </p:nvSpPr>
+        <p:spPr>
+          <a:xfrm>
+            <a:off x="822960" y="5806440"/>
+            <a:ext cx="7315200" cy="320040"/>
+          </a:xfrm>
+          <a:prstGeom prst="rect">
+            <a:avLst/>
+          </a:prstGeom>
+          <a:noFill/>
+        </p:spPr>
+        <p:txBody>
+          <a:bodyPr wrap="square" lIns="0" rIns="0" tIns="0" bIns="0" anchor="t">
+            <a:spAutoFit/>
+          </a:bodyPr>
+          <a:lstStyle/>
+          <a:p>
+            <a:pPr algn="l"/>
+            <a:r>
+              <a:rPr sz="1100" b="0">
+                <a:solidFill>
+                  <a:srgbClr val="64748B"/>
+                </a:solidFill>
+                <a:latin typeface="Calibri"/>
+              </a:rPr>
+              <a:t>jw08048 . sa07885 . sh08466</a:t>
+            </a:r>
+          </a:p>
+        </p:txBody>
+      </p:sp>
+      <p:sp>
+        <p:nvSpPr>
+          <p:cNvPr id="18" name="TextBox 17"/>
+          <p:cNvSpPr txBox="1"/>
+          <p:nvPr/>
+        </p:nvSpPr>
+        <p:spPr>
+          <a:xfrm>
+            <a:off x="457200" y="6492240"/>
+            <a:ext cx="5486400" cy="274320"/>
+          </a:xfrm>
+          <a:prstGeom prst="rect">
+            <a:avLst/>
+          </a:prstGeom>
+          <a:noFill/>
+        </p:spPr>
+        <p:txBody>
+          <a:bodyPr wrap="square" lIns="0" rIns="0" tIns="0" bIns="0" anchor="t">
+            <a:spAutoFit/>
+          </a:bodyPr>
+          <a:lstStyle/>
+          <a:p>
+            <a:pPr algn="l"/>
+            <a:r>
+              <a:rPr sz="900" b="0">
+                <a:solidFill>
+                  <a:srgbClr val="64748B"/>
+                </a:solidFill>
+                <a:latin typeface="Calibri"/>
+              </a:rPr>
+              <a:t>ADA Progress Report  |  Habib University  |  Spring 2026</a:t>
+            </a:r>
+          </a:p>
+        </p:txBody>
+      </p:sp>
+      <p:sp>
+        <p:nvSpPr>
+          <p:cNvPr id="19" name="TextBox 18"/>
+          <p:cNvSpPr txBox="1"/>
+          <p:nvPr/>
+        </p:nvSpPr>
+        <p:spPr>
+          <a:xfrm>
+            <a:off x="11094415" y="6492240"/>
+            <a:ext cx="640080" cy="274320"/>
+          </a:xfrm>
+          <a:prstGeom prst="rect">
+            <a:avLst/>
+          </a:prstGeom>
+          <a:noFill/>
+        </p:spPr>
+        <p:txBody>
+          <a:bodyPr wrap="square" lIns="0" rIns="0" tIns="0" bIns="0" anchor="t">
+            <a:spAutoFit/>
+          </a:bodyPr>
+          <a:lstStyle/>
+          <a:p>
             <a:pPr algn="r"/>
             <a:r>
-              <a:rPr sz="1000" b="0" i="0">
+              <a:rPr sz="900" b="0">
                 <a:solidFill>
                   <a:srgbClr val="64748B"/>
                 </a:solidFill>
+                <a:latin typeface="Calibri"/>
               </a:rPr>
-              <a:t>1 / 5</a:t>
+              <a:t>1 / 4</a:t>
             </a:r>
           </a:p>
         </p:txBody>
@@ -3455,14 +3772,6 @@
 <file path=ppt/slides/slide2.xml><?xml version="1.0" encoding="utf-8"?>
 <p:sld xmlns:a="http://schemas.openxmlformats.org/drawingml/2006/main" xmlns:p="http://schemas.openxmlformats.org/presentationml/2006/main" xmlns:r="http://schemas.openxmlformats.org/officeDocument/2006/relationships">
   <p:cSld>
-    <p:bg>
-      <p:bgPr>
-        <a:solidFill>
-          <a:srgbClr val="0F172A"/>
-        </a:solidFill>
-        <a:effectLst/>
-      </p:bgPr>
-    </p:bg>
     <p:spTree>
       <p:nvGrpSpPr>
         <p:cNvPr id="1" name=""/>
@@ -3478,18 +3787,19 @@
         </p:nvSpPr>
         <p:spPr>
           <a:xfrm>
-            <a:off x="0" y="502920"/>
-            <a:ext cx="12188952" cy="41148"/>
+            <a:off x="0" y="0"/>
+            <a:ext cx="12191695" cy="6858000"/>
           </a:xfrm>
           <a:prstGeom prst="rect">
             <a:avLst/>
           </a:prstGeom>
           <a:solidFill>
-            <a:srgbClr val="3B82F6"/>
+            <a:srgbClr val="0F172A"/>
           </a:solidFill>
           <a:ln>
             <a:noFill/>
           </a:ln>
+          <a:effectLst/>
         </p:spPr>
         <p:style>
           <a:lnRef idx="1">
@@ -3515,231 +3825,25 @@
       </p:sp>
       <p:sp>
         <p:nvSpPr>
-          <p:cNvPr id="3" name="TextBox 2"/>
-          <p:cNvSpPr txBox="1"/>
-          <p:nvPr/>
-        </p:nvSpPr>
-        <p:spPr>
-          <a:xfrm>
-            <a:off x="365760" y="109728"/>
-            <a:ext cx="8229600" cy="502920"/>
-          </a:xfrm>
-          <a:prstGeom prst="rect">
-            <a:avLst/>
-          </a:prstGeom>
-          <a:noFill/>
-        </p:spPr>
-        <p:txBody>
-          <a:bodyPr wrap="square">
-            <a:spAutoFit/>
-          </a:bodyPr>
-          <a:lstStyle/>
-          <a:p>
-            <a:pPr algn="l"/>
-            <a:r>
-              <a:rPr sz="2600" b="1" i="0">
-                <a:solidFill>
-                  <a:srgbClr val="FFFFFF"/>
-                </a:solidFill>
-              </a:rPr>
-              <a:t>Problem &amp; Motivation</a:t>
-            </a:r>
-          </a:p>
-        </p:txBody>
-      </p:sp>
-      <p:sp>
-        <p:nvSpPr>
-          <p:cNvPr id="4" name="TextBox 3"/>
-          <p:cNvSpPr txBox="1"/>
-          <p:nvPr/>
-        </p:nvSpPr>
-        <p:spPr>
-          <a:xfrm>
-            <a:off x="365760" y="822960"/>
-            <a:ext cx="5577840" cy="2286000"/>
-          </a:xfrm>
-          <a:prstGeom prst="rect">
-            <a:avLst/>
-          </a:prstGeom>
-          <a:noFill/>
-        </p:spPr>
-        <p:txBody>
-          <a:bodyPr wrap="square">
-            <a:spAutoFit/>
-          </a:bodyPr>
-          <a:lstStyle/>
-          <a:p>
-            <a:pPr algn="l"/>
-            <a:r>
-              <a:rPr sz="1400" b="1" i="0">
-                <a:solidFill>
-                  <a:srgbClr val="3B82F6"/>
-                </a:solidFill>
-              </a:rPr>
-              <a:t>What is the Problem?</a:t>
-            </a:r>
-          </a:p>
-          <a:p>
-            <a:pPr algn="l">
-              <a:spcBef>
-                <a:spcPts val="400"/>
-              </a:spcBef>
-            </a:pPr>
-            <a:r>
-              <a:rPr sz="1300" b="0" i="0">
-                <a:solidFill>
-                  <a:srgbClr val="CBD5E1"/>
-                </a:solidFill>
-              </a:rPr>
-              <a:t>Grid-based pathfinding: find the shortest path from A to B on a grid where some cells are blocked.</a:t>
-            </a:r>
-          </a:p>
-          <a:p>
-            <a:pPr algn="l">
-              <a:spcBef>
-                <a:spcPts val="600"/>
-              </a:spcBef>
-            </a:pPr>
-            <a:r>
-              <a:rPr sz="1300" b="0" i="0">
-                <a:solidFill>
-                  <a:srgbClr val="CBD5E1"/>
-                </a:solidFill>
-              </a:rPr>
-              <a:t>4-connected grid: each cell links to its 4 cardinal neighbours only (up, down, left, right) — no diagonals.</a:t>
-            </a:r>
-          </a:p>
-          <a:p>
-            <a:pPr algn="l">
-              <a:spcBef>
-                <a:spcPts val="600"/>
-              </a:spcBef>
-            </a:pPr>
-            <a:r>
-              <a:rPr sz="1300" b="0" i="0">
-                <a:solidFill>
-                  <a:srgbClr val="CBD5E1"/>
-                </a:solidFill>
-              </a:rPr>
-              <a:t>A naive search visits every reachable cell before confirming the shortest path. Too slow on large maps.</a:t>
-            </a:r>
-          </a:p>
-        </p:txBody>
-      </p:sp>
-      <p:sp>
-        <p:nvSpPr>
-          <p:cNvPr id="5" name="TextBox 4"/>
-          <p:cNvSpPr txBox="1"/>
-          <p:nvPr/>
-        </p:nvSpPr>
-        <p:spPr>
-          <a:xfrm>
-            <a:off x="365760" y="3200400"/>
-            <a:ext cx="5577840" cy="2286000"/>
-          </a:xfrm>
-          <a:prstGeom prst="rect">
-            <a:avLst/>
-          </a:prstGeom>
-          <a:noFill/>
-        </p:spPr>
-        <p:txBody>
-          <a:bodyPr wrap="square">
-            <a:spAutoFit/>
-          </a:bodyPr>
-          <a:lstStyle/>
-          <a:p>
-            <a:pPr algn="l"/>
-            <a:r>
-              <a:rPr sz="1400" b="1" i="0">
-                <a:solidFill>
-                  <a:srgbClr val="3B82F6"/>
-                </a:solidFill>
-              </a:rPr>
-              <a:t>Why Does It Matter?</a:t>
-            </a:r>
-          </a:p>
-          <a:p>
-            <a:pPr algn="l">
-              <a:spcBef>
-                <a:spcPts val="500"/>
-              </a:spcBef>
-            </a:pPr>
-            <a:r>
-              <a:rPr sz="1300" b="0" i="0">
-                <a:solidFill>
-                  <a:srgbClr val="CBD5E1"/>
-                </a:solidFill>
-              </a:rPr>
-              <a:t>🎮  Game AI — characters navigating around walls</a:t>
-            </a:r>
-          </a:p>
-          <a:p>
-            <a:pPr algn="l">
-              <a:spcBef>
-                <a:spcPts val="400"/>
-              </a:spcBef>
-            </a:pPr>
-            <a:r>
-              <a:rPr sz="1300" b="0" i="0">
-                <a:solidFill>
-                  <a:srgbClr val="CBD5E1"/>
-                </a:solidFill>
-              </a:rPr>
-              <a:t>🤖  Robotics — route planning in warehouses</a:t>
-            </a:r>
-          </a:p>
-          <a:p>
-            <a:pPr algn="l">
-              <a:spcBef>
-                <a:spcPts val="400"/>
-              </a:spcBef>
-            </a:pPr>
-            <a:r>
-              <a:rPr sz="1300" b="0" i="0">
-                <a:solidFill>
-                  <a:srgbClr val="CBD5E1"/>
-                </a:solidFill>
-              </a:rPr>
-              <a:t>📦  Logistics — efficient path finding on maps</a:t>
-            </a:r>
-          </a:p>
-          <a:p>
-            <a:pPr algn="l">
-              <a:spcBef>
-                <a:spcPts val="600"/>
-              </a:spcBef>
-            </a:pPr>
-            <a:r>
-              <a:rPr sz="1200" b="0" i="0">
-                <a:solidFill>
-                  <a:srgbClr val="64748B"/>
-                </a:solidFill>
-              </a:rPr>
-              <a:t>Pathfinding runs thousands of times per second in real systems — small improvements matter at scale.</a:t>
-            </a:r>
-          </a:p>
-        </p:txBody>
-      </p:sp>
-      <p:sp>
-        <p:nvSpPr>
-          <p:cNvPr id="6" name="Rectangle 5"/>
+          <p:cNvPr id="3" name="Rectangle 2"/>
           <p:cNvSpPr/>
           <p:nvPr/>
         </p:nvSpPr>
         <p:spPr>
           <a:xfrm>
-            <a:off x="6217920" y="914400"/>
-            <a:ext cx="5577840" cy="1691640"/>
+            <a:off x="457200" y="502920"/>
+            <a:ext cx="73152" cy="502920"/>
           </a:xfrm>
           <a:prstGeom prst="rect">
             <a:avLst/>
           </a:prstGeom>
           <a:solidFill>
-            <a:srgbClr val="1E293B"/>
+            <a:srgbClr val="38BDF8"/>
           </a:solidFill>
           <a:ln>
             <a:noFill/>
           </a:ln>
+          <a:effectLst/>
         </p:spPr>
         <p:style>
           <a:lnRef idx="1">
@@ -3765,24 +3869,97 @@
       </p:sp>
       <p:sp>
         <p:nvSpPr>
-          <p:cNvPr id="7" name="Rectangle 6"/>
+          <p:cNvPr id="4" name="TextBox 3"/>
+          <p:cNvSpPr txBox="1"/>
+          <p:nvPr/>
+        </p:nvSpPr>
+        <p:spPr>
+          <a:xfrm>
+            <a:off x="685800" y="457200"/>
+            <a:ext cx="10972800" cy="594360"/>
+          </a:xfrm>
+          <a:prstGeom prst="rect">
+            <a:avLst/>
+          </a:prstGeom>
+          <a:noFill/>
+        </p:spPr>
+        <p:txBody>
+          <a:bodyPr wrap="square" lIns="0" rIns="0" tIns="0" bIns="0" anchor="t">
+            <a:spAutoFit/>
+          </a:bodyPr>
+          <a:lstStyle/>
+          <a:p>
+            <a:pPr algn="l"/>
+            <a:r>
+              <a:rPr sz="2800" b="1">
+                <a:solidFill>
+                  <a:srgbClr val="EEF2F7"/>
+                </a:solidFill>
+                <a:latin typeface="Calibri"/>
+              </a:rPr>
+              <a:t>Three Algorithms, One Problem</a:t>
+            </a:r>
+          </a:p>
+        </p:txBody>
+      </p:sp>
+      <p:sp>
+        <p:nvSpPr>
+          <p:cNvPr id="5" name="TextBox 4"/>
+          <p:cNvSpPr txBox="1"/>
+          <p:nvPr/>
+        </p:nvSpPr>
+        <p:spPr>
+          <a:xfrm>
+            <a:off x="685800" y="1051560"/>
+            <a:ext cx="10972800" cy="365760"/>
+          </a:xfrm>
+          <a:prstGeom prst="rect">
+            <a:avLst/>
+          </a:prstGeom>
+          <a:noFill/>
+        </p:spPr>
+        <p:txBody>
+          <a:bodyPr wrap="square" lIns="0" rIns="0" tIns="0" bIns="0" anchor="t">
+            <a:spAutoFit/>
+          </a:bodyPr>
+          <a:lstStyle/>
+          <a:p>
+            <a:pPr algn="l"/>
+            <a:r>
+              <a:rPr sz="1300" b="0">
+                <a:solidFill>
+                  <a:srgbClr val="94A3B8"/>
+                </a:solidFill>
+                <a:latin typeface="Calibri"/>
+              </a:rPr>
+              <a:t>Shortest path on a 4-connected grid. Same input, very different behavior.</a:t>
+            </a:r>
+          </a:p>
+        </p:txBody>
+      </p:sp>
+      <p:sp>
+        <p:nvSpPr>
+          <p:cNvPr id="6" name="Rounded Rectangle 5"/>
           <p:cNvSpPr/>
           <p:nvPr/>
         </p:nvSpPr>
         <p:spPr>
           <a:xfrm>
-            <a:off x="6217920" y="914400"/>
-            <a:ext cx="64008" cy="1691640"/>
-          </a:xfrm>
-          <a:prstGeom prst="rect">
-            <a:avLst/>
+            <a:off x="457200" y="1783080"/>
+            <a:ext cx="3657600" cy="4114800"/>
+          </a:xfrm>
+          <a:prstGeom prst="roundRect">
+            <a:avLst>
+              <a:gd name="adj" fmla="val 8000"/>
+            </a:avLst>
           </a:prstGeom>
           <a:solidFill>
-            <a:srgbClr val="F59E0B"/>
+            <a:srgbClr val="22304D"/>
           </a:solidFill>
           <a:ln>
             <a:noFill/>
           </a:ln>
+          <a:effectLst/>
         </p:spPr>
         <p:style>
           <a:lnRef idx="1">
@@ -3808,73 +3985,27 @@
       </p:sp>
       <p:sp>
         <p:nvSpPr>
-          <p:cNvPr id="8" name="TextBox 7"/>
-          <p:cNvSpPr txBox="1"/>
-          <p:nvPr/>
-        </p:nvSpPr>
-        <p:spPr>
-          <a:xfrm>
-            <a:off x="6400800" y="1078992"/>
-            <a:ext cx="5212080" cy="1371600"/>
-          </a:xfrm>
-          <a:prstGeom prst="rect">
-            <a:avLst/>
-          </a:prstGeom>
-          <a:noFill/>
-        </p:spPr>
-        <p:txBody>
-          <a:bodyPr wrap="square">
-            <a:spAutoFit/>
-          </a:bodyPr>
-          <a:lstStyle/>
-          <a:p>
-            <a:pPr algn="l"/>
-            <a:r>
-              <a:rPr sz="1500" b="1" i="0">
-                <a:solidFill>
-                  <a:srgbClr val="F59E0B"/>
-                </a:solidFill>
-              </a:rPr>
-              <a:t>Dijkstra</a:t>
-            </a:r>
-          </a:p>
-          <a:p>
-            <a:pPr algn="l">
-              <a:spcBef>
-                <a:spcPts val="500"/>
-              </a:spcBef>
-            </a:pPr>
-            <a:r>
-              <a:rPr sz="1200" b="0" i="0">
-                <a:solidFill>
-                  <a:srgbClr val="CBD5E1"/>
-                </a:solidFill>
-              </a:rPr>
-              <a:t>No heuristic. Searches in all directions equally. Slow but guaranteed optimal.</a:t>
-            </a:r>
-          </a:p>
-        </p:txBody>
-      </p:sp>
-      <p:sp>
-        <p:nvSpPr>
-          <p:cNvPr id="9" name="Rectangle 8"/>
+          <p:cNvPr id="7" name="Rounded Rectangle 6"/>
           <p:cNvSpPr/>
           <p:nvPr/>
         </p:nvSpPr>
         <p:spPr>
           <a:xfrm>
-            <a:off x="6217920" y="2788920"/>
-            <a:ext cx="5577840" cy="1691640"/>
-          </a:xfrm>
-          <a:prstGeom prst="rect">
-            <a:avLst/>
+            <a:off x="457200" y="1783080"/>
+            <a:ext cx="3657600" cy="640080"/>
+          </a:xfrm>
+          <a:prstGeom prst="roundRect">
+            <a:avLst>
+              <a:gd name="adj" fmla="val 8000"/>
+            </a:avLst>
           </a:prstGeom>
           <a:solidFill>
-            <a:srgbClr val="1E293B"/>
+            <a:srgbClr val="E05C5C"/>
           </a:solidFill>
           <a:ln>
             <a:noFill/>
           </a:ln>
+          <a:effectLst/>
         </p:spPr>
         <p:style>
           <a:lnRef idx="1">
@@ -3900,24 +4031,132 @@
       </p:sp>
       <p:sp>
         <p:nvSpPr>
-          <p:cNvPr id="10" name="Rectangle 9"/>
+          <p:cNvPr id="8" name="TextBox 7"/>
+          <p:cNvSpPr txBox="1"/>
+          <p:nvPr/>
+        </p:nvSpPr>
+        <p:spPr>
+          <a:xfrm>
+            <a:off x="457200" y="1783080"/>
+            <a:ext cx="3657600" cy="640080"/>
+          </a:xfrm>
+          <a:prstGeom prst="rect">
+            <a:avLst/>
+          </a:prstGeom>
+          <a:noFill/>
+        </p:spPr>
+        <p:txBody>
+          <a:bodyPr wrap="square" lIns="0" rIns="0" tIns="0" bIns="0" anchor="ctr">
+            <a:spAutoFit/>
+          </a:bodyPr>
+          <a:lstStyle/>
+          <a:p>
+            <a:pPr algn="ctr"/>
+            <a:r>
+              <a:rPr sz="1800" b="1">
+                <a:solidFill>
+                  <a:srgbClr val="EEF2F7"/>
+                </a:solidFill>
+                <a:latin typeface="Calibri"/>
+              </a:rPr>
+              <a:t>DIJKSTRA</a:t>
+            </a:r>
+          </a:p>
+        </p:txBody>
+      </p:sp>
+      <p:sp>
+        <p:nvSpPr>
+          <p:cNvPr id="9" name="TextBox 8"/>
+          <p:cNvSpPr txBox="1"/>
+          <p:nvPr/>
+        </p:nvSpPr>
+        <p:spPr>
+          <a:xfrm>
+            <a:off x="731520" y="2606040"/>
+            <a:ext cx="3108960" cy="365760"/>
+          </a:xfrm>
+          <a:prstGeom prst="rect">
+            <a:avLst/>
+          </a:prstGeom>
+          <a:noFill/>
+        </p:spPr>
+        <p:txBody>
+          <a:bodyPr wrap="square" lIns="0" rIns="0" tIns="0" bIns="0" anchor="t">
+            <a:spAutoFit/>
+          </a:bodyPr>
+          <a:lstStyle/>
+          <a:p>
+            <a:pPr algn="l"/>
+            <a:r>
+              <a:rPr sz="1300" b="1">
+                <a:solidFill>
+                  <a:srgbClr val="E05C5C"/>
+                </a:solidFill>
+                <a:latin typeface="Calibri"/>
+              </a:rPr>
+              <a:t>The baseline</a:t>
+            </a:r>
+          </a:p>
+        </p:txBody>
+      </p:sp>
+      <p:sp>
+        <p:nvSpPr>
+          <p:cNvPr id="10" name="TextBox 9"/>
+          <p:cNvSpPr txBox="1"/>
+          <p:nvPr/>
+        </p:nvSpPr>
+        <p:spPr>
+          <a:xfrm>
+            <a:off x="731520" y="3017520"/>
+            <a:ext cx="3108960" cy="2103120"/>
+          </a:xfrm>
+          <a:prstGeom prst="rect">
+            <a:avLst/>
+          </a:prstGeom>
+          <a:noFill/>
+        </p:spPr>
+        <p:txBody>
+          <a:bodyPr wrap="square" lIns="0" rIns="0" tIns="0" bIns="0" anchor="t">
+            <a:spAutoFit/>
+          </a:bodyPr>
+          <a:lstStyle/>
+          <a:p>
+            <a:pPr algn="l"/>
+            <a:r>
+              <a:rPr sz="1100" b="0">
+                <a:solidFill>
+                  <a:srgbClr val="EEF2F7"/>
+                </a:solidFill>
+                <a:latin typeface="Calibri"/>
+              </a:rPr>
+              <a:t>Explores every reachable cell in order of distance from start. Always correct, but has no sense of where the goal is, so it essentially maps the entire reachable area first.</a:t>
+            </a:r>
+          </a:p>
+        </p:txBody>
+      </p:sp>
+      <p:sp>
+        <p:nvSpPr>
+          <p:cNvPr id="11" name="Rounded Rectangle 10"/>
           <p:cNvSpPr/>
           <p:nvPr/>
         </p:nvSpPr>
         <p:spPr>
           <a:xfrm>
-            <a:off x="6217920" y="2788920"/>
-            <a:ext cx="64008" cy="1691640"/>
-          </a:xfrm>
-          <a:prstGeom prst="rect">
-            <a:avLst/>
+            <a:off x="731520" y="4983480"/>
+            <a:ext cx="3108960" cy="731520"/>
+          </a:xfrm>
+          <a:prstGeom prst="roundRect">
+            <a:avLst>
+              <a:gd name="adj" fmla="val 8000"/>
+            </a:avLst>
           </a:prstGeom>
           <a:solidFill>
-            <a:srgbClr val="10B981"/>
+            <a:srgbClr val="1A253D"/>
           </a:solidFill>
           <a:ln>
             <a:noFill/>
           </a:ln>
+          <a:effectLst/>
         </p:spPr>
         <p:style>
           <a:lnRef idx="1">
@@ -3943,14 +4182,14 @@
       </p:sp>
       <p:sp>
         <p:nvSpPr>
-          <p:cNvPr id="11" name="TextBox 10"/>
+          <p:cNvPr id="12" name="TextBox 11"/>
           <p:cNvSpPr txBox="1"/>
           <p:nvPr/>
         </p:nvSpPr>
         <p:spPr>
           <a:xfrm>
-            <a:off x="6400800" y="2953512"/>
-            <a:ext cx="5212080" cy="1371600"/>
+            <a:off x="731520" y="5029200"/>
+            <a:ext cx="3108960" cy="320040"/>
           </a:xfrm>
           <a:prstGeom prst="rect">
             <a:avLst/>
@@ -3958,58 +4197,82 @@
           <a:noFill/>
         </p:spPr>
         <p:txBody>
-          <a:bodyPr wrap="square">
+          <a:bodyPr wrap="square" lIns="0" rIns="0" tIns="0" bIns="0" anchor="t">
             <a:spAutoFit/>
           </a:bodyPr>
           <a:lstStyle/>
           <a:p>
-            <a:pPr algn="l"/>
-            <a:r>
-              <a:rPr sz="1500" b="1" i="0">
-                <a:solidFill>
-                  <a:srgbClr val="10B981"/>
-                </a:solidFill>
+            <a:pPr algn="ctr"/>
+            <a:r>
+              <a:rPr sz="900" b="1">
+                <a:solidFill>
+                  <a:srgbClr val="94A3B8"/>
+                </a:solidFill>
+                <a:latin typeface="Calibri"/>
               </a:rPr>
-              <a:t>A*</a:t>
-            </a:r>
-          </a:p>
-          <a:p>
-            <a:pPr algn="l">
-              <a:spcBef>
-                <a:spcPts val="500"/>
-              </a:spcBef>
-            </a:pPr>
-            <a:r>
-              <a:rPr sz="1200" b="0" i="0">
-                <a:solidFill>
-                  <a:srgbClr val="CBD5E1"/>
-                </a:solidFill>
+              <a:t>Mechanism</a:t>
+            </a:r>
+          </a:p>
+        </p:txBody>
+      </p:sp>
+      <p:sp>
+        <p:nvSpPr>
+          <p:cNvPr id="13" name="TextBox 12"/>
+          <p:cNvSpPr txBox="1"/>
+          <p:nvPr/>
+        </p:nvSpPr>
+        <p:spPr>
+          <a:xfrm>
+            <a:off x="731520" y="5349240"/>
+            <a:ext cx="3108960" cy="320040"/>
+          </a:xfrm>
+          <a:prstGeom prst="rect">
+            <a:avLst/>
+          </a:prstGeom>
+          <a:noFill/>
+        </p:spPr>
+        <p:txBody>
+          <a:bodyPr wrap="square" lIns="0" rIns="0" tIns="0" bIns="0" anchor="t">
+            <a:spAutoFit/>
+          </a:bodyPr>
+          <a:lstStyle/>
+          <a:p>
+            <a:pPr algn="ctr"/>
+            <a:r>
+              <a:rPr sz="1300" b="1">
+                <a:solidFill>
+                  <a:srgbClr val="E05C5C"/>
+                </a:solidFill>
+                <a:latin typeface="Calibri"/>
               </a:rPr>
-              <a:t>Adds a heuristic (Manhattan distance). Focuses search toward the goal. Fast &amp; optimal.</a:t>
-            </a:r>
-          </a:p>
-        </p:txBody>
-      </p:sp>
-      <p:sp>
-        <p:nvSpPr>
-          <p:cNvPr id="12" name="Rectangle 11"/>
+              <a:t>Uniform wavefront</a:t>
+            </a:r>
+          </a:p>
+        </p:txBody>
+      </p:sp>
+      <p:sp>
+        <p:nvSpPr>
+          <p:cNvPr id="14" name="Rounded Rectangle 13"/>
           <p:cNvSpPr/>
           <p:nvPr/>
         </p:nvSpPr>
         <p:spPr>
           <a:xfrm>
-            <a:off x="6217920" y="4663440"/>
-            <a:ext cx="5577840" cy="1691640"/>
-          </a:xfrm>
-          <a:prstGeom prst="rect">
-            <a:avLst/>
+            <a:off x="4297680" y="1783080"/>
+            <a:ext cx="3657600" cy="4114800"/>
+          </a:xfrm>
+          <a:prstGeom prst="roundRect">
+            <a:avLst>
+              <a:gd name="adj" fmla="val 8000"/>
+            </a:avLst>
           </a:prstGeom>
           <a:solidFill>
-            <a:srgbClr val="1E293B"/>
+            <a:srgbClr val="22304D"/>
           </a:solidFill>
           <a:ln>
             <a:noFill/>
           </a:ln>
+          <a:effectLst/>
         </p:spPr>
         <p:style>
           <a:lnRef idx="1">
@@ -4035,24 +4298,27 @@
       </p:sp>
       <p:sp>
         <p:nvSpPr>
-          <p:cNvPr id="13" name="Rectangle 12"/>
+          <p:cNvPr id="15" name="Rounded Rectangle 14"/>
           <p:cNvSpPr/>
           <p:nvPr/>
         </p:nvSpPr>
         <p:spPr>
           <a:xfrm>
-            <a:off x="6217920" y="4663440"/>
-            <a:ext cx="64008" cy="1691640"/>
-          </a:xfrm>
-          <a:prstGeom prst="rect">
-            <a:avLst/>
+            <a:off x="4297680" y="1783080"/>
+            <a:ext cx="3657600" cy="640080"/>
+          </a:xfrm>
+          <a:prstGeom prst="roundRect">
+            <a:avLst>
+              <a:gd name="adj" fmla="val 8000"/>
+            </a:avLst>
           </a:prstGeom>
           <a:solidFill>
-            <a:srgbClr val="3B82F6"/>
+            <a:srgbClr val="4D94E0"/>
           </a:solidFill>
           <a:ln>
             <a:noFill/>
           </a:ln>
+          <a:effectLst/>
         </p:spPr>
         <p:style>
           <a:lnRef idx="1">
@@ -4078,14 +4344,14 @@
       </p:sp>
       <p:sp>
         <p:nvSpPr>
-          <p:cNvPr id="14" name="TextBox 13"/>
+          <p:cNvPr id="16" name="TextBox 15"/>
           <p:cNvSpPr txBox="1"/>
           <p:nvPr/>
         </p:nvSpPr>
         <p:spPr>
           <a:xfrm>
-            <a:off x="6400800" y="4828031"/>
-            <a:ext cx="5212080" cy="1371600"/>
+            <a:off x="4297680" y="1783080"/>
+            <a:ext cx="3657600" cy="640080"/>
           </a:xfrm>
           <a:prstGeom prst="rect">
             <a:avLst/>
@@ -4093,48 +4359,347 @@
           <a:noFill/>
         </p:spPr>
         <p:txBody>
-          <a:bodyPr wrap="square">
+          <a:bodyPr wrap="square" lIns="0" rIns="0" tIns="0" bIns="0" anchor="ctr">
             <a:spAutoFit/>
           </a:bodyPr>
           <a:lstStyle/>
           <a:p>
+            <a:pPr algn="ctr"/>
+            <a:r>
+              <a:rPr sz="1800" b="1">
+                <a:solidFill>
+                  <a:srgbClr val="EEF2F7"/>
+                </a:solidFill>
+                <a:latin typeface="Calibri"/>
+              </a:rPr>
+              <a:t>A*</a:t>
+            </a:r>
+          </a:p>
+        </p:txBody>
+      </p:sp>
+      <p:sp>
+        <p:nvSpPr>
+          <p:cNvPr id="17" name="TextBox 16"/>
+          <p:cNvSpPr txBox="1"/>
+          <p:nvPr/>
+        </p:nvSpPr>
+        <p:spPr>
+          <a:xfrm>
+            <a:off x="4572000" y="2606040"/>
+            <a:ext cx="3108960" cy="365760"/>
+          </a:xfrm>
+          <a:prstGeom prst="rect">
+            <a:avLst/>
+          </a:prstGeom>
+          <a:noFill/>
+        </p:spPr>
+        <p:txBody>
+          <a:bodyPr wrap="square" lIns="0" rIns="0" tIns="0" bIns="0" anchor="t">
+            <a:spAutoFit/>
+          </a:bodyPr>
+          <a:lstStyle/>
+          <a:p>
             <a:pPr algn="l"/>
             <a:r>
-              <a:rPr sz="1500" b="1" i="0">
-                <a:solidFill>
-                  <a:srgbClr val="3B82F6"/>
-                </a:solidFill>
+              <a:rPr sz="1300" b="1">
+                <a:solidFill>
+                  <a:srgbClr val="4D94E0"/>
+                </a:solidFill>
+                <a:latin typeface="Calibri"/>
+              </a:rPr>
+              <a:t>Heuristic guided</a:t>
+            </a:r>
+          </a:p>
+        </p:txBody>
+      </p:sp>
+      <p:sp>
+        <p:nvSpPr>
+          <p:cNvPr id="18" name="TextBox 17"/>
+          <p:cNvSpPr txBox="1"/>
+          <p:nvPr/>
+        </p:nvSpPr>
+        <p:spPr>
+          <a:xfrm>
+            <a:off x="4572000" y="3017520"/>
+            <a:ext cx="3108960" cy="2103120"/>
+          </a:xfrm>
+          <a:prstGeom prst="rect">
+            <a:avLst/>
+          </a:prstGeom>
+          <a:noFill/>
+        </p:spPr>
+        <p:txBody>
+          <a:bodyPr wrap="square" lIns="0" rIns="0" tIns="0" bIns="0" anchor="t">
+            <a:spAutoFit/>
+          </a:bodyPr>
+          <a:lstStyle/>
+          <a:p>
+            <a:pPr algn="l"/>
+            <a:r>
+              <a:rPr sz="1100" b="0">
+                <a:solidFill>
+                  <a:srgbClr val="EEF2F7"/>
+                </a:solidFill>
+                <a:latin typeface="Calibri"/>
+              </a:rPr>
+              <a:t>Adds Manhattan distance to the goal as a lower-bound estimate. Picks the cell with the lowest total estimated cost at each step, so the search moves toward the goal instead of spreading evenly.</a:t>
+            </a:r>
+          </a:p>
+        </p:txBody>
+      </p:sp>
+      <p:sp>
+        <p:nvSpPr>
+          <p:cNvPr id="19" name="Rounded Rectangle 18"/>
+          <p:cNvSpPr/>
+          <p:nvPr/>
+        </p:nvSpPr>
+        <p:spPr>
+          <a:xfrm>
+            <a:off x="4572000" y="4983480"/>
+            <a:ext cx="3108960" cy="731520"/>
+          </a:xfrm>
+          <a:prstGeom prst="roundRect">
+            <a:avLst>
+              <a:gd name="adj" fmla="val 8000"/>
+            </a:avLst>
+          </a:prstGeom>
+          <a:solidFill>
+            <a:srgbClr val="1A253D"/>
+          </a:solidFill>
+          <a:ln>
+            <a:noFill/>
+          </a:ln>
+          <a:effectLst/>
+        </p:spPr>
+        <p:style>
+          <a:lnRef idx="1">
+            <a:schemeClr val="accent1"/>
+          </a:lnRef>
+          <a:fillRef idx="3">
+            <a:schemeClr val="accent1"/>
+          </a:fillRef>
+          <a:effectRef idx="2">
+            <a:schemeClr val="accent1"/>
+          </a:effectRef>
+          <a:fontRef idx="minor">
+            <a:schemeClr val="lt1"/>
+          </a:fontRef>
+        </p:style>
+        <p:txBody>
+          <a:bodyPr rtlCol="0" anchor="ctr"/>
+          <a:lstStyle/>
+          <a:p>
+            <a:pPr algn="ctr"/>
+          </a:p>
+        </p:txBody>
+      </p:sp>
+      <p:sp>
+        <p:nvSpPr>
+          <p:cNvPr id="20" name="TextBox 19"/>
+          <p:cNvSpPr txBox="1"/>
+          <p:nvPr/>
+        </p:nvSpPr>
+        <p:spPr>
+          <a:xfrm>
+            <a:off x="4572000" y="5029200"/>
+            <a:ext cx="3108960" cy="320040"/>
+          </a:xfrm>
+          <a:prstGeom prst="rect">
+            <a:avLst/>
+          </a:prstGeom>
+          <a:noFill/>
+        </p:spPr>
+        <p:txBody>
+          <a:bodyPr wrap="square" lIns="0" rIns="0" tIns="0" bIns="0" anchor="t">
+            <a:spAutoFit/>
+          </a:bodyPr>
+          <a:lstStyle/>
+          <a:p>
+            <a:pPr algn="ctr"/>
+            <a:r>
+              <a:rPr sz="900" b="1">
+                <a:solidFill>
+                  <a:srgbClr val="94A3B8"/>
+                </a:solidFill>
+                <a:latin typeface="Calibri"/>
+              </a:rPr>
+              <a:t>Mechanism</a:t>
+            </a:r>
+          </a:p>
+        </p:txBody>
+      </p:sp>
+      <p:sp>
+        <p:nvSpPr>
+          <p:cNvPr id="21" name="TextBox 20"/>
+          <p:cNvSpPr txBox="1"/>
+          <p:nvPr/>
+        </p:nvSpPr>
+        <p:spPr>
+          <a:xfrm>
+            <a:off x="4572000" y="5349240"/>
+            <a:ext cx="3108960" cy="320040"/>
+          </a:xfrm>
+          <a:prstGeom prst="rect">
+            <a:avLst/>
+          </a:prstGeom>
+          <a:noFill/>
+        </p:spPr>
+        <p:txBody>
+          <a:bodyPr wrap="square" lIns="0" rIns="0" tIns="0" bIns="0" anchor="t">
+            <a:spAutoFit/>
+          </a:bodyPr>
+          <a:lstStyle/>
+          <a:p>
+            <a:pPr algn="ctr"/>
+            <a:r>
+              <a:rPr sz="1300" b="1">
+                <a:solidFill>
+                  <a:srgbClr val="4D94E0"/>
+                </a:solidFill>
+                <a:latin typeface="Calibri"/>
+              </a:rPr>
+              <a:t>Goal-biased search</a:t>
+            </a:r>
+          </a:p>
+        </p:txBody>
+      </p:sp>
+      <p:sp>
+        <p:nvSpPr>
+          <p:cNvPr id="22" name="Rounded Rectangle 21"/>
+          <p:cNvSpPr/>
+          <p:nvPr/>
+        </p:nvSpPr>
+        <p:spPr>
+          <a:xfrm>
+            <a:off x="8138159" y="1783080"/>
+            <a:ext cx="3657600" cy="4114800"/>
+          </a:xfrm>
+          <a:prstGeom prst="roundRect">
+            <a:avLst>
+              <a:gd name="adj" fmla="val 8000"/>
+            </a:avLst>
+          </a:prstGeom>
+          <a:solidFill>
+            <a:srgbClr val="22304D"/>
+          </a:solidFill>
+          <a:ln>
+            <a:noFill/>
+          </a:ln>
+          <a:effectLst/>
+        </p:spPr>
+        <p:style>
+          <a:lnRef idx="1">
+            <a:schemeClr val="accent1"/>
+          </a:lnRef>
+          <a:fillRef idx="3">
+            <a:schemeClr val="accent1"/>
+          </a:fillRef>
+          <a:effectRef idx="2">
+            <a:schemeClr val="accent1"/>
+          </a:effectRef>
+          <a:fontRef idx="minor">
+            <a:schemeClr val="lt1"/>
+          </a:fontRef>
+        </p:style>
+        <p:txBody>
+          <a:bodyPr rtlCol="0" anchor="ctr"/>
+          <a:lstStyle/>
+          <a:p>
+            <a:pPr algn="ctr"/>
+          </a:p>
+        </p:txBody>
+      </p:sp>
+      <p:sp>
+        <p:nvSpPr>
+          <p:cNvPr id="23" name="Rounded Rectangle 22"/>
+          <p:cNvSpPr/>
+          <p:nvPr/>
+        </p:nvSpPr>
+        <p:spPr>
+          <a:xfrm>
+            <a:off x="8138159" y="1783080"/>
+            <a:ext cx="3657600" cy="640080"/>
+          </a:xfrm>
+          <a:prstGeom prst="roundRect">
+            <a:avLst>
+              <a:gd name="adj" fmla="val 8000"/>
+            </a:avLst>
+          </a:prstGeom>
+          <a:solidFill>
+            <a:srgbClr val="2CA02C"/>
+          </a:solidFill>
+          <a:ln>
+            <a:noFill/>
+          </a:ln>
+          <a:effectLst/>
+        </p:spPr>
+        <p:style>
+          <a:lnRef idx="1">
+            <a:schemeClr val="accent1"/>
+          </a:lnRef>
+          <a:fillRef idx="3">
+            <a:schemeClr val="accent1"/>
+          </a:fillRef>
+          <a:effectRef idx="2">
+            <a:schemeClr val="accent1"/>
+          </a:effectRef>
+          <a:fontRef idx="minor">
+            <a:schemeClr val="lt1"/>
+          </a:fontRef>
+        </p:style>
+        <p:txBody>
+          <a:bodyPr rtlCol="0" anchor="ctr"/>
+          <a:lstStyle/>
+          <a:p>
+            <a:pPr algn="ctr"/>
+          </a:p>
+        </p:txBody>
+      </p:sp>
+      <p:sp>
+        <p:nvSpPr>
+          <p:cNvPr id="24" name="TextBox 23"/>
+          <p:cNvSpPr txBox="1"/>
+          <p:nvPr/>
+        </p:nvSpPr>
+        <p:spPr>
+          <a:xfrm>
+            <a:off x="8138159" y="1783080"/>
+            <a:ext cx="3657600" cy="640080"/>
+          </a:xfrm>
+          <a:prstGeom prst="rect">
+            <a:avLst/>
+          </a:prstGeom>
+          <a:noFill/>
+        </p:spPr>
+        <p:txBody>
+          <a:bodyPr wrap="square" lIns="0" rIns="0" tIns="0" bIns="0" anchor="ctr">
+            <a:spAutoFit/>
+          </a:bodyPr>
+          <a:lstStyle/>
+          <a:p>
+            <a:pPr algn="ctr"/>
+            <a:r>
+              <a:rPr sz="1800" b="1">
+                <a:solidFill>
+                  <a:srgbClr val="EEF2F7"/>
+                </a:solidFill>
+                <a:latin typeface="Calibri"/>
               </a:rPr>
               <a:t>JPS4</a:t>
             </a:r>
           </a:p>
-          <a:p>
-            <a:pPr algn="l">
-              <a:spcBef>
-                <a:spcPts val="500"/>
-              </a:spcBef>
-            </a:pPr>
-            <a:r>
-              <a:rPr sz="1200" b="0" i="0">
-                <a:solidFill>
-                  <a:srgbClr val="CBD5E1"/>
-                </a:solidFill>
-              </a:rPr>
-              <a:t>Skips empty space via jump points. Only stops where routing decisions are forced. Fewest expansions on open maps.</a:t>
-            </a:r>
-          </a:p>
-        </p:txBody>
-      </p:sp>
-      <p:sp>
-        <p:nvSpPr>
-          <p:cNvPr id="15" name="TextBox 14"/>
+        </p:txBody>
+      </p:sp>
+      <p:sp>
+        <p:nvSpPr>
+          <p:cNvPr id="25" name="TextBox 24"/>
           <p:cNvSpPr txBox="1"/>
           <p:nvPr/>
         </p:nvSpPr>
         <p:spPr>
           <a:xfrm>
-            <a:off x="365760" y="5989320"/>
-            <a:ext cx="11430000" cy="457200"/>
+            <a:off x="8412480" y="2606040"/>
+            <a:ext cx="3108960" cy="365760"/>
           </a:xfrm>
           <a:prstGeom prst="rect">
             <a:avLst/>
@@ -4142,33 +4707,34 @@
           <a:noFill/>
         </p:spPr>
         <p:txBody>
-          <a:bodyPr wrap="square">
+          <a:bodyPr wrap="square" lIns="0" rIns="0" tIns="0" bIns="0" anchor="t">
             <a:spAutoFit/>
           </a:bodyPr>
           <a:lstStyle/>
           <a:p>
             <a:pPr algn="l"/>
             <a:r>
-              <a:rPr sz="1300" b="0" i="1">
-                <a:solidFill>
-                  <a:srgbClr val="10B981"/>
-                </a:solidFill>
+              <a:rPr sz="1300" b="1">
+                <a:solidFill>
+                  <a:srgbClr val="2CA02C"/>
+                </a:solidFill>
+                <a:latin typeface="Calibri"/>
               </a:rPr>
-              <a:t>Our question: which algorithm visits the fewest cells — and why?</a:t>
-            </a:r>
-          </a:p>
-        </p:txBody>
-      </p:sp>
-      <p:sp>
-        <p:nvSpPr>
-          <p:cNvPr id="16" name="TextBox 15"/>
+              <a:t>Baum (2025)</a:t>
+            </a:r>
+          </a:p>
+        </p:txBody>
+      </p:sp>
+      <p:sp>
+        <p:nvSpPr>
+          <p:cNvPr id="26" name="TextBox 25"/>
           <p:cNvSpPr txBox="1"/>
           <p:nvPr/>
         </p:nvSpPr>
         <p:spPr>
           <a:xfrm>
-            <a:off x="11430000" y="6492240"/>
-            <a:ext cx="731520" cy="274320"/>
+            <a:off x="8412480" y="3017520"/>
+            <a:ext cx="3108960" cy="2103120"/>
           </a:xfrm>
           <a:prstGeom prst="rect">
             <a:avLst/>
@@ -4176,19 +4742,241 @@
           <a:noFill/>
         </p:spPr>
         <p:txBody>
-          <a:bodyPr wrap="square">
+          <a:bodyPr wrap="square" lIns="0" rIns="0" tIns="0" bIns="0" anchor="t">
             <a:spAutoFit/>
           </a:bodyPr>
           <a:lstStyle/>
           <a:p>
+            <a:pPr algn="l"/>
+            <a:r>
+              <a:rPr sz="1100" b="0">
+                <a:solidFill>
+                  <a:srgbClr val="EEF2F7"/>
+                </a:solidFill>
+                <a:latin typeface="Calibri"/>
+              </a:rPr>
+              <a:t>Skips over long open corridors entirely. Stops only at jump points, places where an obstacle forces a real routing choice. Only those cells enter the open list, so the list stays small.</a:t>
+            </a:r>
+          </a:p>
+        </p:txBody>
+      </p:sp>
+      <p:sp>
+        <p:nvSpPr>
+          <p:cNvPr id="27" name="Rounded Rectangle 26"/>
+          <p:cNvSpPr/>
+          <p:nvPr/>
+        </p:nvSpPr>
+        <p:spPr>
+          <a:xfrm>
+            <a:off x="8412480" y="4983480"/>
+            <a:ext cx="3108960" cy="731520"/>
+          </a:xfrm>
+          <a:prstGeom prst="roundRect">
+            <a:avLst>
+              <a:gd name="adj" fmla="val 8000"/>
+            </a:avLst>
+          </a:prstGeom>
+          <a:solidFill>
+            <a:srgbClr val="1A253D"/>
+          </a:solidFill>
+          <a:ln>
+            <a:noFill/>
+          </a:ln>
+          <a:effectLst/>
+        </p:spPr>
+        <p:style>
+          <a:lnRef idx="1">
+            <a:schemeClr val="accent1"/>
+          </a:lnRef>
+          <a:fillRef idx="3">
+            <a:schemeClr val="accent1"/>
+          </a:fillRef>
+          <a:effectRef idx="2">
+            <a:schemeClr val="accent1"/>
+          </a:effectRef>
+          <a:fontRef idx="minor">
+            <a:schemeClr val="lt1"/>
+          </a:fontRef>
+        </p:style>
+        <p:txBody>
+          <a:bodyPr rtlCol="0" anchor="ctr"/>
+          <a:lstStyle/>
+          <a:p>
+            <a:pPr algn="ctr"/>
+          </a:p>
+        </p:txBody>
+      </p:sp>
+      <p:sp>
+        <p:nvSpPr>
+          <p:cNvPr id="28" name="TextBox 27"/>
+          <p:cNvSpPr txBox="1"/>
+          <p:nvPr/>
+        </p:nvSpPr>
+        <p:spPr>
+          <a:xfrm>
+            <a:off x="8412480" y="5029200"/>
+            <a:ext cx="3108960" cy="320040"/>
+          </a:xfrm>
+          <a:prstGeom prst="rect">
+            <a:avLst/>
+          </a:prstGeom>
+          <a:noFill/>
+        </p:spPr>
+        <p:txBody>
+          <a:bodyPr wrap="square" lIns="0" rIns="0" tIns="0" bIns="0" anchor="t">
+            <a:spAutoFit/>
+          </a:bodyPr>
+          <a:lstStyle/>
+          <a:p>
+            <a:pPr algn="ctr"/>
+            <a:r>
+              <a:rPr sz="900" b="1">
+                <a:solidFill>
+                  <a:srgbClr val="94A3B8"/>
+                </a:solidFill>
+                <a:latin typeface="Calibri"/>
+              </a:rPr>
+              <a:t>Mechanism</a:t>
+            </a:r>
+          </a:p>
+        </p:txBody>
+      </p:sp>
+      <p:sp>
+        <p:nvSpPr>
+          <p:cNvPr id="29" name="TextBox 28"/>
+          <p:cNvSpPr txBox="1"/>
+          <p:nvPr/>
+        </p:nvSpPr>
+        <p:spPr>
+          <a:xfrm>
+            <a:off x="8412480" y="5349240"/>
+            <a:ext cx="3108960" cy="320040"/>
+          </a:xfrm>
+          <a:prstGeom prst="rect">
+            <a:avLst/>
+          </a:prstGeom>
+          <a:noFill/>
+        </p:spPr>
+        <p:txBody>
+          <a:bodyPr wrap="square" lIns="0" rIns="0" tIns="0" bIns="0" anchor="t">
+            <a:spAutoFit/>
+          </a:bodyPr>
+          <a:lstStyle/>
+          <a:p>
+            <a:pPr algn="ctr"/>
+            <a:r>
+              <a:rPr sz="1300" b="1">
+                <a:solidFill>
+                  <a:srgbClr val="2CA02C"/>
+                </a:solidFill>
+                <a:latin typeface="Calibri"/>
+              </a:rPr>
+              <a:t>Symmetry pruning</a:t>
+            </a:r>
+          </a:p>
+        </p:txBody>
+      </p:sp>
+      <p:sp>
+        <p:nvSpPr>
+          <p:cNvPr id="30" name="TextBox 29"/>
+          <p:cNvSpPr txBox="1"/>
+          <p:nvPr/>
+        </p:nvSpPr>
+        <p:spPr>
+          <a:xfrm>
+            <a:off x="685800" y="6080760"/>
+            <a:ext cx="10972800" cy="365760"/>
+          </a:xfrm>
+          <a:prstGeom prst="rect">
+            <a:avLst/>
+          </a:prstGeom>
+          <a:noFill/>
+        </p:spPr>
+        <p:txBody>
+          <a:bodyPr wrap="square" lIns="0" rIns="0" tIns="0" bIns="0" anchor="t">
+            <a:spAutoFit/>
+          </a:bodyPr>
+          <a:lstStyle/>
+          <a:p>
+            <a:pPr algn="ctr"/>
+            <a:r>
+              <a:rPr sz="1200" b="0">
+                <a:solidFill>
+                  <a:srgbClr val="94A3B8"/>
+                </a:solidFill>
+                <a:latin typeface="Calibri"/>
+              </a:rPr>
+              <a:t>All three guarantee the same shortest path. The difference is how many cells each one has to look at.</a:t>
+            </a:r>
+          </a:p>
+        </p:txBody>
+      </p:sp>
+      <p:sp>
+        <p:nvSpPr>
+          <p:cNvPr id="31" name="TextBox 30"/>
+          <p:cNvSpPr txBox="1"/>
+          <p:nvPr/>
+        </p:nvSpPr>
+        <p:spPr>
+          <a:xfrm>
+            <a:off x="457200" y="6492240"/>
+            <a:ext cx="5486400" cy="274320"/>
+          </a:xfrm>
+          <a:prstGeom prst="rect">
+            <a:avLst/>
+          </a:prstGeom>
+          <a:noFill/>
+        </p:spPr>
+        <p:txBody>
+          <a:bodyPr wrap="square" lIns="0" rIns="0" tIns="0" bIns="0" anchor="t">
+            <a:spAutoFit/>
+          </a:bodyPr>
+          <a:lstStyle/>
+          <a:p>
+            <a:pPr algn="l"/>
+            <a:r>
+              <a:rPr sz="900" b="0">
+                <a:solidFill>
+                  <a:srgbClr val="64748B"/>
+                </a:solidFill>
+                <a:latin typeface="Calibri"/>
+              </a:rPr>
+              <a:t>ADA Progress Report  |  Habib University  |  Spring 2026</a:t>
+            </a:r>
+          </a:p>
+        </p:txBody>
+      </p:sp>
+      <p:sp>
+        <p:nvSpPr>
+          <p:cNvPr id="32" name="TextBox 31"/>
+          <p:cNvSpPr txBox="1"/>
+          <p:nvPr/>
+        </p:nvSpPr>
+        <p:spPr>
+          <a:xfrm>
+            <a:off x="11094415" y="6492240"/>
+            <a:ext cx="640080" cy="274320"/>
+          </a:xfrm>
+          <a:prstGeom prst="rect">
+            <a:avLst/>
+          </a:prstGeom>
+          <a:noFill/>
+        </p:spPr>
+        <p:txBody>
+          <a:bodyPr wrap="square" lIns="0" rIns="0" tIns="0" bIns="0" anchor="t">
+            <a:spAutoFit/>
+          </a:bodyPr>
+          <a:lstStyle/>
+          <a:p>
             <a:pPr algn="r"/>
             <a:r>
-              <a:rPr sz="1000" b="0" i="0">
+              <a:rPr sz="900" b="0">
                 <a:solidFill>
                   <a:srgbClr val="64748B"/>
                 </a:solidFill>
+                <a:latin typeface="Calibri"/>
               </a:rPr>
-              <a:t>2 / 5</a:t>
+              <a:t>2 / 4</a:t>
             </a:r>
           </a:p>
         </p:txBody>
@@ -4204,14 +4992,6 @@
 <file path=ppt/slides/slide3.xml><?xml version="1.0" encoding="utf-8"?>
 <p:sld xmlns:a="http://schemas.openxmlformats.org/drawingml/2006/main" xmlns:p="http://schemas.openxmlformats.org/presentationml/2006/main" xmlns:r="http://schemas.openxmlformats.org/officeDocument/2006/relationships">
   <p:cSld>
-    <p:bg>
-      <p:bgPr>
-        <a:solidFill>
-          <a:srgbClr val="0F172A"/>
-        </a:solidFill>
-        <a:effectLst/>
-      </p:bgPr>
-    </p:bg>
     <p:spTree>
       <p:nvGrpSpPr>
         <p:cNvPr id="1" name=""/>
@@ -4227,18 +5007,19 @@
         </p:nvSpPr>
         <p:spPr>
           <a:xfrm>
-            <a:off x="0" y="502920"/>
-            <a:ext cx="12188952" cy="41148"/>
+            <a:off x="0" y="0"/>
+            <a:ext cx="12191695" cy="6858000"/>
           </a:xfrm>
           <a:prstGeom prst="rect">
             <a:avLst/>
           </a:prstGeom>
           <a:solidFill>
-            <a:srgbClr val="3B82F6"/>
+            <a:srgbClr val="0F172A"/>
           </a:solidFill>
           <a:ln>
             <a:noFill/>
           </a:ln>
+          <a:effectLst/>
         </p:spPr>
         <p:style>
           <a:lnRef idx="1">
@@ -4264,58 +5045,25 @@
       </p:sp>
       <p:sp>
         <p:nvSpPr>
-          <p:cNvPr id="3" name="TextBox 2"/>
-          <p:cNvSpPr txBox="1"/>
-          <p:nvPr/>
-        </p:nvSpPr>
-        <p:spPr>
-          <a:xfrm>
-            <a:off x="365760" y="109728"/>
-            <a:ext cx="10972800" cy="502920"/>
-          </a:xfrm>
-          <a:prstGeom prst="rect">
-            <a:avLst/>
-          </a:prstGeom>
-          <a:noFill/>
-        </p:spPr>
-        <p:txBody>
-          <a:bodyPr wrap="square">
-            <a:spAutoFit/>
-          </a:bodyPr>
-          <a:lstStyle/>
-          <a:p>
-            <a:pPr algn="l"/>
-            <a:r>
-              <a:rPr sz="2600" b="1" i="0">
-                <a:solidFill>
-                  <a:srgbClr val="FFFFFF"/>
-                </a:solidFill>
-              </a:rPr>
-              <a:t>Methodology — How the Algorithms Work</a:t>
-            </a:r>
-          </a:p>
-        </p:txBody>
-      </p:sp>
-      <p:sp>
-        <p:nvSpPr>
-          <p:cNvPr id="4" name="Rectangle 3"/>
+          <p:cNvPr id="3" name="Rectangle 2"/>
           <p:cNvSpPr/>
           <p:nvPr/>
         </p:nvSpPr>
         <p:spPr>
           <a:xfrm>
-            <a:off x="320040" y="777240"/>
-            <a:ext cx="3749039" cy="5303520"/>
+            <a:off x="457200" y="502920"/>
+            <a:ext cx="73152" cy="502920"/>
           </a:xfrm>
           <a:prstGeom prst="rect">
             <a:avLst/>
           </a:prstGeom>
           <a:solidFill>
-            <a:srgbClr val="1E293B"/>
+            <a:srgbClr val="38BDF8"/>
           </a:solidFill>
           <a:ln>
             <a:noFill/>
           </a:ln>
+          <a:effectLst/>
         </p:spPr>
         <p:style>
           <a:lnRef idx="1">
@@ -4341,24 +5089,97 @@
       </p:sp>
       <p:sp>
         <p:nvSpPr>
-          <p:cNvPr id="5" name="Rectangle 4"/>
+          <p:cNvPr id="4" name="TextBox 3"/>
+          <p:cNvSpPr txBox="1"/>
+          <p:nvPr/>
+        </p:nvSpPr>
+        <p:spPr>
+          <a:xfrm>
+            <a:off x="685800" y="457200"/>
+            <a:ext cx="10972800" cy="594360"/>
+          </a:xfrm>
+          <a:prstGeom prst="rect">
+            <a:avLst/>
+          </a:prstGeom>
+          <a:noFill/>
+        </p:spPr>
+        <p:txBody>
+          <a:bodyPr wrap="square" lIns="0" rIns="0" tIns="0" bIns="0" anchor="t">
+            <a:spAutoFit/>
+          </a:bodyPr>
+          <a:lstStyle/>
+          <a:p>
+            <a:pPr algn="l"/>
+            <a:r>
+              <a:rPr sz="2800" b="1">
+                <a:solidFill>
+                  <a:srgbClr val="EEF2F7"/>
+                </a:solidFill>
+                <a:latin typeface="Calibri"/>
+              </a:rPr>
+              <a:t>Methodology</a:t>
+            </a:r>
+          </a:p>
+        </p:txBody>
+      </p:sp>
+      <p:sp>
+        <p:nvSpPr>
+          <p:cNvPr id="5" name="TextBox 4"/>
+          <p:cNvSpPr txBox="1"/>
+          <p:nvPr/>
+        </p:nvSpPr>
+        <p:spPr>
+          <a:xfrm>
+            <a:off x="685800" y="1051560"/>
+            <a:ext cx="10972800" cy="365760"/>
+          </a:xfrm>
+          <a:prstGeom prst="rect">
+            <a:avLst/>
+          </a:prstGeom>
+          <a:noFill/>
+        </p:spPr>
+        <p:txBody>
+          <a:bodyPr wrap="square" lIns="0" rIns="0" tIns="0" bIns="0" anchor="t">
+            <a:spAutoFit/>
+          </a:bodyPr>
+          <a:lstStyle/>
+          <a:p>
+            <a:pPr algn="l"/>
+            <a:r>
+              <a:rPr sz="1300" b="0">
+                <a:solidFill>
+                  <a:srgbClr val="94A3B8"/>
+                </a:solidFill>
+                <a:latin typeface="Calibri"/>
+              </a:rPr>
+              <a:t>Same benchmark, same grids, same search loop. Only the algorithm swaps.</a:t>
+            </a:r>
+          </a:p>
+        </p:txBody>
+      </p:sp>
+      <p:sp>
+        <p:nvSpPr>
+          <p:cNvPr id="6" name="Rounded Rectangle 5"/>
           <p:cNvSpPr/>
           <p:nvPr/>
         </p:nvSpPr>
         <p:spPr>
           <a:xfrm>
-            <a:off x="320040" y="777240"/>
-            <a:ext cx="3749039" cy="256032"/>
-          </a:xfrm>
-          <a:prstGeom prst="rect">
-            <a:avLst/>
+            <a:off x="457200" y="1737360"/>
+            <a:ext cx="5303520" cy="4572000"/>
+          </a:xfrm>
+          <a:prstGeom prst="roundRect">
+            <a:avLst>
+              <a:gd name="adj" fmla="val 8000"/>
+            </a:avLst>
           </a:prstGeom>
           <a:solidFill>
-            <a:srgbClr val="F59E0B"/>
+            <a:srgbClr val="22304D"/>
           </a:solidFill>
           <a:ln>
             <a:noFill/>
           </a:ln>
+          <a:effectLst/>
         </p:spPr>
         <p:style>
           <a:lnRef idx="1">
@@ -4384,14 +5205,14 @@
       </p:sp>
       <p:sp>
         <p:nvSpPr>
-          <p:cNvPr id="6" name="TextBox 5"/>
+          <p:cNvPr id="7" name="TextBox 6"/>
           <p:cNvSpPr txBox="1"/>
           <p:nvPr/>
         </p:nvSpPr>
         <p:spPr>
           <a:xfrm>
-            <a:off x="429768" y="804672"/>
-            <a:ext cx="3474720" cy="256032"/>
+            <a:off x="685800" y="1874519"/>
+            <a:ext cx="4846320" cy="411480"/>
           </a:xfrm>
           <a:prstGeom prst="rect">
             <a:avLst/>
@@ -4399,33 +5220,34 @@
           <a:noFill/>
         </p:spPr>
         <p:txBody>
-          <a:bodyPr wrap="square">
+          <a:bodyPr wrap="square" lIns="0" rIns="0" tIns="0" bIns="0" anchor="t">
             <a:spAutoFit/>
           </a:bodyPr>
           <a:lstStyle/>
           <a:p>
             <a:pPr algn="l"/>
             <a:r>
-              <a:rPr sz="1100" b="1" i="0">
-                <a:solidFill>
-                  <a:srgbClr val="FFFFFF"/>
-                </a:solidFill>
+              <a:rPr sz="1600" b="1">
+                <a:solidFill>
+                  <a:srgbClr val="38BDF8"/>
+                </a:solidFill>
+                <a:latin typeface="Calibri"/>
               </a:rPr>
-              <a:t>DIJKSTRA</a:t>
-            </a:r>
-          </a:p>
-        </p:txBody>
-      </p:sp>
-      <p:sp>
-        <p:nvSpPr>
-          <p:cNvPr id="7" name="TextBox 6"/>
+              <a:t>Benchmark Setup</a:t>
+            </a:r>
+          </a:p>
+        </p:txBody>
+      </p:sp>
+      <p:sp>
+        <p:nvSpPr>
+          <p:cNvPr id="8" name="TextBox 7"/>
           <p:cNvSpPr txBox="1"/>
           <p:nvPr/>
         </p:nvSpPr>
         <p:spPr>
           <a:xfrm>
-            <a:off x="457200" y="1097280"/>
-            <a:ext cx="3474720" cy="365760"/>
+            <a:off x="685800" y="2468880"/>
+            <a:ext cx="1828800" cy="320040"/>
           </a:xfrm>
           <a:prstGeom prst="rect">
             <a:avLst/>
@@ -4433,33 +5255,34 @@
           <a:noFill/>
         </p:spPr>
         <p:txBody>
-          <a:bodyPr wrap="square">
+          <a:bodyPr wrap="square" lIns="0" rIns="0" tIns="0" bIns="0" anchor="t">
             <a:spAutoFit/>
           </a:bodyPr>
           <a:lstStyle/>
           <a:p>
             <a:pPr algn="l"/>
             <a:r>
-              <a:rPr sz="1300" b="1" i="0">
-                <a:solidFill>
-                  <a:srgbClr val="F59E0B"/>
-                </a:solidFill>
+              <a:rPr sz="900" b="1">
+                <a:solidFill>
+                  <a:srgbClr val="94A3B8"/>
+                </a:solidFill>
+                <a:latin typeface="Calibri"/>
               </a:rPr>
-              <a:t>Baseline — No Heuristic</a:t>
-            </a:r>
-          </a:p>
-        </p:txBody>
-      </p:sp>
-      <p:sp>
-        <p:nvSpPr>
-          <p:cNvPr id="8" name="TextBox 7"/>
+              <a:t>GRID</a:t>
+            </a:r>
+          </a:p>
+        </p:txBody>
+      </p:sp>
+      <p:sp>
+        <p:nvSpPr>
+          <p:cNvPr id="9" name="TextBox 8"/>
           <p:cNvSpPr txBox="1"/>
           <p:nvPr/>
         </p:nvSpPr>
         <p:spPr>
           <a:xfrm>
-            <a:off x="457200" y="1508760"/>
-            <a:ext cx="3474720" cy="4389120"/>
+            <a:off x="685800" y="2724912"/>
+            <a:ext cx="4846320" cy="457200"/>
           </a:xfrm>
           <a:prstGeom prst="rect">
             <a:avLst/>
@@ -4467,88 +5290,397 @@
           <a:noFill/>
         </p:spPr>
         <p:txBody>
-          <a:bodyPr wrap="square">
+          <a:bodyPr wrap="square" lIns="0" rIns="0" tIns="0" bIns="0" anchor="t">
             <a:spAutoFit/>
           </a:bodyPr>
           <a:lstStyle/>
           <a:p>
             <a:pPr algn="l"/>
             <a:r>
-              <a:rPr sz="1100" b="0" i="0">
-                <a:solidFill>
-                  <a:srgbClr val="CBD5E1"/>
-                </a:solidFill>
+              <a:rPr sz="1200" b="1">
+                <a:solidFill>
+                  <a:srgbClr val="EEF2F7"/>
+                </a:solidFill>
+                <a:latin typeface="Calibri"/>
               </a:rPr>
-              <a:t>• Expands cells in order of distance from the start (cost d before d+1)</a:t>
-            </a:r>
-          </a:p>
-          <a:p>
-            <a:pPr algn="l">
-              <a:spcBef>
-                <a:spcPts val="500"/>
-              </a:spcBef>
-            </a:pPr>
-            <a:r>
-              <a:rPr sz="1100" b="0" i="0">
-                <a:solidFill>
-                  <a:srgbClr val="CBD5E1"/>
-                </a:solidFill>
+              <a:t>50 x 50 random obstacles</a:t>
+            </a:r>
+          </a:p>
+        </p:txBody>
+      </p:sp>
+      <p:sp>
+        <p:nvSpPr>
+          <p:cNvPr id="10" name="TextBox 9"/>
+          <p:cNvSpPr txBox="1"/>
+          <p:nvPr/>
+        </p:nvSpPr>
+        <p:spPr>
+          <a:xfrm>
+            <a:off x="685800" y="3108960"/>
+            <a:ext cx="1828800" cy="320040"/>
+          </a:xfrm>
+          <a:prstGeom prst="rect">
+            <a:avLst/>
+          </a:prstGeom>
+          <a:noFill/>
+        </p:spPr>
+        <p:txBody>
+          <a:bodyPr wrap="square" lIns="0" rIns="0" tIns="0" bIns="0" anchor="t">
+            <a:spAutoFit/>
+          </a:bodyPr>
+          <a:lstStyle/>
+          <a:p>
+            <a:pPr algn="l"/>
+            <a:r>
+              <a:rPr sz="900" b="1">
+                <a:solidFill>
+                  <a:srgbClr val="94A3B8"/>
+                </a:solidFill>
+                <a:latin typeface="Calibri"/>
               </a:rPr>
-              <a:t>• No knowledge of where the goal is → searches equally in all directions</a:t>
-            </a:r>
-          </a:p>
-          <a:p>
-            <a:pPr algn="l">
-              <a:spcBef>
-                <a:spcPts val="500"/>
-              </a:spcBef>
-            </a:pPr>
-            <a:r>
-              <a:rPr sz="1100" b="0" i="0">
-                <a:solidFill>
-                  <a:srgbClr val="CBD5E1"/>
-                </a:solidFill>
+              <a:t>DENSITIES</a:t>
+            </a:r>
+          </a:p>
+        </p:txBody>
+      </p:sp>
+      <p:sp>
+        <p:nvSpPr>
+          <p:cNvPr id="11" name="TextBox 10"/>
+          <p:cNvSpPr txBox="1"/>
+          <p:nvPr/>
+        </p:nvSpPr>
+        <p:spPr>
+          <a:xfrm>
+            <a:off x="685800" y="3364992"/>
+            <a:ext cx="4846320" cy="457200"/>
+          </a:xfrm>
+          <a:prstGeom prst="rect">
+            <a:avLst/>
+          </a:prstGeom>
+          <a:noFill/>
+        </p:spPr>
+        <p:txBody>
+          <a:bodyPr wrap="square" lIns="0" rIns="0" tIns="0" bIns="0" anchor="t">
+            <a:spAutoFit/>
+          </a:bodyPr>
+          <a:lstStyle/>
+          <a:p>
+            <a:pPr algn="l"/>
+            <a:r>
+              <a:rPr sz="1200" b="1">
+                <a:solidFill>
+                  <a:srgbClr val="EEF2F7"/>
+                </a:solidFill>
+                <a:latin typeface="Calibri"/>
               </a:rPr>
-              <a:t>• Must map the entire reachable area before confirming the shortest path</a:t>
-            </a:r>
-          </a:p>
-          <a:p>
-            <a:pPr algn="l">
-              <a:spcBef>
-                <a:spcPts val="500"/>
-              </a:spcBef>
-            </a:pPr>
-            <a:r>
-              <a:rPr sz="1100" b="0" i="0">
-                <a:solidFill>
-                  <a:srgbClr val="CBD5E1"/>
-                </a:solidFill>
+              <a:t>15 percent, 28 percent, 40 percent</a:t>
+            </a:r>
+          </a:p>
+        </p:txBody>
+      </p:sp>
+      <p:sp>
+        <p:nvSpPr>
+          <p:cNvPr id="12" name="TextBox 11"/>
+          <p:cNvSpPr txBox="1"/>
+          <p:nvPr/>
+        </p:nvSpPr>
+        <p:spPr>
+          <a:xfrm>
+            <a:off x="685800" y="3749040"/>
+            <a:ext cx="1828800" cy="320040"/>
+          </a:xfrm>
+          <a:prstGeom prst="rect">
+            <a:avLst/>
+          </a:prstGeom>
+          <a:noFill/>
+        </p:spPr>
+        <p:txBody>
+          <a:bodyPr wrap="square" lIns="0" rIns="0" tIns="0" bIns="0" anchor="t">
+            <a:spAutoFit/>
+          </a:bodyPr>
+          <a:lstStyle/>
+          <a:p>
+            <a:pPr algn="l"/>
+            <a:r>
+              <a:rPr sz="900" b="1">
+                <a:solidFill>
+                  <a:srgbClr val="94A3B8"/>
+                </a:solidFill>
+                <a:latin typeface="Calibri"/>
               </a:rPr>
-              <a:t>• Always optimal, but wastes significant effort</a:t>
-            </a:r>
-          </a:p>
-        </p:txBody>
-      </p:sp>
-      <p:sp>
-        <p:nvSpPr>
-          <p:cNvPr id="9" name="Rectangle 8"/>
+              <a:t>TRIALS PER DENSITY</a:t>
+            </a:r>
+          </a:p>
+        </p:txBody>
+      </p:sp>
+      <p:sp>
+        <p:nvSpPr>
+          <p:cNvPr id="13" name="TextBox 12"/>
+          <p:cNvSpPr txBox="1"/>
+          <p:nvPr/>
+        </p:nvSpPr>
+        <p:spPr>
+          <a:xfrm>
+            <a:off x="685800" y="4005072"/>
+            <a:ext cx="4846320" cy="457200"/>
+          </a:xfrm>
+          <a:prstGeom prst="rect">
+            <a:avLst/>
+          </a:prstGeom>
+          <a:noFill/>
+        </p:spPr>
+        <p:txBody>
+          <a:bodyPr wrap="square" lIns="0" rIns="0" tIns="0" bIns="0" anchor="t">
+            <a:spAutoFit/>
+          </a:bodyPr>
+          <a:lstStyle/>
+          <a:p>
+            <a:pPr algn="l"/>
+            <a:r>
+              <a:rPr sz="1200" b="1">
+                <a:solidFill>
+                  <a:srgbClr val="EEF2F7"/>
+                </a:solidFill>
+                <a:latin typeface="Calibri"/>
+              </a:rPr>
+              <a:t>24 accepted runs</a:t>
+            </a:r>
+          </a:p>
+        </p:txBody>
+      </p:sp>
+      <p:sp>
+        <p:nvSpPr>
+          <p:cNvPr id="14" name="TextBox 13"/>
+          <p:cNvSpPr txBox="1"/>
+          <p:nvPr/>
+        </p:nvSpPr>
+        <p:spPr>
+          <a:xfrm>
+            <a:off x="685800" y="4389120"/>
+            <a:ext cx="1828800" cy="320040"/>
+          </a:xfrm>
+          <a:prstGeom prst="rect">
+            <a:avLst/>
+          </a:prstGeom>
+          <a:noFill/>
+        </p:spPr>
+        <p:txBody>
+          <a:bodyPr wrap="square" lIns="0" rIns="0" tIns="0" bIns="0" anchor="t">
+            <a:spAutoFit/>
+          </a:bodyPr>
+          <a:lstStyle/>
+          <a:p>
+            <a:pPr algn="l"/>
+            <a:r>
+              <a:rPr sz="900" b="1">
+                <a:solidFill>
+                  <a:srgbClr val="94A3B8"/>
+                </a:solidFill>
+                <a:latin typeface="Calibri"/>
+              </a:rPr>
+              <a:t>SEED</a:t>
+            </a:r>
+          </a:p>
+        </p:txBody>
+      </p:sp>
+      <p:sp>
+        <p:nvSpPr>
+          <p:cNvPr id="15" name="TextBox 14"/>
+          <p:cNvSpPr txBox="1"/>
+          <p:nvPr/>
+        </p:nvSpPr>
+        <p:spPr>
+          <a:xfrm>
+            <a:off x="685800" y="4645152"/>
+            <a:ext cx="4846320" cy="457200"/>
+          </a:xfrm>
+          <a:prstGeom prst="rect">
+            <a:avLst/>
+          </a:prstGeom>
+          <a:noFill/>
+        </p:spPr>
+        <p:txBody>
+          <a:bodyPr wrap="square" lIns="0" rIns="0" tIns="0" bIns="0" anchor="t">
+            <a:spAutoFit/>
+          </a:bodyPr>
+          <a:lstStyle/>
+          <a:p>
+            <a:pPr algn="l"/>
+            <a:r>
+              <a:rPr sz="1200" b="1">
+                <a:solidFill>
+                  <a:srgbClr val="EEF2F7"/>
+                </a:solidFill>
+                <a:latin typeface="Calibri"/>
+              </a:rPr>
+              <a:t>42 (deterministic)</a:t>
+            </a:r>
+          </a:p>
+        </p:txBody>
+      </p:sp>
+      <p:sp>
+        <p:nvSpPr>
+          <p:cNvPr id="16" name="TextBox 15"/>
+          <p:cNvSpPr txBox="1"/>
+          <p:nvPr/>
+        </p:nvSpPr>
+        <p:spPr>
+          <a:xfrm>
+            <a:off x="685800" y="5029200"/>
+            <a:ext cx="1828800" cy="320040"/>
+          </a:xfrm>
+          <a:prstGeom prst="rect">
+            <a:avLst/>
+          </a:prstGeom>
+          <a:noFill/>
+        </p:spPr>
+        <p:txBody>
+          <a:bodyPr wrap="square" lIns="0" rIns="0" tIns="0" bIns="0" anchor="t">
+            <a:spAutoFit/>
+          </a:bodyPr>
+          <a:lstStyle/>
+          <a:p>
+            <a:pPr algn="l"/>
+            <a:r>
+              <a:rPr sz="900" b="1">
+                <a:solidFill>
+                  <a:srgbClr val="94A3B8"/>
+                </a:solidFill>
+                <a:latin typeface="Calibri"/>
+              </a:rPr>
+              <a:t>START AND GOAL</a:t>
+            </a:r>
+          </a:p>
+        </p:txBody>
+      </p:sp>
+      <p:sp>
+        <p:nvSpPr>
+          <p:cNvPr id="17" name="TextBox 16"/>
+          <p:cNvSpPr txBox="1"/>
+          <p:nvPr/>
+        </p:nvSpPr>
+        <p:spPr>
+          <a:xfrm>
+            <a:off x="685800" y="5285232"/>
+            <a:ext cx="4846320" cy="457200"/>
+          </a:xfrm>
+          <a:prstGeom prst="rect">
+            <a:avLst/>
+          </a:prstGeom>
+          <a:noFill/>
+        </p:spPr>
+        <p:txBody>
+          <a:bodyPr wrap="square" lIns="0" rIns="0" tIns="0" bIns="0" anchor="t">
+            <a:spAutoFit/>
+          </a:bodyPr>
+          <a:lstStyle/>
+          <a:p>
+            <a:pPr algn="l"/>
+            <a:r>
+              <a:rPr sz="1200" b="1">
+                <a:solidFill>
+                  <a:srgbClr val="EEF2F7"/>
+                </a:solidFill>
+                <a:latin typeface="Calibri"/>
+              </a:rPr>
+              <a:t>Placed far apart, verified reachable</a:t>
+            </a:r>
+          </a:p>
+        </p:txBody>
+      </p:sp>
+      <p:sp>
+        <p:nvSpPr>
+          <p:cNvPr id="18" name="TextBox 17"/>
+          <p:cNvSpPr txBox="1"/>
+          <p:nvPr/>
+        </p:nvSpPr>
+        <p:spPr>
+          <a:xfrm>
+            <a:off x="685800" y="5669280"/>
+            <a:ext cx="1828800" cy="320040"/>
+          </a:xfrm>
+          <a:prstGeom prst="rect">
+            <a:avLst/>
+          </a:prstGeom>
+          <a:noFill/>
+        </p:spPr>
+        <p:txBody>
+          <a:bodyPr wrap="square" lIns="0" rIns="0" tIns="0" bIns="0" anchor="t">
+            <a:spAutoFit/>
+          </a:bodyPr>
+          <a:lstStyle/>
+          <a:p>
+            <a:pPr algn="l"/>
+            <a:r>
+              <a:rPr sz="900" b="1">
+                <a:solidFill>
+                  <a:srgbClr val="94A3B8"/>
+                </a:solidFill>
+                <a:latin typeface="Calibri"/>
+              </a:rPr>
+              <a:t>ACCEPTANCE RULE</a:t>
+            </a:r>
+          </a:p>
+        </p:txBody>
+      </p:sp>
+      <p:sp>
+        <p:nvSpPr>
+          <p:cNvPr id="19" name="TextBox 18"/>
+          <p:cNvSpPr txBox="1"/>
+          <p:nvPr/>
+        </p:nvSpPr>
+        <p:spPr>
+          <a:xfrm>
+            <a:off x="685800" y="5925312"/>
+            <a:ext cx="4846320" cy="457200"/>
+          </a:xfrm>
+          <a:prstGeom prst="rect">
+            <a:avLst/>
+          </a:prstGeom>
+          <a:noFill/>
+        </p:spPr>
+        <p:txBody>
+          <a:bodyPr wrap="square" lIns="0" rIns="0" tIns="0" bIns="0" anchor="t">
+            <a:spAutoFit/>
+          </a:bodyPr>
+          <a:lstStyle/>
+          <a:p>
+            <a:pPr algn="l"/>
+            <a:r>
+              <a:rPr sz="1200" b="1">
+                <a:solidFill>
+                  <a:srgbClr val="EEF2F7"/>
+                </a:solidFill>
+                <a:latin typeface="Calibri"/>
+              </a:rPr>
+              <a:t>Trial counted only if all three algorithms succeed</a:t>
+            </a:r>
+          </a:p>
+        </p:txBody>
+      </p:sp>
+      <p:sp>
+        <p:nvSpPr>
+          <p:cNvPr id="20" name="Rounded Rectangle 19"/>
           <p:cNvSpPr/>
           <p:nvPr/>
         </p:nvSpPr>
         <p:spPr>
           <a:xfrm>
-            <a:off x="4251959" y="777240"/>
-            <a:ext cx="3749039" cy="5303520"/>
-          </a:xfrm>
-          <a:prstGeom prst="rect">
-            <a:avLst/>
+            <a:off x="6126480" y="1737360"/>
+            <a:ext cx="5623560" cy="4572000"/>
+          </a:xfrm>
+          <a:prstGeom prst="roundRect">
+            <a:avLst>
+              <a:gd name="adj" fmla="val 8000"/>
+            </a:avLst>
           </a:prstGeom>
           <a:solidFill>
-            <a:srgbClr val="1E293B"/>
+            <a:srgbClr val="22304D"/>
           </a:solidFill>
           <a:ln>
             <a:noFill/>
           </a:ln>
+          <a:effectLst/>
         </p:spPr>
         <p:style>
           <a:lnRef idx="1">
@@ -4574,24 +5706,97 @@
       </p:sp>
       <p:sp>
         <p:nvSpPr>
-          <p:cNvPr id="10" name="Rectangle 9"/>
+          <p:cNvPr id="21" name="TextBox 20"/>
+          <p:cNvSpPr txBox="1"/>
+          <p:nvPr/>
+        </p:nvSpPr>
+        <p:spPr>
+          <a:xfrm>
+            <a:off x="6355080" y="1874519"/>
+            <a:ext cx="5166360" cy="411480"/>
+          </a:xfrm>
+          <a:prstGeom prst="rect">
+            <a:avLst/>
+          </a:prstGeom>
+          <a:noFill/>
+        </p:spPr>
+        <p:txBody>
+          <a:bodyPr wrap="square" lIns="0" rIns="0" tIns="0" bIns="0" anchor="t">
+            <a:spAutoFit/>
+          </a:bodyPr>
+          <a:lstStyle/>
+          <a:p>
+            <a:pPr algn="l"/>
+            <a:r>
+              <a:rPr sz="1600" b="1">
+                <a:solidFill>
+                  <a:srgbClr val="38BDF8"/>
+                </a:solidFill>
+                <a:latin typeface="Calibri"/>
+              </a:rPr>
+              <a:t>Shared Search Loop</a:t>
+            </a:r>
+          </a:p>
+        </p:txBody>
+      </p:sp>
+      <p:sp>
+        <p:nvSpPr>
+          <p:cNvPr id="22" name="TextBox 21"/>
+          <p:cNvSpPr txBox="1"/>
+          <p:nvPr/>
+        </p:nvSpPr>
+        <p:spPr>
+          <a:xfrm>
+            <a:off x="6355080" y="2240280"/>
+            <a:ext cx="5166360" cy="365760"/>
+          </a:xfrm>
+          <a:prstGeom prst="rect">
+            <a:avLst/>
+          </a:prstGeom>
+          <a:noFill/>
+        </p:spPr>
+        <p:txBody>
+          <a:bodyPr wrap="square" lIns="0" rIns="0" tIns="0" bIns="0" anchor="t">
+            <a:spAutoFit/>
+          </a:bodyPr>
+          <a:lstStyle/>
+          <a:p>
+            <a:pPr algn="l"/>
+            <a:r>
+              <a:rPr sz="1000" b="0">
+                <a:solidFill>
+                  <a:srgbClr val="94A3B8"/>
+                </a:solidFill>
+                <a:latin typeface="Calibri"/>
+              </a:rPr>
+              <a:t>One A* engine. Heuristic and successor function plug in per algorithm.</a:t>
+            </a:r>
+          </a:p>
+        </p:txBody>
+      </p:sp>
+      <p:sp>
+        <p:nvSpPr>
+          <p:cNvPr id="23" name="Rounded Rectangle 22"/>
           <p:cNvSpPr/>
           <p:nvPr/>
         </p:nvSpPr>
         <p:spPr>
           <a:xfrm>
-            <a:off x="4251959" y="777240"/>
-            <a:ext cx="3749039" cy="256032"/>
-          </a:xfrm>
-          <a:prstGeom prst="rect">
-            <a:avLst/>
+            <a:off x="7818120" y="2834640"/>
+            <a:ext cx="2194560" cy="777240"/>
+          </a:xfrm>
+          <a:prstGeom prst="roundRect">
+            <a:avLst>
+              <a:gd name="adj" fmla="val 8000"/>
+            </a:avLst>
           </a:prstGeom>
           <a:solidFill>
-            <a:srgbClr val="10B981"/>
+            <a:srgbClr val="38BDF8"/>
           </a:solidFill>
           <a:ln>
             <a:noFill/>
           </a:ln>
+          <a:effectLst/>
         </p:spPr>
         <p:style>
           <a:lnRef idx="1">
@@ -4617,14 +5822,14 @@
       </p:sp>
       <p:sp>
         <p:nvSpPr>
-          <p:cNvPr id="11" name="TextBox 10"/>
+          <p:cNvPr id="24" name="TextBox 23"/>
           <p:cNvSpPr txBox="1"/>
           <p:nvPr/>
         </p:nvSpPr>
         <p:spPr>
           <a:xfrm>
-            <a:off x="4361688" y="804672"/>
-            <a:ext cx="3474720" cy="256032"/>
+            <a:off x="7818120" y="2834640"/>
+            <a:ext cx="2194560" cy="777240"/>
           </a:xfrm>
           <a:prstGeom prst="rect">
             <a:avLst/>
@@ -4632,33 +5837,34 @@
           <a:noFill/>
         </p:spPr>
         <p:txBody>
-          <a:bodyPr wrap="square">
+          <a:bodyPr wrap="square" lIns="0" rIns="0" tIns="0" bIns="0" anchor="ctr">
             <a:spAutoFit/>
           </a:bodyPr>
           <a:lstStyle/>
           <a:p>
-            <a:pPr algn="l"/>
-            <a:r>
-              <a:rPr sz="1100" b="1" i="0">
-                <a:solidFill>
-                  <a:srgbClr val="FFFFFF"/>
-                </a:solidFill>
+            <a:pPr algn="ctr"/>
+            <a:r>
+              <a:rPr sz="1600" b="1">
+                <a:solidFill>
+                  <a:srgbClr val="0F172A"/>
+                </a:solidFill>
+                <a:latin typeface="Calibri"/>
               </a:rPr>
-              <a:t>A*</a:t>
-            </a:r>
-          </a:p>
-        </p:txBody>
-      </p:sp>
-      <p:sp>
-        <p:nvSpPr>
-          <p:cNvPr id="12" name="TextBox 11"/>
+              <a:t>astar_jps( )</a:t>
+            </a:r>
+          </a:p>
+        </p:txBody>
+      </p:sp>
+      <p:sp>
+        <p:nvSpPr>
+          <p:cNvPr id="25" name="TextBox 24"/>
           <p:cNvSpPr txBox="1"/>
           <p:nvPr/>
         </p:nvSpPr>
         <p:spPr>
           <a:xfrm>
-            <a:off x="4389120" y="1097280"/>
-            <a:ext cx="3474720" cy="365760"/>
+            <a:off x="7818120" y="3657600"/>
+            <a:ext cx="2194560" cy="274320"/>
           </a:xfrm>
           <a:prstGeom prst="rect">
             <a:avLst/>
@@ -4666,122 +5872,49 @@
           <a:noFill/>
         </p:spPr>
         <p:txBody>
-          <a:bodyPr wrap="square">
+          <a:bodyPr wrap="square" lIns="0" rIns="0" tIns="0" bIns="0" anchor="t">
             <a:spAutoFit/>
           </a:bodyPr>
           <a:lstStyle/>
           <a:p>
-            <a:pPr algn="l"/>
-            <a:r>
-              <a:rPr sz="1300" b="1" i="0">
-                <a:solidFill>
-                  <a:srgbClr val="10B981"/>
-                </a:solidFill>
+            <a:pPr algn="ctr"/>
+            <a:r>
+              <a:rPr sz="900" b="0">
+                <a:solidFill>
+                  <a:srgbClr val="94A3B8"/>
+                </a:solidFill>
+                <a:latin typeface="Calibri"/>
               </a:rPr>
-              <a:t>Heuristic-Guided Search</a:t>
-            </a:r>
-          </a:p>
-        </p:txBody>
-      </p:sp>
-      <p:sp>
-        <p:nvSpPr>
-          <p:cNvPr id="13" name="TextBox 12"/>
-          <p:cNvSpPr txBox="1"/>
-          <p:nvPr/>
-        </p:nvSpPr>
-        <p:spPr>
-          <a:xfrm>
-            <a:off x="4389120" y="1508760"/>
-            <a:ext cx="3474720" cy="4389120"/>
-          </a:xfrm>
-          <a:prstGeom prst="rect">
-            <a:avLst/>
-          </a:prstGeom>
-          <a:noFill/>
-        </p:spPr>
-        <p:txBody>
-          <a:bodyPr wrap="square">
-            <a:spAutoFit/>
-          </a:bodyPr>
-          <a:lstStyle/>
-          <a:p>
-            <a:pPr algn="l"/>
-            <a:r>
-              <a:rPr sz="1100" b="0" i="0">
-                <a:solidFill>
-                  <a:srgbClr val="CBD5E1"/>
-                </a:solidFill>
-              </a:rPr>
-              <a:t>• At each step, picks the cell with lowest (current cost + Manhattan distance to goal)</a:t>
-            </a:r>
-          </a:p>
-          <a:p>
-            <a:pPr algn="l">
-              <a:spcBef>
-                <a:spcPts val="500"/>
-              </a:spcBef>
-            </a:pPr>
-            <a:r>
-              <a:rPr sz="1100" b="0" i="0">
-                <a:solidFill>
-                  <a:srgbClr val="CBD5E1"/>
-                </a:solidFill>
-              </a:rPr>
-              <a:t>• Manhattan distance is a valid lower bound on a 4-connected grid → still optimal</a:t>
-            </a:r>
-          </a:p>
-          <a:p>
-            <a:pPr algn="l">
-              <a:spcBef>
-                <a:spcPts val="500"/>
-              </a:spcBef>
-            </a:pPr>
-            <a:r>
-              <a:rPr sz="1100" b="0" i="0">
-                <a:solidFill>
-                  <a:srgbClr val="CBD5E1"/>
-                </a:solidFill>
-              </a:rPr>
-              <a:t>• Focuses the search toward the goal, skipping cells in the wrong direction</a:t>
-            </a:r>
-          </a:p>
-          <a:p>
-            <a:pPr algn="l">
-              <a:spcBef>
-                <a:spcPts val="500"/>
-              </a:spcBef>
-            </a:pPr>
-            <a:r>
-              <a:rPr sz="1100" b="0" i="0">
-                <a:solidFill>
-                  <a:srgbClr val="CBD5E1"/>
-                </a:solidFill>
-              </a:rPr>
-              <a:t>• Roughly half the expansions of Dijkstra on open maps</a:t>
-            </a:r>
-          </a:p>
-        </p:txBody>
-      </p:sp>
-      <p:sp>
-        <p:nvSpPr>
-          <p:cNvPr id="14" name="Rectangle 13"/>
+              <a:t>heap-based open list</a:t>
+            </a:r>
+          </a:p>
+        </p:txBody>
+      </p:sp>
+      <p:sp>
+        <p:nvSpPr>
+          <p:cNvPr id="26" name="Rounded Rectangle 25"/>
           <p:cNvSpPr/>
           <p:nvPr/>
         </p:nvSpPr>
         <p:spPr>
           <a:xfrm>
-            <a:off x="8183879" y="777240"/>
-            <a:ext cx="3749039" cy="5303520"/>
-          </a:xfrm>
-          <a:prstGeom prst="rect">
-            <a:avLst/>
+            <a:off x="6400800" y="4617720"/>
+            <a:ext cx="1691640" cy="1280160"/>
+          </a:xfrm>
+          <a:prstGeom prst="roundRect">
+            <a:avLst>
+              <a:gd name="adj" fmla="val 8000"/>
+            </a:avLst>
           </a:prstGeom>
           <a:solidFill>
-            <a:srgbClr val="1E293B"/>
+            <a:srgbClr val="1A253D"/>
           </a:solidFill>
-          <a:ln>
-            <a:noFill/>
+          <a:ln w="12700">
+            <a:solidFill>
+              <a:srgbClr val="E05C5C"/>
+            </a:solidFill>
           </a:ln>
+          <a:effectLst/>
         </p:spPr>
         <p:style>
           <a:lnRef idx="1">
@@ -4807,24 +5940,27 @@
       </p:sp>
       <p:sp>
         <p:nvSpPr>
-          <p:cNvPr id="15" name="Rectangle 14"/>
+          <p:cNvPr id="27" name="Rounded Rectangle 26"/>
           <p:cNvSpPr/>
           <p:nvPr/>
         </p:nvSpPr>
         <p:spPr>
           <a:xfrm>
-            <a:off x="8183879" y="777240"/>
-            <a:ext cx="3749039" cy="256032"/>
-          </a:xfrm>
-          <a:prstGeom prst="rect">
-            <a:avLst/>
+            <a:off x="6400800" y="4617720"/>
+            <a:ext cx="1691640" cy="320040"/>
+          </a:xfrm>
+          <a:prstGeom prst="roundRect">
+            <a:avLst>
+              <a:gd name="adj" fmla="val 8000"/>
+            </a:avLst>
           </a:prstGeom>
           <a:solidFill>
-            <a:srgbClr val="3B82F6"/>
+            <a:srgbClr val="E05C5C"/>
           </a:solidFill>
           <a:ln>
             <a:noFill/>
           </a:ln>
+          <a:effectLst/>
         </p:spPr>
         <p:style>
           <a:lnRef idx="1">
@@ -4850,14 +5986,14 @@
       </p:sp>
       <p:sp>
         <p:nvSpPr>
-          <p:cNvPr id="16" name="TextBox 15"/>
+          <p:cNvPr id="28" name="TextBox 27"/>
           <p:cNvSpPr txBox="1"/>
           <p:nvPr/>
         </p:nvSpPr>
         <p:spPr>
           <a:xfrm>
-            <a:off x="8293607" y="804672"/>
-            <a:ext cx="3474720" cy="256032"/>
+            <a:off x="6400800" y="4617720"/>
+            <a:ext cx="1691640" cy="320040"/>
           </a:xfrm>
           <a:prstGeom prst="rect">
             <a:avLst/>
@@ -4865,33 +6001,34 @@
           <a:noFill/>
         </p:spPr>
         <p:txBody>
-          <a:bodyPr wrap="square">
+          <a:bodyPr wrap="square" lIns="0" rIns="0" tIns="0" bIns="0" anchor="ctr">
             <a:spAutoFit/>
           </a:bodyPr>
           <a:lstStyle/>
           <a:p>
-            <a:pPr algn="l"/>
-            <a:r>
-              <a:rPr sz="1100" b="1" i="0">
-                <a:solidFill>
-                  <a:srgbClr val="FFFFFF"/>
-                </a:solidFill>
+            <a:pPr algn="ctr"/>
+            <a:r>
+              <a:rPr sz="1200" b="1">
+                <a:solidFill>
+                  <a:srgbClr val="EEF2F7"/>
+                </a:solidFill>
+                <a:latin typeface="Calibri"/>
               </a:rPr>
-              <a:t>JPS4</a:t>
-            </a:r>
-          </a:p>
-        </p:txBody>
-      </p:sp>
-      <p:sp>
-        <p:nvSpPr>
-          <p:cNvPr id="17" name="TextBox 16"/>
+              <a:t>Dijkstra</a:t>
+            </a:r>
+          </a:p>
+        </p:txBody>
+      </p:sp>
+      <p:sp>
+        <p:nvSpPr>
+          <p:cNvPr id="29" name="TextBox 28"/>
           <p:cNvSpPr txBox="1"/>
           <p:nvPr/>
         </p:nvSpPr>
         <p:spPr>
           <a:xfrm>
-            <a:off x="8321040" y="1097280"/>
-            <a:ext cx="3474720" cy="365760"/>
+            <a:off x="6492240" y="5001768"/>
+            <a:ext cx="1508760" cy="320040"/>
           </a:xfrm>
           <a:prstGeom prst="rect">
             <a:avLst/>
@@ -4899,33 +6036,34 @@
           <a:noFill/>
         </p:spPr>
         <p:txBody>
-          <a:bodyPr wrap="square">
+          <a:bodyPr wrap="square" lIns="0" rIns="0" tIns="0" bIns="0" anchor="t">
             <a:spAutoFit/>
           </a:bodyPr>
           <a:lstStyle/>
           <a:p>
-            <a:pPr algn="l"/>
-            <a:r>
-              <a:rPr sz="1300" b="1" i="0">
-                <a:solidFill>
-                  <a:srgbClr val="3B82F6"/>
-                </a:solidFill>
+            <a:pPr algn="ctr"/>
+            <a:r>
+              <a:rPr sz="1000" b="1">
+                <a:solidFill>
+                  <a:srgbClr val="EEF2F7"/>
+                </a:solidFill>
+                <a:latin typeface="Calibri"/>
               </a:rPr>
-              <a:t>Jump Point Search (4-Connected)</a:t>
-            </a:r>
-          </a:p>
-        </p:txBody>
-      </p:sp>
-      <p:sp>
-        <p:nvSpPr>
-          <p:cNvPr id="18" name="TextBox 17"/>
+              <a:t>h = 0</a:t>
+            </a:r>
+          </a:p>
+        </p:txBody>
+      </p:sp>
+      <p:sp>
+        <p:nvSpPr>
+          <p:cNvPr id="30" name="TextBox 29"/>
           <p:cNvSpPr txBox="1"/>
           <p:nvPr/>
         </p:nvSpPr>
         <p:spPr>
           <a:xfrm>
-            <a:off x="8321040" y="1508760"/>
-            <a:ext cx="3474720" cy="4389120"/>
+            <a:off x="6492240" y="5330952"/>
+            <a:ext cx="1508760" cy="502920"/>
           </a:xfrm>
           <a:prstGeom prst="rect">
             <a:avLst/>
@@ -4933,88 +6071,49 @@
           <a:noFill/>
         </p:spPr>
         <p:txBody>
-          <a:bodyPr wrap="square">
+          <a:bodyPr wrap="square" lIns="0" rIns="0" tIns="0" bIns="0" anchor="t">
             <a:spAutoFit/>
           </a:bodyPr>
           <a:lstStyle/>
           <a:p>
-            <a:pPr algn="l"/>
-            <a:r>
-              <a:rPr sz="1100" b="0" i="0">
-                <a:solidFill>
-                  <a:srgbClr val="CBD5E1"/>
-                </a:solidFill>
+            <a:pPr algn="ctr"/>
+            <a:r>
+              <a:rPr sz="900" b="0">
+                <a:solidFill>
+                  <a:srgbClr val="94A3B8"/>
+                </a:solidFill>
+                <a:latin typeface="Calibri"/>
               </a:rPr>
-              <a:t>• Asks at every cell: can I skip ahead without missing anything useful?</a:t>
-            </a:r>
-          </a:p>
-          <a:p>
-            <a:pPr algn="l">
-              <a:spcBef>
-                <a:spcPts val="500"/>
-              </a:spcBef>
-            </a:pPr>
-            <a:r>
-              <a:rPr sz="1100" b="0" i="0">
-                <a:solidFill>
-                  <a:srgbClr val="CBD5E1"/>
-                </a:solidFill>
-              </a:rPr>
-              <a:t>• Straight-line runs through open space: every cell has identical cost &amp; options → skip them</a:t>
-            </a:r>
-          </a:p>
-          <a:p>
-            <a:pPr algn="l">
-              <a:spcBef>
-                <a:spcPts val="500"/>
-              </a:spcBef>
-            </a:pPr>
-            <a:r>
-              <a:rPr sz="1100" b="0" i="0">
-                <a:solidFill>
-                  <a:srgbClr val="CBD5E1"/>
-                </a:solidFill>
-              </a:rPr>
-              <a:t>• Only stops at jump points: where an obstacle creates a forced routing choice</a:t>
-            </a:r>
-          </a:p>
-          <a:p>
-            <a:pPr algn="l">
-              <a:spcBef>
-                <a:spcPts val="500"/>
-              </a:spcBef>
-            </a:pPr>
-            <a:r>
-              <a:rPr sz="1100" b="0" i="0">
-                <a:solidFill>
-                  <a:srgbClr val="CBD5E1"/>
-                </a:solidFill>
-              </a:rPr>
-              <a:t>• Baum (2025) formalizes this for cardinal-only movement — different rules than 8-connected</a:t>
-            </a:r>
-          </a:p>
-        </p:txBody>
-      </p:sp>
-      <p:sp>
-        <p:nvSpPr>
-          <p:cNvPr id="19" name="Rectangle 18"/>
+              <a:t>4-neighbour successors</a:t>
+            </a:r>
+          </a:p>
+        </p:txBody>
+      </p:sp>
+      <p:sp>
+        <p:nvSpPr>
+          <p:cNvPr id="31" name="Rounded Rectangle 30"/>
           <p:cNvSpPr/>
           <p:nvPr/>
         </p:nvSpPr>
         <p:spPr>
           <a:xfrm>
-            <a:off x="320040" y="6263640"/>
-            <a:ext cx="11548872" cy="411480"/>
-          </a:xfrm>
-          <a:prstGeom prst="rect">
-            <a:avLst/>
+            <a:off x="8092440" y="4617720"/>
+            <a:ext cx="1691640" cy="1280160"/>
+          </a:xfrm>
+          <a:prstGeom prst="roundRect">
+            <a:avLst>
+              <a:gd name="adj" fmla="val 8000"/>
+            </a:avLst>
           </a:prstGeom>
           <a:solidFill>
-            <a:srgbClr val="0A0F1E"/>
+            <a:srgbClr val="1A253D"/>
           </a:solidFill>
-          <a:ln>
-            <a:noFill/>
+          <a:ln w="12700">
+            <a:solidFill>
+              <a:srgbClr val="4D94E0"/>
+            </a:solidFill>
           </a:ln>
+          <a:effectLst/>
         </p:spPr>
         <p:style>
           <a:lnRef idx="1">
@@ -5040,14 +6139,60 @@
       </p:sp>
       <p:sp>
         <p:nvSpPr>
-          <p:cNvPr id="20" name="TextBox 19"/>
+          <p:cNvPr id="32" name="Rounded Rectangle 31"/>
+          <p:cNvSpPr/>
+          <p:nvPr/>
+        </p:nvSpPr>
+        <p:spPr>
+          <a:xfrm>
+            <a:off x="8092440" y="4617720"/>
+            <a:ext cx="1691640" cy="320040"/>
+          </a:xfrm>
+          <a:prstGeom prst="roundRect">
+            <a:avLst>
+              <a:gd name="adj" fmla="val 8000"/>
+            </a:avLst>
+          </a:prstGeom>
+          <a:solidFill>
+            <a:srgbClr val="4D94E0"/>
+          </a:solidFill>
+          <a:ln>
+            <a:noFill/>
+          </a:ln>
+          <a:effectLst/>
+        </p:spPr>
+        <p:style>
+          <a:lnRef idx="1">
+            <a:schemeClr val="accent1"/>
+          </a:lnRef>
+          <a:fillRef idx="3">
+            <a:schemeClr val="accent1"/>
+          </a:fillRef>
+          <a:effectRef idx="2">
+            <a:schemeClr val="accent1"/>
+          </a:effectRef>
+          <a:fontRef idx="minor">
+            <a:schemeClr val="lt1"/>
+          </a:fontRef>
+        </p:style>
+        <p:txBody>
+          <a:bodyPr rtlCol="0" anchor="ctr"/>
+          <a:lstStyle/>
+          <a:p>
+            <a:pPr algn="ctr"/>
+          </a:p>
+        </p:txBody>
+      </p:sp>
+      <p:sp>
+        <p:nvSpPr>
+          <p:cNvPr id="33" name="TextBox 32"/>
           <p:cNvSpPr txBox="1"/>
           <p:nvPr/>
         </p:nvSpPr>
         <p:spPr>
           <a:xfrm>
-            <a:off x="365760" y="6291072"/>
-            <a:ext cx="11430000" cy="365760"/>
+            <a:off x="8092440" y="4617720"/>
+            <a:ext cx="1691640" cy="320040"/>
           </a:xfrm>
           <a:prstGeom prst="rect">
             <a:avLst/>
@@ -5055,33 +6200,34 @@
           <a:noFill/>
         </p:spPr>
         <p:txBody>
-          <a:bodyPr wrap="square">
+          <a:bodyPr wrap="square" lIns="0" rIns="0" tIns="0" bIns="0" anchor="ctr">
             <a:spAutoFit/>
           </a:bodyPr>
           <a:lstStyle/>
           <a:p>
             <a:pPr algn="ctr"/>
             <a:r>
-              <a:rPr sz="1100" b="0" i="1">
-                <a:solidFill>
-                  <a:srgbClr val="10B981"/>
-                </a:solidFill>
+              <a:rPr sz="1200" b="1">
+                <a:solidFill>
+                  <a:srgbClr val="EEF2F7"/>
+                </a:solidFill>
+                <a:latin typeface="Calibri"/>
               </a:rPr>
-              <a:t>⚖  Fair comparison: all 3 algorithms share the same search loop. Only the heuristic and neighbour-finding function differ. Any result difference is purely algorithmic.</a:t>
-            </a:r>
-          </a:p>
-        </p:txBody>
-      </p:sp>
-      <p:sp>
-        <p:nvSpPr>
-          <p:cNvPr id="21" name="TextBox 20"/>
+              <a:t>A*</a:t>
+            </a:r>
+          </a:p>
+        </p:txBody>
+      </p:sp>
+      <p:sp>
+        <p:nvSpPr>
+          <p:cNvPr id="34" name="TextBox 33"/>
           <p:cNvSpPr txBox="1"/>
           <p:nvPr/>
         </p:nvSpPr>
         <p:spPr>
           <a:xfrm>
-            <a:off x="11430000" y="6492240"/>
-            <a:ext cx="731520" cy="274320"/>
+            <a:off x="8183879" y="5001768"/>
+            <a:ext cx="1508760" cy="320040"/>
           </a:xfrm>
           <a:prstGeom prst="rect">
             <a:avLst/>
@@ -5089,19 +6235,359 @@
           <a:noFill/>
         </p:spPr>
         <p:txBody>
-          <a:bodyPr wrap="square">
+          <a:bodyPr wrap="square" lIns="0" rIns="0" tIns="0" bIns="0" anchor="t">
             <a:spAutoFit/>
           </a:bodyPr>
           <a:lstStyle/>
           <a:p>
+            <a:pPr algn="ctr"/>
+            <a:r>
+              <a:rPr sz="1000" b="1">
+                <a:solidFill>
+                  <a:srgbClr val="EEF2F7"/>
+                </a:solidFill>
+                <a:latin typeface="Calibri"/>
+              </a:rPr>
+              <a:t>h = Manhattan</a:t>
+            </a:r>
+          </a:p>
+        </p:txBody>
+      </p:sp>
+      <p:sp>
+        <p:nvSpPr>
+          <p:cNvPr id="35" name="TextBox 34"/>
+          <p:cNvSpPr txBox="1"/>
+          <p:nvPr/>
+        </p:nvSpPr>
+        <p:spPr>
+          <a:xfrm>
+            <a:off x="8183879" y="5330952"/>
+            <a:ext cx="1508760" cy="502920"/>
+          </a:xfrm>
+          <a:prstGeom prst="rect">
+            <a:avLst/>
+          </a:prstGeom>
+          <a:noFill/>
+        </p:spPr>
+        <p:txBody>
+          <a:bodyPr wrap="square" lIns="0" rIns="0" tIns="0" bIns="0" anchor="t">
+            <a:spAutoFit/>
+          </a:bodyPr>
+          <a:lstStyle/>
+          <a:p>
+            <a:pPr algn="ctr"/>
+            <a:r>
+              <a:rPr sz="900" b="0">
+                <a:solidFill>
+                  <a:srgbClr val="94A3B8"/>
+                </a:solidFill>
+                <a:latin typeface="Calibri"/>
+              </a:rPr>
+              <a:t>4-neighbour successors</a:t>
+            </a:r>
+          </a:p>
+        </p:txBody>
+      </p:sp>
+      <p:sp>
+        <p:nvSpPr>
+          <p:cNvPr id="36" name="Rounded Rectangle 35"/>
+          <p:cNvSpPr/>
+          <p:nvPr/>
+        </p:nvSpPr>
+        <p:spPr>
+          <a:xfrm>
+            <a:off x="9784080" y="4617720"/>
+            <a:ext cx="1691640" cy="1280160"/>
+          </a:xfrm>
+          <a:prstGeom prst="roundRect">
+            <a:avLst>
+              <a:gd name="adj" fmla="val 8000"/>
+            </a:avLst>
+          </a:prstGeom>
+          <a:solidFill>
+            <a:srgbClr val="1A253D"/>
+          </a:solidFill>
+          <a:ln w="12700">
+            <a:solidFill>
+              <a:srgbClr val="2CA02C"/>
+            </a:solidFill>
+          </a:ln>
+          <a:effectLst/>
+        </p:spPr>
+        <p:style>
+          <a:lnRef idx="1">
+            <a:schemeClr val="accent1"/>
+          </a:lnRef>
+          <a:fillRef idx="3">
+            <a:schemeClr val="accent1"/>
+          </a:fillRef>
+          <a:effectRef idx="2">
+            <a:schemeClr val="accent1"/>
+          </a:effectRef>
+          <a:fontRef idx="minor">
+            <a:schemeClr val="lt1"/>
+          </a:fontRef>
+        </p:style>
+        <p:txBody>
+          <a:bodyPr rtlCol="0" anchor="ctr"/>
+          <a:lstStyle/>
+          <a:p>
+            <a:pPr algn="ctr"/>
+          </a:p>
+        </p:txBody>
+      </p:sp>
+      <p:sp>
+        <p:nvSpPr>
+          <p:cNvPr id="37" name="Rounded Rectangle 36"/>
+          <p:cNvSpPr/>
+          <p:nvPr/>
+        </p:nvSpPr>
+        <p:spPr>
+          <a:xfrm>
+            <a:off x="9784080" y="4617720"/>
+            <a:ext cx="1691640" cy="320040"/>
+          </a:xfrm>
+          <a:prstGeom prst="roundRect">
+            <a:avLst>
+              <a:gd name="adj" fmla="val 8000"/>
+            </a:avLst>
+          </a:prstGeom>
+          <a:solidFill>
+            <a:srgbClr val="2CA02C"/>
+          </a:solidFill>
+          <a:ln>
+            <a:noFill/>
+          </a:ln>
+          <a:effectLst/>
+        </p:spPr>
+        <p:style>
+          <a:lnRef idx="1">
+            <a:schemeClr val="accent1"/>
+          </a:lnRef>
+          <a:fillRef idx="3">
+            <a:schemeClr val="accent1"/>
+          </a:fillRef>
+          <a:effectRef idx="2">
+            <a:schemeClr val="accent1"/>
+          </a:effectRef>
+          <a:fontRef idx="minor">
+            <a:schemeClr val="lt1"/>
+          </a:fontRef>
+        </p:style>
+        <p:txBody>
+          <a:bodyPr rtlCol="0" anchor="ctr"/>
+          <a:lstStyle/>
+          <a:p>
+            <a:pPr algn="ctr"/>
+          </a:p>
+        </p:txBody>
+      </p:sp>
+      <p:sp>
+        <p:nvSpPr>
+          <p:cNvPr id="38" name="TextBox 37"/>
+          <p:cNvSpPr txBox="1"/>
+          <p:nvPr/>
+        </p:nvSpPr>
+        <p:spPr>
+          <a:xfrm>
+            <a:off x="9784080" y="4617720"/>
+            <a:ext cx="1691640" cy="320040"/>
+          </a:xfrm>
+          <a:prstGeom prst="rect">
+            <a:avLst/>
+          </a:prstGeom>
+          <a:noFill/>
+        </p:spPr>
+        <p:txBody>
+          <a:bodyPr wrap="square" lIns="0" rIns="0" tIns="0" bIns="0" anchor="ctr">
+            <a:spAutoFit/>
+          </a:bodyPr>
+          <a:lstStyle/>
+          <a:p>
+            <a:pPr algn="ctr"/>
+            <a:r>
+              <a:rPr sz="1200" b="1">
+                <a:solidFill>
+                  <a:srgbClr val="EEF2F7"/>
+                </a:solidFill>
+                <a:latin typeface="Calibri"/>
+              </a:rPr>
+              <a:t>JPS4</a:t>
+            </a:r>
+          </a:p>
+        </p:txBody>
+      </p:sp>
+      <p:sp>
+        <p:nvSpPr>
+          <p:cNvPr id="39" name="TextBox 38"/>
+          <p:cNvSpPr txBox="1"/>
+          <p:nvPr/>
+        </p:nvSpPr>
+        <p:spPr>
+          <a:xfrm>
+            <a:off x="9875519" y="5001768"/>
+            <a:ext cx="1508760" cy="320040"/>
+          </a:xfrm>
+          <a:prstGeom prst="rect">
+            <a:avLst/>
+          </a:prstGeom>
+          <a:noFill/>
+        </p:spPr>
+        <p:txBody>
+          <a:bodyPr wrap="square" lIns="0" rIns="0" tIns="0" bIns="0" anchor="t">
+            <a:spAutoFit/>
+          </a:bodyPr>
+          <a:lstStyle/>
+          <a:p>
+            <a:pPr algn="ctr"/>
+            <a:r>
+              <a:rPr sz="1000" b="1">
+                <a:solidFill>
+                  <a:srgbClr val="EEF2F7"/>
+                </a:solidFill>
+                <a:latin typeface="Calibri"/>
+              </a:rPr>
+              <a:t>h = Manhattan</a:t>
+            </a:r>
+          </a:p>
+        </p:txBody>
+      </p:sp>
+      <p:sp>
+        <p:nvSpPr>
+          <p:cNvPr id="40" name="TextBox 39"/>
+          <p:cNvSpPr txBox="1"/>
+          <p:nvPr/>
+        </p:nvSpPr>
+        <p:spPr>
+          <a:xfrm>
+            <a:off x="9875519" y="5330952"/>
+            <a:ext cx="1508760" cy="502920"/>
+          </a:xfrm>
+          <a:prstGeom prst="rect">
+            <a:avLst/>
+          </a:prstGeom>
+          <a:noFill/>
+        </p:spPr>
+        <p:txBody>
+          <a:bodyPr wrap="square" lIns="0" rIns="0" tIns="0" bIns="0" anchor="t">
+            <a:spAutoFit/>
+          </a:bodyPr>
+          <a:lstStyle/>
+          <a:p>
+            <a:pPr algn="ctr"/>
+            <a:r>
+              <a:rPr sz="900" b="0">
+                <a:solidFill>
+                  <a:srgbClr val="94A3B8"/>
+                </a:solidFill>
+                <a:latin typeface="Calibri"/>
+              </a:rPr>
+              <a:t>jump-point successors</a:t>
+            </a:r>
+          </a:p>
+        </p:txBody>
+      </p:sp>
+      <p:sp>
+        <p:nvSpPr>
+          <p:cNvPr id="41" name="TextBox 40"/>
+          <p:cNvSpPr txBox="1"/>
+          <p:nvPr/>
+        </p:nvSpPr>
+        <p:spPr>
+          <a:xfrm>
+            <a:off x="6355080" y="5989320"/>
+            <a:ext cx="5166360" cy="320040"/>
+          </a:xfrm>
+          <a:prstGeom prst="rect">
+            <a:avLst/>
+          </a:prstGeom>
+          <a:noFill/>
+        </p:spPr>
+        <p:txBody>
+          <a:bodyPr wrap="square" lIns="0" rIns="0" tIns="0" bIns="0" anchor="t">
+            <a:spAutoFit/>
+          </a:bodyPr>
+          <a:lstStyle/>
+          <a:p>
+            <a:pPr algn="ctr"/>
+            <a:r>
+              <a:rPr sz="1100" b="1">
+                <a:solidFill>
+                  <a:srgbClr val="EEF2F7"/>
+                </a:solidFill>
+                <a:latin typeface="Calibri"/>
+              </a:rPr>
+              <a:t>Any measured difference comes from the algorithm itself.</a:t>
+            </a:r>
+          </a:p>
+        </p:txBody>
+      </p:sp>
+      <p:sp>
+        <p:nvSpPr>
+          <p:cNvPr id="42" name="TextBox 41"/>
+          <p:cNvSpPr txBox="1"/>
+          <p:nvPr/>
+        </p:nvSpPr>
+        <p:spPr>
+          <a:xfrm>
+            <a:off x="457200" y="6492240"/>
+            <a:ext cx="5486400" cy="274320"/>
+          </a:xfrm>
+          <a:prstGeom prst="rect">
+            <a:avLst/>
+          </a:prstGeom>
+          <a:noFill/>
+        </p:spPr>
+        <p:txBody>
+          <a:bodyPr wrap="square" lIns="0" rIns="0" tIns="0" bIns="0" anchor="t">
+            <a:spAutoFit/>
+          </a:bodyPr>
+          <a:lstStyle/>
+          <a:p>
+            <a:pPr algn="l"/>
+            <a:r>
+              <a:rPr sz="900" b="0">
+                <a:solidFill>
+                  <a:srgbClr val="64748B"/>
+                </a:solidFill>
+                <a:latin typeface="Calibri"/>
+              </a:rPr>
+              <a:t>ADA Progress Report  |  Habib University  |  Spring 2026</a:t>
+            </a:r>
+          </a:p>
+        </p:txBody>
+      </p:sp>
+      <p:sp>
+        <p:nvSpPr>
+          <p:cNvPr id="43" name="TextBox 42"/>
+          <p:cNvSpPr txBox="1"/>
+          <p:nvPr/>
+        </p:nvSpPr>
+        <p:spPr>
+          <a:xfrm>
+            <a:off x="11094415" y="6492240"/>
+            <a:ext cx="640080" cy="274320"/>
+          </a:xfrm>
+          <a:prstGeom prst="rect">
+            <a:avLst/>
+          </a:prstGeom>
+          <a:noFill/>
+        </p:spPr>
+        <p:txBody>
+          <a:bodyPr wrap="square" lIns="0" rIns="0" tIns="0" bIns="0" anchor="t">
+            <a:spAutoFit/>
+          </a:bodyPr>
+          <a:lstStyle/>
+          <a:p>
             <a:pPr algn="r"/>
             <a:r>
-              <a:rPr sz="1000" b="0" i="0">
+              <a:rPr sz="900" b="0">
                 <a:solidFill>
                   <a:srgbClr val="64748B"/>
                 </a:solidFill>
+                <a:latin typeface="Calibri"/>
               </a:rPr>
-              <a:t>3 / 5</a:t>
+              <a:t>3 / 4</a:t>
             </a:r>
           </a:p>
         </p:txBody>
@@ -5117,14 +6603,6 @@
 <file path=ppt/slides/slide4.xml><?xml version="1.0" encoding="utf-8"?>
 <p:sld xmlns:a="http://schemas.openxmlformats.org/drawingml/2006/main" xmlns:p="http://schemas.openxmlformats.org/presentationml/2006/main" xmlns:r="http://schemas.openxmlformats.org/officeDocument/2006/relationships">
   <p:cSld>
-    <p:bg>
-      <p:bgPr>
-        <a:solidFill>
-          <a:srgbClr val="0F172A"/>
-        </a:solidFill>
-        <a:effectLst/>
-      </p:bgPr>
-    </p:bg>
     <p:spTree>
       <p:nvGrpSpPr>
         <p:cNvPr id="1" name=""/>
@@ -5140,18 +6618,19 @@
         </p:nvSpPr>
         <p:spPr>
           <a:xfrm>
-            <a:off x="0" y="502920"/>
-            <a:ext cx="12188952" cy="41148"/>
+            <a:off x="0" y="0"/>
+            <a:ext cx="12191695" cy="6858000"/>
           </a:xfrm>
           <a:prstGeom prst="rect">
             <a:avLst/>
           </a:prstGeom>
           <a:solidFill>
-            <a:srgbClr val="3B82F6"/>
+            <a:srgbClr val="0F172A"/>
           </a:solidFill>
           <a:ln>
             <a:noFill/>
           </a:ln>
+          <a:effectLst/>
         </p:spPr>
         <p:style>
           <a:lnRef idx="1">
@@ -5177,92 +6656,25 @@
       </p:sp>
       <p:sp>
         <p:nvSpPr>
-          <p:cNvPr id="3" name="TextBox 2"/>
-          <p:cNvSpPr txBox="1"/>
-          <p:nvPr/>
-        </p:nvSpPr>
-        <p:spPr>
-          <a:xfrm>
-            <a:off x="365760" y="109728"/>
-            <a:ext cx="8229600" cy="502920"/>
-          </a:xfrm>
-          <a:prstGeom prst="rect">
-            <a:avLst/>
-          </a:prstGeom>
-          <a:noFill/>
-        </p:spPr>
-        <p:txBody>
-          <a:bodyPr wrap="square">
-            <a:spAutoFit/>
-          </a:bodyPr>
-          <a:lstStyle/>
-          <a:p>
-            <a:pPr algn="l"/>
-            <a:r>
-              <a:rPr sz="2600" b="1" i="0">
-                <a:solidFill>
-                  <a:srgbClr val="FFFFFF"/>
-                </a:solidFill>
-              </a:rPr>
-              <a:t>Preliminary Results</a:t>
-            </a:r>
-          </a:p>
-        </p:txBody>
-      </p:sp>
-      <p:sp>
-        <p:nvSpPr>
-          <p:cNvPr id="4" name="TextBox 3"/>
-          <p:cNvSpPr txBox="1"/>
-          <p:nvPr/>
-        </p:nvSpPr>
-        <p:spPr>
-          <a:xfrm>
-            <a:off x="365760" y="621792"/>
-            <a:ext cx="11430000" cy="320040"/>
-          </a:xfrm>
-          <a:prstGeom prst="rect">
-            <a:avLst/>
-          </a:prstGeom>
-          <a:noFill/>
-        </p:spPr>
-        <p:txBody>
-          <a:bodyPr wrap="square">
-            <a:spAutoFit/>
-          </a:bodyPr>
-          <a:lstStyle/>
-          <a:p>
-            <a:pPr algn="l"/>
-            <a:r>
-              <a:rPr sz="1100" b="0" i="1">
-                <a:solidFill>
-                  <a:srgbClr val="64748B"/>
-                </a:solidFill>
-              </a:rPr>
-              <a:t>50×50 grids  ·  3 obstacle densities (15%, 28%, 40%)  ·  24 trials each  ·  seed 42  ·  start &amp; goal maximally separated</a:t>
-            </a:r>
-          </a:p>
-        </p:txBody>
-      </p:sp>
-      <p:sp>
-        <p:nvSpPr>
-          <p:cNvPr id="5" name="Rectangle 4"/>
+          <p:cNvPr id="3" name="Rectangle 2"/>
           <p:cNvSpPr/>
           <p:nvPr/>
         </p:nvSpPr>
         <p:spPr>
           <a:xfrm>
-            <a:off x="320040" y="1051560"/>
-            <a:ext cx="5669280" cy="384048"/>
+            <a:off x="457200" y="502920"/>
+            <a:ext cx="73152" cy="502920"/>
           </a:xfrm>
           <a:prstGeom prst="rect">
             <a:avLst/>
           </a:prstGeom>
           <a:solidFill>
-            <a:srgbClr val="3B82F6"/>
+            <a:srgbClr val="38BDF8"/>
           </a:solidFill>
           <a:ln>
             <a:noFill/>
           </a:ln>
+          <a:effectLst/>
         </p:spPr>
         <p:style>
           <a:lnRef idx="1">
@@ -5288,14 +6700,14 @@
       </p:sp>
       <p:sp>
         <p:nvSpPr>
-          <p:cNvPr id="6" name="TextBox 5"/>
+          <p:cNvPr id="4" name="TextBox 3"/>
           <p:cNvSpPr txBox="1"/>
           <p:nvPr/>
         </p:nvSpPr>
         <p:spPr>
           <a:xfrm>
-            <a:off x="429768" y="1124712"/>
-            <a:ext cx="5486400" cy="274320"/>
+            <a:off x="685800" y="457200"/>
+            <a:ext cx="10972800" cy="594360"/>
           </a:xfrm>
           <a:prstGeom prst="rect">
             <a:avLst/>
@@ -5303,43 +6715,106 @@
           <a:noFill/>
         </p:spPr>
         <p:txBody>
-          <a:bodyPr wrap="square">
+          <a:bodyPr wrap="square" lIns="0" rIns="0" tIns="0" bIns="0" anchor="t">
             <a:spAutoFit/>
           </a:bodyPr>
           <a:lstStyle/>
           <a:p>
             <a:pPr algn="l"/>
             <a:r>
-              <a:rPr sz="1000" b="1" i="0">
-                <a:solidFill>
-                  <a:srgbClr val="FFFFFF"/>
-                </a:solidFill>
+              <a:rPr sz="2800" b="1">
+                <a:solidFill>
+                  <a:srgbClr val="EEF2F7"/>
+                </a:solidFill>
+                <a:latin typeface="Calibri"/>
               </a:rPr>
-              <a:t>Algorithm      15% Exp  ms     28% Exp  ms     40% Exp  ms</a:t>
-            </a:r>
-          </a:p>
-        </p:txBody>
-      </p:sp>
-      <p:sp>
-        <p:nvSpPr>
-          <p:cNvPr id="7" name="Rectangle 6"/>
+              <a:t>Preliminary Results</a:t>
+            </a:r>
+          </a:p>
+        </p:txBody>
+      </p:sp>
+      <p:sp>
+        <p:nvSpPr>
+          <p:cNvPr id="5" name="TextBox 4"/>
+          <p:cNvSpPr txBox="1"/>
+          <p:nvPr/>
+        </p:nvSpPr>
+        <p:spPr>
+          <a:xfrm>
+            <a:off x="685800" y="1051560"/>
+            <a:ext cx="10972800" cy="365760"/>
+          </a:xfrm>
+          <a:prstGeom prst="rect">
+            <a:avLst/>
+          </a:prstGeom>
+          <a:noFill/>
+        </p:spPr>
+        <p:txBody>
+          <a:bodyPr wrap="square" lIns="0" rIns="0" tIns="0" bIns="0" anchor="t">
+            <a:spAutoFit/>
+          </a:bodyPr>
+          <a:lstStyle/>
+          <a:p>
+            <a:pPr algn="l"/>
+            <a:r>
+              <a:rPr sz="1300" b="0">
+                <a:solidFill>
+                  <a:srgbClr val="94A3B8"/>
+                </a:solidFill>
+                <a:latin typeface="Calibri"/>
+              </a:rPr>
+              <a:t>Node expansions and wall-clock time vs. obstacle density. 24 trials each.</a:t>
+            </a:r>
+          </a:p>
+        </p:txBody>
+      </p:sp>
+      <p:pic>
+        <p:nvPicPr>
+          <p:cNvPr id="6" name="Picture 5" descr="results_combined.png"/>
+          <p:cNvPicPr>
+            <a:picLocks noChangeAspect="1"/>
+          </p:cNvPicPr>
+          <p:nvPr/>
+        </p:nvPicPr>
+        <p:blipFill>
+          <a:blip r:embed="rId2"/>
+          <a:stretch>
+            <a:fillRect/>
+          </a:stretch>
+        </p:blipFill>
+        <p:spPr>
+          <a:xfrm>
+            <a:off x="365760" y="1737360"/>
+            <a:ext cx="7223760" cy="2911537"/>
+          </a:xfrm>
+          <a:prstGeom prst="rect">
+            <a:avLst/>
+          </a:prstGeom>
+        </p:spPr>
+      </p:pic>
+      <p:sp>
+        <p:nvSpPr>
+          <p:cNvPr id="7" name="Rounded Rectangle 6"/>
           <p:cNvSpPr/>
           <p:nvPr/>
         </p:nvSpPr>
         <p:spPr>
           <a:xfrm>
-            <a:off x="320040" y="1435607"/>
-            <a:ext cx="5669280" cy="402336"/>
-          </a:xfrm>
-          <a:prstGeom prst="rect">
-            <a:avLst/>
+            <a:off x="7818120" y="1737360"/>
+            <a:ext cx="3931920" cy="4572000"/>
+          </a:xfrm>
+          <a:prstGeom prst="roundRect">
+            <a:avLst>
+              <a:gd name="adj" fmla="val 8000"/>
+            </a:avLst>
           </a:prstGeom>
           <a:solidFill>
-            <a:srgbClr val="1E293B"/>
+            <a:srgbClr val="22304D"/>
           </a:solidFill>
           <a:ln>
             <a:noFill/>
           </a:ln>
+          <a:effectLst/>
         </p:spPr>
         <p:style>
           <a:lnRef idx="1">
@@ -5371,8 +6846,8 @@
         </p:nvSpPr>
         <p:spPr>
           <a:xfrm>
-            <a:off x="429768" y="1527048"/>
-            <a:ext cx="5486400" cy="274320"/>
+            <a:off x="8046720" y="1874519"/>
+            <a:ext cx="3474720" cy="411480"/>
           </a:xfrm>
           <a:prstGeom prst="rect">
             <a:avLst/>
@@ -5380,43 +6855,45 @@
           <a:noFill/>
         </p:spPr>
         <p:txBody>
-          <a:bodyPr wrap="square">
+          <a:bodyPr wrap="square" lIns="0" rIns="0" tIns="0" bIns="0" anchor="t">
             <a:spAutoFit/>
           </a:bodyPr>
           <a:lstStyle/>
           <a:p>
             <a:pPr algn="l"/>
             <a:r>
-              <a:rPr sz="1100" b="0" i="0">
-                <a:solidFill>
-                  <a:srgbClr val="CBD5E1"/>
-                </a:solidFill>
+              <a:rPr sz="1600" b="1">
+                <a:solidFill>
+                  <a:srgbClr val="38BDF8"/>
+                </a:solidFill>
+                <a:latin typeface="Calibri"/>
               </a:rPr>
-              <a:t>Dijkstra        2062   7.07      1659   4.96       915   2.73</a:t>
-            </a:r>
-          </a:p>
-        </p:txBody>
-      </p:sp>
-      <p:sp>
-        <p:nvSpPr>
-          <p:cNvPr id="9" name="Rectangle 8"/>
+              <a:t>Key Findings</a:t>
+            </a:r>
+          </a:p>
+        </p:txBody>
+      </p:sp>
+      <p:sp>
+        <p:nvSpPr>
+          <p:cNvPr id="9" name="Oval 8"/>
           <p:cNvSpPr/>
           <p:nvPr/>
         </p:nvSpPr>
         <p:spPr>
           <a:xfrm>
-            <a:off x="320040" y="1837943"/>
-            <a:ext cx="5669280" cy="402336"/>
-          </a:xfrm>
-          <a:prstGeom prst="rect">
+            <a:off x="8092440" y="2487168"/>
+            <a:ext cx="201168" cy="201168"/>
+          </a:xfrm>
+          <a:prstGeom prst="ellipse">
             <a:avLst/>
           </a:prstGeom>
           <a:solidFill>
-            <a:srgbClr val="182735"/>
+            <a:srgbClr val="4D94E0"/>
           </a:solidFill>
           <a:ln>
             <a:noFill/>
           </a:ln>
+          <a:effectLst/>
         </p:spPr>
         <p:style>
           <a:lnRef idx="1">
@@ -5448,8 +6925,8 @@
         </p:nvSpPr>
         <p:spPr>
           <a:xfrm>
-            <a:off x="429768" y="1929384"/>
-            <a:ext cx="5486400" cy="274320"/>
+            <a:off x="8412480" y="2395728"/>
+            <a:ext cx="3017520" cy="320040"/>
           </a:xfrm>
           <a:prstGeom prst="rect">
             <a:avLst/>
@@ -5457,43 +6934,80 @@
           <a:noFill/>
         </p:spPr>
         <p:txBody>
-          <a:bodyPr wrap="square">
+          <a:bodyPr wrap="square" lIns="0" rIns="0" tIns="0" bIns="0" anchor="t">
             <a:spAutoFit/>
           </a:bodyPr>
           <a:lstStyle/>
           <a:p>
             <a:pPr algn="l"/>
             <a:r>
-              <a:rPr sz="1100" b="0" i="0">
-                <a:solidFill>
-                  <a:srgbClr val="10B981"/>
-                </a:solidFill>
+              <a:rPr sz="1300" b="1">
+                <a:solidFill>
+                  <a:srgbClr val="EEF2F7"/>
+                </a:solidFill>
+                <a:latin typeface="Calibri"/>
               </a:rPr>
-              <a:t>A*              1020   3.74       629   2.11       513   1.70</a:t>
-            </a:r>
-          </a:p>
-        </p:txBody>
-      </p:sp>
-      <p:sp>
-        <p:nvSpPr>
-          <p:cNvPr id="11" name="Rectangle 10"/>
+              <a:t>A* halves Dijkstra</a:t>
+            </a:r>
+          </a:p>
+        </p:txBody>
+      </p:sp>
+      <p:sp>
+        <p:nvSpPr>
+          <p:cNvPr id="11" name="TextBox 10"/>
+          <p:cNvSpPr txBox="1"/>
+          <p:nvPr/>
+        </p:nvSpPr>
+        <p:spPr>
+          <a:xfrm>
+            <a:off x="8412480" y="2697480"/>
+            <a:ext cx="3017520" cy="731520"/>
+          </a:xfrm>
+          <a:prstGeom prst="rect">
+            <a:avLst/>
+          </a:prstGeom>
+          <a:noFill/>
+        </p:spPr>
+        <p:txBody>
+          <a:bodyPr wrap="square" lIns="0" rIns="0" tIns="0" bIns="0" anchor="t">
+            <a:spAutoFit/>
+          </a:bodyPr>
+          <a:lstStyle/>
+          <a:p>
+            <a:pPr algn="l"/>
+            <a:r>
+              <a:rPr sz="1000" b="0">
+                <a:solidFill>
+                  <a:srgbClr val="94A3B8"/>
+                </a:solidFill>
+                <a:latin typeface="Calibri"/>
+              </a:rPr>
+              <a:t>Around 50 percent of Dijkstra's expansions at every density. Manhattan heuristic pays off consistently.</a:t>
+            </a:r>
+          </a:p>
+        </p:txBody>
+      </p:sp>
+      <p:sp>
+        <p:nvSpPr>
+          <p:cNvPr id="12" name="Oval 11"/>
           <p:cNvSpPr/>
           <p:nvPr/>
         </p:nvSpPr>
         <p:spPr>
           <a:xfrm>
-            <a:off x="320040" y="2240279"/>
-            <a:ext cx="5669280" cy="402336"/>
-          </a:xfrm>
-          <a:prstGeom prst="rect">
+            <a:off x="8092440" y="3538728"/>
+            <a:ext cx="201168" cy="201168"/>
+          </a:xfrm>
+          <a:prstGeom prst="ellipse">
             <a:avLst/>
           </a:prstGeom>
           <a:solidFill>
-            <a:srgbClr val="1E293B"/>
+            <a:srgbClr val="2CA02C"/>
           </a:solidFill>
           <a:ln>
             <a:noFill/>
           </a:ln>
+          <a:effectLst/>
         </p:spPr>
         <p:style>
           <a:lnRef idx="1">
@@ -5519,14 +7033,14 @@
       </p:sp>
       <p:sp>
         <p:nvSpPr>
-          <p:cNvPr id="12" name="TextBox 11"/>
+          <p:cNvPr id="13" name="TextBox 12"/>
           <p:cNvSpPr txBox="1"/>
           <p:nvPr/>
         </p:nvSpPr>
         <p:spPr>
           <a:xfrm>
-            <a:off x="429768" y="2331720"/>
-            <a:ext cx="5486400" cy="274320"/>
+            <a:off x="8412480" y="3447288"/>
+            <a:ext cx="3017520" cy="320040"/>
           </a:xfrm>
           <a:prstGeom prst="rect">
             <a:avLst/>
@@ -5534,33 +7048,34 @@
           <a:noFill/>
         </p:spPr>
         <p:txBody>
-          <a:bodyPr wrap="square">
+          <a:bodyPr wrap="square" lIns="0" rIns="0" tIns="0" bIns="0" anchor="t">
             <a:spAutoFit/>
           </a:bodyPr>
           <a:lstStyle/>
           <a:p>
             <a:pPr algn="l"/>
             <a:r>
-              <a:rPr sz="1100" b="1" i="0">
-                <a:solidFill>
-                  <a:srgbClr val="3B82F6"/>
-                </a:solidFill>
+              <a:rPr sz="1300" b="1">
+                <a:solidFill>
+                  <a:srgbClr val="EEF2F7"/>
+                </a:solidFill>
+                <a:latin typeface="Calibri"/>
               </a:rPr>
-              <a:t>JPS4             488   4.43       970   6.22       682   3.13</a:t>
-            </a:r>
-          </a:p>
-        </p:txBody>
-      </p:sp>
-      <p:sp>
-        <p:nvSpPr>
-          <p:cNvPr id="13" name="TextBox 12"/>
+              <a:t>JPS4 wins on open maps</a:t>
+            </a:r>
+          </a:p>
+        </p:txBody>
+      </p:sp>
+      <p:sp>
+        <p:nvSpPr>
+          <p:cNvPr id="14" name="TextBox 13"/>
           <p:cNvSpPr txBox="1"/>
           <p:nvPr/>
         </p:nvSpPr>
         <p:spPr>
           <a:xfrm>
-            <a:off x="320040" y="2688335"/>
-            <a:ext cx="5669280" cy="320040"/>
+            <a:off x="8412480" y="3749039"/>
+            <a:ext cx="3017520" cy="731520"/>
           </a:xfrm>
           <a:prstGeom prst="rect">
             <a:avLst/>
@@ -5568,43 +7083,45 @@
           <a:noFill/>
         </p:spPr>
         <p:txBody>
-          <a:bodyPr wrap="square">
+          <a:bodyPr wrap="square" lIns="0" rIns="0" tIns="0" bIns="0" anchor="t">
             <a:spAutoFit/>
           </a:bodyPr>
           <a:lstStyle/>
           <a:p>
             <a:pPr algn="l"/>
             <a:r>
-              <a:rPr sz="900" b="0" i="1">
-                <a:solidFill>
-                  <a:srgbClr val="64748B"/>
-                </a:solidFill>
+              <a:rPr sz="1000" b="0">
+                <a:solidFill>
+                  <a:srgbClr val="94A3B8"/>
+                </a:solidFill>
+                <a:latin typeface="Calibri"/>
               </a:rPr>
-              <a:t>Exp = mean node expansions   ·   ms = mean wall-clock time   ·   24 trials per density</a:t>
-            </a:r>
-          </a:p>
-        </p:txBody>
-      </p:sp>
-      <p:sp>
-        <p:nvSpPr>
-          <p:cNvPr id="14" name="Rectangle 13"/>
+              <a:t>At 15 percent density, JPS4 visits only 488 nodes versus 2062 for Dijkstra. A 76 percent reduction.</a:t>
+            </a:r>
+          </a:p>
+        </p:txBody>
+      </p:sp>
+      <p:sp>
+        <p:nvSpPr>
+          <p:cNvPr id="15" name="Oval 14"/>
           <p:cNvSpPr/>
           <p:nvPr/>
         </p:nvSpPr>
         <p:spPr>
           <a:xfrm>
-            <a:off x="6172200" y="1005840"/>
-            <a:ext cx="5669280" cy="3108960"/>
-          </a:xfrm>
-          <a:prstGeom prst="rect">
+            <a:off x="8092440" y="4590288"/>
+            <a:ext cx="201168" cy="201168"/>
+          </a:xfrm>
+          <a:prstGeom prst="ellipse">
             <a:avLst/>
           </a:prstGeom>
           <a:solidFill>
-            <a:srgbClr val="1E293B"/>
+            <a:srgbClr val="F5A624"/>
           </a:solidFill>
           <a:ln>
             <a:noFill/>
           </a:ln>
+          <a:effectLst/>
         </p:spPr>
         <p:style>
           <a:lnRef idx="1">
@@ -5630,14 +7147,14 @@
       </p:sp>
       <p:sp>
         <p:nvSpPr>
-          <p:cNvPr id="15" name="TextBox 14"/>
+          <p:cNvPr id="16" name="TextBox 15"/>
           <p:cNvSpPr txBox="1"/>
           <p:nvPr/>
         </p:nvSpPr>
         <p:spPr>
           <a:xfrm>
-            <a:off x="6309360" y="2103120"/>
-            <a:ext cx="5303520" cy="914400"/>
+            <a:off x="8412480" y="4498848"/>
+            <a:ext cx="3017520" cy="320040"/>
           </a:xfrm>
           <a:prstGeom prst="rect">
             <a:avLst/>
@@ -5645,33 +7162,34 @@
           <a:noFill/>
         </p:spPr>
         <p:txBody>
-          <a:bodyPr wrap="square">
+          <a:bodyPr wrap="square" lIns="0" rIns="0" tIns="0" bIns="0" anchor="t">
             <a:spAutoFit/>
           </a:bodyPr>
           <a:lstStyle/>
           <a:p>
-            <a:pPr algn="ctr"/>
-            <a:r>
-              <a:rPr sz="1100" b="0" i="1">
-                <a:solidFill>
-                  <a:srgbClr val="64748B"/>
-                </a:solidFill>
+            <a:pPr algn="l"/>
+            <a:r>
+              <a:rPr sz="1300" b="1">
+                <a:solidFill>
+                  <a:srgbClr val="EEF2F7"/>
+                </a:solidFill>
+                <a:latin typeface="Calibri"/>
               </a:rPr>
-              <a:t>[Figure: results_combined.png — add manually if missing]</a:t>
-            </a:r>
-          </a:p>
-        </p:txBody>
-      </p:sp>
-      <p:sp>
-        <p:nvSpPr>
-          <p:cNvPr id="16" name="TextBox 15"/>
+              <a:t>JPS4 loses on dense maps</a:t>
+            </a:r>
+          </a:p>
+        </p:txBody>
+      </p:sp>
+      <p:sp>
+        <p:nvSpPr>
+          <p:cNvPr id="17" name="TextBox 16"/>
           <p:cNvSpPr txBox="1"/>
           <p:nvPr/>
         </p:nvSpPr>
         <p:spPr>
           <a:xfrm>
-            <a:off x="6172200" y="4160520"/>
-            <a:ext cx="5669280" cy="320040"/>
+            <a:off x="8412480" y="4800600"/>
+            <a:ext cx="3017520" cy="731520"/>
           </a:xfrm>
           <a:prstGeom prst="rect">
             <a:avLst/>
@@ -5679,239 +7197,47 @@
           <a:noFill/>
         </p:spPr>
         <p:txBody>
-          <a:bodyPr wrap="square">
+          <a:bodyPr wrap="square" lIns="0" rIns="0" tIns="0" bIns="0" anchor="t">
             <a:spAutoFit/>
           </a:bodyPr>
           <a:lstStyle/>
           <a:p>
-            <a:pPr algn="ctr"/>
-            <a:r>
-              <a:rPr sz="900" b="0" i="1">
-                <a:solidFill>
-                  <a:srgbClr val="64748B"/>
-                </a:solidFill>
+            <a:pPr algn="l"/>
+            <a:r>
+              <a:rPr sz="1000" b="0">
+                <a:solidFill>
+                  <a:srgbClr val="94A3B8"/>
+                </a:solidFill>
+                <a:latin typeface="Calibri"/>
               </a:rPr>
-              <a:t>Figure 1: Mean node expansions (left) and wall-clock time (right) vs. obstacle density</a:t>
-            </a:r>
-          </a:p>
-        </p:txBody>
-      </p:sp>
-      <p:sp>
-        <p:nvSpPr>
-          <p:cNvPr id="17" name="TextBox 16"/>
-          <p:cNvSpPr txBox="1"/>
-          <p:nvPr/>
-        </p:nvSpPr>
-        <p:spPr>
-          <a:xfrm>
-            <a:off x="320040" y="4663440"/>
-            <a:ext cx="11430000" cy="384048"/>
-          </a:xfrm>
-          <a:prstGeom prst="rect">
-            <a:avLst/>
-          </a:prstGeom>
-          <a:noFill/>
-        </p:spPr>
-        <p:txBody>
-          <a:bodyPr wrap="square">
-            <a:spAutoFit/>
-          </a:bodyPr>
-          <a:lstStyle/>
-          <a:p>
-            <a:pPr algn="l"/>
-            <a:r>
-              <a:rPr sz="1100" b="0" i="0">
-                <a:solidFill>
-                  <a:srgbClr val="10B981"/>
-                </a:solidFill>
-              </a:rPr>
-              <a:t>✓  A* cuts Dijkstra's expansions by ~50% at all densities — the heuristic consistently helps</a:t>
-            </a:r>
-          </a:p>
-        </p:txBody>
-      </p:sp>
-      <p:sp>
-        <p:nvSpPr>
-          <p:cNvPr id="18" name="TextBox 17"/>
-          <p:cNvSpPr txBox="1"/>
-          <p:nvPr/>
-        </p:nvSpPr>
-        <p:spPr>
-          <a:xfrm>
-            <a:off x="320040" y="5102352"/>
-            <a:ext cx="11430000" cy="384048"/>
-          </a:xfrm>
-          <a:prstGeom prst="rect">
-            <a:avLst/>
-          </a:prstGeom>
-          <a:noFill/>
-        </p:spPr>
-        <p:txBody>
-          <a:bodyPr wrap="square">
-            <a:spAutoFit/>
-          </a:bodyPr>
-          <a:lstStyle/>
-          <a:p>
-            <a:pPr algn="l"/>
-            <a:r>
-              <a:rPr sz="1100" b="0" i="0">
-                <a:solidFill>
-                  <a:srgbClr val="3B82F6"/>
-                </a:solidFill>
-              </a:rPr>
-              <a:t>✓  JPS4 wins at LOW density: 488 vs 1020 nodes (52% fewer than A*) — open maps = long jumps</a:t>
-            </a:r>
-          </a:p>
-        </p:txBody>
-      </p:sp>
-      <p:sp>
-        <p:nvSpPr>
-          <p:cNvPr id="19" name="TextBox 18"/>
-          <p:cNvSpPr txBox="1"/>
-          <p:nvPr/>
-        </p:nvSpPr>
-        <p:spPr>
-          <a:xfrm>
-            <a:off x="320040" y="5541264"/>
-            <a:ext cx="11430000" cy="384048"/>
-          </a:xfrm>
-          <a:prstGeom prst="rect">
-            <a:avLst/>
-          </a:prstGeom>
-          <a:noFill/>
-        </p:spPr>
-        <p:txBody>
-          <a:bodyPr wrap="square">
-            <a:spAutoFit/>
-          </a:bodyPr>
-          <a:lstStyle/>
-          <a:p>
-            <a:pPr algn="l"/>
-            <a:r>
-              <a:rPr sz="1100" b="0" i="0">
-                <a:solidFill>
-                  <a:srgbClr val="F59E0B"/>
-                </a:solidFill>
-              </a:rPr>
-              <a:t>⚠  JPS4 SLOWER than A* at medium density: obstacles make jumps short, overhead stays constant</a:t>
-            </a:r>
-          </a:p>
-        </p:txBody>
-      </p:sp>
-      <p:sp>
-        <p:nvSpPr>
-          <p:cNvPr id="20" name="TextBox 19"/>
-          <p:cNvSpPr txBox="1"/>
-          <p:nvPr/>
-        </p:nvSpPr>
-        <p:spPr>
-          <a:xfrm>
-            <a:off x="320040" y="5980175"/>
-            <a:ext cx="11430000" cy="384048"/>
-          </a:xfrm>
-          <a:prstGeom prst="rect">
-            <a:avLst/>
-          </a:prstGeom>
-          <a:noFill/>
-        </p:spPr>
-        <p:txBody>
-          <a:bodyPr wrap="square">
-            <a:spAutoFit/>
-          </a:bodyPr>
-          <a:lstStyle/>
-          <a:p>
-            <a:pPr algn="l"/>
-            <a:r>
-              <a:rPr sz="1100" b="0" i="0">
-                <a:solidFill>
-                  <a:srgbClr val="64748B"/>
-                </a:solidFill>
-              </a:rPr>
-              <a:t>⏱  JPS4 slower on the clock in Python — compiled code (C++/Java) removes this overhead</a:t>
-            </a:r>
-          </a:p>
-        </p:txBody>
-      </p:sp>
-      <p:sp>
-        <p:nvSpPr>
-          <p:cNvPr id="21" name="TextBox 20"/>
-          <p:cNvSpPr txBox="1"/>
-          <p:nvPr/>
-        </p:nvSpPr>
-        <p:spPr>
-          <a:xfrm>
-            <a:off x="11430000" y="6492240"/>
-            <a:ext cx="731520" cy="274320"/>
-          </a:xfrm>
-          <a:prstGeom prst="rect">
-            <a:avLst/>
-          </a:prstGeom>
-          <a:noFill/>
-        </p:spPr>
-        <p:txBody>
-          <a:bodyPr wrap="square">
-            <a:spAutoFit/>
-          </a:bodyPr>
-          <a:lstStyle/>
-          <a:p>
-            <a:pPr algn="r"/>
-            <a:r>
-              <a:rPr sz="1000" b="0" i="0">
-                <a:solidFill>
-                  <a:srgbClr val="64748B"/>
-                </a:solidFill>
-              </a:rPr>
-              <a:t>4 / 5</a:t>
-            </a:r>
-          </a:p>
-        </p:txBody>
-      </p:sp>
-    </p:spTree>
-  </p:cSld>
-  <p:clrMapOvr>
-    <a:masterClrMapping/>
-  </p:clrMapOvr>
-</p:sld>
-</file>
-
-<file path=ppt/slides/slide5.xml><?xml version="1.0" encoding="utf-8"?>
-<p:sld xmlns:a="http://schemas.openxmlformats.org/drawingml/2006/main" xmlns:p="http://schemas.openxmlformats.org/presentationml/2006/main" xmlns:r="http://schemas.openxmlformats.org/officeDocument/2006/relationships">
-  <p:cSld>
-    <p:bg>
-      <p:bgPr>
-        <a:solidFill>
-          <a:srgbClr val="0F172A"/>
-        </a:solidFill>
-        <a:effectLst/>
-      </p:bgPr>
-    </p:bg>
-    <p:spTree>
-      <p:nvGrpSpPr>
-        <p:cNvPr id="1" name=""/>
-        <p:cNvGrpSpPr/>
-        <p:nvPr/>
-      </p:nvGrpSpPr>
-      <p:grpSpPr/>
-      <p:sp>
-        <p:nvSpPr>
-          <p:cNvPr id="2" name="Rectangle 1"/>
+              <a:t>At 28 percent, JPS4 expands 970 cells versus A*'s 629. Shorter corridors mean shorter jumps.</a:t>
+            </a:r>
+          </a:p>
+        </p:txBody>
+      </p:sp>
+      <p:sp>
+        <p:nvSpPr>
+          <p:cNvPr id="18" name="Rounded Rectangle 17"/>
           <p:cNvSpPr/>
           <p:nvPr/>
         </p:nvSpPr>
         <p:spPr>
           <a:xfrm>
-            <a:off x="0" y="502920"/>
-            <a:ext cx="12188952" cy="41148"/>
-          </a:xfrm>
-          <a:prstGeom prst="rect">
-            <a:avLst/>
+            <a:off x="8046720" y="5577840"/>
+            <a:ext cx="3474720" cy="640080"/>
+          </a:xfrm>
+          <a:prstGeom prst="roundRect">
+            <a:avLst>
+              <a:gd name="adj" fmla="val 8000"/>
+            </a:avLst>
           </a:prstGeom>
           <a:solidFill>
-            <a:srgbClr val="3B82F6"/>
+            <a:srgbClr val="1A253D"/>
           </a:solidFill>
           <a:ln>
             <a:noFill/>
           </a:ln>
+          <a:effectLst/>
         </p:spPr>
         <p:style>
           <a:lnRef idx="1">
@@ -5937,14 +7263,14 @@
       </p:sp>
       <p:sp>
         <p:nvSpPr>
-          <p:cNvPr id="3" name="TextBox 2"/>
+          <p:cNvPr id="19" name="TextBox 18"/>
           <p:cNvSpPr txBox="1"/>
           <p:nvPr/>
         </p:nvSpPr>
         <p:spPr>
           <a:xfrm>
-            <a:off x="365760" y="109728"/>
-            <a:ext cx="8229600" cy="502920"/>
+            <a:off x="8046720" y="5577840"/>
+            <a:ext cx="3474720" cy="320040"/>
           </a:xfrm>
           <a:prstGeom prst="rect">
             <a:avLst/>
@@ -5952,33 +7278,34 @@
           <a:noFill/>
         </p:spPr>
         <p:txBody>
-          <a:bodyPr wrap="square">
+          <a:bodyPr wrap="square" lIns="0" rIns="0" tIns="0" bIns="0" anchor="t">
             <a:spAutoFit/>
           </a:bodyPr>
           <a:lstStyle/>
           <a:p>
-            <a:pPr algn="l"/>
-            <a:r>
-              <a:rPr sz="2600" b="1" i="0">
-                <a:solidFill>
-                  <a:srgbClr val="FFFFFF"/>
-                </a:solidFill>
+            <a:pPr algn="ctr"/>
+            <a:r>
+              <a:rPr sz="900" b="1">
+                <a:solidFill>
+                  <a:srgbClr val="2CA02C"/>
+                </a:solidFill>
+                <a:latin typeface="Calibri"/>
               </a:rPr>
-              <a:t>Challenges &amp; Next Plan</a:t>
-            </a:r>
-          </a:p>
-        </p:txBody>
-      </p:sp>
-      <p:sp>
-        <p:nvSpPr>
-          <p:cNvPr id="4" name="TextBox 3"/>
+              <a:t>CORRECTNESS</a:t>
+            </a:r>
+          </a:p>
+        </p:txBody>
+      </p:sp>
+      <p:sp>
+        <p:nvSpPr>
+          <p:cNvPr id="20" name="TextBox 19"/>
           <p:cNvSpPr txBox="1"/>
           <p:nvPr/>
         </p:nvSpPr>
         <p:spPr>
           <a:xfrm>
-            <a:off x="365760" y="685800"/>
-            <a:ext cx="5303520" cy="320040"/>
+            <a:off x="8046720" y="5852160"/>
+            <a:ext cx="3474720" cy="320040"/>
           </a:xfrm>
           <a:prstGeom prst="rect">
             <a:avLst/>
@@ -5986,119 +7313,34 @@
           <a:noFill/>
         </p:spPr>
         <p:txBody>
-          <a:bodyPr wrap="square">
+          <a:bodyPr wrap="square" lIns="0" rIns="0" tIns="0" bIns="0" anchor="t">
             <a:spAutoFit/>
           </a:bodyPr>
           <a:lstStyle/>
           <a:p>
-            <a:pPr algn="l"/>
-            <a:r>
-              <a:rPr sz="1000" b="1" i="0">
-                <a:solidFill>
-                  <a:srgbClr val="3B82F6"/>
-                </a:solidFill>
+            <a:pPr algn="ctr"/>
+            <a:r>
+              <a:rPr sz="1100" b="1">
+                <a:solidFill>
+                  <a:srgbClr val="EEF2F7"/>
+                </a:solidFill>
+                <a:latin typeface="Calibri"/>
               </a:rPr>
-              <a:t>CHALLENGES IDENTIFIED</a:t>
-            </a:r>
-          </a:p>
-        </p:txBody>
-      </p:sp>
-      <p:sp>
-        <p:nvSpPr>
-          <p:cNvPr id="5" name="Rectangle 4"/>
-          <p:cNvSpPr/>
-          <p:nvPr/>
-        </p:nvSpPr>
-        <p:spPr>
-          <a:xfrm>
-            <a:off x="320040" y="1051560"/>
-            <a:ext cx="5486400" cy="1554480"/>
-          </a:xfrm>
-          <a:prstGeom prst="rect">
-            <a:avLst/>
-          </a:prstGeom>
-          <a:solidFill>
-            <a:srgbClr val="1E293B"/>
-          </a:solidFill>
-          <a:ln>
-            <a:noFill/>
-          </a:ln>
-        </p:spPr>
-        <p:style>
-          <a:lnRef idx="1">
-            <a:schemeClr val="accent1"/>
-          </a:lnRef>
-          <a:fillRef idx="3">
-            <a:schemeClr val="accent1"/>
-          </a:fillRef>
-          <a:effectRef idx="2">
-            <a:schemeClr val="accent1"/>
-          </a:effectRef>
-          <a:fontRef idx="minor">
-            <a:schemeClr val="lt1"/>
-          </a:fontRef>
-        </p:style>
-        <p:txBody>
-          <a:bodyPr rtlCol="0" anchor="ctr"/>
-          <a:lstStyle/>
-          <a:p>
-            <a:pPr algn="ctr"/>
-          </a:p>
-        </p:txBody>
-      </p:sp>
-      <p:sp>
-        <p:nvSpPr>
-          <p:cNvPr id="6" name="Rectangle 5"/>
-          <p:cNvSpPr/>
-          <p:nvPr/>
-        </p:nvSpPr>
-        <p:spPr>
-          <a:xfrm>
-            <a:off x="347472" y="1161288"/>
-            <a:ext cx="457200" cy="457200"/>
-          </a:xfrm>
-          <a:prstGeom prst="rect">
-            <a:avLst/>
-          </a:prstGeom>
-          <a:solidFill>
-            <a:srgbClr val="F59E0B"/>
-          </a:solidFill>
-          <a:ln>
-            <a:noFill/>
-          </a:ln>
-        </p:spPr>
-        <p:style>
-          <a:lnRef idx="1">
-            <a:schemeClr val="accent1"/>
-          </a:lnRef>
-          <a:fillRef idx="3">
-            <a:schemeClr val="accent1"/>
-          </a:fillRef>
-          <a:effectRef idx="2">
-            <a:schemeClr val="accent1"/>
-          </a:effectRef>
-          <a:fontRef idx="minor">
-            <a:schemeClr val="lt1"/>
-          </a:fontRef>
-        </p:style>
-        <p:txBody>
-          <a:bodyPr rtlCol="0" anchor="ctr"/>
-          <a:lstStyle/>
-          <a:p>
-            <a:pPr algn="ctr"/>
-          </a:p>
-        </p:txBody>
-      </p:sp>
-      <p:sp>
-        <p:nvSpPr>
-          <p:cNvPr id="7" name="TextBox 6"/>
+              <a:t>All three return equal path lengths on every trial.</a:t>
+            </a:r>
+          </a:p>
+        </p:txBody>
+      </p:sp>
+      <p:sp>
+        <p:nvSpPr>
+          <p:cNvPr id="21" name="TextBox 20"/>
           <p:cNvSpPr txBox="1"/>
           <p:nvPr/>
         </p:nvSpPr>
         <p:spPr>
           <a:xfrm>
-            <a:off x="347472" y="1179576"/>
-            <a:ext cx="457200" cy="365760"/>
+            <a:off x="457200" y="6492240"/>
+            <a:ext cx="5486400" cy="274320"/>
           </a:xfrm>
           <a:prstGeom prst="rect">
             <a:avLst/>
@@ -6106,33 +7348,34 @@
           <a:noFill/>
         </p:spPr>
         <p:txBody>
-          <a:bodyPr wrap="square">
+          <a:bodyPr wrap="square" lIns="0" rIns="0" tIns="0" bIns="0" anchor="t">
             <a:spAutoFit/>
           </a:bodyPr>
           <a:lstStyle/>
           <a:p>
-            <a:pPr algn="ctr"/>
-            <a:r>
-              <a:rPr sz="1400" b="1" i="0">
-                <a:solidFill>
-                  <a:srgbClr val="FFFFFF"/>
-                </a:solidFill>
+            <a:pPr algn="l"/>
+            <a:r>
+              <a:rPr sz="900" b="0">
+                <a:solidFill>
+                  <a:srgbClr val="64748B"/>
+                </a:solidFill>
+                <a:latin typeface="Calibri"/>
               </a:rPr>
-              <a:t>1</a:t>
-            </a:r>
-          </a:p>
-        </p:txBody>
-      </p:sp>
-      <p:sp>
-        <p:nvSpPr>
-          <p:cNvPr id="8" name="TextBox 7"/>
+              <a:t>ADA Progress Report  |  Habib University  |  Spring 2026</a:t>
+            </a:r>
+          </a:p>
+        </p:txBody>
+      </p:sp>
+      <p:sp>
+        <p:nvSpPr>
+          <p:cNvPr id="22" name="TextBox 21"/>
           <p:cNvSpPr txBox="1"/>
           <p:nvPr/>
         </p:nvSpPr>
         <p:spPr>
           <a:xfrm>
-            <a:off x="914400" y="1161288"/>
-            <a:ext cx="4754880" cy="1371600"/>
+            <a:off x="11094415" y="6492240"/>
+            <a:ext cx="640080" cy="274320"/>
           </a:xfrm>
           <a:prstGeom prst="rect">
             <a:avLst/>
@@ -6140,937 +7383,20 @@
           <a:noFill/>
         </p:spPr>
         <p:txBody>
-          <a:bodyPr wrap="square">
+          <a:bodyPr wrap="square" lIns="0" rIns="0" tIns="0" bIns="0" anchor="t">
             <a:spAutoFit/>
           </a:bodyPr>
           <a:lstStyle/>
           <a:p>
-            <a:pPr algn="l"/>
-            <a:r>
-              <a:rPr sz="1300" b="1" i="0">
-                <a:solidFill>
-                  <a:srgbClr val="F59E0B"/>
-                </a:solidFill>
+            <a:pPr algn="r"/>
+            <a:r>
+              <a:rPr sz="900" b="0">
+                <a:solidFill>
+                  <a:srgbClr val="64748B"/>
+                </a:solidFill>
+                <a:latin typeface="Calibri"/>
               </a:rPr>
-              <a:t>Fair Timing</a:t>
-            </a:r>
-          </a:p>
-          <a:p>
-            <a:pPr algn="l">
-              <a:spcBef>
-                <a:spcPts val="500"/>
-              </a:spcBef>
-            </a:pPr>
-            <a:r>
-              <a:rPr sz="1100" b="0" i="0">
-                <a:solidFill>
-                  <a:srgbClr val="CBD5E1"/>
-                </a:solidFill>
-              </a:rPr>
-              <a:t>Python amplifies JPS4's inner-loop cost. Node expansions give a cleaner algorithmic picture right now. Plan: profile the loop and optimize data access patterns.</a:t>
-            </a:r>
-          </a:p>
-        </p:txBody>
-      </p:sp>
-      <p:sp>
-        <p:nvSpPr>
-          <p:cNvPr id="9" name="Rectangle 8"/>
-          <p:cNvSpPr/>
-          <p:nvPr/>
-        </p:nvSpPr>
-        <p:spPr>
-          <a:xfrm>
-            <a:off x="320040" y="2715768"/>
-            <a:ext cx="5486400" cy="1554480"/>
-          </a:xfrm>
-          <a:prstGeom prst="rect">
-            <a:avLst/>
-          </a:prstGeom>
-          <a:solidFill>
-            <a:srgbClr val="1E293B"/>
-          </a:solidFill>
-          <a:ln>
-            <a:noFill/>
-          </a:ln>
-        </p:spPr>
-        <p:style>
-          <a:lnRef idx="1">
-            <a:schemeClr val="accent1"/>
-          </a:lnRef>
-          <a:fillRef idx="3">
-            <a:schemeClr val="accent1"/>
-          </a:fillRef>
-          <a:effectRef idx="2">
-            <a:schemeClr val="accent1"/>
-          </a:effectRef>
-          <a:fontRef idx="minor">
-            <a:schemeClr val="lt1"/>
-          </a:fontRef>
-        </p:style>
-        <p:txBody>
-          <a:bodyPr rtlCol="0" anchor="ctr"/>
-          <a:lstStyle/>
-          <a:p>
-            <a:pPr algn="ctr"/>
-          </a:p>
-        </p:txBody>
-      </p:sp>
-      <p:sp>
-        <p:nvSpPr>
-          <p:cNvPr id="10" name="Rectangle 9"/>
-          <p:cNvSpPr/>
-          <p:nvPr/>
-        </p:nvSpPr>
-        <p:spPr>
-          <a:xfrm>
-            <a:off x="347472" y="2825496"/>
-            <a:ext cx="457200" cy="457200"/>
-          </a:xfrm>
-          <a:prstGeom prst="rect">
-            <a:avLst/>
-          </a:prstGeom>
-          <a:solidFill>
-            <a:srgbClr val="10B981"/>
-          </a:solidFill>
-          <a:ln>
-            <a:noFill/>
-          </a:ln>
-        </p:spPr>
-        <p:style>
-          <a:lnRef idx="1">
-            <a:schemeClr val="accent1"/>
-          </a:lnRef>
-          <a:fillRef idx="3">
-            <a:schemeClr val="accent1"/>
-          </a:fillRef>
-          <a:effectRef idx="2">
-            <a:schemeClr val="accent1"/>
-          </a:effectRef>
-          <a:fontRef idx="minor">
-            <a:schemeClr val="lt1"/>
-          </a:fontRef>
-        </p:style>
-        <p:txBody>
-          <a:bodyPr rtlCol="0" anchor="ctr"/>
-          <a:lstStyle/>
-          <a:p>
-            <a:pPr algn="ctr"/>
-          </a:p>
-        </p:txBody>
-      </p:sp>
-      <p:sp>
-        <p:nvSpPr>
-          <p:cNvPr id="11" name="TextBox 10"/>
-          <p:cNvSpPr txBox="1"/>
-          <p:nvPr/>
-        </p:nvSpPr>
-        <p:spPr>
-          <a:xfrm>
-            <a:off x="347472" y="2843784"/>
-            <a:ext cx="457200" cy="365760"/>
-          </a:xfrm>
-          <a:prstGeom prst="rect">
-            <a:avLst/>
-          </a:prstGeom>
-          <a:noFill/>
-        </p:spPr>
-        <p:txBody>
-          <a:bodyPr wrap="square">
-            <a:spAutoFit/>
-          </a:bodyPr>
-          <a:lstStyle/>
-          <a:p>
-            <a:pPr algn="ctr"/>
-            <a:r>
-              <a:rPr sz="1400" b="1" i="0">
-                <a:solidFill>
-                  <a:srgbClr val="FFFFFF"/>
-                </a:solidFill>
-              </a:rPr>
-              <a:t>2</a:t>
-            </a:r>
-          </a:p>
-        </p:txBody>
-      </p:sp>
-      <p:sp>
-        <p:nvSpPr>
-          <p:cNvPr id="12" name="TextBox 11"/>
-          <p:cNvSpPr txBox="1"/>
-          <p:nvPr/>
-        </p:nvSpPr>
-        <p:spPr>
-          <a:xfrm>
-            <a:off x="914400" y="2825496"/>
-            <a:ext cx="4754880" cy="1371600"/>
-          </a:xfrm>
-          <a:prstGeom prst="rect">
-            <a:avLst/>
-          </a:prstGeom>
-          <a:noFill/>
-        </p:spPr>
-        <p:txBody>
-          <a:bodyPr wrap="square">
-            <a:spAutoFit/>
-          </a:bodyPr>
-          <a:lstStyle/>
-          <a:p>
-            <a:pPr algn="l"/>
-            <a:r>
-              <a:rPr sz="1300" b="1" i="0">
-                <a:solidFill>
-                  <a:srgbClr val="10B981"/>
-                </a:solidFill>
-              </a:rPr>
-              <a:t>Grid Size Too Small</a:t>
-            </a:r>
-          </a:p>
-          <a:p>
-            <a:pPr algn="l">
-              <a:spcBef>
-                <a:spcPts val="500"/>
-              </a:spcBef>
-            </a:pPr>
-            <a:r>
-              <a:rPr sz="1100" b="0" i="0">
-                <a:solidFill>
-                  <a:srgbClr val="CBD5E1"/>
-                </a:solidFill>
-              </a:rPr>
-              <a:t>On 50×50 all algorithms finish in &lt;10ms — timing noise obscures differences. JPS4's advantage grows with corridor length, so we need 100×100 and 200×200 scale tests.</a:t>
-            </a:r>
-          </a:p>
-        </p:txBody>
-      </p:sp>
-      <p:sp>
-        <p:nvSpPr>
-          <p:cNvPr id="13" name="Rectangle 12"/>
-          <p:cNvSpPr/>
-          <p:nvPr/>
-        </p:nvSpPr>
-        <p:spPr>
-          <a:xfrm>
-            <a:off x="320040" y="4379976"/>
-            <a:ext cx="5486400" cy="1554480"/>
-          </a:xfrm>
-          <a:prstGeom prst="rect">
-            <a:avLst/>
-          </a:prstGeom>
-          <a:solidFill>
-            <a:srgbClr val="1E293B"/>
-          </a:solidFill>
-          <a:ln>
-            <a:noFill/>
-          </a:ln>
-        </p:spPr>
-        <p:style>
-          <a:lnRef idx="1">
-            <a:schemeClr val="accent1"/>
-          </a:lnRef>
-          <a:fillRef idx="3">
-            <a:schemeClr val="accent1"/>
-          </a:fillRef>
-          <a:effectRef idx="2">
-            <a:schemeClr val="accent1"/>
-          </a:effectRef>
-          <a:fontRef idx="minor">
-            <a:schemeClr val="lt1"/>
-          </a:fontRef>
-        </p:style>
-        <p:txBody>
-          <a:bodyPr rtlCol="0" anchor="ctr"/>
-          <a:lstStyle/>
-          <a:p>
-            <a:pPr algn="ctr"/>
-          </a:p>
-        </p:txBody>
-      </p:sp>
-      <p:sp>
-        <p:nvSpPr>
-          <p:cNvPr id="14" name="Rectangle 13"/>
-          <p:cNvSpPr/>
-          <p:nvPr/>
-        </p:nvSpPr>
-        <p:spPr>
-          <a:xfrm>
-            <a:off x="347472" y="4489704"/>
-            <a:ext cx="457200" cy="457200"/>
-          </a:xfrm>
-          <a:prstGeom prst="rect">
-            <a:avLst/>
-          </a:prstGeom>
-          <a:solidFill>
-            <a:srgbClr val="3B82F6"/>
-          </a:solidFill>
-          <a:ln>
-            <a:noFill/>
-          </a:ln>
-        </p:spPr>
-        <p:style>
-          <a:lnRef idx="1">
-            <a:schemeClr val="accent1"/>
-          </a:lnRef>
-          <a:fillRef idx="3">
-            <a:schemeClr val="accent1"/>
-          </a:fillRef>
-          <a:effectRef idx="2">
-            <a:schemeClr val="accent1"/>
-          </a:effectRef>
-          <a:fontRef idx="minor">
-            <a:schemeClr val="lt1"/>
-          </a:fontRef>
-        </p:style>
-        <p:txBody>
-          <a:bodyPr rtlCol="0" anchor="ctr"/>
-          <a:lstStyle/>
-          <a:p>
-            <a:pPr algn="ctr"/>
-          </a:p>
-        </p:txBody>
-      </p:sp>
-      <p:sp>
-        <p:nvSpPr>
-          <p:cNvPr id="15" name="TextBox 14"/>
-          <p:cNvSpPr txBox="1"/>
-          <p:nvPr/>
-        </p:nvSpPr>
-        <p:spPr>
-          <a:xfrm>
-            <a:off x="347472" y="4507992"/>
-            <a:ext cx="457200" cy="365760"/>
-          </a:xfrm>
-          <a:prstGeom prst="rect">
-            <a:avLst/>
-          </a:prstGeom>
-          <a:noFill/>
-        </p:spPr>
-        <p:txBody>
-          <a:bodyPr wrap="square">
-            <a:spAutoFit/>
-          </a:bodyPr>
-          <a:lstStyle/>
-          <a:p>
-            <a:pPr algn="ctr"/>
-            <a:r>
-              <a:rPr sz="1400" b="1" i="0">
-                <a:solidFill>
-                  <a:srgbClr val="FFFFFF"/>
-                </a:solidFill>
-              </a:rPr>
-              <a:t>3</a:t>
-            </a:r>
-          </a:p>
-        </p:txBody>
-      </p:sp>
-      <p:sp>
-        <p:nvSpPr>
-          <p:cNvPr id="16" name="TextBox 15"/>
-          <p:cNvSpPr txBox="1"/>
-          <p:nvPr/>
-        </p:nvSpPr>
-        <p:spPr>
-          <a:xfrm>
-            <a:off x="914400" y="4489704"/>
-            <a:ext cx="4754880" cy="1371600"/>
-          </a:xfrm>
-          <a:prstGeom prst="rect">
-            <a:avLst/>
-          </a:prstGeom>
-          <a:noFill/>
-        </p:spPr>
-        <p:txBody>
-          <a:bodyPr wrap="square">
-            <a:spAutoFit/>
-          </a:bodyPr>
-          <a:lstStyle/>
-          <a:p>
-            <a:pPr algn="l"/>
-            <a:r>
-              <a:rPr sz="1300" b="1" i="0">
-                <a:solidFill>
-                  <a:srgbClr val="3B82F6"/>
-                </a:solidFill>
-              </a:rPr>
-              <a:t>Density Cross-Over Unknown</a:t>
-            </a:r>
-          </a:p>
-          <a:p>
-            <a:pPr algn="l">
-              <a:spcBef>
-                <a:spcPts val="500"/>
-              </a:spcBef>
-            </a:pPr>
-            <a:r>
-              <a:rPr sz="1100" b="0" i="0">
-                <a:solidFill>
-                  <a:srgbClr val="CBD5E1"/>
-                </a:solidFill>
-              </a:rPr>
-              <a:t>JPS4 outperforms A* at low density but not at medium. We don't know exactly where the break-even point is — finding it is the key open question.</a:t>
-            </a:r>
-          </a:p>
-        </p:txBody>
-      </p:sp>
-      <p:sp>
-        <p:nvSpPr>
-          <p:cNvPr id="17" name="TextBox 16"/>
-          <p:cNvSpPr txBox="1"/>
-          <p:nvPr/>
-        </p:nvSpPr>
-        <p:spPr>
-          <a:xfrm>
-            <a:off x="6080760" y="685800"/>
-            <a:ext cx="5760720" cy="320040"/>
-          </a:xfrm>
-          <a:prstGeom prst="rect">
-            <a:avLst/>
-          </a:prstGeom>
-          <a:noFill/>
-        </p:spPr>
-        <p:txBody>
-          <a:bodyPr wrap="square">
-            <a:spAutoFit/>
-          </a:bodyPr>
-          <a:lstStyle/>
-          <a:p>
-            <a:pPr algn="l"/>
-            <a:r>
-              <a:rPr sz="1000" b="1" i="0">
-                <a:solidFill>
-                  <a:srgbClr val="10B981"/>
-                </a:solidFill>
-              </a:rPr>
-              <a:t>NEXT PLAN</a:t>
-            </a:r>
-          </a:p>
-        </p:txBody>
-      </p:sp>
-      <p:sp>
-        <p:nvSpPr>
-          <p:cNvPr id="18" name="Oval 17"/>
-          <p:cNvSpPr/>
-          <p:nvPr/>
-        </p:nvSpPr>
-        <p:spPr>
-          <a:xfrm>
-            <a:off x="6080760" y="1188719"/>
-            <a:ext cx="201168" cy="201168"/>
-          </a:xfrm>
-          <a:prstGeom prst="ellipse">
-            <a:avLst/>
-          </a:prstGeom>
-          <a:solidFill>
-            <a:srgbClr val="3B82F6"/>
-          </a:solidFill>
-          <a:ln>
-            <a:noFill/>
-          </a:ln>
-        </p:spPr>
-        <p:style>
-          <a:lnRef idx="1">
-            <a:schemeClr val="accent1"/>
-          </a:lnRef>
-          <a:fillRef idx="3">
-            <a:schemeClr val="accent1"/>
-          </a:fillRef>
-          <a:effectRef idx="2">
-            <a:schemeClr val="accent1"/>
-          </a:effectRef>
-          <a:fontRef idx="minor">
-            <a:schemeClr val="lt1"/>
-          </a:fontRef>
-        </p:style>
-        <p:txBody>
-          <a:bodyPr rtlCol="0" anchor="ctr"/>
-          <a:lstStyle/>
-          <a:p>
-            <a:pPr algn="ctr"/>
-          </a:p>
-        </p:txBody>
-      </p:sp>
-      <p:sp>
-        <p:nvSpPr>
-          <p:cNvPr id="19" name="Rectangle 18"/>
-          <p:cNvSpPr/>
-          <p:nvPr/>
-        </p:nvSpPr>
-        <p:spPr>
-          <a:xfrm>
-            <a:off x="6172200" y="1389888"/>
-            <a:ext cx="18288" cy="1216152"/>
-          </a:xfrm>
-          <a:prstGeom prst="rect">
-            <a:avLst/>
-          </a:prstGeom>
-          <a:solidFill>
-            <a:srgbClr val="64748B"/>
-          </a:solidFill>
-          <a:ln>
-            <a:noFill/>
-          </a:ln>
-        </p:spPr>
-        <p:style>
-          <a:lnRef idx="1">
-            <a:schemeClr val="accent1"/>
-          </a:lnRef>
-          <a:fillRef idx="3">
-            <a:schemeClr val="accent1"/>
-          </a:fillRef>
-          <a:effectRef idx="2">
-            <a:schemeClr val="accent1"/>
-          </a:effectRef>
-          <a:fontRef idx="minor">
-            <a:schemeClr val="lt1"/>
-          </a:fontRef>
-        </p:style>
-        <p:txBody>
-          <a:bodyPr rtlCol="0" anchor="ctr"/>
-          <a:lstStyle/>
-          <a:p>
-            <a:pPr algn="ctr"/>
-          </a:p>
-        </p:txBody>
-      </p:sp>
-      <p:sp>
-        <p:nvSpPr>
-          <p:cNvPr id="20" name="TextBox 19"/>
-          <p:cNvSpPr txBox="1"/>
-          <p:nvPr/>
-        </p:nvSpPr>
-        <p:spPr>
-          <a:xfrm>
-            <a:off x="6446520" y="1051560"/>
-            <a:ext cx="5394960" cy="1325880"/>
-          </a:xfrm>
-          <a:prstGeom prst="rect">
-            <a:avLst/>
-          </a:prstGeom>
-          <a:noFill/>
-        </p:spPr>
-        <p:txBody>
-          <a:bodyPr wrap="square">
-            <a:spAutoFit/>
-          </a:bodyPr>
-          <a:lstStyle/>
-          <a:p>
-            <a:pPr algn="l"/>
-            <a:r>
-              <a:rPr sz="1200" b="1" i="0">
-                <a:solidFill>
-                  <a:srgbClr val="3B82F6"/>
-                </a:solidFill>
-              </a:rPr>
-              <a:t>Week 13</a:t>
-            </a:r>
-          </a:p>
-          <a:p>
-            <a:pPr algn="l">
-              <a:spcBef>
-                <a:spcPts val="400"/>
-              </a:spcBef>
-            </a:pPr>
-            <a:r>
-              <a:rPr sz="1100" b="0" i="0">
-                <a:solidFill>
-                  <a:srgbClr val="CBD5E1"/>
-                </a:solidFill>
-              </a:rPr>
-              <a:t>Scale benchmarks to 100×100 and 200×200 grids. Sweep density 5–50% in 5% steps to locate the A*/JPS4 cross-over point. This is the core dataset for the final report.</a:t>
-            </a:r>
-          </a:p>
-        </p:txBody>
-      </p:sp>
-      <p:sp>
-        <p:nvSpPr>
-          <p:cNvPr id="21" name="Oval 20"/>
-          <p:cNvSpPr/>
-          <p:nvPr/>
-        </p:nvSpPr>
-        <p:spPr>
-          <a:xfrm>
-            <a:off x="6080760" y="2606040"/>
-            <a:ext cx="201168" cy="201168"/>
-          </a:xfrm>
-          <a:prstGeom prst="ellipse">
-            <a:avLst/>
-          </a:prstGeom>
-          <a:solidFill>
-            <a:srgbClr val="10B981"/>
-          </a:solidFill>
-          <a:ln>
-            <a:noFill/>
-          </a:ln>
-        </p:spPr>
-        <p:style>
-          <a:lnRef idx="1">
-            <a:schemeClr val="accent1"/>
-          </a:lnRef>
-          <a:fillRef idx="3">
-            <a:schemeClr val="accent1"/>
-          </a:fillRef>
-          <a:effectRef idx="2">
-            <a:schemeClr val="accent1"/>
-          </a:effectRef>
-          <a:fontRef idx="minor">
-            <a:schemeClr val="lt1"/>
-          </a:fontRef>
-        </p:style>
-        <p:txBody>
-          <a:bodyPr rtlCol="0" anchor="ctr"/>
-          <a:lstStyle/>
-          <a:p>
-            <a:pPr algn="ctr"/>
-          </a:p>
-        </p:txBody>
-      </p:sp>
-      <p:sp>
-        <p:nvSpPr>
-          <p:cNvPr id="22" name="Rectangle 21"/>
-          <p:cNvSpPr/>
-          <p:nvPr/>
-        </p:nvSpPr>
-        <p:spPr>
-          <a:xfrm>
-            <a:off x="6172200" y="2807208"/>
-            <a:ext cx="18288" cy="1216152"/>
-          </a:xfrm>
-          <a:prstGeom prst="rect">
-            <a:avLst/>
-          </a:prstGeom>
-          <a:solidFill>
-            <a:srgbClr val="64748B"/>
-          </a:solidFill>
-          <a:ln>
-            <a:noFill/>
-          </a:ln>
-        </p:spPr>
-        <p:style>
-          <a:lnRef idx="1">
-            <a:schemeClr val="accent1"/>
-          </a:lnRef>
-          <a:fillRef idx="3">
-            <a:schemeClr val="accent1"/>
-          </a:fillRef>
-          <a:effectRef idx="2">
-            <a:schemeClr val="accent1"/>
-          </a:effectRef>
-          <a:fontRef idx="minor">
-            <a:schemeClr val="lt1"/>
-          </a:fontRef>
-        </p:style>
-        <p:txBody>
-          <a:bodyPr rtlCol="0" anchor="ctr"/>
-          <a:lstStyle/>
-          <a:p>
-            <a:pPr algn="ctr"/>
-          </a:p>
-        </p:txBody>
-      </p:sp>
-      <p:sp>
-        <p:nvSpPr>
-          <p:cNvPr id="23" name="TextBox 22"/>
-          <p:cNvSpPr txBox="1"/>
-          <p:nvPr/>
-        </p:nvSpPr>
-        <p:spPr>
-          <a:xfrm>
-            <a:off x="6446520" y="2468880"/>
-            <a:ext cx="5394960" cy="1325880"/>
-          </a:xfrm>
-          <a:prstGeom prst="rect">
-            <a:avLst/>
-          </a:prstGeom>
-          <a:noFill/>
-        </p:spPr>
-        <p:txBody>
-          <a:bodyPr wrap="square">
-            <a:spAutoFit/>
-          </a:bodyPr>
-          <a:lstStyle/>
-          <a:p>
-            <a:pPr algn="l"/>
-            <a:r>
-              <a:rPr sz="1200" b="1" i="0">
-                <a:solidFill>
-                  <a:srgbClr val="10B981"/>
-                </a:solidFill>
-              </a:rPr>
-              <a:t>Week 13</a:t>
-            </a:r>
-          </a:p>
-          <a:p>
-            <a:pPr algn="l">
-              <a:spcBef>
-                <a:spcPts val="400"/>
-              </a:spcBef>
-            </a:pPr>
-            <a:r>
-              <a:rPr sz="1100" b="0" i="0">
-                <a:solidFill>
-                  <a:srgbClr val="CBD5E1"/>
-                </a:solidFill>
-              </a:rPr>
-              <a:t>Complete the Snake-game visualization. Each algorithm shown separately with explored cells colored distinctly — makes the search strategies immediately visible.</a:t>
-            </a:r>
-          </a:p>
-        </p:txBody>
-      </p:sp>
-      <p:sp>
-        <p:nvSpPr>
-          <p:cNvPr id="24" name="Oval 23"/>
-          <p:cNvSpPr/>
-          <p:nvPr/>
-        </p:nvSpPr>
-        <p:spPr>
-          <a:xfrm>
-            <a:off x="6080760" y="4023360"/>
-            <a:ext cx="201168" cy="201168"/>
-          </a:xfrm>
-          <a:prstGeom prst="ellipse">
-            <a:avLst/>
-          </a:prstGeom>
-          <a:solidFill>
-            <a:srgbClr val="F59E0B"/>
-          </a:solidFill>
-          <a:ln>
-            <a:noFill/>
-          </a:ln>
-        </p:spPr>
-        <p:style>
-          <a:lnRef idx="1">
-            <a:schemeClr val="accent1"/>
-          </a:lnRef>
-          <a:fillRef idx="3">
-            <a:schemeClr val="accent1"/>
-          </a:fillRef>
-          <a:effectRef idx="2">
-            <a:schemeClr val="accent1"/>
-          </a:effectRef>
-          <a:fontRef idx="minor">
-            <a:schemeClr val="lt1"/>
-          </a:fontRef>
-        </p:style>
-        <p:txBody>
-          <a:bodyPr rtlCol="0" anchor="ctr"/>
-          <a:lstStyle/>
-          <a:p>
-            <a:pPr algn="ctr"/>
-          </a:p>
-        </p:txBody>
-      </p:sp>
-      <p:sp>
-        <p:nvSpPr>
-          <p:cNvPr id="25" name="Rectangle 24"/>
-          <p:cNvSpPr/>
-          <p:nvPr/>
-        </p:nvSpPr>
-        <p:spPr>
-          <a:xfrm>
-            <a:off x="6172200" y="4224528"/>
-            <a:ext cx="18288" cy="1216152"/>
-          </a:xfrm>
-          <a:prstGeom prst="rect">
-            <a:avLst/>
-          </a:prstGeom>
-          <a:solidFill>
-            <a:srgbClr val="64748B"/>
-          </a:solidFill>
-          <a:ln>
-            <a:noFill/>
-          </a:ln>
-        </p:spPr>
-        <p:style>
-          <a:lnRef idx="1">
-            <a:schemeClr val="accent1"/>
-          </a:lnRef>
-          <a:fillRef idx="3">
-            <a:schemeClr val="accent1"/>
-          </a:fillRef>
-          <a:effectRef idx="2">
-            <a:schemeClr val="accent1"/>
-          </a:effectRef>
-          <a:fontRef idx="minor">
-            <a:schemeClr val="lt1"/>
-          </a:fontRef>
-        </p:style>
-        <p:txBody>
-          <a:bodyPr rtlCol="0" anchor="ctr"/>
-          <a:lstStyle/>
-          <a:p>
-            <a:pPr algn="ctr"/>
-          </a:p>
-        </p:txBody>
-      </p:sp>
-      <p:sp>
-        <p:nvSpPr>
-          <p:cNvPr id="26" name="TextBox 25"/>
-          <p:cNvSpPr txBox="1"/>
-          <p:nvPr/>
-        </p:nvSpPr>
-        <p:spPr>
-          <a:xfrm>
-            <a:off x="6446520" y="3886200"/>
-            <a:ext cx="5394960" cy="1325880"/>
-          </a:xfrm>
-          <a:prstGeom prst="rect">
-            <a:avLst/>
-          </a:prstGeom>
-          <a:noFill/>
-        </p:spPr>
-        <p:txBody>
-          <a:bodyPr wrap="square">
-            <a:spAutoFit/>
-          </a:bodyPr>
-          <a:lstStyle/>
-          <a:p>
-            <a:pPr algn="l"/>
-            <a:r>
-              <a:rPr sz="1200" b="1" i="0">
-                <a:solidFill>
-                  <a:srgbClr val="F59E0B"/>
-                </a:solidFill>
-              </a:rPr>
-              <a:t>Week 14</a:t>
-            </a:r>
-          </a:p>
-          <a:p>
-            <a:pPr algn="l">
-              <a:spcBef>
-                <a:spcPts val="400"/>
-              </a:spcBef>
-            </a:pPr>
-            <a:r>
-              <a:rPr sz="1100" b="0" i="0">
-                <a:solidFill>
-                  <a:srgbClr val="CBD5E1"/>
-                </a:solidFill>
-              </a:rPr>
-              <a:t>Finalize all tables and figures. Write the discussion comparing results to literature. Bring the paper to final submission quality.</a:t>
-            </a:r>
-          </a:p>
-        </p:txBody>
-      </p:sp>
-      <p:sp>
-        <p:nvSpPr>
-          <p:cNvPr id="27" name="Oval 26"/>
-          <p:cNvSpPr/>
-          <p:nvPr/>
-        </p:nvSpPr>
-        <p:spPr>
-          <a:xfrm>
-            <a:off x="6080760" y="5440680"/>
-            <a:ext cx="201168" cy="201168"/>
-          </a:xfrm>
-          <a:prstGeom prst="ellipse">
-            <a:avLst/>
-          </a:prstGeom>
-          <a:solidFill>
-            <a:srgbClr val="64748B"/>
-          </a:solidFill>
-          <a:ln>
-            <a:noFill/>
-          </a:ln>
-        </p:spPr>
-        <p:style>
-          <a:lnRef idx="1">
-            <a:schemeClr val="accent1"/>
-          </a:lnRef>
-          <a:fillRef idx="3">
-            <a:schemeClr val="accent1"/>
-          </a:fillRef>
-          <a:effectRef idx="2">
-            <a:schemeClr val="accent1"/>
-          </a:effectRef>
-          <a:fontRef idx="minor">
-            <a:schemeClr val="lt1"/>
-          </a:fontRef>
-        </p:style>
-        <p:txBody>
-          <a:bodyPr rtlCol="0" anchor="ctr"/>
-          <a:lstStyle/>
-          <a:p>
-            <a:pPr algn="ctr"/>
-          </a:p>
-        </p:txBody>
-      </p:sp>
-      <p:sp>
-        <p:nvSpPr>
-          <p:cNvPr id="28" name="TextBox 27"/>
-          <p:cNvSpPr txBox="1"/>
-          <p:nvPr/>
-        </p:nvSpPr>
-        <p:spPr>
-          <a:xfrm>
-            <a:off x="6446520" y="5303520"/>
-            <a:ext cx="5394960" cy="1325880"/>
-          </a:xfrm>
-          <a:prstGeom prst="rect">
-            <a:avLst/>
-          </a:prstGeom>
-          <a:noFill/>
-        </p:spPr>
-        <p:txBody>
-          <a:bodyPr wrap="square">
-            <a:spAutoFit/>
-          </a:bodyPr>
-          <a:lstStyle/>
-          <a:p>
-            <a:pPr algn="l"/>
-            <a:r>
-              <a:rPr sz="1200" b="1" i="0">
-                <a:solidFill>
-                  <a:srgbClr val="64748B"/>
-                </a:solidFill>
-              </a:rPr>
-              <a:t>Week 15</a:t>
-            </a:r>
-          </a:p>
-          <a:p>
-            <a:pPr algn="l">
-              <a:spcBef>
-                <a:spcPts val="400"/>
-              </a:spcBef>
-            </a:pPr>
-            <a:r>
-              <a:rPr sz="1100" b="0" i="0">
-                <a:solidFill>
-                  <a:srgbClr val="CBD5E1"/>
-                </a:solidFill>
-              </a:rPr>
-              <a:t>Prepare final presentation slides. Rehearse the live demo. Submit by deadline.</a:t>
-            </a:r>
-          </a:p>
-        </p:txBody>
-      </p:sp>
-      <p:sp>
-        <p:nvSpPr>
-          <p:cNvPr id="29" name="TextBox 28"/>
-          <p:cNvSpPr txBox="1"/>
-          <p:nvPr/>
-        </p:nvSpPr>
-        <p:spPr>
-          <a:xfrm>
-            <a:off x="11430000" y="6492240"/>
-            <a:ext cx="731520" cy="274320"/>
-          </a:xfrm>
-          <a:prstGeom prst="rect">
-            <a:avLst/>
-          </a:prstGeom>
-          <a:noFill/>
-        </p:spPr>
-        <p:txBody>
-          <a:bodyPr wrap="square">
-            <a:spAutoFit/>
-          </a:bodyPr>
-          <a:lstStyle/>
-          <a:p>
-            <a:pPr algn="r"/>
-            <a:r>
-              <a:rPr sz="1000" b="0" i="0">
-                <a:solidFill>
-                  <a:srgbClr val="64748B"/>
-                </a:solidFill>
-              </a:rPr>
-              <a:t>5 / 5</a:t>
+              <a:t>4 / 4</a:t>
             </a:r>
           </a:p>
         </p:txBody>

--- a/Proj/report/ADA_Interim_Presentation.pptx
+++ b/Proj/report/ADA_Interim_Presentation.pptx
@@ -9,8 +9,9 @@
     <p:sldId id="257" r:id="rId8"/>
     <p:sldId id="258" r:id="rId9"/>
     <p:sldId id="259" r:id="rId10"/>
+    <p:sldId id="260" r:id="rId11"/>
   </p:sldIdLst>
-  <p:sldSz cx="12191695" cy="6858000" type="screen4x3"/>
+  <p:sldSz cx="12188952" cy="6858000" type="screen4x3"/>
   <p:notesSz cx="6858000" cy="9144000"/>
   <p:defaultTextStyle>
     <a:defPPr>
@@ -3084,6 +3085,14 @@
 <file path=ppt/slides/slide1.xml><?xml version="1.0" encoding="utf-8"?>
 <p:sld xmlns:a="http://schemas.openxmlformats.org/drawingml/2006/main" xmlns:p="http://schemas.openxmlformats.org/presentationml/2006/main" xmlns:r="http://schemas.openxmlformats.org/officeDocument/2006/relationships">
   <p:cSld>
+    <p:bg>
+      <p:bgPr>
+        <a:solidFill>
+          <a:srgbClr val="0F172A"/>
+        </a:solidFill>
+        <a:effectLst/>
+      </p:bgPr>
+    </p:bg>
     <p:spTree>
       <p:nvGrpSpPr>
         <p:cNvPr id="1" name=""/>
@@ -3100,18 +3109,17 @@
         <p:spPr>
           <a:xfrm>
             <a:off x="0" y="0"/>
-            <a:ext cx="12191695" cy="6858000"/>
+            <a:ext cx="365760" cy="6858000"/>
           </a:xfrm>
           <a:prstGeom prst="rect">
             <a:avLst/>
           </a:prstGeom>
           <a:solidFill>
-            <a:srgbClr val="0F172A"/>
+            <a:srgbClr val="3B82F6"/>
           </a:solidFill>
           <a:ln>
             <a:noFill/>
           </a:ln>
-          <a:effectLst/>
         </p:spPr>
         <p:style>
           <a:lnRef idx="1">
@@ -3137,25 +3145,24 @@
       </p:sp>
       <p:sp>
         <p:nvSpPr>
-          <p:cNvPr id="3" name="Rectangle 2"/>
+          <p:cNvPr id="3" name="Oval 2"/>
           <p:cNvSpPr/>
           <p:nvPr/>
         </p:nvSpPr>
         <p:spPr>
           <a:xfrm>
-            <a:off x="0" y="0"/>
-            <a:ext cx="228600" cy="6858000"/>
-          </a:xfrm>
-          <a:prstGeom prst="rect">
+            <a:off x="9601200" y="-731520"/>
+            <a:ext cx="2926080" cy="2926080"/>
+          </a:xfrm>
+          <a:prstGeom prst="ellipse">
             <a:avLst/>
           </a:prstGeom>
           <a:solidFill>
-            <a:srgbClr val="38BDF8"/>
+            <a:srgbClr val="1E293B"/>
           </a:solidFill>
           <a:ln>
             <a:noFill/>
           </a:ln>
-          <a:effectLst/>
         </p:spPr>
         <p:style>
           <a:lnRef idx="1">
@@ -3179,30 +3186,40 @@
           </a:p>
         </p:txBody>
       </p:sp>
-      <p:pic>
-        <p:nvPicPr>
-          <p:cNvPr id="4" name="Picture 3" descr="jps_concept.png"/>
-          <p:cNvPicPr>
-            <a:picLocks noChangeAspect="1"/>
-          </p:cNvPicPr>
-          <p:nvPr/>
-        </p:nvPicPr>
-        <p:blipFill>
-          <a:blip r:embed="rId2"/>
-          <a:stretch>
-            <a:fillRect/>
-          </a:stretch>
-        </p:blipFill>
-        <p:spPr>
-          <a:xfrm>
-            <a:off x="8229600" y="1920240"/>
-            <a:ext cx="3672418" cy="3108960"/>
-          </a:xfrm>
-          <a:prstGeom prst="rect">
-            <a:avLst/>
-          </a:prstGeom>
-        </p:spPr>
-      </p:pic>
+      <p:sp>
+        <p:nvSpPr>
+          <p:cNvPr id="4" name="TextBox 3"/>
+          <p:cNvSpPr txBox="1"/>
+          <p:nvPr/>
+        </p:nvSpPr>
+        <p:spPr>
+          <a:xfrm>
+            <a:off x="731520" y="1371600"/>
+            <a:ext cx="10058400" cy="365760"/>
+          </a:xfrm>
+          <a:prstGeom prst="rect">
+            <a:avLst/>
+          </a:prstGeom>
+          <a:noFill/>
+        </p:spPr>
+        <p:txBody>
+          <a:bodyPr wrap="square">
+            <a:spAutoFit/>
+          </a:bodyPr>
+          <a:lstStyle/>
+          <a:p>
+            <a:pPr algn="l"/>
+            <a:r>
+              <a:rPr sz="1100" b="1" i="0">
+                <a:solidFill>
+                  <a:srgbClr val="3B82F6"/>
+                </a:solidFill>
+              </a:rPr>
+              <a:t>ADA INTERIM DEMO  ·  WEEK 13  ·  APRIL 2026</a:t>
+            </a:r>
+          </a:p>
+        </p:txBody>
+      </p:sp>
       <p:sp>
         <p:nvSpPr>
           <p:cNvPr id="5" name="TextBox 4"/>
@@ -3211,8 +3228,8 @@
         </p:nvSpPr>
         <p:spPr>
           <a:xfrm>
-            <a:off x="822960" y="1280160"/>
-            <a:ext cx="10058400" cy="365760"/>
+            <a:off x="731520" y="1828800"/>
+            <a:ext cx="10058400" cy="1645920"/>
           </a:xfrm>
           <a:prstGeom prst="rect">
             <a:avLst/>
@@ -3220,20 +3237,34 @@
           <a:noFill/>
         </p:spPr>
         <p:txBody>
-          <a:bodyPr wrap="square" lIns="0" rIns="0" tIns="0" bIns="0" anchor="t">
+          <a:bodyPr wrap="square">
             <a:spAutoFit/>
           </a:bodyPr>
           <a:lstStyle/>
           <a:p>
             <a:pPr algn="l"/>
             <a:r>
-              <a:rPr sz="1100" b="1">
-                <a:solidFill>
-                  <a:srgbClr val="38BDF8"/>
-                </a:solidFill>
-                <a:latin typeface="Calibri"/>
-              </a:rPr>
-              <a:t>HABIB UNIVERSITY  |  ALGORITHM DESIGN &amp; ANALYSIS</a:t>
+              <a:rPr sz="3600" b="1" i="0">
+                <a:solidFill>
+                  <a:srgbClr val="FFFFFF"/>
+                </a:solidFill>
+              </a:rPr>
+              <a:t>Benchmarking Shortest-Path</a:t>
+            </a:r>
+          </a:p>
+          <a:p>
+            <a:pPr algn="l">
+              <a:spcBef>
+                <a:spcPts val="200"/>
+              </a:spcBef>
+            </a:pPr>
+            <a:r>
+              <a:rPr sz="3600" b="1" i="0">
+                <a:solidFill>
+                  <a:srgbClr val="FFFFFF"/>
+                </a:solidFill>
+              </a:rPr>
+              <a:t>Algorithms on 4-Connected Grid Maps</a:t>
             </a:r>
           </a:p>
         </p:txBody>
@@ -3246,8 +3277,8 @@
         </p:nvSpPr>
         <p:spPr>
           <a:xfrm>
-            <a:off x="822960" y="1737360"/>
-            <a:ext cx="7315200" cy="1280160"/>
+            <a:off x="731520" y="3520440"/>
+            <a:ext cx="9144000" cy="457200"/>
           </a:xfrm>
           <a:prstGeom prst="rect">
             <a:avLst/>
@@ -3255,117 +3286,43 @@
           <a:noFill/>
         </p:spPr>
         <p:txBody>
-          <a:bodyPr wrap="square" lIns="0" rIns="0" tIns="0" bIns="0" anchor="t">
+          <a:bodyPr wrap="square">
             <a:spAutoFit/>
           </a:bodyPr>
           <a:lstStyle/>
           <a:p>
             <a:pPr algn="l"/>
             <a:r>
-              <a:rPr sz="4000" b="1">
-                <a:solidFill>
-                  <a:srgbClr val="EEF2F7"/>
-                </a:solidFill>
-                <a:latin typeface="Calibri"/>
-              </a:rPr>
-              <a:t>Comparing Shortest-Path</a:t>
-            </a:r>
-          </a:p>
-        </p:txBody>
-      </p:sp>
-      <p:sp>
-        <p:nvSpPr>
-          <p:cNvPr id="7" name="TextBox 6"/>
-          <p:cNvSpPr txBox="1"/>
-          <p:nvPr/>
-        </p:nvSpPr>
-        <p:spPr>
-          <a:xfrm>
-            <a:off x="822960" y="2468880"/>
-            <a:ext cx="7315200" cy="914400"/>
-          </a:xfrm>
-          <a:prstGeom prst="rect">
-            <a:avLst/>
-          </a:prstGeom>
-          <a:noFill/>
-        </p:spPr>
-        <p:txBody>
-          <a:bodyPr wrap="square" lIns="0" rIns="0" tIns="0" bIns="0" anchor="t">
-            <a:spAutoFit/>
-          </a:bodyPr>
-          <a:lstStyle/>
-          <a:p>
-            <a:pPr algn="l"/>
-            <a:r>
-              <a:rPr sz="4000" b="1">
-                <a:solidFill>
-                  <a:srgbClr val="EEF2F7"/>
-                </a:solidFill>
-                <a:latin typeface="Calibri"/>
-              </a:rPr>
-              <a:t>Algorithms on Grid Maps</a:t>
-            </a:r>
-          </a:p>
-        </p:txBody>
-      </p:sp>
-      <p:sp>
-        <p:nvSpPr>
-          <p:cNvPr id="8" name="TextBox 7"/>
-          <p:cNvSpPr txBox="1"/>
-          <p:nvPr/>
-        </p:nvSpPr>
-        <p:spPr>
-          <a:xfrm>
-            <a:off x="822960" y="3246120"/>
-            <a:ext cx="7315200" cy="457200"/>
-          </a:xfrm>
-          <a:prstGeom prst="rect">
-            <a:avLst/>
-          </a:prstGeom>
-          <a:noFill/>
-        </p:spPr>
-        <p:txBody>
-          <a:bodyPr wrap="square" lIns="0" rIns="0" tIns="0" bIns="0" anchor="t">
-            <a:spAutoFit/>
-          </a:bodyPr>
-          <a:lstStyle/>
-          <a:p>
-            <a:pPr algn="l"/>
-            <a:r>
-              <a:rPr sz="1600" b="0">
-                <a:solidFill>
-                  <a:srgbClr val="94A3B8"/>
-                </a:solidFill>
-                <a:latin typeface="Calibri"/>
-              </a:rPr>
-              <a:t>Dijkstra vs A* vs JPS4 on 4-connected grids</a:t>
-            </a:r>
-          </a:p>
-        </p:txBody>
-      </p:sp>
-      <p:sp>
-        <p:nvSpPr>
-          <p:cNvPr id="9" name="Rounded Rectangle 8"/>
+              <a:rPr sz="1800" b="0" i="1">
+                <a:solidFill>
+                  <a:srgbClr val="10B981"/>
+                </a:solidFill>
+              </a:rPr>
+              <a:t>Dijkstra  ·  A*  ·  Jump Point Search (JPS4)</a:t>
+            </a:r>
+          </a:p>
+        </p:txBody>
+      </p:sp>
+      <p:sp>
+        <p:nvSpPr>
+          <p:cNvPr id="7" name="Rectangle 6"/>
           <p:cNvSpPr/>
           <p:nvPr/>
         </p:nvSpPr>
         <p:spPr>
           <a:xfrm>
-            <a:off x="822960" y="4023360"/>
-            <a:ext cx="1417320" cy="502920"/>
-          </a:xfrm>
-          <a:prstGeom prst="roundRect">
-            <a:avLst>
-              <a:gd name="adj" fmla="val 8000"/>
-            </a:avLst>
+            <a:off x="731520" y="4114800"/>
+            <a:ext cx="4114800" cy="36576"/>
+          </a:xfrm>
+          <a:prstGeom prst="rect">
+            <a:avLst/>
           </a:prstGeom>
           <a:solidFill>
-            <a:srgbClr val="E05C5C"/>
+            <a:srgbClr val="64748B"/>
           </a:solidFill>
           <a:ln>
             <a:noFill/>
           </a:ln>
-          <a:effectLst/>
         </p:spPr>
         <p:style>
           <a:lnRef idx="1">
@@ -3391,14 +3348,14 @@
       </p:sp>
       <p:sp>
         <p:nvSpPr>
-          <p:cNvPr id="10" name="TextBox 9"/>
+          <p:cNvPr id="8" name="TextBox 7"/>
           <p:cNvSpPr txBox="1"/>
           <p:nvPr/>
         </p:nvSpPr>
         <p:spPr>
           <a:xfrm>
-            <a:off x="822960" y="4023360"/>
-            <a:ext cx="1417320" cy="502920"/>
+            <a:off x="731520" y="4251960"/>
+            <a:ext cx="8229600" cy="1097280"/>
           </a:xfrm>
           <a:prstGeom prst="rect">
             <a:avLst/>
@@ -3406,80 +3363,63 @@
           <a:noFill/>
         </p:spPr>
         <p:txBody>
-          <a:bodyPr wrap="square" lIns="0" rIns="0" tIns="0" bIns="0" anchor="ctr">
+          <a:bodyPr wrap="square">
             <a:spAutoFit/>
           </a:bodyPr>
           <a:lstStyle/>
           <a:p>
-            <a:pPr algn="ctr"/>
-            <a:r>
-              <a:rPr sz="1600" b="1">
-                <a:solidFill>
-                  <a:srgbClr val="EEF2F7"/>
-                </a:solidFill>
-                <a:latin typeface="Calibri"/>
-              </a:rPr>
-              <a:t>Dijkstra</a:t>
-            </a:r>
-          </a:p>
-        </p:txBody>
-      </p:sp>
-      <p:sp>
-        <p:nvSpPr>
-          <p:cNvPr id="11" name="Rounded Rectangle 10"/>
-          <p:cNvSpPr/>
-          <p:nvPr/>
-        </p:nvSpPr>
-        <p:spPr>
-          <a:xfrm>
-            <a:off x="2331720" y="4023360"/>
-            <a:ext cx="1417320" cy="502920"/>
-          </a:xfrm>
-          <a:prstGeom prst="roundRect">
-            <a:avLst>
-              <a:gd name="adj" fmla="val 8000"/>
-            </a:avLst>
-          </a:prstGeom>
-          <a:solidFill>
-            <a:srgbClr val="4D94E0"/>
-          </a:solidFill>
-          <a:ln>
-            <a:noFill/>
-          </a:ln>
-          <a:effectLst/>
-        </p:spPr>
-        <p:style>
-          <a:lnRef idx="1">
-            <a:schemeClr val="accent1"/>
-          </a:lnRef>
-          <a:fillRef idx="3">
-            <a:schemeClr val="accent1"/>
-          </a:fillRef>
-          <a:effectRef idx="2">
-            <a:schemeClr val="accent1"/>
-          </a:effectRef>
-          <a:fontRef idx="minor">
-            <a:schemeClr val="lt1"/>
-          </a:fontRef>
-        </p:style>
-        <p:txBody>
-          <a:bodyPr rtlCol="0" anchor="ctr"/>
-          <a:lstStyle/>
-          <a:p>
-            <a:pPr algn="ctr"/>
-          </a:p>
-        </p:txBody>
-      </p:sp>
-      <p:sp>
-        <p:nvSpPr>
-          <p:cNvPr id="12" name="TextBox 11"/>
+            <a:pPr algn="l"/>
+            <a:r>
+              <a:rPr sz="1400" b="1" i="0">
+                <a:solidFill>
+                  <a:srgbClr val="CBD5E1"/>
+                </a:solidFill>
+              </a:rPr>
+              <a:t>Jazib Waqas   ·   Salman Adnan   ·   Hunain Abbas</a:t>
+            </a:r>
+          </a:p>
+          <a:p>
+            <a:pPr algn="l">
+              <a:spcBef>
+                <a:spcPts val="400"/>
+              </a:spcBef>
+            </a:pPr>
+            <a:r>
+              <a:rPr sz="1100" b="0" i="0">
+                <a:solidFill>
+                  <a:srgbClr val="64748B"/>
+                </a:solidFill>
+              </a:rPr>
+              <a:t>jw08048  ·  sa07885  ·  sh08466</a:t>
+            </a:r>
+          </a:p>
+          <a:p>
+            <a:pPr algn="l">
+              <a:spcBef>
+                <a:spcPts val="200"/>
+              </a:spcBef>
+            </a:pPr>
+            <a:r>
+              <a:rPr sz="1100" b="0" i="0">
+                <a:solidFill>
+                  <a:srgbClr val="64748B"/>
+                </a:solidFill>
+              </a:rPr>
+              <a:t>Habib University</a:t>
+            </a:r>
+          </a:p>
+        </p:txBody>
+      </p:sp>
+      <p:sp>
+        <p:nvSpPr>
+          <p:cNvPr id="9" name="TextBox 8"/>
           <p:cNvSpPr txBox="1"/>
           <p:nvPr/>
         </p:nvSpPr>
         <p:spPr>
           <a:xfrm>
-            <a:off x="2331720" y="4023360"/>
-            <a:ext cx="1417320" cy="502920"/>
+            <a:off x="11430000" y="6492240"/>
+            <a:ext cx="731520" cy="274320"/>
           </a:xfrm>
           <a:prstGeom prst="rect">
             <a:avLst/>
@@ -3487,276 +3427,19 @@
           <a:noFill/>
         </p:spPr>
         <p:txBody>
-          <a:bodyPr wrap="square" lIns="0" rIns="0" tIns="0" bIns="0" anchor="ctr">
+          <a:bodyPr wrap="square">
             <a:spAutoFit/>
           </a:bodyPr>
           <a:lstStyle/>
           <a:p>
-            <a:pPr algn="ctr"/>
-            <a:r>
-              <a:rPr sz="1600" b="1">
-                <a:solidFill>
-                  <a:srgbClr val="EEF2F7"/>
-                </a:solidFill>
-                <a:latin typeface="Calibri"/>
-              </a:rPr>
-              <a:t>A*</a:t>
-            </a:r>
-          </a:p>
-        </p:txBody>
-      </p:sp>
-      <p:sp>
-        <p:nvSpPr>
-          <p:cNvPr id="13" name="Rounded Rectangle 12"/>
-          <p:cNvSpPr/>
-          <p:nvPr/>
-        </p:nvSpPr>
-        <p:spPr>
-          <a:xfrm>
-            <a:off x="3840480" y="4023360"/>
-            <a:ext cx="1417320" cy="502920"/>
-          </a:xfrm>
-          <a:prstGeom prst="roundRect">
-            <a:avLst>
-              <a:gd name="adj" fmla="val 8000"/>
-            </a:avLst>
-          </a:prstGeom>
-          <a:solidFill>
-            <a:srgbClr val="2CA02C"/>
-          </a:solidFill>
-          <a:ln>
-            <a:noFill/>
-          </a:ln>
-          <a:effectLst/>
-        </p:spPr>
-        <p:style>
-          <a:lnRef idx="1">
-            <a:schemeClr val="accent1"/>
-          </a:lnRef>
-          <a:fillRef idx="3">
-            <a:schemeClr val="accent1"/>
-          </a:fillRef>
-          <a:effectRef idx="2">
-            <a:schemeClr val="accent1"/>
-          </a:effectRef>
-          <a:fontRef idx="minor">
-            <a:schemeClr val="lt1"/>
-          </a:fontRef>
-        </p:style>
-        <p:txBody>
-          <a:bodyPr rtlCol="0" anchor="ctr"/>
-          <a:lstStyle/>
-          <a:p>
-            <a:pPr algn="ctr"/>
-          </a:p>
-        </p:txBody>
-      </p:sp>
-      <p:sp>
-        <p:nvSpPr>
-          <p:cNvPr id="14" name="TextBox 13"/>
-          <p:cNvSpPr txBox="1"/>
-          <p:nvPr/>
-        </p:nvSpPr>
-        <p:spPr>
-          <a:xfrm>
-            <a:off x="3840480" y="4023360"/>
-            <a:ext cx="1417320" cy="502920"/>
-          </a:xfrm>
-          <a:prstGeom prst="rect">
-            <a:avLst/>
-          </a:prstGeom>
-          <a:noFill/>
-        </p:spPr>
-        <p:txBody>
-          <a:bodyPr wrap="square" lIns="0" rIns="0" tIns="0" bIns="0" anchor="ctr">
-            <a:spAutoFit/>
-          </a:bodyPr>
-          <a:lstStyle/>
-          <a:p>
-            <a:pPr algn="ctr"/>
-            <a:r>
-              <a:rPr sz="1600" b="1">
-                <a:solidFill>
-                  <a:srgbClr val="EEF2F7"/>
-                </a:solidFill>
-                <a:latin typeface="Calibri"/>
-              </a:rPr>
-              <a:t>JPS4</a:t>
-            </a:r>
-          </a:p>
-        </p:txBody>
-      </p:sp>
-      <p:sp>
-        <p:nvSpPr>
-          <p:cNvPr id="15" name="TextBox 14"/>
-          <p:cNvSpPr txBox="1"/>
-          <p:nvPr/>
-        </p:nvSpPr>
-        <p:spPr>
-          <a:xfrm>
-            <a:off x="822960" y="4937760"/>
-            <a:ext cx="7315200" cy="411480"/>
-          </a:xfrm>
-          <a:prstGeom prst="rect">
-            <a:avLst/>
-          </a:prstGeom>
-          <a:noFill/>
-        </p:spPr>
-        <p:txBody>
-          <a:bodyPr wrap="square" lIns="0" rIns="0" tIns="0" bIns="0" anchor="t">
-            <a:spAutoFit/>
-          </a:bodyPr>
-          <a:lstStyle/>
-          <a:p>
-            <a:pPr algn="l"/>
-            <a:r>
-              <a:rPr sz="1800" b="1">
-                <a:solidFill>
-                  <a:srgbClr val="94A3B8"/>
-                </a:solidFill>
-                <a:latin typeface="Calibri"/>
-              </a:rPr>
-              <a:t>Interim Progress Report</a:t>
-            </a:r>
-          </a:p>
-        </p:txBody>
-      </p:sp>
-      <p:sp>
-        <p:nvSpPr>
-          <p:cNvPr id="16" name="TextBox 15"/>
-          <p:cNvSpPr txBox="1"/>
-          <p:nvPr/>
-        </p:nvSpPr>
-        <p:spPr>
-          <a:xfrm>
-            <a:off x="822960" y="5440680"/>
-            <a:ext cx="7315200" cy="365760"/>
-          </a:xfrm>
-          <a:prstGeom prst="rect">
-            <a:avLst/>
-          </a:prstGeom>
-          <a:noFill/>
-        </p:spPr>
-        <p:txBody>
-          <a:bodyPr wrap="square" lIns="0" rIns="0" tIns="0" bIns="0" anchor="t">
-            <a:spAutoFit/>
-          </a:bodyPr>
-          <a:lstStyle/>
-          <a:p>
-            <a:pPr algn="l"/>
-            <a:r>
-              <a:rPr sz="1400" b="0">
-                <a:solidFill>
-                  <a:srgbClr val="EEF2F7"/>
-                </a:solidFill>
-                <a:latin typeface="Calibri"/>
-              </a:rPr>
-              <a:t>Jazib Waqas    |    Salman Adnan    |    Hunain Abbas</a:t>
-            </a:r>
-          </a:p>
-        </p:txBody>
-      </p:sp>
-      <p:sp>
-        <p:nvSpPr>
-          <p:cNvPr id="17" name="TextBox 16"/>
-          <p:cNvSpPr txBox="1"/>
-          <p:nvPr/>
-        </p:nvSpPr>
-        <p:spPr>
-          <a:xfrm>
-            <a:off x="822960" y="5806440"/>
-            <a:ext cx="7315200" cy="320040"/>
-          </a:xfrm>
-          <a:prstGeom prst="rect">
-            <a:avLst/>
-          </a:prstGeom>
-          <a:noFill/>
-        </p:spPr>
-        <p:txBody>
-          <a:bodyPr wrap="square" lIns="0" rIns="0" tIns="0" bIns="0" anchor="t">
-            <a:spAutoFit/>
-          </a:bodyPr>
-          <a:lstStyle/>
-          <a:p>
-            <a:pPr algn="l"/>
-            <a:r>
-              <a:rPr sz="1100" b="0">
+            <a:pPr algn="r"/>
+            <a:r>
+              <a:rPr sz="1000" b="0" i="0">
                 <a:solidFill>
                   <a:srgbClr val="64748B"/>
                 </a:solidFill>
-                <a:latin typeface="Calibri"/>
-              </a:rPr>
-              <a:t>jw08048 . sa07885 . sh08466</a:t>
-            </a:r>
-          </a:p>
-        </p:txBody>
-      </p:sp>
-      <p:sp>
-        <p:nvSpPr>
-          <p:cNvPr id="18" name="TextBox 17"/>
-          <p:cNvSpPr txBox="1"/>
-          <p:nvPr/>
-        </p:nvSpPr>
-        <p:spPr>
-          <a:xfrm>
-            <a:off x="457200" y="6492240"/>
-            <a:ext cx="5486400" cy="274320"/>
-          </a:xfrm>
-          <a:prstGeom prst="rect">
-            <a:avLst/>
-          </a:prstGeom>
-          <a:noFill/>
-        </p:spPr>
-        <p:txBody>
-          <a:bodyPr wrap="square" lIns="0" rIns="0" tIns="0" bIns="0" anchor="t">
-            <a:spAutoFit/>
-          </a:bodyPr>
-          <a:lstStyle/>
-          <a:p>
-            <a:pPr algn="l"/>
-            <a:r>
-              <a:rPr sz="900" b="0">
-                <a:solidFill>
-                  <a:srgbClr val="64748B"/>
-                </a:solidFill>
-                <a:latin typeface="Calibri"/>
-              </a:rPr>
-              <a:t>ADA Progress Report  |  Habib University  |  Spring 2026</a:t>
-            </a:r>
-          </a:p>
-        </p:txBody>
-      </p:sp>
-      <p:sp>
-        <p:nvSpPr>
-          <p:cNvPr id="19" name="TextBox 18"/>
-          <p:cNvSpPr txBox="1"/>
-          <p:nvPr/>
-        </p:nvSpPr>
-        <p:spPr>
-          <a:xfrm>
-            <a:off x="11094415" y="6492240"/>
-            <a:ext cx="640080" cy="274320"/>
-          </a:xfrm>
-          <a:prstGeom prst="rect">
-            <a:avLst/>
-          </a:prstGeom>
-          <a:noFill/>
-        </p:spPr>
-        <p:txBody>
-          <a:bodyPr wrap="square" lIns="0" rIns="0" tIns="0" bIns="0" anchor="t">
-            <a:spAutoFit/>
-          </a:bodyPr>
-          <a:lstStyle/>
-          <a:p>
-            <a:pPr algn="r"/>
-            <a:r>
-              <a:rPr sz="900" b="0">
-                <a:solidFill>
-                  <a:srgbClr val="64748B"/>
-                </a:solidFill>
-                <a:latin typeface="Calibri"/>
-              </a:rPr>
-              <a:t>1 / 4</a:t>
+              </a:rPr>
+              <a:t>1 / 5</a:t>
             </a:r>
           </a:p>
         </p:txBody>
@@ -3772,6 +3455,14 @@
 <file path=ppt/slides/slide2.xml><?xml version="1.0" encoding="utf-8"?>
 <p:sld xmlns:a="http://schemas.openxmlformats.org/drawingml/2006/main" xmlns:p="http://schemas.openxmlformats.org/presentationml/2006/main" xmlns:r="http://schemas.openxmlformats.org/officeDocument/2006/relationships">
   <p:cSld>
+    <p:bg>
+      <p:bgPr>
+        <a:solidFill>
+          <a:srgbClr val="0F172A"/>
+        </a:solidFill>
+        <a:effectLst/>
+      </p:bgPr>
+    </p:bg>
     <p:spTree>
       <p:nvGrpSpPr>
         <p:cNvPr id="1" name=""/>
@@ -3787,19 +3478,18 @@
         </p:nvSpPr>
         <p:spPr>
           <a:xfrm>
-            <a:off x="0" y="0"/>
-            <a:ext cx="12191695" cy="6858000"/>
+            <a:off x="0" y="502920"/>
+            <a:ext cx="12188952" cy="41148"/>
           </a:xfrm>
           <a:prstGeom prst="rect">
             <a:avLst/>
           </a:prstGeom>
           <a:solidFill>
-            <a:srgbClr val="0F172A"/>
+            <a:srgbClr val="3B82F6"/>
           </a:solidFill>
           <a:ln>
             <a:noFill/>
           </a:ln>
-          <a:effectLst/>
         </p:spPr>
         <p:style>
           <a:lnRef idx="1">
@@ -3825,25 +3515,231 @@
       </p:sp>
       <p:sp>
         <p:nvSpPr>
-          <p:cNvPr id="3" name="Rectangle 2"/>
+          <p:cNvPr id="3" name="TextBox 2"/>
+          <p:cNvSpPr txBox="1"/>
+          <p:nvPr/>
+        </p:nvSpPr>
+        <p:spPr>
+          <a:xfrm>
+            <a:off x="365760" y="109728"/>
+            <a:ext cx="8229600" cy="502920"/>
+          </a:xfrm>
+          <a:prstGeom prst="rect">
+            <a:avLst/>
+          </a:prstGeom>
+          <a:noFill/>
+        </p:spPr>
+        <p:txBody>
+          <a:bodyPr wrap="square">
+            <a:spAutoFit/>
+          </a:bodyPr>
+          <a:lstStyle/>
+          <a:p>
+            <a:pPr algn="l"/>
+            <a:r>
+              <a:rPr sz="2600" b="1" i="0">
+                <a:solidFill>
+                  <a:srgbClr val="FFFFFF"/>
+                </a:solidFill>
+              </a:rPr>
+              <a:t>Problem &amp; Motivation</a:t>
+            </a:r>
+          </a:p>
+        </p:txBody>
+      </p:sp>
+      <p:sp>
+        <p:nvSpPr>
+          <p:cNvPr id="4" name="TextBox 3"/>
+          <p:cNvSpPr txBox="1"/>
+          <p:nvPr/>
+        </p:nvSpPr>
+        <p:spPr>
+          <a:xfrm>
+            <a:off x="365760" y="822960"/>
+            <a:ext cx="5577840" cy="2286000"/>
+          </a:xfrm>
+          <a:prstGeom prst="rect">
+            <a:avLst/>
+          </a:prstGeom>
+          <a:noFill/>
+        </p:spPr>
+        <p:txBody>
+          <a:bodyPr wrap="square">
+            <a:spAutoFit/>
+          </a:bodyPr>
+          <a:lstStyle/>
+          <a:p>
+            <a:pPr algn="l"/>
+            <a:r>
+              <a:rPr sz="1400" b="1" i="0">
+                <a:solidFill>
+                  <a:srgbClr val="3B82F6"/>
+                </a:solidFill>
+              </a:rPr>
+              <a:t>What is the Problem?</a:t>
+            </a:r>
+          </a:p>
+          <a:p>
+            <a:pPr algn="l">
+              <a:spcBef>
+                <a:spcPts val="400"/>
+              </a:spcBef>
+            </a:pPr>
+            <a:r>
+              <a:rPr sz="1300" b="0" i="0">
+                <a:solidFill>
+                  <a:srgbClr val="CBD5E1"/>
+                </a:solidFill>
+              </a:rPr>
+              <a:t>Grid-based pathfinding: find the shortest path from A to B on a grid where some cells are blocked.</a:t>
+            </a:r>
+          </a:p>
+          <a:p>
+            <a:pPr algn="l">
+              <a:spcBef>
+                <a:spcPts val="600"/>
+              </a:spcBef>
+            </a:pPr>
+            <a:r>
+              <a:rPr sz="1300" b="0" i="0">
+                <a:solidFill>
+                  <a:srgbClr val="CBD5E1"/>
+                </a:solidFill>
+              </a:rPr>
+              <a:t>4-connected grid: each cell links to its 4 cardinal neighbours only (up, down, left, right) — no diagonals.</a:t>
+            </a:r>
+          </a:p>
+          <a:p>
+            <a:pPr algn="l">
+              <a:spcBef>
+                <a:spcPts val="600"/>
+              </a:spcBef>
+            </a:pPr>
+            <a:r>
+              <a:rPr sz="1300" b="0" i="0">
+                <a:solidFill>
+                  <a:srgbClr val="CBD5E1"/>
+                </a:solidFill>
+              </a:rPr>
+              <a:t>A naive search visits every reachable cell before confirming the shortest path. Too slow on large maps.</a:t>
+            </a:r>
+          </a:p>
+        </p:txBody>
+      </p:sp>
+      <p:sp>
+        <p:nvSpPr>
+          <p:cNvPr id="5" name="TextBox 4"/>
+          <p:cNvSpPr txBox="1"/>
+          <p:nvPr/>
+        </p:nvSpPr>
+        <p:spPr>
+          <a:xfrm>
+            <a:off x="365760" y="3200400"/>
+            <a:ext cx="5577840" cy="2286000"/>
+          </a:xfrm>
+          <a:prstGeom prst="rect">
+            <a:avLst/>
+          </a:prstGeom>
+          <a:noFill/>
+        </p:spPr>
+        <p:txBody>
+          <a:bodyPr wrap="square">
+            <a:spAutoFit/>
+          </a:bodyPr>
+          <a:lstStyle/>
+          <a:p>
+            <a:pPr algn="l"/>
+            <a:r>
+              <a:rPr sz="1400" b="1" i="0">
+                <a:solidFill>
+                  <a:srgbClr val="3B82F6"/>
+                </a:solidFill>
+              </a:rPr>
+              <a:t>Why Does It Matter?</a:t>
+            </a:r>
+          </a:p>
+          <a:p>
+            <a:pPr algn="l">
+              <a:spcBef>
+                <a:spcPts val="500"/>
+              </a:spcBef>
+            </a:pPr>
+            <a:r>
+              <a:rPr sz="1300" b="0" i="0">
+                <a:solidFill>
+                  <a:srgbClr val="CBD5E1"/>
+                </a:solidFill>
+              </a:rPr>
+              <a:t>🎮  Game AI — characters navigating around walls</a:t>
+            </a:r>
+          </a:p>
+          <a:p>
+            <a:pPr algn="l">
+              <a:spcBef>
+                <a:spcPts val="400"/>
+              </a:spcBef>
+            </a:pPr>
+            <a:r>
+              <a:rPr sz="1300" b="0" i="0">
+                <a:solidFill>
+                  <a:srgbClr val="CBD5E1"/>
+                </a:solidFill>
+              </a:rPr>
+              <a:t>🤖  Robotics — route planning in warehouses</a:t>
+            </a:r>
+          </a:p>
+          <a:p>
+            <a:pPr algn="l">
+              <a:spcBef>
+                <a:spcPts val="400"/>
+              </a:spcBef>
+            </a:pPr>
+            <a:r>
+              <a:rPr sz="1300" b="0" i="0">
+                <a:solidFill>
+                  <a:srgbClr val="CBD5E1"/>
+                </a:solidFill>
+              </a:rPr>
+              <a:t>📦  Logistics — efficient path finding on maps</a:t>
+            </a:r>
+          </a:p>
+          <a:p>
+            <a:pPr algn="l">
+              <a:spcBef>
+                <a:spcPts val="600"/>
+              </a:spcBef>
+            </a:pPr>
+            <a:r>
+              <a:rPr sz="1200" b="0" i="0">
+                <a:solidFill>
+                  <a:srgbClr val="64748B"/>
+                </a:solidFill>
+              </a:rPr>
+              <a:t>Pathfinding runs thousands of times per second in real systems — small improvements matter at scale.</a:t>
+            </a:r>
+          </a:p>
+        </p:txBody>
+      </p:sp>
+      <p:sp>
+        <p:nvSpPr>
+          <p:cNvPr id="6" name="Rectangle 5"/>
           <p:cNvSpPr/>
           <p:nvPr/>
         </p:nvSpPr>
         <p:spPr>
           <a:xfrm>
-            <a:off x="457200" y="502920"/>
-            <a:ext cx="73152" cy="502920"/>
+            <a:off x="6217920" y="914400"/>
+            <a:ext cx="5577840" cy="1691640"/>
           </a:xfrm>
           <a:prstGeom prst="rect">
             <a:avLst/>
           </a:prstGeom>
           <a:solidFill>
-            <a:srgbClr val="38BDF8"/>
+            <a:srgbClr val="1E293B"/>
           </a:solidFill>
           <a:ln>
             <a:noFill/>
           </a:ln>
-          <a:effectLst/>
         </p:spPr>
         <p:style>
           <a:lnRef idx="1">
@@ -3869,97 +3765,24 @@
       </p:sp>
       <p:sp>
         <p:nvSpPr>
-          <p:cNvPr id="4" name="TextBox 3"/>
-          <p:cNvSpPr txBox="1"/>
-          <p:nvPr/>
-        </p:nvSpPr>
-        <p:spPr>
-          <a:xfrm>
-            <a:off x="685800" y="457200"/>
-            <a:ext cx="10972800" cy="594360"/>
-          </a:xfrm>
-          <a:prstGeom prst="rect">
-            <a:avLst/>
-          </a:prstGeom>
-          <a:noFill/>
-        </p:spPr>
-        <p:txBody>
-          <a:bodyPr wrap="square" lIns="0" rIns="0" tIns="0" bIns="0" anchor="t">
-            <a:spAutoFit/>
-          </a:bodyPr>
-          <a:lstStyle/>
-          <a:p>
-            <a:pPr algn="l"/>
-            <a:r>
-              <a:rPr sz="2800" b="1">
-                <a:solidFill>
-                  <a:srgbClr val="EEF2F7"/>
-                </a:solidFill>
-                <a:latin typeface="Calibri"/>
-              </a:rPr>
-              <a:t>Three Algorithms, One Problem</a:t>
-            </a:r>
-          </a:p>
-        </p:txBody>
-      </p:sp>
-      <p:sp>
-        <p:nvSpPr>
-          <p:cNvPr id="5" name="TextBox 4"/>
-          <p:cNvSpPr txBox="1"/>
-          <p:nvPr/>
-        </p:nvSpPr>
-        <p:spPr>
-          <a:xfrm>
-            <a:off x="685800" y="1051560"/>
-            <a:ext cx="10972800" cy="365760"/>
-          </a:xfrm>
-          <a:prstGeom prst="rect">
-            <a:avLst/>
-          </a:prstGeom>
-          <a:noFill/>
-        </p:spPr>
-        <p:txBody>
-          <a:bodyPr wrap="square" lIns="0" rIns="0" tIns="0" bIns="0" anchor="t">
-            <a:spAutoFit/>
-          </a:bodyPr>
-          <a:lstStyle/>
-          <a:p>
-            <a:pPr algn="l"/>
-            <a:r>
-              <a:rPr sz="1300" b="0">
-                <a:solidFill>
-                  <a:srgbClr val="94A3B8"/>
-                </a:solidFill>
-                <a:latin typeface="Calibri"/>
-              </a:rPr>
-              <a:t>Shortest path on a 4-connected grid. Same input, very different behavior.</a:t>
-            </a:r>
-          </a:p>
-        </p:txBody>
-      </p:sp>
-      <p:sp>
-        <p:nvSpPr>
-          <p:cNvPr id="6" name="Rounded Rectangle 5"/>
+          <p:cNvPr id="7" name="Rectangle 6"/>
           <p:cNvSpPr/>
           <p:nvPr/>
         </p:nvSpPr>
         <p:spPr>
           <a:xfrm>
-            <a:off x="457200" y="1783080"/>
-            <a:ext cx="3657600" cy="4114800"/>
-          </a:xfrm>
-          <a:prstGeom prst="roundRect">
-            <a:avLst>
-              <a:gd name="adj" fmla="val 8000"/>
-            </a:avLst>
+            <a:off x="6217920" y="914400"/>
+            <a:ext cx="64008" cy="1691640"/>
+          </a:xfrm>
+          <a:prstGeom prst="rect">
+            <a:avLst/>
           </a:prstGeom>
           <a:solidFill>
-            <a:srgbClr val="22304D"/>
+            <a:srgbClr val="F59E0B"/>
           </a:solidFill>
           <a:ln>
             <a:noFill/>
           </a:ln>
-          <a:effectLst/>
         </p:spPr>
         <p:style>
           <a:lnRef idx="1">
@@ -3985,27 +3808,73 @@
       </p:sp>
       <p:sp>
         <p:nvSpPr>
-          <p:cNvPr id="7" name="Rounded Rectangle 6"/>
+          <p:cNvPr id="8" name="TextBox 7"/>
+          <p:cNvSpPr txBox="1"/>
+          <p:nvPr/>
+        </p:nvSpPr>
+        <p:spPr>
+          <a:xfrm>
+            <a:off x="6400800" y="1078992"/>
+            <a:ext cx="5212080" cy="1371600"/>
+          </a:xfrm>
+          <a:prstGeom prst="rect">
+            <a:avLst/>
+          </a:prstGeom>
+          <a:noFill/>
+        </p:spPr>
+        <p:txBody>
+          <a:bodyPr wrap="square">
+            <a:spAutoFit/>
+          </a:bodyPr>
+          <a:lstStyle/>
+          <a:p>
+            <a:pPr algn="l"/>
+            <a:r>
+              <a:rPr sz="1500" b="1" i="0">
+                <a:solidFill>
+                  <a:srgbClr val="F59E0B"/>
+                </a:solidFill>
+              </a:rPr>
+              <a:t>Dijkstra</a:t>
+            </a:r>
+          </a:p>
+          <a:p>
+            <a:pPr algn="l">
+              <a:spcBef>
+                <a:spcPts val="500"/>
+              </a:spcBef>
+            </a:pPr>
+            <a:r>
+              <a:rPr sz="1200" b="0" i="0">
+                <a:solidFill>
+                  <a:srgbClr val="CBD5E1"/>
+                </a:solidFill>
+              </a:rPr>
+              <a:t>No heuristic. Searches in all directions equally. Slow but guaranteed optimal.</a:t>
+            </a:r>
+          </a:p>
+        </p:txBody>
+      </p:sp>
+      <p:sp>
+        <p:nvSpPr>
+          <p:cNvPr id="9" name="Rectangle 8"/>
           <p:cNvSpPr/>
           <p:nvPr/>
         </p:nvSpPr>
         <p:spPr>
           <a:xfrm>
-            <a:off x="457200" y="1783080"/>
-            <a:ext cx="3657600" cy="640080"/>
-          </a:xfrm>
-          <a:prstGeom prst="roundRect">
-            <a:avLst>
-              <a:gd name="adj" fmla="val 8000"/>
-            </a:avLst>
+            <a:off x="6217920" y="2788920"/>
+            <a:ext cx="5577840" cy="1691640"/>
+          </a:xfrm>
+          <a:prstGeom prst="rect">
+            <a:avLst/>
           </a:prstGeom>
           <a:solidFill>
-            <a:srgbClr val="E05C5C"/>
+            <a:srgbClr val="1E293B"/>
           </a:solidFill>
           <a:ln>
             <a:noFill/>
           </a:ln>
-          <a:effectLst/>
         </p:spPr>
         <p:style>
           <a:lnRef idx="1">
@@ -4031,132 +3900,24 @@
       </p:sp>
       <p:sp>
         <p:nvSpPr>
-          <p:cNvPr id="8" name="TextBox 7"/>
-          <p:cNvSpPr txBox="1"/>
-          <p:nvPr/>
-        </p:nvSpPr>
-        <p:spPr>
-          <a:xfrm>
-            <a:off x="457200" y="1783080"/>
-            <a:ext cx="3657600" cy="640080"/>
-          </a:xfrm>
-          <a:prstGeom prst="rect">
-            <a:avLst/>
-          </a:prstGeom>
-          <a:noFill/>
-        </p:spPr>
-        <p:txBody>
-          <a:bodyPr wrap="square" lIns="0" rIns="0" tIns="0" bIns="0" anchor="ctr">
-            <a:spAutoFit/>
-          </a:bodyPr>
-          <a:lstStyle/>
-          <a:p>
-            <a:pPr algn="ctr"/>
-            <a:r>
-              <a:rPr sz="1800" b="1">
-                <a:solidFill>
-                  <a:srgbClr val="EEF2F7"/>
-                </a:solidFill>
-                <a:latin typeface="Calibri"/>
-              </a:rPr>
-              <a:t>DIJKSTRA</a:t>
-            </a:r>
-          </a:p>
-        </p:txBody>
-      </p:sp>
-      <p:sp>
-        <p:nvSpPr>
-          <p:cNvPr id="9" name="TextBox 8"/>
-          <p:cNvSpPr txBox="1"/>
-          <p:nvPr/>
-        </p:nvSpPr>
-        <p:spPr>
-          <a:xfrm>
-            <a:off x="731520" y="2606040"/>
-            <a:ext cx="3108960" cy="365760"/>
-          </a:xfrm>
-          <a:prstGeom prst="rect">
-            <a:avLst/>
-          </a:prstGeom>
-          <a:noFill/>
-        </p:spPr>
-        <p:txBody>
-          <a:bodyPr wrap="square" lIns="0" rIns="0" tIns="0" bIns="0" anchor="t">
-            <a:spAutoFit/>
-          </a:bodyPr>
-          <a:lstStyle/>
-          <a:p>
-            <a:pPr algn="l"/>
-            <a:r>
-              <a:rPr sz="1300" b="1">
-                <a:solidFill>
-                  <a:srgbClr val="E05C5C"/>
-                </a:solidFill>
-                <a:latin typeface="Calibri"/>
-              </a:rPr>
-              <a:t>The baseline</a:t>
-            </a:r>
-          </a:p>
-        </p:txBody>
-      </p:sp>
-      <p:sp>
-        <p:nvSpPr>
-          <p:cNvPr id="10" name="TextBox 9"/>
-          <p:cNvSpPr txBox="1"/>
-          <p:nvPr/>
-        </p:nvSpPr>
-        <p:spPr>
-          <a:xfrm>
-            <a:off x="731520" y="3017520"/>
-            <a:ext cx="3108960" cy="2103120"/>
-          </a:xfrm>
-          <a:prstGeom prst="rect">
-            <a:avLst/>
-          </a:prstGeom>
-          <a:noFill/>
-        </p:spPr>
-        <p:txBody>
-          <a:bodyPr wrap="square" lIns="0" rIns="0" tIns="0" bIns="0" anchor="t">
-            <a:spAutoFit/>
-          </a:bodyPr>
-          <a:lstStyle/>
-          <a:p>
-            <a:pPr algn="l"/>
-            <a:r>
-              <a:rPr sz="1100" b="0">
-                <a:solidFill>
-                  <a:srgbClr val="EEF2F7"/>
-                </a:solidFill>
-                <a:latin typeface="Calibri"/>
-              </a:rPr>
-              <a:t>Explores every reachable cell in order of distance from start. Always correct, but has no sense of where the goal is, so it essentially maps the entire reachable area first.</a:t>
-            </a:r>
-          </a:p>
-        </p:txBody>
-      </p:sp>
-      <p:sp>
-        <p:nvSpPr>
-          <p:cNvPr id="11" name="Rounded Rectangle 10"/>
+          <p:cNvPr id="10" name="Rectangle 9"/>
           <p:cNvSpPr/>
           <p:nvPr/>
         </p:nvSpPr>
         <p:spPr>
           <a:xfrm>
-            <a:off x="731520" y="4983480"/>
-            <a:ext cx="3108960" cy="731520"/>
-          </a:xfrm>
-          <a:prstGeom prst="roundRect">
-            <a:avLst>
-              <a:gd name="adj" fmla="val 8000"/>
-            </a:avLst>
+            <a:off x="6217920" y="2788920"/>
+            <a:ext cx="64008" cy="1691640"/>
+          </a:xfrm>
+          <a:prstGeom prst="rect">
+            <a:avLst/>
           </a:prstGeom>
           <a:solidFill>
-            <a:srgbClr val="1A253D"/>
+            <a:srgbClr val="10B981"/>
           </a:solidFill>
           <a:ln>
             <a:noFill/>
           </a:ln>
-          <a:effectLst/>
         </p:spPr>
         <p:style>
           <a:lnRef idx="1">
@@ -4182,14 +3943,14 @@
       </p:sp>
       <p:sp>
         <p:nvSpPr>
-          <p:cNvPr id="12" name="TextBox 11"/>
+          <p:cNvPr id="11" name="TextBox 10"/>
           <p:cNvSpPr txBox="1"/>
           <p:nvPr/>
         </p:nvSpPr>
         <p:spPr>
           <a:xfrm>
-            <a:off x="731520" y="5029200"/>
-            <a:ext cx="3108960" cy="320040"/>
+            <a:off x="6400800" y="2953512"/>
+            <a:ext cx="5212080" cy="1371600"/>
           </a:xfrm>
           <a:prstGeom prst="rect">
             <a:avLst/>
@@ -4197,82 +3958,58 @@
           <a:noFill/>
         </p:spPr>
         <p:txBody>
-          <a:bodyPr wrap="square" lIns="0" rIns="0" tIns="0" bIns="0" anchor="t">
+          <a:bodyPr wrap="square">
             <a:spAutoFit/>
           </a:bodyPr>
           <a:lstStyle/>
           <a:p>
-            <a:pPr algn="ctr"/>
-            <a:r>
-              <a:rPr sz="900" b="1">
-                <a:solidFill>
-                  <a:srgbClr val="94A3B8"/>
-                </a:solidFill>
-                <a:latin typeface="Calibri"/>
-              </a:rPr>
-              <a:t>Mechanism</a:t>
-            </a:r>
-          </a:p>
-        </p:txBody>
-      </p:sp>
-      <p:sp>
-        <p:nvSpPr>
-          <p:cNvPr id="13" name="TextBox 12"/>
-          <p:cNvSpPr txBox="1"/>
-          <p:nvPr/>
-        </p:nvSpPr>
-        <p:spPr>
-          <a:xfrm>
-            <a:off x="731520" y="5349240"/>
-            <a:ext cx="3108960" cy="320040"/>
-          </a:xfrm>
-          <a:prstGeom prst="rect">
-            <a:avLst/>
-          </a:prstGeom>
-          <a:noFill/>
-        </p:spPr>
-        <p:txBody>
-          <a:bodyPr wrap="square" lIns="0" rIns="0" tIns="0" bIns="0" anchor="t">
-            <a:spAutoFit/>
-          </a:bodyPr>
-          <a:lstStyle/>
-          <a:p>
-            <a:pPr algn="ctr"/>
-            <a:r>
-              <a:rPr sz="1300" b="1">
-                <a:solidFill>
-                  <a:srgbClr val="E05C5C"/>
-                </a:solidFill>
-                <a:latin typeface="Calibri"/>
-              </a:rPr>
-              <a:t>Uniform wavefront</a:t>
-            </a:r>
-          </a:p>
-        </p:txBody>
-      </p:sp>
-      <p:sp>
-        <p:nvSpPr>
-          <p:cNvPr id="14" name="Rounded Rectangle 13"/>
+            <a:pPr algn="l"/>
+            <a:r>
+              <a:rPr sz="1500" b="1" i="0">
+                <a:solidFill>
+                  <a:srgbClr val="10B981"/>
+                </a:solidFill>
+              </a:rPr>
+              <a:t>A*</a:t>
+            </a:r>
+          </a:p>
+          <a:p>
+            <a:pPr algn="l">
+              <a:spcBef>
+                <a:spcPts val="500"/>
+              </a:spcBef>
+            </a:pPr>
+            <a:r>
+              <a:rPr sz="1200" b="0" i="0">
+                <a:solidFill>
+                  <a:srgbClr val="CBD5E1"/>
+                </a:solidFill>
+              </a:rPr>
+              <a:t>Adds a heuristic (Manhattan distance). Focuses search toward the goal. Fast &amp; optimal.</a:t>
+            </a:r>
+          </a:p>
+        </p:txBody>
+      </p:sp>
+      <p:sp>
+        <p:nvSpPr>
+          <p:cNvPr id="12" name="Rectangle 11"/>
           <p:cNvSpPr/>
           <p:nvPr/>
         </p:nvSpPr>
         <p:spPr>
           <a:xfrm>
-            <a:off x="4297680" y="1783080"/>
-            <a:ext cx="3657600" cy="4114800"/>
-          </a:xfrm>
-          <a:prstGeom prst="roundRect">
-            <a:avLst>
-              <a:gd name="adj" fmla="val 8000"/>
-            </a:avLst>
+            <a:off x="6217920" y="4663440"/>
+            <a:ext cx="5577840" cy="1691640"/>
+          </a:xfrm>
+          <a:prstGeom prst="rect">
+            <a:avLst/>
           </a:prstGeom>
           <a:solidFill>
-            <a:srgbClr val="22304D"/>
+            <a:srgbClr val="1E293B"/>
           </a:solidFill>
           <a:ln>
             <a:noFill/>
           </a:ln>
-          <a:effectLst/>
         </p:spPr>
         <p:style>
           <a:lnRef idx="1">
@@ -4298,27 +4035,24 @@
       </p:sp>
       <p:sp>
         <p:nvSpPr>
-          <p:cNvPr id="15" name="Rounded Rectangle 14"/>
+          <p:cNvPr id="13" name="Rectangle 12"/>
           <p:cNvSpPr/>
           <p:nvPr/>
         </p:nvSpPr>
         <p:spPr>
           <a:xfrm>
-            <a:off x="4297680" y="1783080"/>
-            <a:ext cx="3657600" cy="640080"/>
-          </a:xfrm>
-          <a:prstGeom prst="roundRect">
-            <a:avLst>
-              <a:gd name="adj" fmla="val 8000"/>
-            </a:avLst>
+            <a:off x="6217920" y="4663440"/>
+            <a:ext cx="64008" cy="1691640"/>
+          </a:xfrm>
+          <a:prstGeom prst="rect">
+            <a:avLst/>
           </a:prstGeom>
           <a:solidFill>
-            <a:srgbClr val="4D94E0"/>
+            <a:srgbClr val="3B82F6"/>
           </a:solidFill>
           <a:ln>
             <a:noFill/>
           </a:ln>
-          <a:effectLst/>
         </p:spPr>
         <p:style>
           <a:lnRef idx="1">
@@ -4344,14 +4078,97 @@
       </p:sp>
       <p:sp>
         <p:nvSpPr>
+          <p:cNvPr id="14" name="TextBox 13"/>
+          <p:cNvSpPr txBox="1"/>
+          <p:nvPr/>
+        </p:nvSpPr>
+        <p:spPr>
+          <a:xfrm>
+            <a:off x="6400800" y="4828031"/>
+            <a:ext cx="5212080" cy="1371600"/>
+          </a:xfrm>
+          <a:prstGeom prst="rect">
+            <a:avLst/>
+          </a:prstGeom>
+          <a:noFill/>
+        </p:spPr>
+        <p:txBody>
+          <a:bodyPr wrap="square">
+            <a:spAutoFit/>
+          </a:bodyPr>
+          <a:lstStyle/>
+          <a:p>
+            <a:pPr algn="l"/>
+            <a:r>
+              <a:rPr sz="1500" b="1" i="0">
+                <a:solidFill>
+                  <a:srgbClr val="3B82F6"/>
+                </a:solidFill>
+              </a:rPr>
+              <a:t>JPS4</a:t>
+            </a:r>
+          </a:p>
+          <a:p>
+            <a:pPr algn="l">
+              <a:spcBef>
+                <a:spcPts val="500"/>
+              </a:spcBef>
+            </a:pPr>
+            <a:r>
+              <a:rPr sz="1200" b="0" i="0">
+                <a:solidFill>
+                  <a:srgbClr val="CBD5E1"/>
+                </a:solidFill>
+              </a:rPr>
+              <a:t>Skips empty space via jump points. Only stops where routing decisions are forced. Fewest expansions on open maps.</a:t>
+            </a:r>
+          </a:p>
+        </p:txBody>
+      </p:sp>
+      <p:sp>
+        <p:nvSpPr>
+          <p:cNvPr id="15" name="TextBox 14"/>
+          <p:cNvSpPr txBox="1"/>
+          <p:nvPr/>
+        </p:nvSpPr>
+        <p:spPr>
+          <a:xfrm>
+            <a:off x="365760" y="5989320"/>
+            <a:ext cx="11430000" cy="457200"/>
+          </a:xfrm>
+          <a:prstGeom prst="rect">
+            <a:avLst/>
+          </a:prstGeom>
+          <a:noFill/>
+        </p:spPr>
+        <p:txBody>
+          <a:bodyPr wrap="square">
+            <a:spAutoFit/>
+          </a:bodyPr>
+          <a:lstStyle/>
+          <a:p>
+            <a:pPr algn="l"/>
+            <a:r>
+              <a:rPr sz="1300" b="0" i="1">
+                <a:solidFill>
+                  <a:srgbClr val="10B981"/>
+                </a:solidFill>
+              </a:rPr>
+              <a:t>Our question: which algorithm visits the fewest cells — and why?</a:t>
+            </a:r>
+          </a:p>
+        </p:txBody>
+      </p:sp>
+      <p:sp>
+        <p:nvSpPr>
           <p:cNvPr id="16" name="TextBox 15"/>
           <p:cNvSpPr txBox="1"/>
           <p:nvPr/>
         </p:nvSpPr>
         <p:spPr>
           <a:xfrm>
-            <a:off x="4297680" y="1783080"/>
-            <a:ext cx="3657600" cy="640080"/>
+            <a:off x="11430000" y="6492240"/>
+            <a:ext cx="731520" cy="274320"/>
           </a:xfrm>
           <a:prstGeom prst="rect">
             <a:avLst/>
@@ -4359,624 +4176,19 @@
           <a:noFill/>
         </p:spPr>
         <p:txBody>
-          <a:bodyPr wrap="square" lIns="0" rIns="0" tIns="0" bIns="0" anchor="ctr">
+          <a:bodyPr wrap="square">
             <a:spAutoFit/>
           </a:bodyPr>
           <a:lstStyle/>
           <a:p>
-            <a:pPr algn="ctr"/>
-            <a:r>
-              <a:rPr sz="1800" b="1">
-                <a:solidFill>
-                  <a:srgbClr val="EEF2F7"/>
-                </a:solidFill>
-                <a:latin typeface="Calibri"/>
-              </a:rPr>
-              <a:t>A*</a:t>
-            </a:r>
-          </a:p>
-        </p:txBody>
-      </p:sp>
-      <p:sp>
-        <p:nvSpPr>
-          <p:cNvPr id="17" name="TextBox 16"/>
-          <p:cNvSpPr txBox="1"/>
-          <p:nvPr/>
-        </p:nvSpPr>
-        <p:spPr>
-          <a:xfrm>
-            <a:off x="4572000" y="2606040"/>
-            <a:ext cx="3108960" cy="365760"/>
-          </a:xfrm>
-          <a:prstGeom prst="rect">
-            <a:avLst/>
-          </a:prstGeom>
-          <a:noFill/>
-        </p:spPr>
-        <p:txBody>
-          <a:bodyPr wrap="square" lIns="0" rIns="0" tIns="0" bIns="0" anchor="t">
-            <a:spAutoFit/>
-          </a:bodyPr>
-          <a:lstStyle/>
-          <a:p>
-            <a:pPr algn="l"/>
-            <a:r>
-              <a:rPr sz="1300" b="1">
-                <a:solidFill>
-                  <a:srgbClr val="4D94E0"/>
-                </a:solidFill>
-                <a:latin typeface="Calibri"/>
-              </a:rPr>
-              <a:t>Heuristic guided</a:t>
-            </a:r>
-          </a:p>
-        </p:txBody>
-      </p:sp>
-      <p:sp>
-        <p:nvSpPr>
-          <p:cNvPr id="18" name="TextBox 17"/>
-          <p:cNvSpPr txBox="1"/>
-          <p:nvPr/>
-        </p:nvSpPr>
-        <p:spPr>
-          <a:xfrm>
-            <a:off x="4572000" y="3017520"/>
-            <a:ext cx="3108960" cy="2103120"/>
-          </a:xfrm>
-          <a:prstGeom prst="rect">
-            <a:avLst/>
-          </a:prstGeom>
-          <a:noFill/>
-        </p:spPr>
-        <p:txBody>
-          <a:bodyPr wrap="square" lIns="0" rIns="0" tIns="0" bIns="0" anchor="t">
-            <a:spAutoFit/>
-          </a:bodyPr>
-          <a:lstStyle/>
-          <a:p>
-            <a:pPr algn="l"/>
-            <a:r>
-              <a:rPr sz="1100" b="0">
-                <a:solidFill>
-                  <a:srgbClr val="EEF2F7"/>
-                </a:solidFill>
-                <a:latin typeface="Calibri"/>
-              </a:rPr>
-              <a:t>Adds Manhattan distance to the goal as a lower-bound estimate. Picks the cell with the lowest total estimated cost at each step, so the search moves toward the goal instead of spreading evenly.</a:t>
-            </a:r>
-          </a:p>
-        </p:txBody>
-      </p:sp>
-      <p:sp>
-        <p:nvSpPr>
-          <p:cNvPr id="19" name="Rounded Rectangle 18"/>
-          <p:cNvSpPr/>
-          <p:nvPr/>
-        </p:nvSpPr>
-        <p:spPr>
-          <a:xfrm>
-            <a:off x="4572000" y="4983480"/>
-            <a:ext cx="3108960" cy="731520"/>
-          </a:xfrm>
-          <a:prstGeom prst="roundRect">
-            <a:avLst>
-              <a:gd name="adj" fmla="val 8000"/>
-            </a:avLst>
-          </a:prstGeom>
-          <a:solidFill>
-            <a:srgbClr val="1A253D"/>
-          </a:solidFill>
-          <a:ln>
-            <a:noFill/>
-          </a:ln>
-          <a:effectLst/>
-        </p:spPr>
-        <p:style>
-          <a:lnRef idx="1">
-            <a:schemeClr val="accent1"/>
-          </a:lnRef>
-          <a:fillRef idx="3">
-            <a:schemeClr val="accent1"/>
-          </a:fillRef>
-          <a:effectRef idx="2">
-            <a:schemeClr val="accent1"/>
-          </a:effectRef>
-          <a:fontRef idx="minor">
-            <a:schemeClr val="lt1"/>
-          </a:fontRef>
-        </p:style>
-        <p:txBody>
-          <a:bodyPr rtlCol="0" anchor="ctr"/>
-          <a:lstStyle/>
-          <a:p>
-            <a:pPr algn="ctr"/>
-          </a:p>
-        </p:txBody>
-      </p:sp>
-      <p:sp>
-        <p:nvSpPr>
-          <p:cNvPr id="20" name="TextBox 19"/>
-          <p:cNvSpPr txBox="1"/>
-          <p:nvPr/>
-        </p:nvSpPr>
-        <p:spPr>
-          <a:xfrm>
-            <a:off x="4572000" y="5029200"/>
-            <a:ext cx="3108960" cy="320040"/>
-          </a:xfrm>
-          <a:prstGeom prst="rect">
-            <a:avLst/>
-          </a:prstGeom>
-          <a:noFill/>
-        </p:spPr>
-        <p:txBody>
-          <a:bodyPr wrap="square" lIns="0" rIns="0" tIns="0" bIns="0" anchor="t">
-            <a:spAutoFit/>
-          </a:bodyPr>
-          <a:lstStyle/>
-          <a:p>
-            <a:pPr algn="ctr"/>
-            <a:r>
-              <a:rPr sz="900" b="1">
-                <a:solidFill>
-                  <a:srgbClr val="94A3B8"/>
-                </a:solidFill>
-                <a:latin typeface="Calibri"/>
-              </a:rPr>
-              <a:t>Mechanism</a:t>
-            </a:r>
-          </a:p>
-        </p:txBody>
-      </p:sp>
-      <p:sp>
-        <p:nvSpPr>
-          <p:cNvPr id="21" name="TextBox 20"/>
-          <p:cNvSpPr txBox="1"/>
-          <p:nvPr/>
-        </p:nvSpPr>
-        <p:spPr>
-          <a:xfrm>
-            <a:off x="4572000" y="5349240"/>
-            <a:ext cx="3108960" cy="320040"/>
-          </a:xfrm>
-          <a:prstGeom prst="rect">
-            <a:avLst/>
-          </a:prstGeom>
-          <a:noFill/>
-        </p:spPr>
-        <p:txBody>
-          <a:bodyPr wrap="square" lIns="0" rIns="0" tIns="0" bIns="0" anchor="t">
-            <a:spAutoFit/>
-          </a:bodyPr>
-          <a:lstStyle/>
-          <a:p>
-            <a:pPr algn="ctr"/>
-            <a:r>
-              <a:rPr sz="1300" b="1">
-                <a:solidFill>
-                  <a:srgbClr val="4D94E0"/>
-                </a:solidFill>
-                <a:latin typeface="Calibri"/>
-              </a:rPr>
-              <a:t>Goal-biased search</a:t>
-            </a:r>
-          </a:p>
-        </p:txBody>
-      </p:sp>
-      <p:sp>
-        <p:nvSpPr>
-          <p:cNvPr id="22" name="Rounded Rectangle 21"/>
-          <p:cNvSpPr/>
-          <p:nvPr/>
-        </p:nvSpPr>
-        <p:spPr>
-          <a:xfrm>
-            <a:off x="8138159" y="1783080"/>
-            <a:ext cx="3657600" cy="4114800"/>
-          </a:xfrm>
-          <a:prstGeom prst="roundRect">
-            <a:avLst>
-              <a:gd name="adj" fmla="val 8000"/>
-            </a:avLst>
-          </a:prstGeom>
-          <a:solidFill>
-            <a:srgbClr val="22304D"/>
-          </a:solidFill>
-          <a:ln>
-            <a:noFill/>
-          </a:ln>
-          <a:effectLst/>
-        </p:spPr>
-        <p:style>
-          <a:lnRef idx="1">
-            <a:schemeClr val="accent1"/>
-          </a:lnRef>
-          <a:fillRef idx="3">
-            <a:schemeClr val="accent1"/>
-          </a:fillRef>
-          <a:effectRef idx="2">
-            <a:schemeClr val="accent1"/>
-          </a:effectRef>
-          <a:fontRef idx="minor">
-            <a:schemeClr val="lt1"/>
-          </a:fontRef>
-        </p:style>
-        <p:txBody>
-          <a:bodyPr rtlCol="0" anchor="ctr"/>
-          <a:lstStyle/>
-          <a:p>
-            <a:pPr algn="ctr"/>
-          </a:p>
-        </p:txBody>
-      </p:sp>
-      <p:sp>
-        <p:nvSpPr>
-          <p:cNvPr id="23" name="Rounded Rectangle 22"/>
-          <p:cNvSpPr/>
-          <p:nvPr/>
-        </p:nvSpPr>
-        <p:spPr>
-          <a:xfrm>
-            <a:off x="8138159" y="1783080"/>
-            <a:ext cx="3657600" cy="640080"/>
-          </a:xfrm>
-          <a:prstGeom prst="roundRect">
-            <a:avLst>
-              <a:gd name="adj" fmla="val 8000"/>
-            </a:avLst>
-          </a:prstGeom>
-          <a:solidFill>
-            <a:srgbClr val="2CA02C"/>
-          </a:solidFill>
-          <a:ln>
-            <a:noFill/>
-          </a:ln>
-          <a:effectLst/>
-        </p:spPr>
-        <p:style>
-          <a:lnRef idx="1">
-            <a:schemeClr val="accent1"/>
-          </a:lnRef>
-          <a:fillRef idx="3">
-            <a:schemeClr val="accent1"/>
-          </a:fillRef>
-          <a:effectRef idx="2">
-            <a:schemeClr val="accent1"/>
-          </a:effectRef>
-          <a:fontRef idx="minor">
-            <a:schemeClr val="lt1"/>
-          </a:fontRef>
-        </p:style>
-        <p:txBody>
-          <a:bodyPr rtlCol="0" anchor="ctr"/>
-          <a:lstStyle/>
-          <a:p>
-            <a:pPr algn="ctr"/>
-          </a:p>
-        </p:txBody>
-      </p:sp>
-      <p:sp>
-        <p:nvSpPr>
-          <p:cNvPr id="24" name="TextBox 23"/>
-          <p:cNvSpPr txBox="1"/>
-          <p:nvPr/>
-        </p:nvSpPr>
-        <p:spPr>
-          <a:xfrm>
-            <a:off x="8138159" y="1783080"/>
-            <a:ext cx="3657600" cy="640080"/>
-          </a:xfrm>
-          <a:prstGeom prst="rect">
-            <a:avLst/>
-          </a:prstGeom>
-          <a:noFill/>
-        </p:spPr>
-        <p:txBody>
-          <a:bodyPr wrap="square" lIns="0" rIns="0" tIns="0" bIns="0" anchor="ctr">
-            <a:spAutoFit/>
-          </a:bodyPr>
-          <a:lstStyle/>
-          <a:p>
-            <a:pPr algn="ctr"/>
-            <a:r>
-              <a:rPr sz="1800" b="1">
-                <a:solidFill>
-                  <a:srgbClr val="EEF2F7"/>
-                </a:solidFill>
-                <a:latin typeface="Calibri"/>
-              </a:rPr>
-              <a:t>JPS4</a:t>
-            </a:r>
-          </a:p>
-        </p:txBody>
-      </p:sp>
-      <p:sp>
-        <p:nvSpPr>
-          <p:cNvPr id="25" name="TextBox 24"/>
-          <p:cNvSpPr txBox="1"/>
-          <p:nvPr/>
-        </p:nvSpPr>
-        <p:spPr>
-          <a:xfrm>
-            <a:off x="8412480" y="2606040"/>
-            <a:ext cx="3108960" cy="365760"/>
-          </a:xfrm>
-          <a:prstGeom prst="rect">
-            <a:avLst/>
-          </a:prstGeom>
-          <a:noFill/>
-        </p:spPr>
-        <p:txBody>
-          <a:bodyPr wrap="square" lIns="0" rIns="0" tIns="0" bIns="0" anchor="t">
-            <a:spAutoFit/>
-          </a:bodyPr>
-          <a:lstStyle/>
-          <a:p>
-            <a:pPr algn="l"/>
-            <a:r>
-              <a:rPr sz="1300" b="1">
-                <a:solidFill>
-                  <a:srgbClr val="2CA02C"/>
-                </a:solidFill>
-                <a:latin typeface="Calibri"/>
-              </a:rPr>
-              <a:t>Baum (2025)</a:t>
-            </a:r>
-          </a:p>
-        </p:txBody>
-      </p:sp>
-      <p:sp>
-        <p:nvSpPr>
-          <p:cNvPr id="26" name="TextBox 25"/>
-          <p:cNvSpPr txBox="1"/>
-          <p:nvPr/>
-        </p:nvSpPr>
-        <p:spPr>
-          <a:xfrm>
-            <a:off x="8412480" y="3017520"/>
-            <a:ext cx="3108960" cy="2103120"/>
-          </a:xfrm>
-          <a:prstGeom prst="rect">
-            <a:avLst/>
-          </a:prstGeom>
-          <a:noFill/>
-        </p:spPr>
-        <p:txBody>
-          <a:bodyPr wrap="square" lIns="0" rIns="0" tIns="0" bIns="0" anchor="t">
-            <a:spAutoFit/>
-          </a:bodyPr>
-          <a:lstStyle/>
-          <a:p>
-            <a:pPr algn="l"/>
-            <a:r>
-              <a:rPr sz="1100" b="0">
-                <a:solidFill>
-                  <a:srgbClr val="EEF2F7"/>
-                </a:solidFill>
-                <a:latin typeface="Calibri"/>
-              </a:rPr>
-              <a:t>Skips over long open corridors entirely. Stops only at jump points, places where an obstacle forces a real routing choice. Only those cells enter the open list, so the list stays small.</a:t>
-            </a:r>
-          </a:p>
-        </p:txBody>
-      </p:sp>
-      <p:sp>
-        <p:nvSpPr>
-          <p:cNvPr id="27" name="Rounded Rectangle 26"/>
-          <p:cNvSpPr/>
-          <p:nvPr/>
-        </p:nvSpPr>
-        <p:spPr>
-          <a:xfrm>
-            <a:off x="8412480" y="4983480"/>
-            <a:ext cx="3108960" cy="731520"/>
-          </a:xfrm>
-          <a:prstGeom prst="roundRect">
-            <a:avLst>
-              <a:gd name="adj" fmla="val 8000"/>
-            </a:avLst>
-          </a:prstGeom>
-          <a:solidFill>
-            <a:srgbClr val="1A253D"/>
-          </a:solidFill>
-          <a:ln>
-            <a:noFill/>
-          </a:ln>
-          <a:effectLst/>
-        </p:spPr>
-        <p:style>
-          <a:lnRef idx="1">
-            <a:schemeClr val="accent1"/>
-          </a:lnRef>
-          <a:fillRef idx="3">
-            <a:schemeClr val="accent1"/>
-          </a:fillRef>
-          <a:effectRef idx="2">
-            <a:schemeClr val="accent1"/>
-          </a:effectRef>
-          <a:fontRef idx="minor">
-            <a:schemeClr val="lt1"/>
-          </a:fontRef>
-        </p:style>
-        <p:txBody>
-          <a:bodyPr rtlCol="0" anchor="ctr"/>
-          <a:lstStyle/>
-          <a:p>
-            <a:pPr algn="ctr"/>
-          </a:p>
-        </p:txBody>
-      </p:sp>
-      <p:sp>
-        <p:nvSpPr>
-          <p:cNvPr id="28" name="TextBox 27"/>
-          <p:cNvSpPr txBox="1"/>
-          <p:nvPr/>
-        </p:nvSpPr>
-        <p:spPr>
-          <a:xfrm>
-            <a:off x="8412480" y="5029200"/>
-            <a:ext cx="3108960" cy="320040"/>
-          </a:xfrm>
-          <a:prstGeom prst="rect">
-            <a:avLst/>
-          </a:prstGeom>
-          <a:noFill/>
-        </p:spPr>
-        <p:txBody>
-          <a:bodyPr wrap="square" lIns="0" rIns="0" tIns="0" bIns="0" anchor="t">
-            <a:spAutoFit/>
-          </a:bodyPr>
-          <a:lstStyle/>
-          <a:p>
-            <a:pPr algn="ctr"/>
-            <a:r>
-              <a:rPr sz="900" b="1">
-                <a:solidFill>
-                  <a:srgbClr val="94A3B8"/>
-                </a:solidFill>
-                <a:latin typeface="Calibri"/>
-              </a:rPr>
-              <a:t>Mechanism</a:t>
-            </a:r>
-          </a:p>
-        </p:txBody>
-      </p:sp>
-      <p:sp>
-        <p:nvSpPr>
-          <p:cNvPr id="29" name="TextBox 28"/>
-          <p:cNvSpPr txBox="1"/>
-          <p:nvPr/>
-        </p:nvSpPr>
-        <p:spPr>
-          <a:xfrm>
-            <a:off x="8412480" y="5349240"/>
-            <a:ext cx="3108960" cy="320040"/>
-          </a:xfrm>
-          <a:prstGeom prst="rect">
-            <a:avLst/>
-          </a:prstGeom>
-          <a:noFill/>
-        </p:spPr>
-        <p:txBody>
-          <a:bodyPr wrap="square" lIns="0" rIns="0" tIns="0" bIns="0" anchor="t">
-            <a:spAutoFit/>
-          </a:bodyPr>
-          <a:lstStyle/>
-          <a:p>
-            <a:pPr algn="ctr"/>
-            <a:r>
-              <a:rPr sz="1300" b="1">
-                <a:solidFill>
-                  <a:srgbClr val="2CA02C"/>
-                </a:solidFill>
-                <a:latin typeface="Calibri"/>
-              </a:rPr>
-              <a:t>Symmetry pruning</a:t>
-            </a:r>
-          </a:p>
-        </p:txBody>
-      </p:sp>
-      <p:sp>
-        <p:nvSpPr>
-          <p:cNvPr id="30" name="TextBox 29"/>
-          <p:cNvSpPr txBox="1"/>
-          <p:nvPr/>
-        </p:nvSpPr>
-        <p:spPr>
-          <a:xfrm>
-            <a:off x="685800" y="6080760"/>
-            <a:ext cx="10972800" cy="365760"/>
-          </a:xfrm>
-          <a:prstGeom prst="rect">
-            <a:avLst/>
-          </a:prstGeom>
-          <a:noFill/>
-        </p:spPr>
-        <p:txBody>
-          <a:bodyPr wrap="square" lIns="0" rIns="0" tIns="0" bIns="0" anchor="t">
-            <a:spAutoFit/>
-          </a:bodyPr>
-          <a:lstStyle/>
-          <a:p>
-            <a:pPr algn="ctr"/>
-            <a:r>
-              <a:rPr sz="1200" b="0">
-                <a:solidFill>
-                  <a:srgbClr val="94A3B8"/>
-                </a:solidFill>
-                <a:latin typeface="Calibri"/>
-              </a:rPr>
-              <a:t>All three guarantee the same shortest path. The difference is how many cells each one has to look at.</a:t>
-            </a:r>
-          </a:p>
-        </p:txBody>
-      </p:sp>
-      <p:sp>
-        <p:nvSpPr>
-          <p:cNvPr id="31" name="TextBox 30"/>
-          <p:cNvSpPr txBox="1"/>
-          <p:nvPr/>
-        </p:nvSpPr>
-        <p:spPr>
-          <a:xfrm>
-            <a:off x="457200" y="6492240"/>
-            <a:ext cx="5486400" cy="274320"/>
-          </a:xfrm>
-          <a:prstGeom prst="rect">
-            <a:avLst/>
-          </a:prstGeom>
-          <a:noFill/>
-        </p:spPr>
-        <p:txBody>
-          <a:bodyPr wrap="square" lIns="0" rIns="0" tIns="0" bIns="0" anchor="t">
-            <a:spAutoFit/>
-          </a:bodyPr>
-          <a:lstStyle/>
-          <a:p>
-            <a:pPr algn="l"/>
-            <a:r>
-              <a:rPr sz="900" b="0">
+            <a:pPr algn="r"/>
+            <a:r>
+              <a:rPr sz="1000" b="0" i="0">
                 <a:solidFill>
                   <a:srgbClr val="64748B"/>
                 </a:solidFill>
-                <a:latin typeface="Calibri"/>
-              </a:rPr>
-              <a:t>ADA Progress Report  |  Habib University  |  Spring 2026</a:t>
-            </a:r>
-          </a:p>
-        </p:txBody>
-      </p:sp>
-      <p:sp>
-        <p:nvSpPr>
-          <p:cNvPr id="32" name="TextBox 31"/>
-          <p:cNvSpPr txBox="1"/>
-          <p:nvPr/>
-        </p:nvSpPr>
-        <p:spPr>
-          <a:xfrm>
-            <a:off x="11094415" y="6492240"/>
-            <a:ext cx="640080" cy="274320"/>
-          </a:xfrm>
-          <a:prstGeom prst="rect">
-            <a:avLst/>
-          </a:prstGeom>
-          <a:noFill/>
-        </p:spPr>
-        <p:txBody>
-          <a:bodyPr wrap="square" lIns="0" rIns="0" tIns="0" bIns="0" anchor="t">
-            <a:spAutoFit/>
-          </a:bodyPr>
-          <a:lstStyle/>
-          <a:p>
-            <a:pPr algn="r"/>
-            <a:r>
-              <a:rPr sz="900" b="0">
-                <a:solidFill>
-                  <a:srgbClr val="64748B"/>
-                </a:solidFill>
-                <a:latin typeface="Calibri"/>
-              </a:rPr>
-              <a:t>2 / 4</a:t>
+              </a:rPr>
+              <a:t>2 / 5</a:t>
             </a:r>
           </a:p>
         </p:txBody>
@@ -4992,6 +4204,14 @@
 <file path=ppt/slides/slide3.xml><?xml version="1.0" encoding="utf-8"?>
 <p:sld xmlns:a="http://schemas.openxmlformats.org/drawingml/2006/main" xmlns:p="http://schemas.openxmlformats.org/presentationml/2006/main" xmlns:r="http://schemas.openxmlformats.org/officeDocument/2006/relationships">
   <p:cSld>
+    <p:bg>
+      <p:bgPr>
+        <a:solidFill>
+          <a:srgbClr val="0F172A"/>
+        </a:solidFill>
+        <a:effectLst/>
+      </p:bgPr>
+    </p:bg>
     <p:spTree>
       <p:nvGrpSpPr>
         <p:cNvPr id="1" name=""/>
@@ -5007,19 +4227,18 @@
         </p:nvSpPr>
         <p:spPr>
           <a:xfrm>
-            <a:off x="0" y="0"/>
-            <a:ext cx="12191695" cy="6858000"/>
+            <a:off x="0" y="502920"/>
+            <a:ext cx="12188952" cy="41148"/>
           </a:xfrm>
           <a:prstGeom prst="rect">
             <a:avLst/>
           </a:prstGeom>
           <a:solidFill>
-            <a:srgbClr val="0F172A"/>
+            <a:srgbClr val="3B82F6"/>
           </a:solidFill>
           <a:ln>
             <a:noFill/>
           </a:ln>
-          <a:effectLst/>
         </p:spPr>
         <p:style>
           <a:lnRef idx="1">
@@ -5045,25 +4264,58 @@
       </p:sp>
       <p:sp>
         <p:nvSpPr>
-          <p:cNvPr id="3" name="Rectangle 2"/>
+          <p:cNvPr id="3" name="TextBox 2"/>
+          <p:cNvSpPr txBox="1"/>
+          <p:nvPr/>
+        </p:nvSpPr>
+        <p:spPr>
+          <a:xfrm>
+            <a:off x="365760" y="109728"/>
+            <a:ext cx="10972800" cy="502920"/>
+          </a:xfrm>
+          <a:prstGeom prst="rect">
+            <a:avLst/>
+          </a:prstGeom>
+          <a:noFill/>
+        </p:spPr>
+        <p:txBody>
+          <a:bodyPr wrap="square">
+            <a:spAutoFit/>
+          </a:bodyPr>
+          <a:lstStyle/>
+          <a:p>
+            <a:pPr algn="l"/>
+            <a:r>
+              <a:rPr sz="2600" b="1" i="0">
+                <a:solidFill>
+                  <a:srgbClr val="FFFFFF"/>
+                </a:solidFill>
+              </a:rPr>
+              <a:t>Methodology — How the Algorithms Work</a:t>
+            </a:r>
+          </a:p>
+        </p:txBody>
+      </p:sp>
+      <p:sp>
+        <p:nvSpPr>
+          <p:cNvPr id="4" name="Rectangle 3"/>
           <p:cNvSpPr/>
           <p:nvPr/>
         </p:nvSpPr>
         <p:spPr>
           <a:xfrm>
-            <a:off x="457200" y="502920"/>
-            <a:ext cx="73152" cy="502920"/>
+            <a:off x="320040" y="777240"/>
+            <a:ext cx="3749039" cy="5303520"/>
           </a:xfrm>
           <a:prstGeom prst="rect">
             <a:avLst/>
           </a:prstGeom>
           <a:solidFill>
-            <a:srgbClr val="38BDF8"/>
+            <a:srgbClr val="1E293B"/>
           </a:solidFill>
           <a:ln>
             <a:noFill/>
           </a:ln>
-          <a:effectLst/>
         </p:spPr>
         <p:style>
           <a:lnRef idx="1">
@@ -5089,97 +4341,24 @@
       </p:sp>
       <p:sp>
         <p:nvSpPr>
-          <p:cNvPr id="4" name="TextBox 3"/>
-          <p:cNvSpPr txBox="1"/>
-          <p:nvPr/>
-        </p:nvSpPr>
-        <p:spPr>
-          <a:xfrm>
-            <a:off x="685800" y="457200"/>
-            <a:ext cx="10972800" cy="594360"/>
-          </a:xfrm>
-          <a:prstGeom prst="rect">
-            <a:avLst/>
-          </a:prstGeom>
-          <a:noFill/>
-        </p:spPr>
-        <p:txBody>
-          <a:bodyPr wrap="square" lIns="0" rIns="0" tIns="0" bIns="0" anchor="t">
-            <a:spAutoFit/>
-          </a:bodyPr>
-          <a:lstStyle/>
-          <a:p>
-            <a:pPr algn="l"/>
-            <a:r>
-              <a:rPr sz="2800" b="1">
-                <a:solidFill>
-                  <a:srgbClr val="EEF2F7"/>
-                </a:solidFill>
-                <a:latin typeface="Calibri"/>
-              </a:rPr>
-              <a:t>Methodology</a:t>
-            </a:r>
-          </a:p>
-        </p:txBody>
-      </p:sp>
-      <p:sp>
-        <p:nvSpPr>
-          <p:cNvPr id="5" name="TextBox 4"/>
-          <p:cNvSpPr txBox="1"/>
-          <p:nvPr/>
-        </p:nvSpPr>
-        <p:spPr>
-          <a:xfrm>
-            <a:off x="685800" y="1051560"/>
-            <a:ext cx="10972800" cy="365760"/>
-          </a:xfrm>
-          <a:prstGeom prst="rect">
-            <a:avLst/>
-          </a:prstGeom>
-          <a:noFill/>
-        </p:spPr>
-        <p:txBody>
-          <a:bodyPr wrap="square" lIns="0" rIns="0" tIns="0" bIns="0" anchor="t">
-            <a:spAutoFit/>
-          </a:bodyPr>
-          <a:lstStyle/>
-          <a:p>
-            <a:pPr algn="l"/>
-            <a:r>
-              <a:rPr sz="1300" b="0">
-                <a:solidFill>
-                  <a:srgbClr val="94A3B8"/>
-                </a:solidFill>
-                <a:latin typeface="Calibri"/>
-              </a:rPr>
-              <a:t>Same benchmark, same grids, same search loop. Only the algorithm swaps.</a:t>
-            </a:r>
-          </a:p>
-        </p:txBody>
-      </p:sp>
-      <p:sp>
-        <p:nvSpPr>
-          <p:cNvPr id="6" name="Rounded Rectangle 5"/>
+          <p:cNvPr id="5" name="Rectangle 4"/>
           <p:cNvSpPr/>
           <p:nvPr/>
         </p:nvSpPr>
         <p:spPr>
           <a:xfrm>
-            <a:off x="457200" y="1737360"/>
-            <a:ext cx="5303520" cy="4572000"/>
-          </a:xfrm>
-          <a:prstGeom prst="roundRect">
-            <a:avLst>
-              <a:gd name="adj" fmla="val 8000"/>
-            </a:avLst>
+            <a:off x="320040" y="777240"/>
+            <a:ext cx="3749039" cy="256032"/>
+          </a:xfrm>
+          <a:prstGeom prst="rect">
+            <a:avLst/>
           </a:prstGeom>
           <a:solidFill>
-            <a:srgbClr val="22304D"/>
+            <a:srgbClr val="F59E0B"/>
           </a:solidFill>
           <a:ln>
             <a:noFill/>
           </a:ln>
-          <a:effectLst/>
         </p:spPr>
         <p:style>
           <a:lnRef idx="1">
@@ -5205,14 +4384,48 @@
       </p:sp>
       <p:sp>
         <p:nvSpPr>
+          <p:cNvPr id="6" name="TextBox 5"/>
+          <p:cNvSpPr txBox="1"/>
+          <p:nvPr/>
+        </p:nvSpPr>
+        <p:spPr>
+          <a:xfrm>
+            <a:off x="429768" y="804672"/>
+            <a:ext cx="3474720" cy="256032"/>
+          </a:xfrm>
+          <a:prstGeom prst="rect">
+            <a:avLst/>
+          </a:prstGeom>
+          <a:noFill/>
+        </p:spPr>
+        <p:txBody>
+          <a:bodyPr wrap="square">
+            <a:spAutoFit/>
+          </a:bodyPr>
+          <a:lstStyle/>
+          <a:p>
+            <a:pPr algn="l"/>
+            <a:r>
+              <a:rPr sz="1100" b="1" i="0">
+                <a:solidFill>
+                  <a:srgbClr val="FFFFFF"/>
+                </a:solidFill>
+              </a:rPr>
+              <a:t>DIJKSTRA</a:t>
+            </a:r>
+          </a:p>
+        </p:txBody>
+      </p:sp>
+      <p:sp>
+        <p:nvSpPr>
           <p:cNvPr id="7" name="TextBox 6"/>
           <p:cNvSpPr txBox="1"/>
           <p:nvPr/>
         </p:nvSpPr>
         <p:spPr>
           <a:xfrm>
-            <a:off x="685800" y="1874519"/>
-            <a:ext cx="4846320" cy="411480"/>
+            <a:off x="457200" y="1097280"/>
+            <a:ext cx="3474720" cy="365760"/>
           </a:xfrm>
           <a:prstGeom prst="rect">
             <a:avLst/>
@@ -5220,20 +4433,19 @@
           <a:noFill/>
         </p:spPr>
         <p:txBody>
-          <a:bodyPr wrap="square" lIns="0" rIns="0" tIns="0" bIns="0" anchor="t">
+          <a:bodyPr wrap="square">
             <a:spAutoFit/>
           </a:bodyPr>
           <a:lstStyle/>
           <a:p>
             <a:pPr algn="l"/>
             <a:r>
-              <a:rPr sz="1600" b="1">
-                <a:solidFill>
-                  <a:srgbClr val="38BDF8"/>
-                </a:solidFill>
-                <a:latin typeface="Calibri"/>
-              </a:rPr>
-              <a:t>Benchmark Setup</a:t>
+              <a:rPr sz="1300" b="1" i="0">
+                <a:solidFill>
+                  <a:srgbClr val="F59E0B"/>
+                </a:solidFill>
+              </a:rPr>
+              <a:t>Baseline — No Heuristic</a:t>
             </a:r>
           </a:p>
         </p:txBody>
@@ -5246,8 +4458,8 @@
         </p:nvSpPr>
         <p:spPr>
           <a:xfrm>
-            <a:off x="685800" y="2468880"/>
-            <a:ext cx="1828800" cy="320040"/>
+            <a:off x="457200" y="1508760"/>
+            <a:ext cx="3474720" cy="4389120"/>
           </a:xfrm>
           <a:prstGeom prst="rect">
             <a:avLst/>
@@ -5255,432 +4467,88 @@
           <a:noFill/>
         </p:spPr>
         <p:txBody>
-          <a:bodyPr wrap="square" lIns="0" rIns="0" tIns="0" bIns="0" anchor="t">
+          <a:bodyPr wrap="square">
             <a:spAutoFit/>
           </a:bodyPr>
           <a:lstStyle/>
           <a:p>
             <a:pPr algn="l"/>
             <a:r>
-              <a:rPr sz="900" b="1">
-                <a:solidFill>
-                  <a:srgbClr val="94A3B8"/>
-                </a:solidFill>
-                <a:latin typeface="Calibri"/>
-              </a:rPr>
-              <a:t>GRID</a:t>
-            </a:r>
-          </a:p>
-        </p:txBody>
-      </p:sp>
-      <p:sp>
-        <p:nvSpPr>
-          <p:cNvPr id="9" name="TextBox 8"/>
-          <p:cNvSpPr txBox="1"/>
-          <p:nvPr/>
-        </p:nvSpPr>
-        <p:spPr>
-          <a:xfrm>
-            <a:off x="685800" y="2724912"/>
-            <a:ext cx="4846320" cy="457200"/>
-          </a:xfrm>
-          <a:prstGeom prst="rect">
-            <a:avLst/>
-          </a:prstGeom>
-          <a:noFill/>
-        </p:spPr>
-        <p:txBody>
-          <a:bodyPr wrap="square" lIns="0" rIns="0" tIns="0" bIns="0" anchor="t">
-            <a:spAutoFit/>
-          </a:bodyPr>
-          <a:lstStyle/>
-          <a:p>
-            <a:pPr algn="l"/>
-            <a:r>
-              <a:rPr sz="1200" b="1">
-                <a:solidFill>
-                  <a:srgbClr val="EEF2F7"/>
-                </a:solidFill>
-                <a:latin typeface="Calibri"/>
-              </a:rPr>
-              <a:t>50 x 50 random obstacles</a:t>
-            </a:r>
-          </a:p>
-        </p:txBody>
-      </p:sp>
-      <p:sp>
-        <p:nvSpPr>
-          <p:cNvPr id="10" name="TextBox 9"/>
-          <p:cNvSpPr txBox="1"/>
-          <p:nvPr/>
-        </p:nvSpPr>
-        <p:spPr>
-          <a:xfrm>
-            <a:off x="685800" y="3108960"/>
-            <a:ext cx="1828800" cy="320040"/>
-          </a:xfrm>
-          <a:prstGeom prst="rect">
-            <a:avLst/>
-          </a:prstGeom>
-          <a:noFill/>
-        </p:spPr>
-        <p:txBody>
-          <a:bodyPr wrap="square" lIns="0" rIns="0" tIns="0" bIns="0" anchor="t">
-            <a:spAutoFit/>
-          </a:bodyPr>
-          <a:lstStyle/>
-          <a:p>
-            <a:pPr algn="l"/>
-            <a:r>
-              <a:rPr sz="900" b="1">
-                <a:solidFill>
-                  <a:srgbClr val="94A3B8"/>
-                </a:solidFill>
-                <a:latin typeface="Calibri"/>
-              </a:rPr>
-              <a:t>DENSITIES</a:t>
-            </a:r>
-          </a:p>
-        </p:txBody>
-      </p:sp>
-      <p:sp>
-        <p:nvSpPr>
-          <p:cNvPr id="11" name="TextBox 10"/>
-          <p:cNvSpPr txBox="1"/>
-          <p:nvPr/>
-        </p:nvSpPr>
-        <p:spPr>
-          <a:xfrm>
-            <a:off x="685800" y="3364992"/>
-            <a:ext cx="4846320" cy="457200"/>
-          </a:xfrm>
-          <a:prstGeom prst="rect">
-            <a:avLst/>
-          </a:prstGeom>
-          <a:noFill/>
-        </p:spPr>
-        <p:txBody>
-          <a:bodyPr wrap="square" lIns="0" rIns="0" tIns="0" bIns="0" anchor="t">
-            <a:spAutoFit/>
-          </a:bodyPr>
-          <a:lstStyle/>
-          <a:p>
-            <a:pPr algn="l"/>
-            <a:r>
-              <a:rPr sz="1200" b="1">
-                <a:solidFill>
-                  <a:srgbClr val="EEF2F7"/>
-                </a:solidFill>
-                <a:latin typeface="Calibri"/>
-              </a:rPr>
-              <a:t>15 percent, 28 percent, 40 percent</a:t>
-            </a:r>
-          </a:p>
-        </p:txBody>
-      </p:sp>
-      <p:sp>
-        <p:nvSpPr>
-          <p:cNvPr id="12" name="TextBox 11"/>
-          <p:cNvSpPr txBox="1"/>
-          <p:nvPr/>
-        </p:nvSpPr>
-        <p:spPr>
-          <a:xfrm>
-            <a:off x="685800" y="3749040"/>
-            <a:ext cx="1828800" cy="320040"/>
-          </a:xfrm>
-          <a:prstGeom prst="rect">
-            <a:avLst/>
-          </a:prstGeom>
-          <a:noFill/>
-        </p:spPr>
-        <p:txBody>
-          <a:bodyPr wrap="square" lIns="0" rIns="0" tIns="0" bIns="0" anchor="t">
-            <a:spAutoFit/>
-          </a:bodyPr>
-          <a:lstStyle/>
-          <a:p>
-            <a:pPr algn="l"/>
-            <a:r>
-              <a:rPr sz="900" b="1">
-                <a:solidFill>
-                  <a:srgbClr val="94A3B8"/>
-                </a:solidFill>
-                <a:latin typeface="Calibri"/>
-              </a:rPr>
-              <a:t>TRIALS PER DENSITY</a:t>
-            </a:r>
-          </a:p>
-        </p:txBody>
-      </p:sp>
-      <p:sp>
-        <p:nvSpPr>
-          <p:cNvPr id="13" name="TextBox 12"/>
-          <p:cNvSpPr txBox="1"/>
-          <p:nvPr/>
-        </p:nvSpPr>
-        <p:spPr>
-          <a:xfrm>
-            <a:off x="685800" y="4005072"/>
-            <a:ext cx="4846320" cy="457200"/>
-          </a:xfrm>
-          <a:prstGeom prst="rect">
-            <a:avLst/>
-          </a:prstGeom>
-          <a:noFill/>
-        </p:spPr>
-        <p:txBody>
-          <a:bodyPr wrap="square" lIns="0" rIns="0" tIns="0" bIns="0" anchor="t">
-            <a:spAutoFit/>
-          </a:bodyPr>
-          <a:lstStyle/>
-          <a:p>
-            <a:pPr algn="l"/>
-            <a:r>
-              <a:rPr sz="1200" b="1">
-                <a:solidFill>
-                  <a:srgbClr val="EEF2F7"/>
-                </a:solidFill>
-                <a:latin typeface="Calibri"/>
-              </a:rPr>
-              <a:t>24 accepted runs</a:t>
-            </a:r>
-          </a:p>
-        </p:txBody>
-      </p:sp>
-      <p:sp>
-        <p:nvSpPr>
-          <p:cNvPr id="14" name="TextBox 13"/>
-          <p:cNvSpPr txBox="1"/>
-          <p:nvPr/>
-        </p:nvSpPr>
-        <p:spPr>
-          <a:xfrm>
-            <a:off x="685800" y="4389120"/>
-            <a:ext cx="1828800" cy="320040"/>
-          </a:xfrm>
-          <a:prstGeom prst="rect">
-            <a:avLst/>
-          </a:prstGeom>
-          <a:noFill/>
-        </p:spPr>
-        <p:txBody>
-          <a:bodyPr wrap="square" lIns="0" rIns="0" tIns="0" bIns="0" anchor="t">
-            <a:spAutoFit/>
-          </a:bodyPr>
-          <a:lstStyle/>
-          <a:p>
-            <a:pPr algn="l"/>
-            <a:r>
-              <a:rPr sz="900" b="1">
-                <a:solidFill>
-                  <a:srgbClr val="94A3B8"/>
-                </a:solidFill>
-                <a:latin typeface="Calibri"/>
-              </a:rPr>
-              <a:t>SEED</a:t>
-            </a:r>
-          </a:p>
-        </p:txBody>
-      </p:sp>
-      <p:sp>
-        <p:nvSpPr>
-          <p:cNvPr id="15" name="TextBox 14"/>
-          <p:cNvSpPr txBox="1"/>
-          <p:nvPr/>
-        </p:nvSpPr>
-        <p:spPr>
-          <a:xfrm>
-            <a:off x="685800" y="4645152"/>
-            <a:ext cx="4846320" cy="457200"/>
-          </a:xfrm>
-          <a:prstGeom prst="rect">
-            <a:avLst/>
-          </a:prstGeom>
-          <a:noFill/>
-        </p:spPr>
-        <p:txBody>
-          <a:bodyPr wrap="square" lIns="0" rIns="0" tIns="0" bIns="0" anchor="t">
-            <a:spAutoFit/>
-          </a:bodyPr>
-          <a:lstStyle/>
-          <a:p>
-            <a:pPr algn="l"/>
-            <a:r>
-              <a:rPr sz="1200" b="1">
-                <a:solidFill>
-                  <a:srgbClr val="EEF2F7"/>
-                </a:solidFill>
-                <a:latin typeface="Calibri"/>
-              </a:rPr>
-              <a:t>42 (deterministic)</a:t>
-            </a:r>
-          </a:p>
-        </p:txBody>
-      </p:sp>
-      <p:sp>
-        <p:nvSpPr>
-          <p:cNvPr id="16" name="TextBox 15"/>
-          <p:cNvSpPr txBox="1"/>
-          <p:nvPr/>
-        </p:nvSpPr>
-        <p:spPr>
-          <a:xfrm>
-            <a:off x="685800" y="5029200"/>
-            <a:ext cx="1828800" cy="320040"/>
-          </a:xfrm>
-          <a:prstGeom prst="rect">
-            <a:avLst/>
-          </a:prstGeom>
-          <a:noFill/>
-        </p:spPr>
-        <p:txBody>
-          <a:bodyPr wrap="square" lIns="0" rIns="0" tIns="0" bIns="0" anchor="t">
-            <a:spAutoFit/>
-          </a:bodyPr>
-          <a:lstStyle/>
-          <a:p>
-            <a:pPr algn="l"/>
-            <a:r>
-              <a:rPr sz="900" b="1">
-                <a:solidFill>
-                  <a:srgbClr val="94A3B8"/>
-                </a:solidFill>
-                <a:latin typeface="Calibri"/>
-              </a:rPr>
-              <a:t>START AND GOAL</a:t>
-            </a:r>
-          </a:p>
-        </p:txBody>
-      </p:sp>
-      <p:sp>
-        <p:nvSpPr>
-          <p:cNvPr id="17" name="TextBox 16"/>
-          <p:cNvSpPr txBox="1"/>
-          <p:nvPr/>
-        </p:nvSpPr>
-        <p:spPr>
-          <a:xfrm>
-            <a:off x="685800" y="5285232"/>
-            <a:ext cx="4846320" cy="457200"/>
-          </a:xfrm>
-          <a:prstGeom prst="rect">
-            <a:avLst/>
-          </a:prstGeom>
-          <a:noFill/>
-        </p:spPr>
-        <p:txBody>
-          <a:bodyPr wrap="square" lIns="0" rIns="0" tIns="0" bIns="0" anchor="t">
-            <a:spAutoFit/>
-          </a:bodyPr>
-          <a:lstStyle/>
-          <a:p>
-            <a:pPr algn="l"/>
-            <a:r>
-              <a:rPr sz="1200" b="1">
-                <a:solidFill>
-                  <a:srgbClr val="EEF2F7"/>
-                </a:solidFill>
-                <a:latin typeface="Calibri"/>
-              </a:rPr>
-              <a:t>Placed far apart, verified reachable</a:t>
-            </a:r>
-          </a:p>
-        </p:txBody>
-      </p:sp>
-      <p:sp>
-        <p:nvSpPr>
-          <p:cNvPr id="18" name="TextBox 17"/>
-          <p:cNvSpPr txBox="1"/>
-          <p:nvPr/>
-        </p:nvSpPr>
-        <p:spPr>
-          <a:xfrm>
-            <a:off x="685800" y="5669280"/>
-            <a:ext cx="1828800" cy="320040"/>
-          </a:xfrm>
-          <a:prstGeom prst="rect">
-            <a:avLst/>
-          </a:prstGeom>
-          <a:noFill/>
-        </p:spPr>
-        <p:txBody>
-          <a:bodyPr wrap="square" lIns="0" rIns="0" tIns="0" bIns="0" anchor="t">
-            <a:spAutoFit/>
-          </a:bodyPr>
-          <a:lstStyle/>
-          <a:p>
-            <a:pPr algn="l"/>
-            <a:r>
-              <a:rPr sz="900" b="1">
-                <a:solidFill>
-                  <a:srgbClr val="94A3B8"/>
-                </a:solidFill>
-                <a:latin typeface="Calibri"/>
-              </a:rPr>
-              <a:t>ACCEPTANCE RULE</a:t>
-            </a:r>
-          </a:p>
-        </p:txBody>
-      </p:sp>
-      <p:sp>
-        <p:nvSpPr>
-          <p:cNvPr id="19" name="TextBox 18"/>
-          <p:cNvSpPr txBox="1"/>
-          <p:nvPr/>
-        </p:nvSpPr>
-        <p:spPr>
-          <a:xfrm>
-            <a:off x="685800" y="5925312"/>
-            <a:ext cx="4846320" cy="457200"/>
-          </a:xfrm>
-          <a:prstGeom prst="rect">
-            <a:avLst/>
-          </a:prstGeom>
-          <a:noFill/>
-        </p:spPr>
-        <p:txBody>
-          <a:bodyPr wrap="square" lIns="0" rIns="0" tIns="0" bIns="0" anchor="t">
-            <a:spAutoFit/>
-          </a:bodyPr>
-          <a:lstStyle/>
-          <a:p>
-            <a:pPr algn="l"/>
-            <a:r>
-              <a:rPr sz="1200" b="1">
-                <a:solidFill>
-                  <a:srgbClr val="EEF2F7"/>
-                </a:solidFill>
-                <a:latin typeface="Calibri"/>
-              </a:rPr>
-              <a:t>Trial counted only if all three algorithms succeed</a:t>
-            </a:r>
-          </a:p>
-        </p:txBody>
-      </p:sp>
-      <p:sp>
-        <p:nvSpPr>
-          <p:cNvPr id="20" name="Rounded Rectangle 19"/>
+              <a:rPr sz="1100" b="0" i="0">
+                <a:solidFill>
+                  <a:srgbClr val="CBD5E1"/>
+                </a:solidFill>
+              </a:rPr>
+              <a:t>• Expands cells in order of distance from the start (cost d before d+1)</a:t>
+            </a:r>
+          </a:p>
+          <a:p>
+            <a:pPr algn="l">
+              <a:spcBef>
+                <a:spcPts val="500"/>
+              </a:spcBef>
+            </a:pPr>
+            <a:r>
+              <a:rPr sz="1100" b="0" i="0">
+                <a:solidFill>
+                  <a:srgbClr val="CBD5E1"/>
+                </a:solidFill>
+              </a:rPr>
+              <a:t>• No knowledge of where the goal is → searches equally in all directions</a:t>
+            </a:r>
+          </a:p>
+          <a:p>
+            <a:pPr algn="l">
+              <a:spcBef>
+                <a:spcPts val="500"/>
+              </a:spcBef>
+            </a:pPr>
+            <a:r>
+              <a:rPr sz="1100" b="0" i="0">
+                <a:solidFill>
+                  <a:srgbClr val="CBD5E1"/>
+                </a:solidFill>
+              </a:rPr>
+              <a:t>• Must map the entire reachable area before confirming the shortest path</a:t>
+            </a:r>
+          </a:p>
+          <a:p>
+            <a:pPr algn="l">
+              <a:spcBef>
+                <a:spcPts val="500"/>
+              </a:spcBef>
+            </a:pPr>
+            <a:r>
+              <a:rPr sz="1100" b="0" i="0">
+                <a:solidFill>
+                  <a:srgbClr val="CBD5E1"/>
+                </a:solidFill>
+              </a:rPr>
+              <a:t>• Always optimal, but wastes significant effort</a:t>
+            </a:r>
+          </a:p>
+        </p:txBody>
+      </p:sp>
+      <p:sp>
+        <p:nvSpPr>
+          <p:cNvPr id="9" name="Rectangle 8"/>
           <p:cNvSpPr/>
           <p:nvPr/>
         </p:nvSpPr>
         <p:spPr>
           <a:xfrm>
-            <a:off x="6126480" y="1737360"/>
-            <a:ext cx="5623560" cy="4572000"/>
-          </a:xfrm>
-          <a:prstGeom prst="roundRect">
-            <a:avLst>
-              <a:gd name="adj" fmla="val 8000"/>
-            </a:avLst>
+            <a:off x="4251959" y="777240"/>
+            <a:ext cx="3749039" cy="5303520"/>
+          </a:xfrm>
+          <a:prstGeom prst="rect">
+            <a:avLst/>
           </a:prstGeom>
           <a:solidFill>
-            <a:srgbClr val="22304D"/>
+            <a:srgbClr val="1E293B"/>
           </a:solidFill>
           <a:ln>
             <a:noFill/>
           </a:ln>
-          <a:effectLst/>
         </p:spPr>
         <p:style>
           <a:lnRef idx="1">
@@ -5706,97 +4574,24 @@
       </p:sp>
       <p:sp>
         <p:nvSpPr>
-          <p:cNvPr id="21" name="TextBox 20"/>
-          <p:cNvSpPr txBox="1"/>
-          <p:nvPr/>
-        </p:nvSpPr>
-        <p:spPr>
-          <a:xfrm>
-            <a:off x="6355080" y="1874519"/>
-            <a:ext cx="5166360" cy="411480"/>
-          </a:xfrm>
-          <a:prstGeom prst="rect">
-            <a:avLst/>
-          </a:prstGeom>
-          <a:noFill/>
-        </p:spPr>
-        <p:txBody>
-          <a:bodyPr wrap="square" lIns="0" rIns="0" tIns="0" bIns="0" anchor="t">
-            <a:spAutoFit/>
-          </a:bodyPr>
-          <a:lstStyle/>
-          <a:p>
-            <a:pPr algn="l"/>
-            <a:r>
-              <a:rPr sz="1600" b="1">
-                <a:solidFill>
-                  <a:srgbClr val="38BDF8"/>
-                </a:solidFill>
-                <a:latin typeface="Calibri"/>
-              </a:rPr>
-              <a:t>Shared Search Loop</a:t>
-            </a:r>
-          </a:p>
-        </p:txBody>
-      </p:sp>
-      <p:sp>
-        <p:nvSpPr>
-          <p:cNvPr id="22" name="TextBox 21"/>
-          <p:cNvSpPr txBox="1"/>
-          <p:nvPr/>
-        </p:nvSpPr>
-        <p:spPr>
-          <a:xfrm>
-            <a:off x="6355080" y="2240280"/>
-            <a:ext cx="5166360" cy="365760"/>
-          </a:xfrm>
-          <a:prstGeom prst="rect">
-            <a:avLst/>
-          </a:prstGeom>
-          <a:noFill/>
-        </p:spPr>
-        <p:txBody>
-          <a:bodyPr wrap="square" lIns="0" rIns="0" tIns="0" bIns="0" anchor="t">
-            <a:spAutoFit/>
-          </a:bodyPr>
-          <a:lstStyle/>
-          <a:p>
-            <a:pPr algn="l"/>
-            <a:r>
-              <a:rPr sz="1000" b="0">
-                <a:solidFill>
-                  <a:srgbClr val="94A3B8"/>
-                </a:solidFill>
-                <a:latin typeface="Calibri"/>
-              </a:rPr>
-              <a:t>One A* engine. Heuristic and successor function plug in per algorithm.</a:t>
-            </a:r>
-          </a:p>
-        </p:txBody>
-      </p:sp>
-      <p:sp>
-        <p:nvSpPr>
-          <p:cNvPr id="23" name="Rounded Rectangle 22"/>
+          <p:cNvPr id="10" name="Rectangle 9"/>
           <p:cNvSpPr/>
           <p:nvPr/>
         </p:nvSpPr>
         <p:spPr>
           <a:xfrm>
-            <a:off x="7818120" y="2834640"/>
-            <a:ext cx="2194560" cy="777240"/>
-          </a:xfrm>
-          <a:prstGeom prst="roundRect">
-            <a:avLst>
-              <a:gd name="adj" fmla="val 8000"/>
-            </a:avLst>
+            <a:off x="4251959" y="777240"/>
+            <a:ext cx="3749039" cy="256032"/>
+          </a:xfrm>
+          <a:prstGeom prst="rect">
+            <a:avLst/>
           </a:prstGeom>
           <a:solidFill>
-            <a:srgbClr val="38BDF8"/>
+            <a:srgbClr val="10B981"/>
           </a:solidFill>
           <a:ln>
             <a:noFill/>
           </a:ln>
-          <a:effectLst/>
         </p:spPr>
         <p:style>
           <a:lnRef idx="1">
@@ -5822,14 +4617,14 @@
       </p:sp>
       <p:sp>
         <p:nvSpPr>
-          <p:cNvPr id="24" name="TextBox 23"/>
+          <p:cNvPr id="11" name="TextBox 10"/>
           <p:cNvSpPr txBox="1"/>
           <p:nvPr/>
         </p:nvSpPr>
         <p:spPr>
           <a:xfrm>
-            <a:off x="7818120" y="2834640"/>
-            <a:ext cx="2194560" cy="777240"/>
+            <a:off x="4361688" y="804672"/>
+            <a:ext cx="3474720" cy="256032"/>
           </a:xfrm>
           <a:prstGeom prst="rect">
             <a:avLst/>
@@ -5837,34 +4632,33 @@
           <a:noFill/>
         </p:spPr>
         <p:txBody>
-          <a:bodyPr wrap="square" lIns="0" rIns="0" tIns="0" bIns="0" anchor="ctr">
+          <a:bodyPr wrap="square">
             <a:spAutoFit/>
           </a:bodyPr>
           <a:lstStyle/>
           <a:p>
-            <a:pPr algn="ctr"/>
-            <a:r>
-              <a:rPr sz="1600" b="1">
-                <a:solidFill>
-                  <a:srgbClr val="0F172A"/>
-                </a:solidFill>
-                <a:latin typeface="Calibri"/>
-              </a:rPr>
-              <a:t>astar_jps( )</a:t>
-            </a:r>
-          </a:p>
-        </p:txBody>
-      </p:sp>
-      <p:sp>
-        <p:nvSpPr>
-          <p:cNvPr id="25" name="TextBox 24"/>
+            <a:pPr algn="l"/>
+            <a:r>
+              <a:rPr sz="1100" b="1" i="0">
+                <a:solidFill>
+                  <a:srgbClr val="FFFFFF"/>
+                </a:solidFill>
+              </a:rPr>
+              <a:t>A*</a:t>
+            </a:r>
+          </a:p>
+        </p:txBody>
+      </p:sp>
+      <p:sp>
+        <p:nvSpPr>
+          <p:cNvPr id="12" name="TextBox 11"/>
           <p:cNvSpPr txBox="1"/>
           <p:nvPr/>
         </p:nvSpPr>
         <p:spPr>
           <a:xfrm>
-            <a:off x="7818120" y="3657600"/>
-            <a:ext cx="2194560" cy="274320"/>
+            <a:off x="4389120" y="1097280"/>
+            <a:ext cx="3474720" cy="365760"/>
           </a:xfrm>
           <a:prstGeom prst="rect">
             <a:avLst/>
@@ -5872,49 +4666,122 @@
           <a:noFill/>
         </p:spPr>
         <p:txBody>
-          <a:bodyPr wrap="square" lIns="0" rIns="0" tIns="0" bIns="0" anchor="t">
+          <a:bodyPr wrap="square">
             <a:spAutoFit/>
           </a:bodyPr>
           <a:lstStyle/>
           <a:p>
-            <a:pPr algn="ctr"/>
-            <a:r>
-              <a:rPr sz="900" b="0">
-                <a:solidFill>
-                  <a:srgbClr val="94A3B8"/>
-                </a:solidFill>
-                <a:latin typeface="Calibri"/>
-              </a:rPr>
-              <a:t>heap-based open list</a:t>
-            </a:r>
-          </a:p>
-        </p:txBody>
-      </p:sp>
-      <p:sp>
-        <p:nvSpPr>
-          <p:cNvPr id="26" name="Rounded Rectangle 25"/>
+            <a:pPr algn="l"/>
+            <a:r>
+              <a:rPr sz="1300" b="1" i="0">
+                <a:solidFill>
+                  <a:srgbClr val="10B981"/>
+                </a:solidFill>
+              </a:rPr>
+              <a:t>Heuristic-Guided Search</a:t>
+            </a:r>
+          </a:p>
+        </p:txBody>
+      </p:sp>
+      <p:sp>
+        <p:nvSpPr>
+          <p:cNvPr id="13" name="TextBox 12"/>
+          <p:cNvSpPr txBox="1"/>
+          <p:nvPr/>
+        </p:nvSpPr>
+        <p:spPr>
+          <a:xfrm>
+            <a:off x="4389120" y="1508760"/>
+            <a:ext cx="3474720" cy="4389120"/>
+          </a:xfrm>
+          <a:prstGeom prst="rect">
+            <a:avLst/>
+          </a:prstGeom>
+          <a:noFill/>
+        </p:spPr>
+        <p:txBody>
+          <a:bodyPr wrap="square">
+            <a:spAutoFit/>
+          </a:bodyPr>
+          <a:lstStyle/>
+          <a:p>
+            <a:pPr algn="l"/>
+            <a:r>
+              <a:rPr sz="1100" b="0" i="0">
+                <a:solidFill>
+                  <a:srgbClr val="CBD5E1"/>
+                </a:solidFill>
+              </a:rPr>
+              <a:t>• At each step, picks the cell with lowest (current cost + Manhattan distance to goal)</a:t>
+            </a:r>
+          </a:p>
+          <a:p>
+            <a:pPr algn="l">
+              <a:spcBef>
+                <a:spcPts val="500"/>
+              </a:spcBef>
+            </a:pPr>
+            <a:r>
+              <a:rPr sz="1100" b="0" i="0">
+                <a:solidFill>
+                  <a:srgbClr val="CBD5E1"/>
+                </a:solidFill>
+              </a:rPr>
+              <a:t>• Manhattan distance is a valid lower bound on a 4-connected grid → still optimal</a:t>
+            </a:r>
+          </a:p>
+          <a:p>
+            <a:pPr algn="l">
+              <a:spcBef>
+                <a:spcPts val="500"/>
+              </a:spcBef>
+            </a:pPr>
+            <a:r>
+              <a:rPr sz="1100" b="0" i="0">
+                <a:solidFill>
+                  <a:srgbClr val="CBD5E1"/>
+                </a:solidFill>
+              </a:rPr>
+              <a:t>• Focuses the search toward the goal, skipping cells in the wrong direction</a:t>
+            </a:r>
+          </a:p>
+          <a:p>
+            <a:pPr algn="l">
+              <a:spcBef>
+                <a:spcPts val="500"/>
+              </a:spcBef>
+            </a:pPr>
+            <a:r>
+              <a:rPr sz="1100" b="0" i="0">
+                <a:solidFill>
+                  <a:srgbClr val="CBD5E1"/>
+                </a:solidFill>
+              </a:rPr>
+              <a:t>• Roughly half the expansions of Dijkstra on open maps</a:t>
+            </a:r>
+          </a:p>
+        </p:txBody>
+      </p:sp>
+      <p:sp>
+        <p:nvSpPr>
+          <p:cNvPr id="14" name="Rectangle 13"/>
           <p:cNvSpPr/>
           <p:nvPr/>
         </p:nvSpPr>
         <p:spPr>
           <a:xfrm>
-            <a:off x="6400800" y="4617720"/>
-            <a:ext cx="1691640" cy="1280160"/>
-          </a:xfrm>
-          <a:prstGeom prst="roundRect">
-            <a:avLst>
-              <a:gd name="adj" fmla="val 8000"/>
-            </a:avLst>
+            <a:off x="8183879" y="777240"/>
+            <a:ext cx="3749039" cy="5303520"/>
+          </a:xfrm>
+          <a:prstGeom prst="rect">
+            <a:avLst/>
           </a:prstGeom>
           <a:solidFill>
-            <a:srgbClr val="1A253D"/>
+            <a:srgbClr val="1E293B"/>
           </a:solidFill>
-          <a:ln w="12700">
-            <a:solidFill>
-              <a:srgbClr val="E05C5C"/>
-            </a:solidFill>
+          <a:ln>
+            <a:noFill/>
           </a:ln>
-          <a:effectLst/>
         </p:spPr>
         <p:style>
           <a:lnRef idx="1">
@@ -5940,27 +4807,24 @@
       </p:sp>
       <p:sp>
         <p:nvSpPr>
-          <p:cNvPr id="27" name="Rounded Rectangle 26"/>
+          <p:cNvPr id="15" name="Rectangle 14"/>
           <p:cNvSpPr/>
           <p:nvPr/>
         </p:nvSpPr>
         <p:spPr>
           <a:xfrm>
-            <a:off x="6400800" y="4617720"/>
-            <a:ext cx="1691640" cy="320040"/>
-          </a:xfrm>
-          <a:prstGeom prst="roundRect">
-            <a:avLst>
-              <a:gd name="adj" fmla="val 8000"/>
-            </a:avLst>
+            <a:off x="8183879" y="777240"/>
+            <a:ext cx="3749039" cy="256032"/>
+          </a:xfrm>
+          <a:prstGeom prst="rect">
+            <a:avLst/>
           </a:prstGeom>
           <a:solidFill>
-            <a:srgbClr val="E05C5C"/>
+            <a:srgbClr val="3B82F6"/>
           </a:solidFill>
           <a:ln>
             <a:noFill/>
           </a:ln>
-          <a:effectLst/>
         </p:spPr>
         <p:style>
           <a:lnRef idx="1">
@@ -5986,14 +4850,14 @@
       </p:sp>
       <p:sp>
         <p:nvSpPr>
-          <p:cNvPr id="28" name="TextBox 27"/>
+          <p:cNvPr id="16" name="TextBox 15"/>
           <p:cNvSpPr txBox="1"/>
           <p:nvPr/>
         </p:nvSpPr>
         <p:spPr>
           <a:xfrm>
-            <a:off x="6400800" y="4617720"/>
-            <a:ext cx="1691640" cy="320040"/>
+            <a:off x="8293607" y="804672"/>
+            <a:ext cx="3474720" cy="256032"/>
           </a:xfrm>
           <a:prstGeom prst="rect">
             <a:avLst/>
@@ -6001,34 +4865,33 @@
           <a:noFill/>
         </p:spPr>
         <p:txBody>
-          <a:bodyPr wrap="square" lIns="0" rIns="0" tIns="0" bIns="0" anchor="ctr">
+          <a:bodyPr wrap="square">
             <a:spAutoFit/>
           </a:bodyPr>
           <a:lstStyle/>
           <a:p>
-            <a:pPr algn="ctr"/>
-            <a:r>
-              <a:rPr sz="1200" b="1">
-                <a:solidFill>
-                  <a:srgbClr val="EEF2F7"/>
-                </a:solidFill>
-                <a:latin typeface="Calibri"/>
-              </a:rPr>
-              <a:t>Dijkstra</a:t>
-            </a:r>
-          </a:p>
-        </p:txBody>
-      </p:sp>
-      <p:sp>
-        <p:nvSpPr>
-          <p:cNvPr id="29" name="TextBox 28"/>
+            <a:pPr algn="l"/>
+            <a:r>
+              <a:rPr sz="1100" b="1" i="0">
+                <a:solidFill>
+                  <a:srgbClr val="FFFFFF"/>
+                </a:solidFill>
+              </a:rPr>
+              <a:t>JPS4</a:t>
+            </a:r>
+          </a:p>
+        </p:txBody>
+      </p:sp>
+      <p:sp>
+        <p:nvSpPr>
+          <p:cNvPr id="17" name="TextBox 16"/>
           <p:cNvSpPr txBox="1"/>
           <p:nvPr/>
         </p:nvSpPr>
         <p:spPr>
           <a:xfrm>
-            <a:off x="6492240" y="5001768"/>
-            <a:ext cx="1508760" cy="320040"/>
+            <a:off x="8321040" y="1097280"/>
+            <a:ext cx="3474720" cy="365760"/>
           </a:xfrm>
           <a:prstGeom prst="rect">
             <a:avLst/>
@@ -6036,34 +4899,33 @@
           <a:noFill/>
         </p:spPr>
         <p:txBody>
-          <a:bodyPr wrap="square" lIns="0" rIns="0" tIns="0" bIns="0" anchor="t">
+          <a:bodyPr wrap="square">
             <a:spAutoFit/>
           </a:bodyPr>
           <a:lstStyle/>
           <a:p>
-            <a:pPr algn="ctr"/>
-            <a:r>
-              <a:rPr sz="1000" b="1">
-                <a:solidFill>
-                  <a:srgbClr val="EEF2F7"/>
-                </a:solidFill>
-                <a:latin typeface="Calibri"/>
-              </a:rPr>
-              <a:t>h = 0</a:t>
-            </a:r>
-          </a:p>
-        </p:txBody>
-      </p:sp>
-      <p:sp>
-        <p:nvSpPr>
-          <p:cNvPr id="30" name="TextBox 29"/>
+            <a:pPr algn="l"/>
+            <a:r>
+              <a:rPr sz="1300" b="1" i="0">
+                <a:solidFill>
+                  <a:srgbClr val="3B82F6"/>
+                </a:solidFill>
+              </a:rPr>
+              <a:t>Jump Point Search (4-Connected)</a:t>
+            </a:r>
+          </a:p>
+        </p:txBody>
+      </p:sp>
+      <p:sp>
+        <p:nvSpPr>
+          <p:cNvPr id="18" name="TextBox 17"/>
           <p:cNvSpPr txBox="1"/>
           <p:nvPr/>
         </p:nvSpPr>
         <p:spPr>
           <a:xfrm>
-            <a:off x="6492240" y="5330952"/>
-            <a:ext cx="1508760" cy="502920"/>
+            <a:off x="8321040" y="1508760"/>
+            <a:ext cx="3474720" cy="4389120"/>
           </a:xfrm>
           <a:prstGeom prst="rect">
             <a:avLst/>
@@ -6071,49 +4933,88 @@
           <a:noFill/>
         </p:spPr>
         <p:txBody>
-          <a:bodyPr wrap="square" lIns="0" rIns="0" tIns="0" bIns="0" anchor="t">
+          <a:bodyPr wrap="square">
             <a:spAutoFit/>
           </a:bodyPr>
           <a:lstStyle/>
           <a:p>
-            <a:pPr algn="ctr"/>
-            <a:r>
-              <a:rPr sz="900" b="0">
-                <a:solidFill>
-                  <a:srgbClr val="94A3B8"/>
-                </a:solidFill>
-                <a:latin typeface="Calibri"/>
-              </a:rPr>
-              <a:t>4-neighbour successors</a:t>
-            </a:r>
-          </a:p>
-        </p:txBody>
-      </p:sp>
-      <p:sp>
-        <p:nvSpPr>
-          <p:cNvPr id="31" name="Rounded Rectangle 30"/>
+            <a:pPr algn="l"/>
+            <a:r>
+              <a:rPr sz="1100" b="0" i="0">
+                <a:solidFill>
+                  <a:srgbClr val="CBD5E1"/>
+                </a:solidFill>
+              </a:rPr>
+              <a:t>• Asks at every cell: can I skip ahead without missing anything useful?</a:t>
+            </a:r>
+          </a:p>
+          <a:p>
+            <a:pPr algn="l">
+              <a:spcBef>
+                <a:spcPts val="500"/>
+              </a:spcBef>
+            </a:pPr>
+            <a:r>
+              <a:rPr sz="1100" b="0" i="0">
+                <a:solidFill>
+                  <a:srgbClr val="CBD5E1"/>
+                </a:solidFill>
+              </a:rPr>
+              <a:t>• Straight-line runs through open space: every cell has identical cost &amp; options → skip them</a:t>
+            </a:r>
+          </a:p>
+          <a:p>
+            <a:pPr algn="l">
+              <a:spcBef>
+                <a:spcPts val="500"/>
+              </a:spcBef>
+            </a:pPr>
+            <a:r>
+              <a:rPr sz="1100" b="0" i="0">
+                <a:solidFill>
+                  <a:srgbClr val="CBD5E1"/>
+                </a:solidFill>
+              </a:rPr>
+              <a:t>• Only stops at jump points: where an obstacle creates a forced routing choice</a:t>
+            </a:r>
+          </a:p>
+          <a:p>
+            <a:pPr algn="l">
+              <a:spcBef>
+                <a:spcPts val="500"/>
+              </a:spcBef>
+            </a:pPr>
+            <a:r>
+              <a:rPr sz="1100" b="0" i="0">
+                <a:solidFill>
+                  <a:srgbClr val="CBD5E1"/>
+                </a:solidFill>
+              </a:rPr>
+              <a:t>• Baum (2025) formalizes this for cardinal-only movement — different rules than 8-connected</a:t>
+            </a:r>
+          </a:p>
+        </p:txBody>
+      </p:sp>
+      <p:sp>
+        <p:nvSpPr>
+          <p:cNvPr id="19" name="Rectangle 18"/>
           <p:cNvSpPr/>
           <p:nvPr/>
         </p:nvSpPr>
         <p:spPr>
           <a:xfrm>
-            <a:off x="8092440" y="4617720"/>
-            <a:ext cx="1691640" cy="1280160"/>
-          </a:xfrm>
-          <a:prstGeom prst="roundRect">
-            <a:avLst>
-              <a:gd name="adj" fmla="val 8000"/>
-            </a:avLst>
+            <a:off x="320040" y="6263640"/>
+            <a:ext cx="11548872" cy="411480"/>
+          </a:xfrm>
+          <a:prstGeom prst="rect">
+            <a:avLst/>
           </a:prstGeom>
           <a:solidFill>
-            <a:srgbClr val="1A253D"/>
+            <a:srgbClr val="0A0F1E"/>
           </a:solidFill>
-          <a:ln w="12700">
-            <a:solidFill>
-              <a:srgbClr val="4D94E0"/>
-            </a:solidFill>
+          <a:ln>
+            <a:noFill/>
           </a:ln>
-          <a:effectLst/>
         </p:spPr>
         <p:style>
           <a:lnRef idx="1">
@@ -6139,60 +5040,14 @@
       </p:sp>
       <p:sp>
         <p:nvSpPr>
-          <p:cNvPr id="32" name="Rounded Rectangle 31"/>
-          <p:cNvSpPr/>
-          <p:nvPr/>
-        </p:nvSpPr>
-        <p:spPr>
-          <a:xfrm>
-            <a:off x="8092440" y="4617720"/>
-            <a:ext cx="1691640" cy="320040"/>
-          </a:xfrm>
-          <a:prstGeom prst="roundRect">
-            <a:avLst>
-              <a:gd name="adj" fmla="val 8000"/>
-            </a:avLst>
-          </a:prstGeom>
-          <a:solidFill>
-            <a:srgbClr val="4D94E0"/>
-          </a:solidFill>
-          <a:ln>
-            <a:noFill/>
-          </a:ln>
-          <a:effectLst/>
-        </p:spPr>
-        <p:style>
-          <a:lnRef idx="1">
-            <a:schemeClr val="accent1"/>
-          </a:lnRef>
-          <a:fillRef idx="3">
-            <a:schemeClr val="accent1"/>
-          </a:fillRef>
-          <a:effectRef idx="2">
-            <a:schemeClr val="accent1"/>
-          </a:effectRef>
-          <a:fontRef idx="minor">
-            <a:schemeClr val="lt1"/>
-          </a:fontRef>
-        </p:style>
-        <p:txBody>
-          <a:bodyPr rtlCol="0" anchor="ctr"/>
-          <a:lstStyle/>
-          <a:p>
-            <a:pPr algn="ctr"/>
-          </a:p>
-        </p:txBody>
-      </p:sp>
-      <p:sp>
-        <p:nvSpPr>
-          <p:cNvPr id="33" name="TextBox 32"/>
+          <p:cNvPr id="20" name="TextBox 19"/>
           <p:cNvSpPr txBox="1"/>
           <p:nvPr/>
         </p:nvSpPr>
         <p:spPr>
           <a:xfrm>
-            <a:off x="8092440" y="4617720"/>
-            <a:ext cx="1691640" cy="320040"/>
+            <a:off x="365760" y="6291072"/>
+            <a:ext cx="11430000" cy="365760"/>
           </a:xfrm>
           <a:prstGeom prst="rect">
             <a:avLst/>
@@ -6200,34 +5055,33 @@
           <a:noFill/>
         </p:spPr>
         <p:txBody>
-          <a:bodyPr wrap="square" lIns="0" rIns="0" tIns="0" bIns="0" anchor="ctr">
+          <a:bodyPr wrap="square">
             <a:spAutoFit/>
           </a:bodyPr>
           <a:lstStyle/>
           <a:p>
             <a:pPr algn="ctr"/>
             <a:r>
-              <a:rPr sz="1200" b="1">
-                <a:solidFill>
-                  <a:srgbClr val="EEF2F7"/>
-                </a:solidFill>
-                <a:latin typeface="Calibri"/>
-              </a:rPr>
-              <a:t>A*</a:t>
-            </a:r>
-          </a:p>
-        </p:txBody>
-      </p:sp>
-      <p:sp>
-        <p:nvSpPr>
-          <p:cNvPr id="34" name="TextBox 33"/>
+              <a:rPr sz="1100" b="0" i="1">
+                <a:solidFill>
+                  <a:srgbClr val="10B981"/>
+                </a:solidFill>
+              </a:rPr>
+              <a:t>⚖  Fair comparison: all 3 algorithms share the same search loop. Only the heuristic and neighbour-finding function differ. Any result difference is purely algorithmic.</a:t>
+            </a:r>
+          </a:p>
+        </p:txBody>
+      </p:sp>
+      <p:sp>
+        <p:nvSpPr>
+          <p:cNvPr id="21" name="TextBox 20"/>
           <p:cNvSpPr txBox="1"/>
           <p:nvPr/>
         </p:nvSpPr>
         <p:spPr>
           <a:xfrm>
-            <a:off x="8183879" y="5001768"/>
-            <a:ext cx="1508760" cy="320040"/>
+            <a:off x="11430000" y="6492240"/>
+            <a:ext cx="731520" cy="274320"/>
           </a:xfrm>
           <a:prstGeom prst="rect">
             <a:avLst/>
@@ -6235,359 +5089,19 @@
           <a:noFill/>
         </p:spPr>
         <p:txBody>
-          <a:bodyPr wrap="square" lIns="0" rIns="0" tIns="0" bIns="0" anchor="t">
+          <a:bodyPr wrap="square">
             <a:spAutoFit/>
           </a:bodyPr>
           <a:lstStyle/>
           <a:p>
-            <a:pPr algn="ctr"/>
-            <a:r>
-              <a:rPr sz="1000" b="1">
-                <a:solidFill>
-                  <a:srgbClr val="EEF2F7"/>
-                </a:solidFill>
-                <a:latin typeface="Calibri"/>
-              </a:rPr>
-              <a:t>h = Manhattan</a:t>
-            </a:r>
-          </a:p>
-        </p:txBody>
-      </p:sp>
-      <p:sp>
-        <p:nvSpPr>
-          <p:cNvPr id="35" name="TextBox 34"/>
-          <p:cNvSpPr txBox="1"/>
-          <p:nvPr/>
-        </p:nvSpPr>
-        <p:spPr>
-          <a:xfrm>
-            <a:off x="8183879" y="5330952"/>
-            <a:ext cx="1508760" cy="502920"/>
-          </a:xfrm>
-          <a:prstGeom prst="rect">
-            <a:avLst/>
-          </a:prstGeom>
-          <a:noFill/>
-        </p:spPr>
-        <p:txBody>
-          <a:bodyPr wrap="square" lIns="0" rIns="0" tIns="0" bIns="0" anchor="t">
-            <a:spAutoFit/>
-          </a:bodyPr>
-          <a:lstStyle/>
-          <a:p>
-            <a:pPr algn="ctr"/>
-            <a:r>
-              <a:rPr sz="900" b="0">
-                <a:solidFill>
-                  <a:srgbClr val="94A3B8"/>
-                </a:solidFill>
-                <a:latin typeface="Calibri"/>
-              </a:rPr>
-              <a:t>4-neighbour successors</a:t>
-            </a:r>
-          </a:p>
-        </p:txBody>
-      </p:sp>
-      <p:sp>
-        <p:nvSpPr>
-          <p:cNvPr id="36" name="Rounded Rectangle 35"/>
-          <p:cNvSpPr/>
-          <p:nvPr/>
-        </p:nvSpPr>
-        <p:spPr>
-          <a:xfrm>
-            <a:off x="9784080" y="4617720"/>
-            <a:ext cx="1691640" cy="1280160"/>
-          </a:xfrm>
-          <a:prstGeom prst="roundRect">
-            <a:avLst>
-              <a:gd name="adj" fmla="val 8000"/>
-            </a:avLst>
-          </a:prstGeom>
-          <a:solidFill>
-            <a:srgbClr val="1A253D"/>
-          </a:solidFill>
-          <a:ln w="12700">
-            <a:solidFill>
-              <a:srgbClr val="2CA02C"/>
-            </a:solidFill>
-          </a:ln>
-          <a:effectLst/>
-        </p:spPr>
-        <p:style>
-          <a:lnRef idx="1">
-            <a:schemeClr val="accent1"/>
-          </a:lnRef>
-          <a:fillRef idx="3">
-            <a:schemeClr val="accent1"/>
-          </a:fillRef>
-          <a:effectRef idx="2">
-            <a:schemeClr val="accent1"/>
-          </a:effectRef>
-          <a:fontRef idx="minor">
-            <a:schemeClr val="lt1"/>
-          </a:fontRef>
-        </p:style>
-        <p:txBody>
-          <a:bodyPr rtlCol="0" anchor="ctr"/>
-          <a:lstStyle/>
-          <a:p>
-            <a:pPr algn="ctr"/>
-          </a:p>
-        </p:txBody>
-      </p:sp>
-      <p:sp>
-        <p:nvSpPr>
-          <p:cNvPr id="37" name="Rounded Rectangle 36"/>
-          <p:cNvSpPr/>
-          <p:nvPr/>
-        </p:nvSpPr>
-        <p:spPr>
-          <a:xfrm>
-            <a:off x="9784080" y="4617720"/>
-            <a:ext cx="1691640" cy="320040"/>
-          </a:xfrm>
-          <a:prstGeom prst="roundRect">
-            <a:avLst>
-              <a:gd name="adj" fmla="val 8000"/>
-            </a:avLst>
-          </a:prstGeom>
-          <a:solidFill>
-            <a:srgbClr val="2CA02C"/>
-          </a:solidFill>
-          <a:ln>
-            <a:noFill/>
-          </a:ln>
-          <a:effectLst/>
-        </p:spPr>
-        <p:style>
-          <a:lnRef idx="1">
-            <a:schemeClr val="accent1"/>
-          </a:lnRef>
-          <a:fillRef idx="3">
-            <a:schemeClr val="accent1"/>
-          </a:fillRef>
-          <a:effectRef idx="2">
-            <a:schemeClr val="accent1"/>
-          </a:effectRef>
-          <a:fontRef idx="minor">
-            <a:schemeClr val="lt1"/>
-          </a:fontRef>
-        </p:style>
-        <p:txBody>
-          <a:bodyPr rtlCol="0" anchor="ctr"/>
-          <a:lstStyle/>
-          <a:p>
-            <a:pPr algn="ctr"/>
-          </a:p>
-        </p:txBody>
-      </p:sp>
-      <p:sp>
-        <p:nvSpPr>
-          <p:cNvPr id="38" name="TextBox 37"/>
-          <p:cNvSpPr txBox="1"/>
-          <p:nvPr/>
-        </p:nvSpPr>
-        <p:spPr>
-          <a:xfrm>
-            <a:off x="9784080" y="4617720"/>
-            <a:ext cx="1691640" cy="320040"/>
-          </a:xfrm>
-          <a:prstGeom prst="rect">
-            <a:avLst/>
-          </a:prstGeom>
-          <a:noFill/>
-        </p:spPr>
-        <p:txBody>
-          <a:bodyPr wrap="square" lIns="0" rIns="0" tIns="0" bIns="0" anchor="ctr">
-            <a:spAutoFit/>
-          </a:bodyPr>
-          <a:lstStyle/>
-          <a:p>
-            <a:pPr algn="ctr"/>
-            <a:r>
-              <a:rPr sz="1200" b="1">
-                <a:solidFill>
-                  <a:srgbClr val="EEF2F7"/>
-                </a:solidFill>
-                <a:latin typeface="Calibri"/>
-              </a:rPr>
-              <a:t>JPS4</a:t>
-            </a:r>
-          </a:p>
-        </p:txBody>
-      </p:sp>
-      <p:sp>
-        <p:nvSpPr>
-          <p:cNvPr id="39" name="TextBox 38"/>
-          <p:cNvSpPr txBox="1"/>
-          <p:nvPr/>
-        </p:nvSpPr>
-        <p:spPr>
-          <a:xfrm>
-            <a:off x="9875519" y="5001768"/>
-            <a:ext cx="1508760" cy="320040"/>
-          </a:xfrm>
-          <a:prstGeom prst="rect">
-            <a:avLst/>
-          </a:prstGeom>
-          <a:noFill/>
-        </p:spPr>
-        <p:txBody>
-          <a:bodyPr wrap="square" lIns="0" rIns="0" tIns="0" bIns="0" anchor="t">
-            <a:spAutoFit/>
-          </a:bodyPr>
-          <a:lstStyle/>
-          <a:p>
-            <a:pPr algn="ctr"/>
-            <a:r>
-              <a:rPr sz="1000" b="1">
-                <a:solidFill>
-                  <a:srgbClr val="EEF2F7"/>
-                </a:solidFill>
-                <a:latin typeface="Calibri"/>
-              </a:rPr>
-              <a:t>h = Manhattan</a:t>
-            </a:r>
-          </a:p>
-        </p:txBody>
-      </p:sp>
-      <p:sp>
-        <p:nvSpPr>
-          <p:cNvPr id="40" name="TextBox 39"/>
-          <p:cNvSpPr txBox="1"/>
-          <p:nvPr/>
-        </p:nvSpPr>
-        <p:spPr>
-          <a:xfrm>
-            <a:off x="9875519" y="5330952"/>
-            <a:ext cx="1508760" cy="502920"/>
-          </a:xfrm>
-          <a:prstGeom prst="rect">
-            <a:avLst/>
-          </a:prstGeom>
-          <a:noFill/>
-        </p:spPr>
-        <p:txBody>
-          <a:bodyPr wrap="square" lIns="0" rIns="0" tIns="0" bIns="0" anchor="t">
-            <a:spAutoFit/>
-          </a:bodyPr>
-          <a:lstStyle/>
-          <a:p>
-            <a:pPr algn="ctr"/>
-            <a:r>
-              <a:rPr sz="900" b="0">
-                <a:solidFill>
-                  <a:srgbClr val="94A3B8"/>
-                </a:solidFill>
-                <a:latin typeface="Calibri"/>
-              </a:rPr>
-              <a:t>jump-point successors</a:t>
-            </a:r>
-          </a:p>
-        </p:txBody>
-      </p:sp>
-      <p:sp>
-        <p:nvSpPr>
-          <p:cNvPr id="41" name="TextBox 40"/>
-          <p:cNvSpPr txBox="1"/>
-          <p:nvPr/>
-        </p:nvSpPr>
-        <p:spPr>
-          <a:xfrm>
-            <a:off x="6355080" y="5989320"/>
-            <a:ext cx="5166360" cy="320040"/>
-          </a:xfrm>
-          <a:prstGeom prst="rect">
-            <a:avLst/>
-          </a:prstGeom>
-          <a:noFill/>
-        </p:spPr>
-        <p:txBody>
-          <a:bodyPr wrap="square" lIns="0" rIns="0" tIns="0" bIns="0" anchor="t">
-            <a:spAutoFit/>
-          </a:bodyPr>
-          <a:lstStyle/>
-          <a:p>
-            <a:pPr algn="ctr"/>
-            <a:r>
-              <a:rPr sz="1100" b="1">
-                <a:solidFill>
-                  <a:srgbClr val="EEF2F7"/>
-                </a:solidFill>
-                <a:latin typeface="Calibri"/>
-              </a:rPr>
-              <a:t>Any measured difference comes from the algorithm itself.</a:t>
-            </a:r>
-          </a:p>
-        </p:txBody>
-      </p:sp>
-      <p:sp>
-        <p:nvSpPr>
-          <p:cNvPr id="42" name="TextBox 41"/>
-          <p:cNvSpPr txBox="1"/>
-          <p:nvPr/>
-        </p:nvSpPr>
-        <p:spPr>
-          <a:xfrm>
-            <a:off x="457200" y="6492240"/>
-            <a:ext cx="5486400" cy="274320"/>
-          </a:xfrm>
-          <a:prstGeom prst="rect">
-            <a:avLst/>
-          </a:prstGeom>
-          <a:noFill/>
-        </p:spPr>
-        <p:txBody>
-          <a:bodyPr wrap="square" lIns="0" rIns="0" tIns="0" bIns="0" anchor="t">
-            <a:spAutoFit/>
-          </a:bodyPr>
-          <a:lstStyle/>
-          <a:p>
-            <a:pPr algn="l"/>
-            <a:r>
-              <a:rPr sz="900" b="0">
+            <a:pPr algn="r"/>
+            <a:r>
+              <a:rPr sz="1000" b="0" i="0">
                 <a:solidFill>
                   <a:srgbClr val="64748B"/>
                 </a:solidFill>
-                <a:latin typeface="Calibri"/>
-              </a:rPr>
-              <a:t>ADA Progress Report  |  Habib University  |  Spring 2026</a:t>
-            </a:r>
-          </a:p>
-        </p:txBody>
-      </p:sp>
-      <p:sp>
-        <p:nvSpPr>
-          <p:cNvPr id="43" name="TextBox 42"/>
-          <p:cNvSpPr txBox="1"/>
-          <p:nvPr/>
-        </p:nvSpPr>
-        <p:spPr>
-          <a:xfrm>
-            <a:off x="11094415" y="6492240"/>
-            <a:ext cx="640080" cy="274320"/>
-          </a:xfrm>
-          <a:prstGeom prst="rect">
-            <a:avLst/>
-          </a:prstGeom>
-          <a:noFill/>
-        </p:spPr>
-        <p:txBody>
-          <a:bodyPr wrap="square" lIns="0" rIns="0" tIns="0" bIns="0" anchor="t">
-            <a:spAutoFit/>
-          </a:bodyPr>
-          <a:lstStyle/>
-          <a:p>
-            <a:pPr algn="r"/>
-            <a:r>
-              <a:rPr sz="900" b="0">
-                <a:solidFill>
-                  <a:srgbClr val="64748B"/>
-                </a:solidFill>
-                <a:latin typeface="Calibri"/>
-              </a:rPr>
-              <a:t>3 / 4</a:t>
+              </a:rPr>
+              <a:t>3 / 5</a:t>
             </a:r>
           </a:p>
         </p:txBody>
@@ -6603,6 +5117,14 @@
 <file path=ppt/slides/slide4.xml><?xml version="1.0" encoding="utf-8"?>
 <p:sld xmlns:a="http://schemas.openxmlformats.org/drawingml/2006/main" xmlns:p="http://schemas.openxmlformats.org/presentationml/2006/main" xmlns:r="http://schemas.openxmlformats.org/officeDocument/2006/relationships">
   <p:cSld>
+    <p:bg>
+      <p:bgPr>
+        <a:solidFill>
+          <a:srgbClr val="0F172A"/>
+        </a:solidFill>
+        <a:effectLst/>
+      </p:bgPr>
+    </p:bg>
     <p:spTree>
       <p:nvGrpSpPr>
         <p:cNvPr id="1" name=""/>
@@ -6618,19 +5140,18 @@
         </p:nvSpPr>
         <p:spPr>
           <a:xfrm>
-            <a:off x="0" y="0"/>
-            <a:ext cx="12191695" cy="6858000"/>
+            <a:off x="0" y="502920"/>
+            <a:ext cx="12188952" cy="41148"/>
           </a:xfrm>
           <a:prstGeom prst="rect">
             <a:avLst/>
           </a:prstGeom>
           <a:solidFill>
-            <a:srgbClr val="0F172A"/>
+            <a:srgbClr val="3B82F6"/>
           </a:solidFill>
           <a:ln>
             <a:noFill/>
           </a:ln>
-          <a:effectLst/>
         </p:spPr>
         <p:style>
           <a:lnRef idx="1">
@@ -6656,25 +5177,92 @@
       </p:sp>
       <p:sp>
         <p:nvSpPr>
-          <p:cNvPr id="3" name="Rectangle 2"/>
+          <p:cNvPr id="3" name="TextBox 2"/>
+          <p:cNvSpPr txBox="1"/>
+          <p:nvPr/>
+        </p:nvSpPr>
+        <p:spPr>
+          <a:xfrm>
+            <a:off x="365760" y="109728"/>
+            <a:ext cx="8229600" cy="502920"/>
+          </a:xfrm>
+          <a:prstGeom prst="rect">
+            <a:avLst/>
+          </a:prstGeom>
+          <a:noFill/>
+        </p:spPr>
+        <p:txBody>
+          <a:bodyPr wrap="square">
+            <a:spAutoFit/>
+          </a:bodyPr>
+          <a:lstStyle/>
+          <a:p>
+            <a:pPr algn="l"/>
+            <a:r>
+              <a:rPr sz="2600" b="1" i="0">
+                <a:solidFill>
+                  <a:srgbClr val="FFFFFF"/>
+                </a:solidFill>
+              </a:rPr>
+              <a:t>Preliminary Results</a:t>
+            </a:r>
+          </a:p>
+        </p:txBody>
+      </p:sp>
+      <p:sp>
+        <p:nvSpPr>
+          <p:cNvPr id="4" name="TextBox 3"/>
+          <p:cNvSpPr txBox="1"/>
+          <p:nvPr/>
+        </p:nvSpPr>
+        <p:spPr>
+          <a:xfrm>
+            <a:off x="365760" y="621792"/>
+            <a:ext cx="11430000" cy="320040"/>
+          </a:xfrm>
+          <a:prstGeom prst="rect">
+            <a:avLst/>
+          </a:prstGeom>
+          <a:noFill/>
+        </p:spPr>
+        <p:txBody>
+          <a:bodyPr wrap="square">
+            <a:spAutoFit/>
+          </a:bodyPr>
+          <a:lstStyle/>
+          <a:p>
+            <a:pPr algn="l"/>
+            <a:r>
+              <a:rPr sz="1100" b="0" i="1">
+                <a:solidFill>
+                  <a:srgbClr val="64748B"/>
+                </a:solidFill>
+              </a:rPr>
+              <a:t>50×50 grids  ·  3 obstacle densities (15%, 28%, 40%)  ·  24 trials each  ·  seed 42  ·  start &amp; goal maximally separated</a:t>
+            </a:r>
+          </a:p>
+        </p:txBody>
+      </p:sp>
+      <p:sp>
+        <p:nvSpPr>
+          <p:cNvPr id="5" name="Rectangle 4"/>
           <p:cNvSpPr/>
           <p:nvPr/>
         </p:nvSpPr>
         <p:spPr>
           <a:xfrm>
-            <a:off x="457200" y="502920"/>
-            <a:ext cx="73152" cy="502920"/>
+            <a:off x="320040" y="1051560"/>
+            <a:ext cx="5669280" cy="384048"/>
           </a:xfrm>
           <a:prstGeom prst="rect">
             <a:avLst/>
           </a:prstGeom>
           <a:solidFill>
-            <a:srgbClr val="38BDF8"/>
+            <a:srgbClr val="3B82F6"/>
           </a:solidFill>
           <a:ln>
             <a:noFill/>
           </a:ln>
-          <a:effectLst/>
         </p:spPr>
         <p:style>
           <a:lnRef idx="1">
@@ -6700,14 +5288,14 @@
       </p:sp>
       <p:sp>
         <p:nvSpPr>
-          <p:cNvPr id="4" name="TextBox 3"/>
+          <p:cNvPr id="6" name="TextBox 5"/>
           <p:cNvSpPr txBox="1"/>
           <p:nvPr/>
         </p:nvSpPr>
         <p:spPr>
           <a:xfrm>
-            <a:off x="685800" y="457200"/>
-            <a:ext cx="10972800" cy="594360"/>
+            <a:off x="429768" y="1124712"/>
+            <a:ext cx="5486400" cy="274320"/>
           </a:xfrm>
           <a:prstGeom prst="rect">
             <a:avLst/>
@@ -6715,106 +5303,43 @@
           <a:noFill/>
         </p:spPr>
         <p:txBody>
-          <a:bodyPr wrap="square" lIns="0" rIns="0" tIns="0" bIns="0" anchor="t">
+          <a:bodyPr wrap="square">
             <a:spAutoFit/>
           </a:bodyPr>
           <a:lstStyle/>
           <a:p>
             <a:pPr algn="l"/>
             <a:r>
-              <a:rPr sz="2800" b="1">
-                <a:solidFill>
-                  <a:srgbClr val="EEF2F7"/>
-                </a:solidFill>
-                <a:latin typeface="Calibri"/>
-              </a:rPr>
-              <a:t>Preliminary Results</a:t>
-            </a:r>
-          </a:p>
-        </p:txBody>
-      </p:sp>
-      <p:sp>
-        <p:nvSpPr>
-          <p:cNvPr id="5" name="TextBox 4"/>
-          <p:cNvSpPr txBox="1"/>
-          <p:nvPr/>
-        </p:nvSpPr>
-        <p:spPr>
-          <a:xfrm>
-            <a:off x="685800" y="1051560"/>
-            <a:ext cx="10972800" cy="365760"/>
-          </a:xfrm>
-          <a:prstGeom prst="rect">
-            <a:avLst/>
-          </a:prstGeom>
-          <a:noFill/>
-        </p:spPr>
-        <p:txBody>
-          <a:bodyPr wrap="square" lIns="0" rIns="0" tIns="0" bIns="0" anchor="t">
-            <a:spAutoFit/>
-          </a:bodyPr>
-          <a:lstStyle/>
-          <a:p>
-            <a:pPr algn="l"/>
-            <a:r>
-              <a:rPr sz="1300" b="0">
-                <a:solidFill>
-                  <a:srgbClr val="94A3B8"/>
-                </a:solidFill>
-                <a:latin typeface="Calibri"/>
-              </a:rPr>
-              <a:t>Node expansions and wall-clock time vs. obstacle density. 24 trials each.</a:t>
-            </a:r>
-          </a:p>
-        </p:txBody>
-      </p:sp>
-      <p:pic>
-        <p:nvPicPr>
-          <p:cNvPr id="6" name="Picture 5" descr="results_combined.png"/>
-          <p:cNvPicPr>
-            <a:picLocks noChangeAspect="1"/>
-          </p:cNvPicPr>
-          <p:nvPr/>
-        </p:nvPicPr>
-        <p:blipFill>
-          <a:blip r:embed="rId2"/>
-          <a:stretch>
-            <a:fillRect/>
-          </a:stretch>
-        </p:blipFill>
-        <p:spPr>
-          <a:xfrm>
-            <a:off x="365760" y="1737360"/>
-            <a:ext cx="7223760" cy="2911537"/>
-          </a:xfrm>
-          <a:prstGeom prst="rect">
-            <a:avLst/>
-          </a:prstGeom>
-        </p:spPr>
-      </p:pic>
-      <p:sp>
-        <p:nvSpPr>
-          <p:cNvPr id="7" name="Rounded Rectangle 6"/>
+              <a:rPr sz="1000" b="1" i="0">
+                <a:solidFill>
+                  <a:srgbClr val="FFFFFF"/>
+                </a:solidFill>
+              </a:rPr>
+              <a:t>Algorithm      15% Exp  ms     28% Exp  ms     40% Exp  ms</a:t>
+            </a:r>
+          </a:p>
+        </p:txBody>
+      </p:sp>
+      <p:sp>
+        <p:nvSpPr>
+          <p:cNvPr id="7" name="Rectangle 6"/>
           <p:cNvSpPr/>
           <p:nvPr/>
         </p:nvSpPr>
         <p:spPr>
           <a:xfrm>
-            <a:off x="7818120" y="1737360"/>
-            <a:ext cx="3931920" cy="4572000"/>
-          </a:xfrm>
-          <a:prstGeom prst="roundRect">
-            <a:avLst>
-              <a:gd name="adj" fmla="val 8000"/>
-            </a:avLst>
+            <a:off x="320040" y="1435607"/>
+            <a:ext cx="5669280" cy="402336"/>
+          </a:xfrm>
+          <a:prstGeom prst="rect">
+            <a:avLst/>
           </a:prstGeom>
           <a:solidFill>
-            <a:srgbClr val="22304D"/>
+            <a:srgbClr val="1E293B"/>
           </a:solidFill>
           <a:ln>
             <a:noFill/>
           </a:ln>
-          <a:effectLst/>
         </p:spPr>
         <p:style>
           <a:lnRef idx="1">
@@ -6846,8 +5371,8 @@
         </p:nvSpPr>
         <p:spPr>
           <a:xfrm>
-            <a:off x="8046720" y="1874519"/>
-            <a:ext cx="3474720" cy="411480"/>
+            <a:off x="429768" y="1527048"/>
+            <a:ext cx="5486400" cy="274320"/>
           </a:xfrm>
           <a:prstGeom prst="rect">
             <a:avLst/>
@@ -6855,45 +5380,43 @@
           <a:noFill/>
         </p:spPr>
         <p:txBody>
-          <a:bodyPr wrap="square" lIns="0" rIns="0" tIns="0" bIns="0" anchor="t">
+          <a:bodyPr wrap="square">
             <a:spAutoFit/>
           </a:bodyPr>
           <a:lstStyle/>
           <a:p>
             <a:pPr algn="l"/>
             <a:r>
-              <a:rPr sz="1600" b="1">
-                <a:solidFill>
-                  <a:srgbClr val="38BDF8"/>
-                </a:solidFill>
-                <a:latin typeface="Calibri"/>
-              </a:rPr>
-              <a:t>Key Findings</a:t>
-            </a:r>
-          </a:p>
-        </p:txBody>
-      </p:sp>
-      <p:sp>
-        <p:nvSpPr>
-          <p:cNvPr id="9" name="Oval 8"/>
+              <a:rPr sz="1100" b="0" i="0">
+                <a:solidFill>
+                  <a:srgbClr val="CBD5E1"/>
+                </a:solidFill>
+              </a:rPr>
+              <a:t>Dijkstra        2062   7.07      1659   4.96       915   2.73</a:t>
+            </a:r>
+          </a:p>
+        </p:txBody>
+      </p:sp>
+      <p:sp>
+        <p:nvSpPr>
+          <p:cNvPr id="9" name="Rectangle 8"/>
           <p:cNvSpPr/>
           <p:nvPr/>
         </p:nvSpPr>
         <p:spPr>
           <a:xfrm>
-            <a:off x="8092440" y="2487168"/>
-            <a:ext cx="201168" cy="201168"/>
-          </a:xfrm>
-          <a:prstGeom prst="ellipse">
+            <a:off x="320040" y="1837943"/>
+            <a:ext cx="5669280" cy="402336"/>
+          </a:xfrm>
+          <a:prstGeom prst="rect">
             <a:avLst/>
           </a:prstGeom>
           <a:solidFill>
-            <a:srgbClr val="4D94E0"/>
+            <a:srgbClr val="182735"/>
           </a:solidFill>
           <a:ln>
             <a:noFill/>
           </a:ln>
-          <a:effectLst/>
         </p:spPr>
         <p:style>
           <a:lnRef idx="1">
@@ -6925,8 +5448,8 @@
         </p:nvSpPr>
         <p:spPr>
           <a:xfrm>
-            <a:off x="8412480" y="2395728"/>
-            <a:ext cx="3017520" cy="320040"/>
+            <a:off x="429768" y="1929384"/>
+            <a:ext cx="5486400" cy="274320"/>
           </a:xfrm>
           <a:prstGeom prst="rect">
             <a:avLst/>
@@ -6934,80 +5457,43 @@
           <a:noFill/>
         </p:spPr>
         <p:txBody>
-          <a:bodyPr wrap="square" lIns="0" rIns="0" tIns="0" bIns="0" anchor="t">
+          <a:bodyPr wrap="square">
             <a:spAutoFit/>
           </a:bodyPr>
           <a:lstStyle/>
           <a:p>
             <a:pPr algn="l"/>
             <a:r>
-              <a:rPr sz="1300" b="1">
-                <a:solidFill>
-                  <a:srgbClr val="EEF2F7"/>
-                </a:solidFill>
-                <a:latin typeface="Calibri"/>
-              </a:rPr>
-              <a:t>A* halves Dijkstra</a:t>
-            </a:r>
-          </a:p>
-        </p:txBody>
-      </p:sp>
-      <p:sp>
-        <p:nvSpPr>
-          <p:cNvPr id="11" name="TextBox 10"/>
-          <p:cNvSpPr txBox="1"/>
-          <p:nvPr/>
-        </p:nvSpPr>
-        <p:spPr>
-          <a:xfrm>
-            <a:off x="8412480" y="2697480"/>
-            <a:ext cx="3017520" cy="731520"/>
-          </a:xfrm>
-          <a:prstGeom prst="rect">
-            <a:avLst/>
-          </a:prstGeom>
-          <a:noFill/>
-        </p:spPr>
-        <p:txBody>
-          <a:bodyPr wrap="square" lIns="0" rIns="0" tIns="0" bIns="0" anchor="t">
-            <a:spAutoFit/>
-          </a:bodyPr>
-          <a:lstStyle/>
-          <a:p>
-            <a:pPr algn="l"/>
-            <a:r>
-              <a:rPr sz="1000" b="0">
-                <a:solidFill>
-                  <a:srgbClr val="94A3B8"/>
-                </a:solidFill>
-                <a:latin typeface="Calibri"/>
-              </a:rPr>
-              <a:t>Around 50 percent of Dijkstra's expansions at every density. Manhattan heuristic pays off consistently.</a:t>
-            </a:r>
-          </a:p>
-        </p:txBody>
-      </p:sp>
-      <p:sp>
-        <p:nvSpPr>
-          <p:cNvPr id="12" name="Oval 11"/>
+              <a:rPr sz="1100" b="0" i="0">
+                <a:solidFill>
+                  <a:srgbClr val="10B981"/>
+                </a:solidFill>
+              </a:rPr>
+              <a:t>A*              1020   3.74       629   2.11       513   1.70</a:t>
+            </a:r>
+          </a:p>
+        </p:txBody>
+      </p:sp>
+      <p:sp>
+        <p:nvSpPr>
+          <p:cNvPr id="11" name="Rectangle 10"/>
           <p:cNvSpPr/>
           <p:nvPr/>
         </p:nvSpPr>
         <p:spPr>
           <a:xfrm>
-            <a:off x="8092440" y="3538728"/>
-            <a:ext cx="201168" cy="201168"/>
-          </a:xfrm>
-          <a:prstGeom prst="ellipse">
+            <a:off x="320040" y="2240279"/>
+            <a:ext cx="5669280" cy="402336"/>
+          </a:xfrm>
+          <a:prstGeom prst="rect">
             <a:avLst/>
           </a:prstGeom>
           <a:solidFill>
-            <a:srgbClr val="2CA02C"/>
+            <a:srgbClr val="1E293B"/>
           </a:solidFill>
           <a:ln>
             <a:noFill/>
           </a:ln>
-          <a:effectLst/>
         </p:spPr>
         <p:style>
           <a:lnRef idx="1">
@@ -7033,14 +5519,48 @@
       </p:sp>
       <p:sp>
         <p:nvSpPr>
+          <p:cNvPr id="12" name="TextBox 11"/>
+          <p:cNvSpPr txBox="1"/>
+          <p:nvPr/>
+        </p:nvSpPr>
+        <p:spPr>
+          <a:xfrm>
+            <a:off x="429768" y="2331720"/>
+            <a:ext cx="5486400" cy="274320"/>
+          </a:xfrm>
+          <a:prstGeom prst="rect">
+            <a:avLst/>
+          </a:prstGeom>
+          <a:noFill/>
+        </p:spPr>
+        <p:txBody>
+          <a:bodyPr wrap="square">
+            <a:spAutoFit/>
+          </a:bodyPr>
+          <a:lstStyle/>
+          <a:p>
+            <a:pPr algn="l"/>
+            <a:r>
+              <a:rPr sz="1100" b="1" i="0">
+                <a:solidFill>
+                  <a:srgbClr val="3B82F6"/>
+                </a:solidFill>
+              </a:rPr>
+              <a:t>JPS4             488   4.43       970   6.22       682   3.13</a:t>
+            </a:r>
+          </a:p>
+        </p:txBody>
+      </p:sp>
+      <p:sp>
+        <p:nvSpPr>
           <p:cNvPr id="13" name="TextBox 12"/>
           <p:cNvSpPr txBox="1"/>
           <p:nvPr/>
         </p:nvSpPr>
         <p:spPr>
           <a:xfrm>
-            <a:off x="8412480" y="3447288"/>
-            <a:ext cx="3017520" cy="320040"/>
+            <a:off x="320040" y="2688335"/>
+            <a:ext cx="5669280" cy="320040"/>
           </a:xfrm>
           <a:prstGeom prst="rect">
             <a:avLst/>
@@ -7048,80 +5568,43 @@
           <a:noFill/>
         </p:spPr>
         <p:txBody>
-          <a:bodyPr wrap="square" lIns="0" rIns="0" tIns="0" bIns="0" anchor="t">
+          <a:bodyPr wrap="square">
             <a:spAutoFit/>
           </a:bodyPr>
           <a:lstStyle/>
           <a:p>
             <a:pPr algn="l"/>
             <a:r>
-              <a:rPr sz="1300" b="1">
-                <a:solidFill>
-                  <a:srgbClr val="EEF2F7"/>
-                </a:solidFill>
-                <a:latin typeface="Calibri"/>
-              </a:rPr>
-              <a:t>JPS4 wins on open maps</a:t>
-            </a:r>
-          </a:p>
-        </p:txBody>
-      </p:sp>
-      <p:sp>
-        <p:nvSpPr>
-          <p:cNvPr id="14" name="TextBox 13"/>
-          <p:cNvSpPr txBox="1"/>
-          <p:nvPr/>
-        </p:nvSpPr>
-        <p:spPr>
-          <a:xfrm>
-            <a:off x="8412480" y="3749039"/>
-            <a:ext cx="3017520" cy="731520"/>
-          </a:xfrm>
-          <a:prstGeom prst="rect">
-            <a:avLst/>
-          </a:prstGeom>
-          <a:noFill/>
-        </p:spPr>
-        <p:txBody>
-          <a:bodyPr wrap="square" lIns="0" rIns="0" tIns="0" bIns="0" anchor="t">
-            <a:spAutoFit/>
-          </a:bodyPr>
-          <a:lstStyle/>
-          <a:p>
-            <a:pPr algn="l"/>
-            <a:r>
-              <a:rPr sz="1000" b="0">
-                <a:solidFill>
-                  <a:srgbClr val="94A3B8"/>
-                </a:solidFill>
-                <a:latin typeface="Calibri"/>
-              </a:rPr>
-              <a:t>At 15 percent density, JPS4 visits only 488 nodes versus 2062 for Dijkstra. A 76 percent reduction.</a:t>
-            </a:r>
-          </a:p>
-        </p:txBody>
-      </p:sp>
-      <p:sp>
-        <p:nvSpPr>
-          <p:cNvPr id="15" name="Oval 14"/>
+              <a:rPr sz="900" b="0" i="1">
+                <a:solidFill>
+                  <a:srgbClr val="64748B"/>
+                </a:solidFill>
+              </a:rPr>
+              <a:t>Exp = mean node expansions   ·   ms = mean wall-clock time   ·   24 trials per density</a:t>
+            </a:r>
+          </a:p>
+        </p:txBody>
+      </p:sp>
+      <p:sp>
+        <p:nvSpPr>
+          <p:cNvPr id="14" name="Rectangle 13"/>
           <p:cNvSpPr/>
           <p:nvPr/>
         </p:nvSpPr>
         <p:spPr>
           <a:xfrm>
-            <a:off x="8092440" y="4590288"/>
-            <a:ext cx="201168" cy="201168"/>
-          </a:xfrm>
-          <a:prstGeom prst="ellipse">
+            <a:off x="6172200" y="1005840"/>
+            <a:ext cx="5669280" cy="3108960"/>
+          </a:xfrm>
+          <a:prstGeom prst="rect">
             <a:avLst/>
           </a:prstGeom>
           <a:solidFill>
-            <a:srgbClr val="F5A624"/>
+            <a:srgbClr val="1E293B"/>
           </a:solidFill>
           <a:ln>
             <a:noFill/>
           </a:ln>
-          <a:effectLst/>
         </p:spPr>
         <p:style>
           <a:lnRef idx="1">
@@ -7147,14 +5630,48 @@
       </p:sp>
       <p:sp>
         <p:nvSpPr>
+          <p:cNvPr id="15" name="TextBox 14"/>
+          <p:cNvSpPr txBox="1"/>
+          <p:nvPr/>
+        </p:nvSpPr>
+        <p:spPr>
+          <a:xfrm>
+            <a:off x="6309360" y="2103120"/>
+            <a:ext cx="5303520" cy="914400"/>
+          </a:xfrm>
+          <a:prstGeom prst="rect">
+            <a:avLst/>
+          </a:prstGeom>
+          <a:noFill/>
+        </p:spPr>
+        <p:txBody>
+          <a:bodyPr wrap="square">
+            <a:spAutoFit/>
+          </a:bodyPr>
+          <a:lstStyle/>
+          <a:p>
+            <a:pPr algn="ctr"/>
+            <a:r>
+              <a:rPr sz="1100" b="0" i="1">
+                <a:solidFill>
+                  <a:srgbClr val="64748B"/>
+                </a:solidFill>
+              </a:rPr>
+              <a:t>[Figure: results_combined.png — add manually if missing]</a:t>
+            </a:r>
+          </a:p>
+        </p:txBody>
+      </p:sp>
+      <p:sp>
+        <p:nvSpPr>
           <p:cNvPr id="16" name="TextBox 15"/>
           <p:cNvSpPr txBox="1"/>
           <p:nvPr/>
         </p:nvSpPr>
         <p:spPr>
           <a:xfrm>
-            <a:off x="8412480" y="4498848"/>
-            <a:ext cx="3017520" cy="320040"/>
+            <a:off x="6172200" y="4160520"/>
+            <a:ext cx="5669280" cy="320040"/>
           </a:xfrm>
           <a:prstGeom prst="rect">
             <a:avLst/>
@@ -7162,20 +5679,19 @@
           <a:noFill/>
         </p:spPr>
         <p:txBody>
-          <a:bodyPr wrap="square" lIns="0" rIns="0" tIns="0" bIns="0" anchor="t">
+          <a:bodyPr wrap="square">
             <a:spAutoFit/>
           </a:bodyPr>
           <a:lstStyle/>
           <a:p>
-            <a:pPr algn="l"/>
-            <a:r>
-              <a:rPr sz="1300" b="1">
-                <a:solidFill>
-                  <a:srgbClr val="EEF2F7"/>
-                </a:solidFill>
-                <a:latin typeface="Calibri"/>
-              </a:rPr>
-              <a:t>JPS4 loses on dense maps</a:t>
+            <a:pPr algn="ctr"/>
+            <a:r>
+              <a:rPr sz="900" b="0" i="1">
+                <a:solidFill>
+                  <a:srgbClr val="64748B"/>
+                </a:solidFill>
+              </a:rPr>
+              <a:t>Figure 1: Mean node expansions (left) and wall-clock time (right) vs. obstacle density</a:t>
             </a:r>
           </a:p>
         </p:txBody>
@@ -7188,8 +5704,8 @@
         </p:nvSpPr>
         <p:spPr>
           <a:xfrm>
-            <a:off x="8412480" y="4800600"/>
-            <a:ext cx="3017520" cy="731520"/>
+            <a:off x="320040" y="4663440"/>
+            <a:ext cx="11430000" cy="384048"/>
           </a:xfrm>
           <a:prstGeom prst="rect">
             <a:avLst/>
@@ -7197,47 +5713,205 @@
           <a:noFill/>
         </p:spPr>
         <p:txBody>
-          <a:bodyPr wrap="square" lIns="0" rIns="0" tIns="0" bIns="0" anchor="t">
+          <a:bodyPr wrap="square">
             <a:spAutoFit/>
           </a:bodyPr>
           <a:lstStyle/>
           <a:p>
             <a:pPr algn="l"/>
             <a:r>
-              <a:rPr sz="1000" b="0">
-                <a:solidFill>
-                  <a:srgbClr val="94A3B8"/>
-                </a:solidFill>
-                <a:latin typeface="Calibri"/>
-              </a:rPr>
-              <a:t>At 28 percent, JPS4 expands 970 cells versus A*'s 629. Shorter corridors mean shorter jumps.</a:t>
-            </a:r>
-          </a:p>
-        </p:txBody>
-      </p:sp>
-      <p:sp>
-        <p:nvSpPr>
-          <p:cNvPr id="18" name="Rounded Rectangle 17"/>
+              <a:rPr sz="1100" b="0" i="0">
+                <a:solidFill>
+                  <a:srgbClr val="10B981"/>
+                </a:solidFill>
+              </a:rPr>
+              <a:t>✓  A* cuts Dijkstra's expansions by ~50% at all densities — the heuristic consistently helps</a:t>
+            </a:r>
+          </a:p>
+        </p:txBody>
+      </p:sp>
+      <p:sp>
+        <p:nvSpPr>
+          <p:cNvPr id="18" name="TextBox 17"/>
+          <p:cNvSpPr txBox="1"/>
+          <p:nvPr/>
+        </p:nvSpPr>
+        <p:spPr>
+          <a:xfrm>
+            <a:off x="320040" y="5102352"/>
+            <a:ext cx="11430000" cy="384048"/>
+          </a:xfrm>
+          <a:prstGeom prst="rect">
+            <a:avLst/>
+          </a:prstGeom>
+          <a:noFill/>
+        </p:spPr>
+        <p:txBody>
+          <a:bodyPr wrap="square">
+            <a:spAutoFit/>
+          </a:bodyPr>
+          <a:lstStyle/>
+          <a:p>
+            <a:pPr algn="l"/>
+            <a:r>
+              <a:rPr sz="1100" b="0" i="0">
+                <a:solidFill>
+                  <a:srgbClr val="3B82F6"/>
+                </a:solidFill>
+              </a:rPr>
+              <a:t>✓  JPS4 wins at LOW density: 488 vs 1020 nodes (52% fewer than A*) — open maps = long jumps</a:t>
+            </a:r>
+          </a:p>
+        </p:txBody>
+      </p:sp>
+      <p:sp>
+        <p:nvSpPr>
+          <p:cNvPr id="19" name="TextBox 18"/>
+          <p:cNvSpPr txBox="1"/>
+          <p:nvPr/>
+        </p:nvSpPr>
+        <p:spPr>
+          <a:xfrm>
+            <a:off x="320040" y="5541264"/>
+            <a:ext cx="11430000" cy="384048"/>
+          </a:xfrm>
+          <a:prstGeom prst="rect">
+            <a:avLst/>
+          </a:prstGeom>
+          <a:noFill/>
+        </p:spPr>
+        <p:txBody>
+          <a:bodyPr wrap="square">
+            <a:spAutoFit/>
+          </a:bodyPr>
+          <a:lstStyle/>
+          <a:p>
+            <a:pPr algn="l"/>
+            <a:r>
+              <a:rPr sz="1100" b="0" i="0">
+                <a:solidFill>
+                  <a:srgbClr val="F59E0B"/>
+                </a:solidFill>
+              </a:rPr>
+              <a:t>⚠  JPS4 SLOWER than A* at medium density: obstacles make jumps short, overhead stays constant</a:t>
+            </a:r>
+          </a:p>
+        </p:txBody>
+      </p:sp>
+      <p:sp>
+        <p:nvSpPr>
+          <p:cNvPr id="20" name="TextBox 19"/>
+          <p:cNvSpPr txBox="1"/>
+          <p:nvPr/>
+        </p:nvSpPr>
+        <p:spPr>
+          <a:xfrm>
+            <a:off x="320040" y="5980175"/>
+            <a:ext cx="11430000" cy="384048"/>
+          </a:xfrm>
+          <a:prstGeom prst="rect">
+            <a:avLst/>
+          </a:prstGeom>
+          <a:noFill/>
+        </p:spPr>
+        <p:txBody>
+          <a:bodyPr wrap="square">
+            <a:spAutoFit/>
+          </a:bodyPr>
+          <a:lstStyle/>
+          <a:p>
+            <a:pPr algn="l"/>
+            <a:r>
+              <a:rPr sz="1100" b="0" i="0">
+                <a:solidFill>
+                  <a:srgbClr val="64748B"/>
+                </a:solidFill>
+              </a:rPr>
+              <a:t>⏱  JPS4 slower on the clock in Python — compiled code (C++/Java) removes this overhead</a:t>
+            </a:r>
+          </a:p>
+        </p:txBody>
+      </p:sp>
+      <p:sp>
+        <p:nvSpPr>
+          <p:cNvPr id="21" name="TextBox 20"/>
+          <p:cNvSpPr txBox="1"/>
+          <p:nvPr/>
+        </p:nvSpPr>
+        <p:spPr>
+          <a:xfrm>
+            <a:off x="11430000" y="6492240"/>
+            <a:ext cx="731520" cy="274320"/>
+          </a:xfrm>
+          <a:prstGeom prst="rect">
+            <a:avLst/>
+          </a:prstGeom>
+          <a:noFill/>
+        </p:spPr>
+        <p:txBody>
+          <a:bodyPr wrap="square">
+            <a:spAutoFit/>
+          </a:bodyPr>
+          <a:lstStyle/>
+          <a:p>
+            <a:pPr algn="r"/>
+            <a:r>
+              <a:rPr sz="1000" b="0" i="0">
+                <a:solidFill>
+                  <a:srgbClr val="64748B"/>
+                </a:solidFill>
+              </a:rPr>
+              <a:t>4 / 5</a:t>
+            </a:r>
+          </a:p>
+        </p:txBody>
+      </p:sp>
+    </p:spTree>
+  </p:cSld>
+  <p:clrMapOvr>
+    <a:masterClrMapping/>
+  </p:clrMapOvr>
+</p:sld>
+</file>
+
+<file path=ppt/slides/slide5.xml><?xml version="1.0" encoding="utf-8"?>
+<p:sld xmlns:a="http://schemas.openxmlformats.org/drawingml/2006/main" xmlns:p="http://schemas.openxmlformats.org/presentationml/2006/main" xmlns:r="http://schemas.openxmlformats.org/officeDocument/2006/relationships">
+  <p:cSld>
+    <p:bg>
+      <p:bgPr>
+        <a:solidFill>
+          <a:srgbClr val="0F172A"/>
+        </a:solidFill>
+        <a:effectLst/>
+      </p:bgPr>
+    </p:bg>
+    <p:spTree>
+      <p:nvGrpSpPr>
+        <p:cNvPr id="1" name=""/>
+        <p:cNvGrpSpPr/>
+        <p:nvPr/>
+      </p:nvGrpSpPr>
+      <p:grpSpPr/>
+      <p:sp>
+        <p:nvSpPr>
+          <p:cNvPr id="2" name="Rectangle 1"/>
           <p:cNvSpPr/>
           <p:nvPr/>
         </p:nvSpPr>
         <p:spPr>
           <a:xfrm>
-            <a:off x="8046720" y="5577840"/>
-            <a:ext cx="3474720" cy="640080"/>
-          </a:xfrm>
-          <a:prstGeom prst="roundRect">
-            <a:avLst>
-              <a:gd name="adj" fmla="val 8000"/>
-            </a:avLst>
+            <a:off x="0" y="502920"/>
+            <a:ext cx="12188952" cy="41148"/>
+          </a:xfrm>
+          <a:prstGeom prst="rect">
+            <a:avLst/>
           </a:prstGeom>
           <a:solidFill>
-            <a:srgbClr val="1A253D"/>
+            <a:srgbClr val="3B82F6"/>
           </a:solidFill>
           <a:ln>
             <a:noFill/>
           </a:ln>
-          <a:effectLst/>
         </p:spPr>
         <p:style>
           <a:lnRef idx="1">
@@ -7263,14 +5937,14 @@
       </p:sp>
       <p:sp>
         <p:nvSpPr>
-          <p:cNvPr id="19" name="TextBox 18"/>
+          <p:cNvPr id="3" name="TextBox 2"/>
           <p:cNvSpPr txBox="1"/>
           <p:nvPr/>
         </p:nvSpPr>
         <p:spPr>
           <a:xfrm>
-            <a:off x="8046720" y="5577840"/>
-            <a:ext cx="3474720" cy="320040"/>
+            <a:off x="365760" y="109728"/>
+            <a:ext cx="8229600" cy="502920"/>
           </a:xfrm>
           <a:prstGeom prst="rect">
             <a:avLst/>
@@ -7278,21 +5952,681 @@
           <a:noFill/>
         </p:spPr>
         <p:txBody>
-          <a:bodyPr wrap="square" lIns="0" rIns="0" tIns="0" bIns="0" anchor="t">
+          <a:bodyPr wrap="square">
             <a:spAutoFit/>
           </a:bodyPr>
           <a:lstStyle/>
           <a:p>
+            <a:pPr algn="l"/>
+            <a:r>
+              <a:rPr sz="2600" b="1" i="0">
+                <a:solidFill>
+                  <a:srgbClr val="FFFFFF"/>
+                </a:solidFill>
+              </a:rPr>
+              <a:t>Challenges &amp; Next Plan</a:t>
+            </a:r>
+          </a:p>
+        </p:txBody>
+      </p:sp>
+      <p:sp>
+        <p:nvSpPr>
+          <p:cNvPr id="4" name="TextBox 3"/>
+          <p:cNvSpPr txBox="1"/>
+          <p:nvPr/>
+        </p:nvSpPr>
+        <p:spPr>
+          <a:xfrm>
+            <a:off x="365760" y="685800"/>
+            <a:ext cx="5303520" cy="320040"/>
+          </a:xfrm>
+          <a:prstGeom prst="rect">
+            <a:avLst/>
+          </a:prstGeom>
+          <a:noFill/>
+        </p:spPr>
+        <p:txBody>
+          <a:bodyPr wrap="square">
+            <a:spAutoFit/>
+          </a:bodyPr>
+          <a:lstStyle/>
+          <a:p>
+            <a:pPr algn="l"/>
+            <a:r>
+              <a:rPr sz="1000" b="1" i="0">
+                <a:solidFill>
+                  <a:srgbClr val="3B82F6"/>
+                </a:solidFill>
+              </a:rPr>
+              <a:t>CHALLENGES IDENTIFIED</a:t>
+            </a:r>
+          </a:p>
+        </p:txBody>
+      </p:sp>
+      <p:sp>
+        <p:nvSpPr>
+          <p:cNvPr id="5" name="Rectangle 4"/>
+          <p:cNvSpPr/>
+          <p:nvPr/>
+        </p:nvSpPr>
+        <p:spPr>
+          <a:xfrm>
+            <a:off x="320040" y="1051560"/>
+            <a:ext cx="5486400" cy="1554480"/>
+          </a:xfrm>
+          <a:prstGeom prst="rect">
+            <a:avLst/>
+          </a:prstGeom>
+          <a:solidFill>
+            <a:srgbClr val="1E293B"/>
+          </a:solidFill>
+          <a:ln>
+            <a:noFill/>
+          </a:ln>
+        </p:spPr>
+        <p:style>
+          <a:lnRef idx="1">
+            <a:schemeClr val="accent1"/>
+          </a:lnRef>
+          <a:fillRef idx="3">
+            <a:schemeClr val="accent1"/>
+          </a:fillRef>
+          <a:effectRef idx="2">
+            <a:schemeClr val="accent1"/>
+          </a:effectRef>
+          <a:fontRef idx="minor">
+            <a:schemeClr val="lt1"/>
+          </a:fontRef>
+        </p:style>
+        <p:txBody>
+          <a:bodyPr rtlCol="0" anchor="ctr"/>
+          <a:lstStyle/>
+          <a:p>
             <a:pPr algn="ctr"/>
-            <a:r>
-              <a:rPr sz="900" b="1">
-                <a:solidFill>
-                  <a:srgbClr val="2CA02C"/>
-                </a:solidFill>
-                <a:latin typeface="Calibri"/>
-              </a:rPr>
-              <a:t>CORRECTNESS</a:t>
-            </a:r>
+          </a:p>
+        </p:txBody>
+      </p:sp>
+      <p:sp>
+        <p:nvSpPr>
+          <p:cNvPr id="6" name="Rectangle 5"/>
+          <p:cNvSpPr/>
+          <p:nvPr/>
+        </p:nvSpPr>
+        <p:spPr>
+          <a:xfrm>
+            <a:off x="347472" y="1161288"/>
+            <a:ext cx="457200" cy="457200"/>
+          </a:xfrm>
+          <a:prstGeom prst="rect">
+            <a:avLst/>
+          </a:prstGeom>
+          <a:solidFill>
+            <a:srgbClr val="F59E0B"/>
+          </a:solidFill>
+          <a:ln>
+            <a:noFill/>
+          </a:ln>
+        </p:spPr>
+        <p:style>
+          <a:lnRef idx="1">
+            <a:schemeClr val="accent1"/>
+          </a:lnRef>
+          <a:fillRef idx="3">
+            <a:schemeClr val="accent1"/>
+          </a:fillRef>
+          <a:effectRef idx="2">
+            <a:schemeClr val="accent1"/>
+          </a:effectRef>
+          <a:fontRef idx="minor">
+            <a:schemeClr val="lt1"/>
+          </a:fontRef>
+        </p:style>
+        <p:txBody>
+          <a:bodyPr rtlCol="0" anchor="ctr"/>
+          <a:lstStyle/>
+          <a:p>
+            <a:pPr algn="ctr"/>
+          </a:p>
+        </p:txBody>
+      </p:sp>
+      <p:sp>
+        <p:nvSpPr>
+          <p:cNvPr id="7" name="TextBox 6"/>
+          <p:cNvSpPr txBox="1"/>
+          <p:nvPr/>
+        </p:nvSpPr>
+        <p:spPr>
+          <a:xfrm>
+            <a:off x="347472" y="1179576"/>
+            <a:ext cx="457200" cy="365760"/>
+          </a:xfrm>
+          <a:prstGeom prst="rect">
+            <a:avLst/>
+          </a:prstGeom>
+          <a:noFill/>
+        </p:spPr>
+        <p:txBody>
+          <a:bodyPr wrap="square">
+            <a:spAutoFit/>
+          </a:bodyPr>
+          <a:lstStyle/>
+          <a:p>
+            <a:pPr algn="ctr"/>
+            <a:r>
+              <a:rPr sz="1400" b="1" i="0">
+                <a:solidFill>
+                  <a:srgbClr val="FFFFFF"/>
+                </a:solidFill>
+              </a:rPr>
+              <a:t>1</a:t>
+            </a:r>
+          </a:p>
+        </p:txBody>
+      </p:sp>
+      <p:sp>
+        <p:nvSpPr>
+          <p:cNvPr id="8" name="TextBox 7"/>
+          <p:cNvSpPr txBox="1"/>
+          <p:nvPr/>
+        </p:nvSpPr>
+        <p:spPr>
+          <a:xfrm>
+            <a:off x="914400" y="1161288"/>
+            <a:ext cx="4754880" cy="1371600"/>
+          </a:xfrm>
+          <a:prstGeom prst="rect">
+            <a:avLst/>
+          </a:prstGeom>
+          <a:noFill/>
+        </p:spPr>
+        <p:txBody>
+          <a:bodyPr wrap="square">
+            <a:spAutoFit/>
+          </a:bodyPr>
+          <a:lstStyle/>
+          <a:p>
+            <a:pPr algn="l"/>
+            <a:r>
+              <a:rPr sz="1300" b="1" i="0">
+                <a:solidFill>
+                  <a:srgbClr val="F59E0B"/>
+                </a:solidFill>
+              </a:rPr>
+              <a:t>Fair Timing</a:t>
+            </a:r>
+          </a:p>
+          <a:p>
+            <a:pPr algn="l">
+              <a:spcBef>
+                <a:spcPts val="500"/>
+              </a:spcBef>
+            </a:pPr>
+            <a:r>
+              <a:rPr sz="1100" b="0" i="0">
+                <a:solidFill>
+                  <a:srgbClr val="CBD5E1"/>
+                </a:solidFill>
+              </a:rPr>
+              <a:t>Python amplifies JPS4's inner-loop cost. Node expansions give a cleaner algorithmic picture right now. Plan: profile the loop and optimize data access patterns.</a:t>
+            </a:r>
+          </a:p>
+        </p:txBody>
+      </p:sp>
+      <p:sp>
+        <p:nvSpPr>
+          <p:cNvPr id="9" name="Rectangle 8"/>
+          <p:cNvSpPr/>
+          <p:nvPr/>
+        </p:nvSpPr>
+        <p:spPr>
+          <a:xfrm>
+            <a:off x="320040" y="2715768"/>
+            <a:ext cx="5486400" cy="1554480"/>
+          </a:xfrm>
+          <a:prstGeom prst="rect">
+            <a:avLst/>
+          </a:prstGeom>
+          <a:solidFill>
+            <a:srgbClr val="1E293B"/>
+          </a:solidFill>
+          <a:ln>
+            <a:noFill/>
+          </a:ln>
+        </p:spPr>
+        <p:style>
+          <a:lnRef idx="1">
+            <a:schemeClr val="accent1"/>
+          </a:lnRef>
+          <a:fillRef idx="3">
+            <a:schemeClr val="accent1"/>
+          </a:fillRef>
+          <a:effectRef idx="2">
+            <a:schemeClr val="accent1"/>
+          </a:effectRef>
+          <a:fontRef idx="minor">
+            <a:schemeClr val="lt1"/>
+          </a:fontRef>
+        </p:style>
+        <p:txBody>
+          <a:bodyPr rtlCol="0" anchor="ctr"/>
+          <a:lstStyle/>
+          <a:p>
+            <a:pPr algn="ctr"/>
+          </a:p>
+        </p:txBody>
+      </p:sp>
+      <p:sp>
+        <p:nvSpPr>
+          <p:cNvPr id="10" name="Rectangle 9"/>
+          <p:cNvSpPr/>
+          <p:nvPr/>
+        </p:nvSpPr>
+        <p:spPr>
+          <a:xfrm>
+            <a:off x="347472" y="2825496"/>
+            <a:ext cx="457200" cy="457200"/>
+          </a:xfrm>
+          <a:prstGeom prst="rect">
+            <a:avLst/>
+          </a:prstGeom>
+          <a:solidFill>
+            <a:srgbClr val="10B981"/>
+          </a:solidFill>
+          <a:ln>
+            <a:noFill/>
+          </a:ln>
+        </p:spPr>
+        <p:style>
+          <a:lnRef idx="1">
+            <a:schemeClr val="accent1"/>
+          </a:lnRef>
+          <a:fillRef idx="3">
+            <a:schemeClr val="accent1"/>
+          </a:fillRef>
+          <a:effectRef idx="2">
+            <a:schemeClr val="accent1"/>
+          </a:effectRef>
+          <a:fontRef idx="minor">
+            <a:schemeClr val="lt1"/>
+          </a:fontRef>
+        </p:style>
+        <p:txBody>
+          <a:bodyPr rtlCol="0" anchor="ctr"/>
+          <a:lstStyle/>
+          <a:p>
+            <a:pPr algn="ctr"/>
+          </a:p>
+        </p:txBody>
+      </p:sp>
+      <p:sp>
+        <p:nvSpPr>
+          <p:cNvPr id="11" name="TextBox 10"/>
+          <p:cNvSpPr txBox="1"/>
+          <p:nvPr/>
+        </p:nvSpPr>
+        <p:spPr>
+          <a:xfrm>
+            <a:off x="347472" y="2843784"/>
+            <a:ext cx="457200" cy="365760"/>
+          </a:xfrm>
+          <a:prstGeom prst="rect">
+            <a:avLst/>
+          </a:prstGeom>
+          <a:noFill/>
+        </p:spPr>
+        <p:txBody>
+          <a:bodyPr wrap="square">
+            <a:spAutoFit/>
+          </a:bodyPr>
+          <a:lstStyle/>
+          <a:p>
+            <a:pPr algn="ctr"/>
+            <a:r>
+              <a:rPr sz="1400" b="1" i="0">
+                <a:solidFill>
+                  <a:srgbClr val="FFFFFF"/>
+                </a:solidFill>
+              </a:rPr>
+              <a:t>2</a:t>
+            </a:r>
+          </a:p>
+        </p:txBody>
+      </p:sp>
+      <p:sp>
+        <p:nvSpPr>
+          <p:cNvPr id="12" name="TextBox 11"/>
+          <p:cNvSpPr txBox="1"/>
+          <p:nvPr/>
+        </p:nvSpPr>
+        <p:spPr>
+          <a:xfrm>
+            <a:off x="914400" y="2825496"/>
+            <a:ext cx="4754880" cy="1371600"/>
+          </a:xfrm>
+          <a:prstGeom prst="rect">
+            <a:avLst/>
+          </a:prstGeom>
+          <a:noFill/>
+        </p:spPr>
+        <p:txBody>
+          <a:bodyPr wrap="square">
+            <a:spAutoFit/>
+          </a:bodyPr>
+          <a:lstStyle/>
+          <a:p>
+            <a:pPr algn="l"/>
+            <a:r>
+              <a:rPr sz="1300" b="1" i="0">
+                <a:solidFill>
+                  <a:srgbClr val="10B981"/>
+                </a:solidFill>
+              </a:rPr>
+              <a:t>Grid Size Too Small</a:t>
+            </a:r>
+          </a:p>
+          <a:p>
+            <a:pPr algn="l">
+              <a:spcBef>
+                <a:spcPts val="500"/>
+              </a:spcBef>
+            </a:pPr>
+            <a:r>
+              <a:rPr sz="1100" b="0" i="0">
+                <a:solidFill>
+                  <a:srgbClr val="CBD5E1"/>
+                </a:solidFill>
+              </a:rPr>
+              <a:t>On 50×50 all algorithms finish in &lt;10ms — timing noise obscures differences. JPS4's advantage grows with corridor length, so we need 100×100 and 200×200 scale tests.</a:t>
+            </a:r>
+          </a:p>
+        </p:txBody>
+      </p:sp>
+      <p:sp>
+        <p:nvSpPr>
+          <p:cNvPr id="13" name="Rectangle 12"/>
+          <p:cNvSpPr/>
+          <p:nvPr/>
+        </p:nvSpPr>
+        <p:spPr>
+          <a:xfrm>
+            <a:off x="320040" y="4379976"/>
+            <a:ext cx="5486400" cy="1554480"/>
+          </a:xfrm>
+          <a:prstGeom prst="rect">
+            <a:avLst/>
+          </a:prstGeom>
+          <a:solidFill>
+            <a:srgbClr val="1E293B"/>
+          </a:solidFill>
+          <a:ln>
+            <a:noFill/>
+          </a:ln>
+        </p:spPr>
+        <p:style>
+          <a:lnRef idx="1">
+            <a:schemeClr val="accent1"/>
+          </a:lnRef>
+          <a:fillRef idx="3">
+            <a:schemeClr val="accent1"/>
+          </a:fillRef>
+          <a:effectRef idx="2">
+            <a:schemeClr val="accent1"/>
+          </a:effectRef>
+          <a:fontRef idx="minor">
+            <a:schemeClr val="lt1"/>
+          </a:fontRef>
+        </p:style>
+        <p:txBody>
+          <a:bodyPr rtlCol="0" anchor="ctr"/>
+          <a:lstStyle/>
+          <a:p>
+            <a:pPr algn="ctr"/>
+          </a:p>
+        </p:txBody>
+      </p:sp>
+      <p:sp>
+        <p:nvSpPr>
+          <p:cNvPr id="14" name="Rectangle 13"/>
+          <p:cNvSpPr/>
+          <p:nvPr/>
+        </p:nvSpPr>
+        <p:spPr>
+          <a:xfrm>
+            <a:off x="347472" y="4489704"/>
+            <a:ext cx="457200" cy="457200"/>
+          </a:xfrm>
+          <a:prstGeom prst="rect">
+            <a:avLst/>
+          </a:prstGeom>
+          <a:solidFill>
+            <a:srgbClr val="3B82F6"/>
+          </a:solidFill>
+          <a:ln>
+            <a:noFill/>
+          </a:ln>
+        </p:spPr>
+        <p:style>
+          <a:lnRef idx="1">
+            <a:schemeClr val="accent1"/>
+          </a:lnRef>
+          <a:fillRef idx="3">
+            <a:schemeClr val="accent1"/>
+          </a:fillRef>
+          <a:effectRef idx="2">
+            <a:schemeClr val="accent1"/>
+          </a:effectRef>
+          <a:fontRef idx="minor">
+            <a:schemeClr val="lt1"/>
+          </a:fontRef>
+        </p:style>
+        <p:txBody>
+          <a:bodyPr rtlCol="0" anchor="ctr"/>
+          <a:lstStyle/>
+          <a:p>
+            <a:pPr algn="ctr"/>
+          </a:p>
+        </p:txBody>
+      </p:sp>
+      <p:sp>
+        <p:nvSpPr>
+          <p:cNvPr id="15" name="TextBox 14"/>
+          <p:cNvSpPr txBox="1"/>
+          <p:nvPr/>
+        </p:nvSpPr>
+        <p:spPr>
+          <a:xfrm>
+            <a:off x="347472" y="4507992"/>
+            <a:ext cx="457200" cy="365760"/>
+          </a:xfrm>
+          <a:prstGeom prst="rect">
+            <a:avLst/>
+          </a:prstGeom>
+          <a:noFill/>
+        </p:spPr>
+        <p:txBody>
+          <a:bodyPr wrap="square">
+            <a:spAutoFit/>
+          </a:bodyPr>
+          <a:lstStyle/>
+          <a:p>
+            <a:pPr algn="ctr"/>
+            <a:r>
+              <a:rPr sz="1400" b="1" i="0">
+                <a:solidFill>
+                  <a:srgbClr val="FFFFFF"/>
+                </a:solidFill>
+              </a:rPr>
+              <a:t>3</a:t>
+            </a:r>
+          </a:p>
+        </p:txBody>
+      </p:sp>
+      <p:sp>
+        <p:nvSpPr>
+          <p:cNvPr id="16" name="TextBox 15"/>
+          <p:cNvSpPr txBox="1"/>
+          <p:nvPr/>
+        </p:nvSpPr>
+        <p:spPr>
+          <a:xfrm>
+            <a:off x="914400" y="4489704"/>
+            <a:ext cx="4754880" cy="1371600"/>
+          </a:xfrm>
+          <a:prstGeom prst="rect">
+            <a:avLst/>
+          </a:prstGeom>
+          <a:noFill/>
+        </p:spPr>
+        <p:txBody>
+          <a:bodyPr wrap="square">
+            <a:spAutoFit/>
+          </a:bodyPr>
+          <a:lstStyle/>
+          <a:p>
+            <a:pPr algn="l"/>
+            <a:r>
+              <a:rPr sz="1300" b="1" i="0">
+                <a:solidFill>
+                  <a:srgbClr val="3B82F6"/>
+                </a:solidFill>
+              </a:rPr>
+              <a:t>Density Cross-Over Unknown</a:t>
+            </a:r>
+          </a:p>
+          <a:p>
+            <a:pPr algn="l">
+              <a:spcBef>
+                <a:spcPts val="500"/>
+              </a:spcBef>
+            </a:pPr>
+            <a:r>
+              <a:rPr sz="1100" b="0" i="0">
+                <a:solidFill>
+                  <a:srgbClr val="CBD5E1"/>
+                </a:solidFill>
+              </a:rPr>
+              <a:t>JPS4 outperforms A* at low density but not at medium. We don't know exactly where the break-even point is — finding it is the key open question.</a:t>
+            </a:r>
+          </a:p>
+        </p:txBody>
+      </p:sp>
+      <p:sp>
+        <p:nvSpPr>
+          <p:cNvPr id="17" name="TextBox 16"/>
+          <p:cNvSpPr txBox="1"/>
+          <p:nvPr/>
+        </p:nvSpPr>
+        <p:spPr>
+          <a:xfrm>
+            <a:off x="6080760" y="685800"/>
+            <a:ext cx="5760720" cy="320040"/>
+          </a:xfrm>
+          <a:prstGeom prst="rect">
+            <a:avLst/>
+          </a:prstGeom>
+          <a:noFill/>
+        </p:spPr>
+        <p:txBody>
+          <a:bodyPr wrap="square">
+            <a:spAutoFit/>
+          </a:bodyPr>
+          <a:lstStyle/>
+          <a:p>
+            <a:pPr algn="l"/>
+            <a:r>
+              <a:rPr sz="1000" b="1" i="0">
+                <a:solidFill>
+                  <a:srgbClr val="10B981"/>
+                </a:solidFill>
+              </a:rPr>
+              <a:t>NEXT PLAN</a:t>
+            </a:r>
+          </a:p>
+        </p:txBody>
+      </p:sp>
+      <p:sp>
+        <p:nvSpPr>
+          <p:cNvPr id="18" name="Oval 17"/>
+          <p:cNvSpPr/>
+          <p:nvPr/>
+        </p:nvSpPr>
+        <p:spPr>
+          <a:xfrm>
+            <a:off x="6080760" y="1188719"/>
+            <a:ext cx="201168" cy="201168"/>
+          </a:xfrm>
+          <a:prstGeom prst="ellipse">
+            <a:avLst/>
+          </a:prstGeom>
+          <a:solidFill>
+            <a:srgbClr val="3B82F6"/>
+          </a:solidFill>
+          <a:ln>
+            <a:noFill/>
+          </a:ln>
+        </p:spPr>
+        <p:style>
+          <a:lnRef idx="1">
+            <a:schemeClr val="accent1"/>
+          </a:lnRef>
+          <a:fillRef idx="3">
+            <a:schemeClr val="accent1"/>
+          </a:fillRef>
+          <a:effectRef idx="2">
+            <a:schemeClr val="accent1"/>
+          </a:effectRef>
+          <a:fontRef idx="minor">
+            <a:schemeClr val="lt1"/>
+          </a:fontRef>
+        </p:style>
+        <p:txBody>
+          <a:bodyPr rtlCol="0" anchor="ctr"/>
+          <a:lstStyle/>
+          <a:p>
+            <a:pPr algn="ctr"/>
+          </a:p>
+        </p:txBody>
+      </p:sp>
+      <p:sp>
+        <p:nvSpPr>
+          <p:cNvPr id="19" name="Rectangle 18"/>
+          <p:cNvSpPr/>
+          <p:nvPr/>
+        </p:nvSpPr>
+        <p:spPr>
+          <a:xfrm>
+            <a:off x="6172200" y="1389888"/>
+            <a:ext cx="18288" cy="1216152"/>
+          </a:xfrm>
+          <a:prstGeom prst="rect">
+            <a:avLst/>
+          </a:prstGeom>
+          <a:solidFill>
+            <a:srgbClr val="64748B"/>
+          </a:solidFill>
+          <a:ln>
+            <a:noFill/>
+          </a:ln>
+        </p:spPr>
+        <p:style>
+          <a:lnRef idx="1">
+            <a:schemeClr val="accent1"/>
+          </a:lnRef>
+          <a:fillRef idx="3">
+            <a:schemeClr val="accent1"/>
+          </a:fillRef>
+          <a:effectRef idx="2">
+            <a:schemeClr val="accent1"/>
+          </a:effectRef>
+          <a:fontRef idx="minor">
+            <a:schemeClr val="lt1"/>
+          </a:fontRef>
+        </p:style>
+        <p:txBody>
+          <a:bodyPr rtlCol="0" anchor="ctr"/>
+          <a:lstStyle/>
+          <a:p>
+            <a:pPr algn="ctr"/>
           </a:p>
         </p:txBody>
       </p:sp>
@@ -7304,8 +6638,8 @@
         </p:nvSpPr>
         <p:spPr>
           <a:xfrm>
-            <a:off x="8046720" y="5852160"/>
-            <a:ext cx="3474720" cy="320040"/>
+            <a:off x="6446520" y="1051560"/>
+            <a:ext cx="5394960" cy="1325880"/>
           </a:xfrm>
           <a:prstGeom prst="rect">
             <a:avLst/>
@@ -7313,34 +6647,134 @@
           <a:noFill/>
         </p:spPr>
         <p:txBody>
-          <a:bodyPr wrap="square" lIns="0" rIns="0" tIns="0" bIns="0" anchor="t">
+          <a:bodyPr wrap="square">
             <a:spAutoFit/>
           </a:bodyPr>
           <a:lstStyle/>
           <a:p>
+            <a:pPr algn="l"/>
+            <a:r>
+              <a:rPr sz="1200" b="1" i="0">
+                <a:solidFill>
+                  <a:srgbClr val="3B82F6"/>
+                </a:solidFill>
+              </a:rPr>
+              <a:t>Week 13</a:t>
+            </a:r>
+          </a:p>
+          <a:p>
+            <a:pPr algn="l">
+              <a:spcBef>
+                <a:spcPts val="400"/>
+              </a:spcBef>
+            </a:pPr>
+            <a:r>
+              <a:rPr sz="1100" b="0" i="0">
+                <a:solidFill>
+                  <a:srgbClr val="CBD5E1"/>
+                </a:solidFill>
+              </a:rPr>
+              <a:t>Scale benchmarks to 100×100 and 200×200 grids. Sweep density 5–50% in 5% steps to locate the A*/JPS4 cross-over point. This is the core dataset for the final report.</a:t>
+            </a:r>
+          </a:p>
+        </p:txBody>
+      </p:sp>
+      <p:sp>
+        <p:nvSpPr>
+          <p:cNvPr id="21" name="Oval 20"/>
+          <p:cNvSpPr/>
+          <p:nvPr/>
+        </p:nvSpPr>
+        <p:spPr>
+          <a:xfrm>
+            <a:off x="6080760" y="2606040"/>
+            <a:ext cx="201168" cy="201168"/>
+          </a:xfrm>
+          <a:prstGeom prst="ellipse">
+            <a:avLst/>
+          </a:prstGeom>
+          <a:solidFill>
+            <a:srgbClr val="10B981"/>
+          </a:solidFill>
+          <a:ln>
+            <a:noFill/>
+          </a:ln>
+        </p:spPr>
+        <p:style>
+          <a:lnRef idx="1">
+            <a:schemeClr val="accent1"/>
+          </a:lnRef>
+          <a:fillRef idx="3">
+            <a:schemeClr val="accent1"/>
+          </a:fillRef>
+          <a:effectRef idx="2">
+            <a:schemeClr val="accent1"/>
+          </a:effectRef>
+          <a:fontRef idx="minor">
+            <a:schemeClr val="lt1"/>
+          </a:fontRef>
+        </p:style>
+        <p:txBody>
+          <a:bodyPr rtlCol="0" anchor="ctr"/>
+          <a:lstStyle/>
+          <a:p>
             <a:pPr algn="ctr"/>
-            <a:r>
-              <a:rPr sz="1100" b="1">
-                <a:solidFill>
-                  <a:srgbClr val="EEF2F7"/>
-                </a:solidFill>
-                <a:latin typeface="Calibri"/>
-              </a:rPr>
-              <a:t>All three return equal path lengths on every trial.</a:t>
-            </a:r>
-          </a:p>
-        </p:txBody>
-      </p:sp>
-      <p:sp>
-        <p:nvSpPr>
-          <p:cNvPr id="21" name="TextBox 20"/>
+          </a:p>
+        </p:txBody>
+      </p:sp>
+      <p:sp>
+        <p:nvSpPr>
+          <p:cNvPr id="22" name="Rectangle 21"/>
+          <p:cNvSpPr/>
+          <p:nvPr/>
+        </p:nvSpPr>
+        <p:spPr>
+          <a:xfrm>
+            <a:off x="6172200" y="2807208"/>
+            <a:ext cx="18288" cy="1216152"/>
+          </a:xfrm>
+          <a:prstGeom prst="rect">
+            <a:avLst/>
+          </a:prstGeom>
+          <a:solidFill>
+            <a:srgbClr val="64748B"/>
+          </a:solidFill>
+          <a:ln>
+            <a:noFill/>
+          </a:ln>
+        </p:spPr>
+        <p:style>
+          <a:lnRef idx="1">
+            <a:schemeClr val="accent1"/>
+          </a:lnRef>
+          <a:fillRef idx="3">
+            <a:schemeClr val="accent1"/>
+          </a:fillRef>
+          <a:effectRef idx="2">
+            <a:schemeClr val="accent1"/>
+          </a:effectRef>
+          <a:fontRef idx="minor">
+            <a:schemeClr val="lt1"/>
+          </a:fontRef>
+        </p:style>
+        <p:txBody>
+          <a:bodyPr rtlCol="0" anchor="ctr"/>
+          <a:lstStyle/>
+          <a:p>
+            <a:pPr algn="ctr"/>
+          </a:p>
+        </p:txBody>
+      </p:sp>
+      <p:sp>
+        <p:nvSpPr>
+          <p:cNvPr id="23" name="TextBox 22"/>
           <p:cNvSpPr txBox="1"/>
           <p:nvPr/>
         </p:nvSpPr>
         <p:spPr>
           <a:xfrm>
-            <a:off x="457200" y="6492240"/>
-            <a:ext cx="5486400" cy="274320"/>
+            <a:off x="6446520" y="2468880"/>
+            <a:ext cx="5394960" cy="1325880"/>
           </a:xfrm>
           <a:prstGeom prst="rect">
             <a:avLst/>
@@ -7348,34 +6782,134 @@
           <a:noFill/>
         </p:spPr>
         <p:txBody>
-          <a:bodyPr wrap="square" lIns="0" rIns="0" tIns="0" bIns="0" anchor="t">
+          <a:bodyPr wrap="square">
             <a:spAutoFit/>
           </a:bodyPr>
           <a:lstStyle/>
           <a:p>
             <a:pPr algn="l"/>
             <a:r>
-              <a:rPr sz="900" b="0">
-                <a:solidFill>
-                  <a:srgbClr val="64748B"/>
-                </a:solidFill>
-                <a:latin typeface="Calibri"/>
-              </a:rPr>
-              <a:t>ADA Progress Report  |  Habib University  |  Spring 2026</a:t>
-            </a:r>
-          </a:p>
-        </p:txBody>
-      </p:sp>
-      <p:sp>
-        <p:nvSpPr>
-          <p:cNvPr id="22" name="TextBox 21"/>
+              <a:rPr sz="1200" b="1" i="0">
+                <a:solidFill>
+                  <a:srgbClr val="10B981"/>
+                </a:solidFill>
+              </a:rPr>
+              <a:t>Week 13</a:t>
+            </a:r>
+          </a:p>
+          <a:p>
+            <a:pPr algn="l">
+              <a:spcBef>
+                <a:spcPts val="400"/>
+              </a:spcBef>
+            </a:pPr>
+            <a:r>
+              <a:rPr sz="1100" b="0" i="0">
+                <a:solidFill>
+                  <a:srgbClr val="CBD5E1"/>
+                </a:solidFill>
+              </a:rPr>
+              <a:t>Complete the Snake-game visualization. Each algorithm shown separately with explored cells colored distinctly — makes the search strategies immediately visible.</a:t>
+            </a:r>
+          </a:p>
+        </p:txBody>
+      </p:sp>
+      <p:sp>
+        <p:nvSpPr>
+          <p:cNvPr id="24" name="Oval 23"/>
+          <p:cNvSpPr/>
+          <p:nvPr/>
+        </p:nvSpPr>
+        <p:spPr>
+          <a:xfrm>
+            <a:off x="6080760" y="4023360"/>
+            <a:ext cx="201168" cy="201168"/>
+          </a:xfrm>
+          <a:prstGeom prst="ellipse">
+            <a:avLst/>
+          </a:prstGeom>
+          <a:solidFill>
+            <a:srgbClr val="F59E0B"/>
+          </a:solidFill>
+          <a:ln>
+            <a:noFill/>
+          </a:ln>
+        </p:spPr>
+        <p:style>
+          <a:lnRef idx="1">
+            <a:schemeClr val="accent1"/>
+          </a:lnRef>
+          <a:fillRef idx="3">
+            <a:schemeClr val="accent1"/>
+          </a:fillRef>
+          <a:effectRef idx="2">
+            <a:schemeClr val="accent1"/>
+          </a:effectRef>
+          <a:fontRef idx="minor">
+            <a:schemeClr val="lt1"/>
+          </a:fontRef>
+        </p:style>
+        <p:txBody>
+          <a:bodyPr rtlCol="0" anchor="ctr"/>
+          <a:lstStyle/>
+          <a:p>
+            <a:pPr algn="ctr"/>
+          </a:p>
+        </p:txBody>
+      </p:sp>
+      <p:sp>
+        <p:nvSpPr>
+          <p:cNvPr id="25" name="Rectangle 24"/>
+          <p:cNvSpPr/>
+          <p:nvPr/>
+        </p:nvSpPr>
+        <p:spPr>
+          <a:xfrm>
+            <a:off x="6172200" y="4224528"/>
+            <a:ext cx="18288" cy="1216152"/>
+          </a:xfrm>
+          <a:prstGeom prst="rect">
+            <a:avLst/>
+          </a:prstGeom>
+          <a:solidFill>
+            <a:srgbClr val="64748B"/>
+          </a:solidFill>
+          <a:ln>
+            <a:noFill/>
+          </a:ln>
+        </p:spPr>
+        <p:style>
+          <a:lnRef idx="1">
+            <a:schemeClr val="accent1"/>
+          </a:lnRef>
+          <a:fillRef idx="3">
+            <a:schemeClr val="accent1"/>
+          </a:fillRef>
+          <a:effectRef idx="2">
+            <a:schemeClr val="accent1"/>
+          </a:effectRef>
+          <a:fontRef idx="minor">
+            <a:schemeClr val="lt1"/>
+          </a:fontRef>
+        </p:style>
+        <p:txBody>
+          <a:bodyPr rtlCol="0" anchor="ctr"/>
+          <a:lstStyle/>
+          <a:p>
+            <a:pPr algn="ctr"/>
+          </a:p>
+        </p:txBody>
+      </p:sp>
+      <p:sp>
+        <p:nvSpPr>
+          <p:cNvPr id="26" name="TextBox 25"/>
           <p:cNvSpPr txBox="1"/>
           <p:nvPr/>
         </p:nvSpPr>
         <p:spPr>
           <a:xfrm>
-            <a:off x="11094415" y="6492240"/>
-            <a:ext cx="640080" cy="274320"/>
+            <a:off x="6446520" y="3886200"/>
+            <a:ext cx="5394960" cy="1325880"/>
           </a:xfrm>
           <a:prstGeom prst="rect">
             <a:avLst/>
@@ -7383,20 +6917,160 @@
           <a:noFill/>
         </p:spPr>
         <p:txBody>
-          <a:bodyPr wrap="square" lIns="0" rIns="0" tIns="0" bIns="0" anchor="t">
+          <a:bodyPr wrap="square">
             <a:spAutoFit/>
           </a:bodyPr>
           <a:lstStyle/>
           <a:p>
+            <a:pPr algn="l"/>
+            <a:r>
+              <a:rPr sz="1200" b="1" i="0">
+                <a:solidFill>
+                  <a:srgbClr val="F59E0B"/>
+                </a:solidFill>
+              </a:rPr>
+              <a:t>Week 14</a:t>
+            </a:r>
+          </a:p>
+          <a:p>
+            <a:pPr algn="l">
+              <a:spcBef>
+                <a:spcPts val="400"/>
+              </a:spcBef>
+            </a:pPr>
+            <a:r>
+              <a:rPr sz="1100" b="0" i="0">
+                <a:solidFill>
+                  <a:srgbClr val="CBD5E1"/>
+                </a:solidFill>
+              </a:rPr>
+              <a:t>Finalize all tables and figures. Write the discussion comparing results to literature. Bring the paper to final submission quality.</a:t>
+            </a:r>
+          </a:p>
+        </p:txBody>
+      </p:sp>
+      <p:sp>
+        <p:nvSpPr>
+          <p:cNvPr id="27" name="Oval 26"/>
+          <p:cNvSpPr/>
+          <p:nvPr/>
+        </p:nvSpPr>
+        <p:spPr>
+          <a:xfrm>
+            <a:off x="6080760" y="5440680"/>
+            <a:ext cx="201168" cy="201168"/>
+          </a:xfrm>
+          <a:prstGeom prst="ellipse">
+            <a:avLst/>
+          </a:prstGeom>
+          <a:solidFill>
+            <a:srgbClr val="64748B"/>
+          </a:solidFill>
+          <a:ln>
+            <a:noFill/>
+          </a:ln>
+        </p:spPr>
+        <p:style>
+          <a:lnRef idx="1">
+            <a:schemeClr val="accent1"/>
+          </a:lnRef>
+          <a:fillRef idx="3">
+            <a:schemeClr val="accent1"/>
+          </a:fillRef>
+          <a:effectRef idx="2">
+            <a:schemeClr val="accent1"/>
+          </a:effectRef>
+          <a:fontRef idx="minor">
+            <a:schemeClr val="lt1"/>
+          </a:fontRef>
+        </p:style>
+        <p:txBody>
+          <a:bodyPr rtlCol="0" anchor="ctr"/>
+          <a:lstStyle/>
+          <a:p>
+            <a:pPr algn="ctr"/>
+          </a:p>
+        </p:txBody>
+      </p:sp>
+      <p:sp>
+        <p:nvSpPr>
+          <p:cNvPr id="28" name="TextBox 27"/>
+          <p:cNvSpPr txBox="1"/>
+          <p:nvPr/>
+        </p:nvSpPr>
+        <p:spPr>
+          <a:xfrm>
+            <a:off x="6446520" y="5303520"/>
+            <a:ext cx="5394960" cy="1325880"/>
+          </a:xfrm>
+          <a:prstGeom prst="rect">
+            <a:avLst/>
+          </a:prstGeom>
+          <a:noFill/>
+        </p:spPr>
+        <p:txBody>
+          <a:bodyPr wrap="square">
+            <a:spAutoFit/>
+          </a:bodyPr>
+          <a:lstStyle/>
+          <a:p>
+            <a:pPr algn="l"/>
+            <a:r>
+              <a:rPr sz="1200" b="1" i="0">
+                <a:solidFill>
+                  <a:srgbClr val="64748B"/>
+                </a:solidFill>
+              </a:rPr>
+              <a:t>Week 15</a:t>
+            </a:r>
+          </a:p>
+          <a:p>
+            <a:pPr algn="l">
+              <a:spcBef>
+                <a:spcPts val="400"/>
+              </a:spcBef>
+            </a:pPr>
+            <a:r>
+              <a:rPr sz="1100" b="0" i="0">
+                <a:solidFill>
+                  <a:srgbClr val="CBD5E1"/>
+                </a:solidFill>
+              </a:rPr>
+              <a:t>Prepare final presentation slides. Rehearse the live demo. Submit by deadline.</a:t>
+            </a:r>
+          </a:p>
+        </p:txBody>
+      </p:sp>
+      <p:sp>
+        <p:nvSpPr>
+          <p:cNvPr id="29" name="TextBox 28"/>
+          <p:cNvSpPr txBox="1"/>
+          <p:nvPr/>
+        </p:nvSpPr>
+        <p:spPr>
+          <a:xfrm>
+            <a:off x="11430000" y="6492240"/>
+            <a:ext cx="731520" cy="274320"/>
+          </a:xfrm>
+          <a:prstGeom prst="rect">
+            <a:avLst/>
+          </a:prstGeom>
+          <a:noFill/>
+        </p:spPr>
+        <p:txBody>
+          <a:bodyPr wrap="square">
+            <a:spAutoFit/>
+          </a:bodyPr>
+          <a:lstStyle/>
+          <a:p>
             <a:pPr algn="r"/>
             <a:r>
-              <a:rPr sz="900" b="0">
+              <a:rPr sz="1000" b="0" i="0">
                 <a:solidFill>
                   <a:srgbClr val="64748B"/>
                 </a:solidFill>
-                <a:latin typeface="Calibri"/>
-              </a:rPr>
-              <a:t>4 / 4</a:t>
+              </a:rPr>
+              <a:t>5 / 5</a:t>
             </a:r>
           </a:p>
         </p:txBody>
